--- a/decks/Microsoft Foundry Guardrails - Tuning Without Over-Blocking.pptx
+++ b/decks/Microsoft Foundry Guardrails - Tuning Without Over-Blocking.pptx
@@ -4,23 +4,26 @@
   <p:sldMasterIdLst>
     <p:sldMasterId id="2147483648" r:id="rId1"/>
   </p:sldMasterIdLst>
+  <p:notesMasterIdLst>
+    <p:notesMasterId r:id="rId16"/>
+  </p:notesMasterIdLst>
   <p:sldIdLst>
-    <p:sldId id="256" r:id="rId7"/>
-    <p:sldId id="257" r:id="rId9"/>
-    <p:sldId id="258" r:id="rId10"/>
-    <p:sldId id="259" r:id="rId11"/>
-    <p:sldId id="260" r:id="rId12"/>
-    <p:sldId id="261" r:id="rId13"/>
-    <p:sldId id="262" r:id="rId14"/>
-    <p:sldId id="263" r:id="rId15"/>
-    <p:sldId id="264" r:id="rId16"/>
-    <p:sldId id="265" r:id="rId17"/>
-    <p:sldId id="266" r:id="rId18"/>
-    <p:sldId id="267" r:id="rId19"/>
-    <p:sldId id="268" r:id="rId20"/>
-    <p:sldId id="269" r:id="rId21"/>
+    <p:sldId id="256" r:id="rId2"/>
+    <p:sldId id="257" r:id="rId3"/>
+    <p:sldId id="258" r:id="rId4"/>
+    <p:sldId id="259" r:id="rId5"/>
+    <p:sldId id="260" r:id="rId6"/>
+    <p:sldId id="261" r:id="rId7"/>
+    <p:sldId id="262" r:id="rId8"/>
+    <p:sldId id="263" r:id="rId9"/>
+    <p:sldId id="264" r:id="rId10"/>
+    <p:sldId id="265" r:id="rId11"/>
+    <p:sldId id="266" r:id="rId12"/>
+    <p:sldId id="267" r:id="rId13"/>
+    <p:sldId id="268" r:id="rId14"/>
+    <p:sldId id="269" r:id="rId15"/>
   </p:sldIdLst>
-  <p:sldSz cx="12191695" cy="6858000" type="screen4x3"/>
+  <p:sldSz cx="12192000" cy="6858000"/>
   <p:notesSz cx="6858000" cy="9144000"/>
   <p:defaultTextStyle>
     <a:defPPr>
@@ -117,11 +120,139 @@
       </a:defRPr>
     </a:lvl9pPr>
   </p:defaultTextStyle>
+  <p:extLst>
+    <p:ext uri="{EFAFB233-063F-42B5-8137-9DF3F51BA10A}">
+      <p15:sldGuideLst xmlns:p15="http://schemas.microsoft.com/office/powerpoint/2012/main">
+        <p15:guide id="1" orient="horz" pos="2160">
+          <p15:clr>
+            <a:srgbClr val="A4A3A4"/>
+          </p15:clr>
+        </p15:guide>
+        <p15:guide id="2" pos="2880">
+          <p15:clr>
+            <a:srgbClr val="A4A3A4"/>
+          </p15:clr>
+        </p15:guide>
+      </p15:sldGuideLst>
+    </p:ext>
+  </p:extLst>
 </p:presentation>
 </file>
 
+<file path=ppt/changesInfos/changesInfo1.xml><?xml version="1.0" encoding="utf-8"?>
+<pc:chgInfo xmlns:a="http://schemas.openxmlformats.org/drawingml/2006/main" xmlns:r="http://schemas.openxmlformats.org/officeDocument/2006/relationships" xmlns:ac="http://schemas.microsoft.com/office/drawing/2013/main/command" xmlns:pc="http://schemas.microsoft.com/office/powerpoint/2013/main/command">
+  <pc:docChgLst>
+    <pc:chgData clId="Web-{936B98DE-C715-4378-8583-78310F4ECA16}"/>
+    <pc:docChg chg="modSld">
+      <pc:chgData name="" userId="" providerId="" clId="Web-{936B98DE-C715-4378-8583-78310F4ECA16}" dt="2026-10-14T14:09:48.612" v="0" actId="34807"/>
+      <pc:docMkLst>
+        <pc:docMk/>
+      </pc:docMkLst>
+      <pc:sldChg chg="modNotesTx">
+        <pc:chgData name="" userId="" providerId="" clId="Web-{936B98DE-C715-4378-8583-78310F4ECA16}" dt="2026-10-14T14:09:48.612" v="0" actId="34807"/>
+        <pc:sldMkLst>
+          <pc:docMk/>
+          <pc:sldMk cId="0" sldId="256"/>
+        </pc:sldMkLst>
+      </pc:sldChg>
+      <pc:sldChg chg="modNotesTx">
+        <pc:chgData name="" userId="" providerId="" clId="Web-{936B98DE-C715-4378-8583-78310F4ECA16}" dt="2026-10-14T14:09:48.612" v="0" actId="34807"/>
+        <pc:sldMkLst>
+          <pc:docMk/>
+          <pc:sldMk cId="0" sldId="257"/>
+        </pc:sldMkLst>
+      </pc:sldChg>
+      <pc:sldChg chg="modNotesTx">
+        <pc:chgData name="" userId="" providerId="" clId="Web-{936B98DE-C715-4378-8583-78310F4ECA16}" dt="2026-10-14T14:09:48.612" v="0" actId="34807"/>
+        <pc:sldMkLst>
+          <pc:docMk/>
+          <pc:sldMk cId="0" sldId="258"/>
+        </pc:sldMkLst>
+      </pc:sldChg>
+      <pc:sldChg chg="modNotesTx">
+        <pc:chgData name="" userId="" providerId="" clId="Web-{936B98DE-C715-4378-8583-78310F4ECA16}" dt="2026-10-14T14:09:48.612" v="0" actId="34807"/>
+        <pc:sldMkLst>
+          <pc:docMk/>
+          <pc:sldMk cId="0" sldId="259"/>
+        </pc:sldMkLst>
+      </pc:sldChg>
+      <pc:sldChg chg="modNotesTx">
+        <pc:chgData name="" userId="" providerId="" clId="Web-{936B98DE-C715-4378-8583-78310F4ECA16}" dt="2026-10-14T14:09:48.612" v="0" actId="34807"/>
+        <pc:sldMkLst>
+          <pc:docMk/>
+          <pc:sldMk cId="0" sldId="260"/>
+        </pc:sldMkLst>
+      </pc:sldChg>
+      <pc:sldChg chg="modNotesTx">
+        <pc:chgData name="" userId="" providerId="" clId="Web-{936B98DE-C715-4378-8583-78310F4ECA16}" dt="2026-10-14T14:09:48.612" v="0" actId="34807"/>
+        <pc:sldMkLst>
+          <pc:docMk/>
+          <pc:sldMk cId="0" sldId="261"/>
+        </pc:sldMkLst>
+      </pc:sldChg>
+      <pc:sldChg chg="modNotesTx">
+        <pc:chgData name="" userId="" providerId="" clId="Web-{936B98DE-C715-4378-8583-78310F4ECA16}" dt="2026-10-14T14:09:48.612" v="0" actId="34807"/>
+        <pc:sldMkLst>
+          <pc:docMk/>
+          <pc:sldMk cId="0" sldId="262"/>
+        </pc:sldMkLst>
+      </pc:sldChg>
+      <pc:sldChg chg="modNotesTx">
+        <pc:chgData name="" userId="" providerId="" clId="Web-{936B98DE-C715-4378-8583-78310F4ECA16}" dt="2026-10-14T14:09:48.612" v="0" actId="34807"/>
+        <pc:sldMkLst>
+          <pc:docMk/>
+          <pc:sldMk cId="0" sldId="263"/>
+        </pc:sldMkLst>
+      </pc:sldChg>
+      <pc:sldChg chg="modNotesTx">
+        <pc:chgData name="" userId="" providerId="" clId="Web-{936B98DE-C715-4378-8583-78310F4ECA16}" dt="2026-10-14T14:09:48.612" v="0" actId="34807"/>
+        <pc:sldMkLst>
+          <pc:docMk/>
+          <pc:sldMk cId="0" sldId="264"/>
+        </pc:sldMkLst>
+      </pc:sldChg>
+      <pc:sldChg chg="modNotesTx">
+        <pc:chgData name="" userId="" providerId="" clId="Web-{936B98DE-C715-4378-8583-78310F4ECA16}" dt="2026-10-14T14:09:48.612" v="0" actId="34807"/>
+        <pc:sldMkLst>
+          <pc:docMk/>
+          <pc:sldMk cId="0" sldId="265"/>
+        </pc:sldMkLst>
+      </pc:sldChg>
+      <pc:sldChg chg="modNotesTx">
+        <pc:chgData name="" userId="" providerId="" clId="Web-{936B98DE-C715-4378-8583-78310F4ECA16}" dt="2026-10-14T14:09:48.612" v="0" actId="34807"/>
+        <pc:sldMkLst>
+          <pc:docMk/>
+          <pc:sldMk cId="0" sldId="266"/>
+        </pc:sldMkLst>
+      </pc:sldChg>
+      <pc:sldChg chg="modNotesTx">
+        <pc:chgData name="" userId="" providerId="" clId="Web-{936B98DE-C715-4378-8583-78310F4ECA16}" dt="2026-10-14T14:09:48.612" v="0" actId="34807"/>
+        <pc:sldMkLst>
+          <pc:docMk/>
+          <pc:sldMk cId="0" sldId="267"/>
+        </pc:sldMkLst>
+      </pc:sldChg>
+      <pc:sldChg chg="modNotesTx">
+        <pc:chgData name="" userId="" providerId="" clId="Web-{936B98DE-C715-4378-8583-78310F4ECA16}" dt="2026-10-14T14:09:48.612" v="0" actId="34807"/>
+        <pc:sldMkLst>
+          <pc:docMk/>
+          <pc:sldMk cId="0" sldId="268"/>
+        </pc:sldMkLst>
+      </pc:sldChg>
+      <pc:sldChg chg="modNotesTx">
+        <pc:chgData name="" userId="" providerId="" clId="Web-{936B98DE-C715-4378-8583-78310F4ECA16}" dt="2026-10-14T14:09:48.612" v="0" actId="34807"/>
+        <pc:sldMkLst>
+          <pc:docMk/>
+          <pc:sldMk cId="0" sldId="269"/>
+        </pc:sldMkLst>
+      </pc:sldChg>
+    </pc:docChg>
+  </pc:docChgLst>
+</pc:chgInfo>
+</file>
+
 <file path=ppt/notesMasters/notesMaster1.xml><?xml version="1.0" encoding="utf-8"?>
-<p:notesMaster xmlns:a="http://schemas.openxmlformats.org/drawingml/2006/main" xmlns:p="http://schemas.openxmlformats.org/presentationml/2006/main" xmlns:r="http://schemas.openxmlformats.org/officeDocument/2006/relationships">
+<p:notesMaster xmlns:a="http://schemas.openxmlformats.org/drawingml/2006/main" xmlns:r="http://schemas.openxmlformats.org/officeDocument/2006/relationships" xmlns:p="http://schemas.openxmlformats.org/presentationml/2006/main">
   <p:cSld>
     <p:bg>
       <p:bgRef idx="1001">
@@ -155,7 +286,7 @@
         <p:spPr>
           <a:xfrm>
             <a:off x="0" y="0"/>
-            <a:ext cx="2971800" cy="457200"/>
+            <a:ext cx="2971800" cy="458788"/>
           </a:xfrm>
           <a:prstGeom prst="rect">
             <a:avLst/>
@@ -186,7 +317,7 @@
         <p:spPr>
           <a:xfrm>
             <a:off x="3884613" y="0"/>
-            <a:ext cx="2971800" cy="457200"/>
+            <a:ext cx="2971800" cy="458788"/>
           </a:xfrm>
           <a:prstGeom prst="rect">
             <a:avLst/>
@@ -200,9 +331,8 @@
             </a:lvl1pPr>
           </a:lstStyle>
           <a:p>
-            <a:fld id="{0F89C1C7-3DCD-1040-A9CF-14679D8B5DDD}" type="datetimeFigureOut">
-              <a:rPr lang="en-US" smtClean="0"/>
-              <a:t>10/17/16</a:t>
+            <a:fld id="{20915448-D9A5-4218-8B1C-61F0674FF8C4}" type="datetimeFigureOut">
+              <a:t>10/14/2026</a:t>
             </a:fld>
             <a:endParaRPr lang="en-US"/>
           </a:p>
@@ -220,8 +350,8 @@
         </p:nvSpPr>
         <p:spPr>
           <a:xfrm>
-            <a:off x="1143000" y="685800"/>
-            <a:ext cx="4572000" cy="3429000"/>
+            <a:off x="685800" y="1143000"/>
+            <a:ext cx="5486400" cy="3086100"/>
           </a:xfrm>
           <a:prstGeom prst="rect">
             <a:avLst/>
@@ -253,8 +383,8 @@
         </p:nvSpPr>
         <p:spPr>
           <a:xfrm>
-            <a:off x="685800" y="4343400"/>
-            <a:ext cx="5486400" cy="4114800"/>
+            <a:off x="685800" y="4400550"/>
+            <a:ext cx="5486400" cy="3600450"/>
           </a:xfrm>
           <a:prstGeom prst="rect">
             <a:avLst/>
@@ -266,38 +396,37 @@
           <a:p>
             <a:pPr lvl="0"/>
             <a:r>
-              <a:rPr lang="en-US" smtClean="0"/>
+              <a:rPr lang="en-US"/>
               <a:t>Click to edit Master text styles</a:t>
             </a:r>
           </a:p>
           <a:p>
             <a:pPr lvl="1"/>
             <a:r>
-              <a:rPr lang="en-US" smtClean="0"/>
+              <a:rPr lang="en-US"/>
               <a:t>Second level</a:t>
             </a:r>
           </a:p>
           <a:p>
             <a:pPr lvl="2"/>
             <a:r>
-              <a:rPr lang="en-US" smtClean="0"/>
+              <a:rPr lang="en-US"/>
               <a:t>Third level</a:t>
             </a:r>
           </a:p>
           <a:p>
             <a:pPr lvl="3"/>
             <a:r>
-              <a:rPr lang="en-US" smtClean="0"/>
+              <a:rPr lang="en-US"/>
               <a:t>Fourth level</a:t>
             </a:r>
           </a:p>
           <a:p>
             <a:pPr lvl="4"/>
             <a:r>
-              <a:rPr lang="en-US" smtClean="0"/>
+              <a:rPr lang="en-US"/>
               <a:t>Fifth level</a:t>
             </a:r>
-            <a:endParaRPr lang="en-US"/>
           </a:p>
         </p:txBody>
       </p:sp>
@@ -314,7 +443,7 @@
         <p:spPr>
           <a:xfrm>
             <a:off x="0" y="8685213"/>
-            <a:ext cx="2971800" cy="457200"/>
+            <a:ext cx="2971800" cy="458787"/>
           </a:xfrm>
           <a:prstGeom prst="rect">
             <a:avLst/>
@@ -345,7 +474,7 @@
         <p:spPr>
           <a:xfrm>
             <a:off x="3884613" y="8685213"/>
-            <a:ext cx="2971800" cy="457200"/>
+            <a:ext cx="2971800" cy="458787"/>
           </a:xfrm>
           <a:prstGeom prst="rect">
             <a:avLst/>
@@ -359,8 +488,7 @@
             </a:lvl1pPr>
           </a:lstStyle>
           <a:p>
-            <a:fld id="{BB5E49A5-4136-284D-997B-48E1D791AD67}" type="slidenum">
-              <a:rPr lang="en-US" smtClean="0"/>
+            <a:fld id="{EA66F449-F41F-4034-807D-8461A3750F79}" type="slidenum">
               <a:t>‹#›</a:t>
             </a:fld>
             <a:endParaRPr lang="en-US"/>
@@ -370,13 +498,13 @@
     </p:spTree>
     <p:extLst>
       <p:ext uri="{BB962C8B-B14F-4D97-AF65-F5344CB8AC3E}">
-        <p14:creationId xmlns:p14="http://schemas.microsoft.com/office/powerpoint/2010/main" val="2623252185"/>
+        <p14:creationId xmlns:p14="http://schemas.microsoft.com/office/powerpoint/2010/main" val="1246237347"/>
       </p:ext>
     </p:extLst>
   </p:cSld>
   <p:clrMap bg1="lt1" tx1="dk1" bg2="lt2" tx2="dk2" accent1="accent1" accent2="accent2" accent3="accent3" accent4="accent4" accent5="accent5" accent6="accent6" hlink="hlink" folHlink="folHlink"/>
   <p:notesStyle>
-    <a:lvl1pPr marL="0" algn="l" defTabSz="457200" rtl="0" eaLnBrk="1" latinLnBrk="0" hangingPunct="1">
+    <a:lvl1pPr marL="0" algn="l" defTabSz="914400" rtl="0" eaLnBrk="1" latinLnBrk="0" hangingPunct="1">
       <a:defRPr sz="1200" kern="1200">
         <a:solidFill>
           <a:schemeClr val="tx1"/>
@@ -386,7 +514,7 @@
         <a:cs typeface="+mn-cs"/>
       </a:defRPr>
     </a:lvl1pPr>
-    <a:lvl2pPr marL="457200" algn="l" defTabSz="457200" rtl="0" eaLnBrk="1" latinLnBrk="0" hangingPunct="1">
+    <a:lvl2pPr marL="457200" algn="l" defTabSz="914400" rtl="0" eaLnBrk="1" latinLnBrk="0" hangingPunct="1">
       <a:defRPr sz="1200" kern="1200">
         <a:solidFill>
           <a:schemeClr val="tx1"/>
@@ -396,7 +524,7 @@
         <a:cs typeface="+mn-cs"/>
       </a:defRPr>
     </a:lvl2pPr>
-    <a:lvl3pPr marL="914400" algn="l" defTabSz="457200" rtl="0" eaLnBrk="1" latinLnBrk="0" hangingPunct="1">
+    <a:lvl3pPr marL="914400" algn="l" defTabSz="914400" rtl="0" eaLnBrk="1" latinLnBrk="0" hangingPunct="1">
       <a:defRPr sz="1200" kern="1200">
         <a:solidFill>
           <a:schemeClr val="tx1"/>
@@ -406,7 +534,7 @@
         <a:cs typeface="+mn-cs"/>
       </a:defRPr>
     </a:lvl3pPr>
-    <a:lvl4pPr marL="1371600" algn="l" defTabSz="457200" rtl="0" eaLnBrk="1" latinLnBrk="0" hangingPunct="1">
+    <a:lvl4pPr marL="1371600" algn="l" defTabSz="914400" rtl="0" eaLnBrk="1" latinLnBrk="0" hangingPunct="1">
       <a:defRPr sz="1200" kern="1200">
         <a:solidFill>
           <a:schemeClr val="tx1"/>
@@ -416,7 +544,7 @@
         <a:cs typeface="+mn-cs"/>
       </a:defRPr>
     </a:lvl4pPr>
-    <a:lvl5pPr marL="1828800" algn="l" defTabSz="457200" rtl="0" eaLnBrk="1" latinLnBrk="0" hangingPunct="1">
+    <a:lvl5pPr marL="1828800" algn="l" defTabSz="914400" rtl="0" eaLnBrk="1" latinLnBrk="0" hangingPunct="1">
       <a:defRPr sz="1200" kern="1200">
         <a:solidFill>
           <a:schemeClr val="tx1"/>
@@ -426,7 +554,7 @@
         <a:cs typeface="+mn-cs"/>
       </a:defRPr>
     </a:lvl5pPr>
-    <a:lvl6pPr marL="2286000" algn="l" defTabSz="457200" rtl="0" eaLnBrk="1" latinLnBrk="0" hangingPunct="1">
+    <a:lvl6pPr marL="2286000" algn="l" defTabSz="914400" rtl="0" eaLnBrk="1" latinLnBrk="0" hangingPunct="1">
       <a:defRPr sz="1200" kern="1200">
         <a:solidFill>
           <a:schemeClr val="tx1"/>
@@ -436,7 +564,7 @@
         <a:cs typeface="+mn-cs"/>
       </a:defRPr>
     </a:lvl6pPr>
-    <a:lvl7pPr marL="2743200" algn="l" defTabSz="457200" rtl="0" eaLnBrk="1" latinLnBrk="0" hangingPunct="1">
+    <a:lvl7pPr marL="2743200" algn="l" defTabSz="914400" rtl="0" eaLnBrk="1" latinLnBrk="0" hangingPunct="1">
       <a:defRPr sz="1200" kern="1200">
         <a:solidFill>
           <a:schemeClr val="tx1"/>
@@ -446,7 +574,7 @@
         <a:cs typeface="+mn-cs"/>
       </a:defRPr>
     </a:lvl7pPr>
-    <a:lvl8pPr marL="3200400" algn="l" defTabSz="457200" rtl="0" eaLnBrk="1" latinLnBrk="0" hangingPunct="1">
+    <a:lvl8pPr marL="3200400" algn="l" defTabSz="914400" rtl="0" eaLnBrk="1" latinLnBrk="0" hangingPunct="1">
       <a:defRPr sz="1200" kern="1200">
         <a:solidFill>
           <a:schemeClr val="tx1"/>
@@ -456,7 +584,7 @@
         <a:cs typeface="+mn-cs"/>
       </a:defRPr>
     </a:lvl8pPr>
-    <a:lvl9pPr marL="3657600" algn="l" defTabSz="457200" rtl="0" eaLnBrk="1" latinLnBrk="0" hangingPunct="1">
+    <a:lvl9pPr marL="3657600" algn="l" defTabSz="914400" rtl="0" eaLnBrk="1" latinLnBrk="0" hangingPunct="1">
       <a:defRPr sz="1200" kern="1200">
         <a:solidFill>
           <a:schemeClr val="tx1"/>
@@ -471,7 +599,7 @@
 </file>
 
 <file path=ppt/notesSlides/notesSlide1.xml><?xml version="1.0" encoding="utf-8"?>
-<p:notes xmlns:a="http://schemas.openxmlformats.org/drawingml/2006/main" xmlns:p="http://schemas.openxmlformats.org/presentationml/2006/main" xmlns:r="http://schemas.openxmlformats.org/officeDocument/2006/relationships">
+<p:notes xmlns:a="http://schemas.openxmlformats.org/drawingml/2006/main" xmlns:r="http://schemas.openxmlformats.org/officeDocument/2006/relationships" xmlns:p="http://schemas.openxmlformats.org/presentationml/2006/main">
   <p:cSld>
     <p:spTree>
       <p:nvGrpSpPr>
@@ -491,7 +619,7 @@
         <p:nvSpPr>
           <p:cNvPr id="2" name="Slide Image Placeholder 1"/>
           <p:cNvSpPr>
-            <a:spLocks noGrp="1"/>
+            <a:spLocks noGrp="1" noRot="1" noChangeAspect="1"/>
           </p:cNvSpPr>
           <p:nvPr>
             <p:ph type="sldImg" idx="2"/>
@@ -506,7 +634,7 @@
             <a:spLocks noGrp="1"/>
           </p:cNvSpPr>
           <p:nvPr>
-            <p:ph type="body" idx="3" sz="quarter"/>
+            <p:ph type="body" sz="quarter" idx="3"/>
           </p:nvPr>
         </p:nvSpPr>
         <p:spPr/>
@@ -515,28 +643,20 @@
           <a:lstStyle/>
           <a:p>
             <a:r>
-              <a:t>This session is about one practical problem: a guardrail in Microsoft Foundry that blocks too much is as much a production blocker as one that blocks too little, and most teams cannot tell which of the two they have.</a:t>
-            </a:r>
-          </a:p>
-          <a:p>
-            <a:r>
-              <a:t>Foundry gives us two content-safety mechanisms. The runtime guardrail sits in the request path and can block. The risk and safety evaluators run afterwards and score responses. They use different scales and they never see each other's results, so neither one answers the tuning question on its own.</a:t>
-            </a:r>
-          </a:p>
-          <a:p>
-            <a:r>
-              <a:t>The plan: first the two layers and how each one works, then how the guardrail reports its decisions in the API, then the evaluator output and a side-by-side comparison. The second half is a measured test: one synthetic question set sent through both layers, three guardrail configurations, two model deployments, and what the numbers say about tuning per category.</a:t>
-            </a:r>
-          </a:p>
-          <a:p>
-            <a:r>
-              <a:t>The test code is public in the foundry-content-safety-eval repository on GitHub.</a:t>
-            </a:r>
-          </a:p>
-          <a:p>
-            <a:r>
-              <a:t>Likely question: is this about turning guardrails off? No. It is about choosing the least restrictive setting that still keeps measured risk within what the workload accepts.</a:t>
-            </a:r>
+              <a:rPr lang="en-US"/>
+              <a:t>This session covers guardrail tuning in Microsoft Foundry, and one practical problem in particular: a guardrail that blocks too much is as much a production blocker as one that blocks too little, and most teams cannot tell which of the two they have.
+The session is aimed at solution architects, developers, and responsible AI and security teams. The scope is the content-harm guardrails on model deployments and the built-in content safety evaluators. Sources were verified on 11 October 2026 against the official Microsoft documentation and a measured test run.
+Foundry provides two content-safety mechanisms.
+First, the runtime guardrail.
+It sits in the request path and can block a request or a response.
+Second, the risk and safety evaluators.
+They run afterwards and score the responses. The important distinction is that the two mechanisms use different scales and never see each other's results, so neither one answers the tuning question on its own.
+The plan follows from that. We begin with the two layers and how each one works. We then look at how the guardrail reports its decisions in the API, followed by the evaluator output and a side-by-side comparison of both layers.
+The second half is a measured test: one synthetic question set sent through both layers, three guardrail configurations and two model deployments, and what the numbers say about tuning per category. The test code is public in the foundry-content-safety-eval repository on GitHub.
+A common question is whether this session is about turning guardrails off. It is not: it is about choosing the least restrictive setting that still keeps measured risk within what the workload accepts.
+The overall narrative is simple: enforcement and measurement are separate layers, and only when the same questions pass through both can over-blocking be told apart from missed risk.</a:t>
+            </a:r>
+            <a:endParaRPr/>
           </a:p>
         </p:txBody>
       </p:sp>
@@ -547,7 +667,7 @@
             <a:spLocks noGrp="1"/>
           </p:cNvSpPr>
           <p:nvPr>
-            <p:ph type="sldNum" idx="5" sz="quarter"/>
+            <p:ph type="sldNum" sz="quarter" idx="5"/>
           </p:nvPr>
         </p:nvSpPr>
         <p:spPr/>
@@ -561,7 +681,7 @@
 </file>
 
 <file path=ppt/notesSlides/notesSlide10.xml><?xml version="1.0" encoding="utf-8"?>
-<p:notes xmlns:a="http://schemas.openxmlformats.org/drawingml/2006/main" xmlns:p="http://schemas.openxmlformats.org/presentationml/2006/main" xmlns:r="http://schemas.openxmlformats.org/officeDocument/2006/relationships">
+<p:notes xmlns:a="http://schemas.openxmlformats.org/drawingml/2006/main" xmlns:r="http://schemas.openxmlformats.org/officeDocument/2006/relationships" xmlns:p="http://schemas.openxmlformats.org/presentationml/2006/main">
   <p:cSld>
     <p:spTree>
       <p:nvGrpSpPr>
@@ -581,7 +701,7 @@
         <p:nvSpPr>
           <p:cNvPr id="2" name="Slide Image Placeholder 1"/>
           <p:cNvSpPr>
-            <a:spLocks noGrp="1"/>
+            <a:spLocks noGrp="1" noRot="1" noChangeAspect="1"/>
           </p:cNvSpPr>
           <p:nvPr>
             <p:ph type="sldImg" idx="2"/>
@@ -596,7 +716,7 @@
             <a:spLocks noGrp="1"/>
           </p:cNvSpPr>
           <p:nvPr>
-            <p:ph type="body" idx="3" sz="quarter"/>
+            <p:ph type="body" sz="quarter" idx="3"/>
           </p:nvPr>
         </p:nvSpPr>
         <p:spPr/>
@@ -605,28 +725,22 @@
           <a:lstStyle/>
           <a:p>
             <a:r>
-              <a:t>Each question-and-model pair ends up in exactly one of four cells. Read the rows as the guardrail verdict and the columns as the evaluator verdict, and each cell holds three counts, one per configuration: highest, medium and lowest blocking.</a:t>
-            </a:r>
-          </a:p>
-          <a:p>
-            <a:r>
-              <a:t>Top left is the cell the session title refers to: blocked, although the evaluator found nothing wrong. Under HighestBlocking that was 57 of 266 pairs; under MediumBlocking 16; under LowestBlocking 8. Bottom right is the opposite failure: allowed, but the evaluator recorded a failure. That stays almost flat at 25, 28 and 26 across the three settings.</a:t>
-            </a:r>
-          </a:p>
-          <a:p>
-            <a:r>
-              <a:t>Top right, blocked and failed, holds only five pairs under the strictest setting and none under the other two.</a:t>
-            </a:r>
-          </a:p>
-          <a:p>
-            <a:r>
-              <a:t>Two cautions. The top-left cell is a proxy for over-blocking, not proof: the evaluator scored a separate generation of the same question, because the replay and the evaluation run each called the model independently. And the counts come from one run per configuration; replay is not deterministic, so small differences are within noise.</a:t>
-            </a:r>
-          </a:p>
-          <a:p>
-            <a:r>
-              <a:t>Likely question: why not label the answers by hand? You should for the final decision; the matrix tells you which few dozen cases deserve that human review.</a:t>
-            </a:r>
+              <a:rPr lang="en-US"/>
+              <a:t>This slide shows the agreement matrix, the guardrail verdict against the evaluator verdict, counted per configuration over 266 question-and-model pairs. Read the rows as the guardrail verdict, blocked or allowed, and the columns as the evaluator verdict, passed or failed.
+The core idea is that each pair ends up in exactly one of four cells. Each cell holds three counts, one per configuration, in the order HighestBlocking, MediumBlocking and LowestBlocking, and for each configuration the four cells sum to 266.
+First, blocked unnecessarily, the top-left cell.
+This is the cell the session title refers to: blocked, although the evaluator found nothing wrong. Under HighestBlocking that was 57 of 266 pairs, under MediumBlocking 16, and under LowestBlocking 8.
+Second, blocked correctly, the top-right cell.
+Blocked and failed, the intended protection, holds only 5 pairs under the strictest setting and 0 under the other two.
+Third, allowed correctly, the bottom-left cell.
+Allowed with no harm found: 179, 222 and 232.
+Fourth, missed risk, the bottom-right cell.
+This is the opposite failure: allowed, but the evaluator recorded a failure. It stays almost flat at 25, 28 and 26 across the three settings.
+Two cautions apply. The top-left cell is a proxy for over-blocking, not proof. It is a strong signal without hand-labelling, but not a measurement of a wrong block, because the evaluator scored a separate generation of the same question: the replay and the evaluation run each called the model independently. And the counts come from one run per configuration; replay is not deterministic, so small differences are within noise.
+A common question is whether the answers should be labelled by hand. For the final decision they should; the matrix identifies which few dozen cases deserve that human review.
+The key takeaway is that relaxing the guardrail sharply reduced the over-blocking proxy, from 57 to 16 to 8, while missed risk stayed almost flat.</a:t>
+            </a:r>
+            <a:endParaRPr/>
           </a:p>
         </p:txBody>
       </p:sp>
@@ -637,7 +751,7 @@
             <a:spLocks noGrp="1"/>
           </p:cNvSpPr>
           <p:nvPr>
-            <p:ph type="sldNum" idx="5" sz="quarter"/>
+            <p:ph type="sldNum" sz="quarter" idx="5"/>
           </p:nvPr>
         </p:nvSpPr>
         <p:spPr/>
@@ -651,7 +765,7 @@
 </file>
 
 <file path=ppt/notesSlides/notesSlide11.xml><?xml version="1.0" encoding="utf-8"?>
-<p:notes xmlns:a="http://schemas.openxmlformats.org/drawingml/2006/main" xmlns:p="http://schemas.openxmlformats.org/presentationml/2006/main" xmlns:r="http://schemas.openxmlformats.org/officeDocument/2006/relationships">
+<p:notes xmlns:a="http://schemas.openxmlformats.org/drawingml/2006/main" xmlns:r="http://schemas.openxmlformats.org/officeDocument/2006/relationships" xmlns:p="http://schemas.openxmlformats.org/presentationml/2006/main">
   <p:cSld>
     <p:spTree>
       <p:nvGrpSpPr>
@@ -671,7 +785,7 @@
         <p:nvSpPr>
           <p:cNvPr id="2" name="Slide Image Placeholder 1"/>
           <p:cNvSpPr>
-            <a:spLocks noGrp="1"/>
+            <a:spLocks noGrp="1" noRot="1" noChangeAspect="1"/>
           </p:cNvSpPr>
           <p:nvPr>
             <p:ph type="sldImg" idx="2"/>
@@ -686,7 +800,7 @@
             <a:spLocks noGrp="1"/>
           </p:cNvSpPr>
           <p:nvPr>
-            <p:ph type="body" idx="3" sz="quarter"/>
+            <p:ph type="body" sz="quarter" idx="3"/>
           </p:nvPr>
         </p:nvSpPr>
         <p:spPr/>
@@ -695,28 +809,24 @@
           <a:lstStyle/>
           <a:p>
             <a:r>
-              <a:t>Under HighestBlocking the guardrail blocked 62 of 266 pairs, 23.3 percent, and 57 of those blocks were pairs where the evaluator found nothing wrong. Moving to MediumBlocking dropped the blocks to 16, six percent, and LowestBlocking to 8, three percent.</a:t>
-            </a:r>
-          </a:p>
-          <a:p>
-            <a:r>
-              <a:t>The important comparison is the second bar in each group. The share of responses that failed evaluation barely moved: 30 under the strictest setting, 28 under medium, 26 under lowest. Relaxing from highest to medium removed 46 of 62 blocks while the measured residual risk stayed essentially where it was.</a:t>
-            </a:r>
-          </a:p>
-          <a:p>
-            <a:r>
-              <a:t>The table on the right splits the result by deployment. Both models were blocked at similar rates under each configuration, but gpt-5.6-sol produced more responses that failed evaluation than gpt-5.4-mini, so model choice moved residual risk more than the guardrail setting did.</a:t>
-            </a:r>
-          </a:p>
-          <a:p>
-            <a:r>
-              <a:t>Caveats: one run per configuration, synthetic questions, and replay that varies between runs by a few percentage points. Treat this as a method and an order of magnitude, not a benchmark.</a:t>
-            </a:r>
-          </a:p>
-          <a:p>
-            <a:r>
-              <a:t>Likely question: so should every customer use MediumBlocking? Not by default. Run the same measurement on the customer's own questions; the next slide shows why the answer is per category.</a:t>
-            </a:r>
+              <a:rPr lang="en-US"/>
+              <a:t>This slide compares the results by guardrail configuration, against the same 266 question-and-model pairs. Read the three cards at the top, then the bar chart, then the table by deployment.
+The core idea is that relaxing the guardrail removed most of the blocks, while the share of responses that failed evaluation barely moved.
+First, HighestBlocking.
+The guardrail blocked 62 of 266 pairs, 23.3 per cent, and 57 of those blocks were pairs where the evaluator found nothing wrong. Missed risk was 25, and 30 responses failed evaluation.
+Second, MediumBlocking.
+Blocks dropped to 16, or 6.0 per cent, with 16 blocked unnecessarily, 28 missed risk and 28 failed evaluations.
+Third, LowestBlocking.
+Blocks dropped to 8, or 3.0 per cent, with 8 blocked unnecessarily, 26 missed risk and 26 failed evaluations.
+Fourth, the bar chart.
+The important comparison is the second bar in each group, the failed evaluations, at 11.3, 10.5 and 9.8 per cent of 266 pairs, against blocks at 23.3, 6.0 and 3.0 per cent. Relaxing from highest to medium removed 46 of 62 blocks while failed evaluations moved only from 30 to 28, so the measured residual risk stayed essentially where it was.
+Fifth, the split by deployment, with 133 pairs per deployment.
+Both models were blocked at similar rates under each configuration: 29, 8 and 4 for gpt-5.4-mini, and 33, 8 and 4 for gpt-5.6-sol. However, gpt-5.6-sol produced more responses that failed evaluation, 17, 17 and 14, than gpt-5.4-mini, at 13, 11 and 12, so model choice moved residual risk more than the guardrail setting did.
+The caveats are one run per configuration, synthetic questions, and replay that varies between runs by a few percentage points. These results are a method and an order of magnitude, not a benchmark.
+A common question is whether every customer should therefore use MediumBlocking. Not by default: the same measurement should be run on the customer's own questions, and the next slide shows why the answer is per category.
+The key takeaway is that a stricter guardrail mostly added blocks, not protection, in this test.</a:t>
+            </a:r>
+            <a:endParaRPr/>
           </a:p>
         </p:txBody>
       </p:sp>
@@ -727,7 +837,7 @@
             <a:spLocks noGrp="1"/>
           </p:cNvSpPr>
           <p:nvPr>
-            <p:ph type="sldNum" idx="5" sz="quarter"/>
+            <p:ph type="sldNum" sz="quarter" idx="5"/>
           </p:nvPr>
         </p:nvSpPr>
         <p:spPr/>
@@ -741,7 +851,7 @@
 </file>
 
 <file path=ppt/notesSlides/notesSlide12.xml><?xml version="1.0" encoding="utf-8"?>
-<p:notes xmlns:a="http://schemas.openxmlformats.org/drawingml/2006/main" xmlns:p="http://schemas.openxmlformats.org/presentationml/2006/main" xmlns:r="http://schemas.openxmlformats.org/officeDocument/2006/relationships">
+<p:notes xmlns:a="http://schemas.openxmlformats.org/drawingml/2006/main" xmlns:r="http://schemas.openxmlformats.org/officeDocument/2006/relationships" xmlns:p="http://schemas.openxmlformats.org/presentationml/2006/main">
   <p:cSld>
     <p:spTree>
       <p:nvGrpSpPr>
@@ -761,7 +871,7 @@
         <p:nvSpPr>
           <p:cNvPr id="2" name="Slide Image Placeholder 1"/>
           <p:cNvSpPr>
-            <a:spLocks noGrp="1"/>
+            <a:spLocks noGrp="1" noRot="1" noChangeAspect="1"/>
           </p:cNvSpPr>
           <p:nvPr>
             <p:ph type="sldImg" idx="2"/>
@@ -776,7 +886,7 @@
             <a:spLocks noGrp="1"/>
           </p:cNvSpPr>
           <p:nvPr>
-            <p:ph type="body" idx="3" sz="quarter"/>
+            <p:ph type="body" sz="quarter" idx="3"/>
           </p:nvPr>
         </p:nvSpPr>
         <p:spPr/>
@@ -785,23 +895,19 @@
           <a:lstStyle/>
           <a:p>
             <a:r>
-              <a:t>This slide explains where the blocks came from.</a:t>
-            </a:r>
-          </a:p>
-          <a:p>
-            <a:r>
-              <a:t>Under HighestBlocking, 41 of the 62 blocks were triggered at low severity, and MediumBlocking, which does not block low severity, removed all of them. Fifty-eight of 62 blocks happened on the model output, not on the user input; output blocks come back with category detail, input blocks as an HTTP 400 without it. And under MediumBlocking, 49 non-safe detections were annotated but not blocked, a reminder that detection and blocking are separate outcomes.</a:t>
-            </a:r>
-          </a:p>
-          <a:p>
-            <a:r>
-              <a:t>Read the categories in four ways. Hate produced five blocks, all at low severity and none under MediumBlocking, so it is the clearest candidate for a threshold change. Sexual produced twelve high-severity blocks that persist under MediumBlocking; that is content the guardrail is meant to stop. Self-harm produced more than half of all blocks, mostly at low severity, so a change there has the largest effect. And whichever you change, change one category at one checkpoint and keep everything else fixed.</a:t>
-            </a:r>
-          </a:p>
-          <a:p>
-            <a:r>
-              <a:t>Likely question: why is self-harm so dominant? In this question set, low-severity self-harm language appeared in supportive answers; check the reason fields on the customer's own data before generalising.</a:t>
-            </a:r>
+              <a:rPr lang="en-US"/>
+              <a:t>This slide shows the results by harm category: which category caused the blocks and at what severity. Read the table first, then the figures and findings. The counts combine both deployments.
+The core idea is that most blocks under HighestBlocking were triggered at low severity, and a few categories account for most of them.
+First, the table.
+Under HighestBlocking there were 62 blocks: 41 at low severity, 9 at medium and 12 at high. Under MediumBlocking there were 16. Self-harm produced 33 blocks, 26 low, 7 medium and 0 high, and 5 under MediumBlocking. Sexual produced 19, with 6 low, 1 medium and 12 high, and 10 under MediumBlocking. Hate produced 5, all low, and 0 under MediumBlocking. Violence produced 5, with 4 low and 1 medium, and 1 under MediumBlocking.
+Second, the three figures.
+41 of the 62 blocks were triggered at low severity, and MediumBlocking, which does not block low severity, removed all of them. 58 of 62 blocks happened on the model output, not on the user input; output blocks come back with category detail, input blocks as an HTTP 400 without it. And under MediumBlocking, 49 non-safe detections were annotated but not blocked, a reminder that detection and blocking are separate outcomes.
+Third, the four findings.
+Hate produced five blocks, all at low severity and none under MediumBlocking, so it is the clearest candidate for a threshold change. Sexual produced twelve high-severity blocks that persist under MediumBlocking; that is content the guardrail is meant to stop. Self-harm produced more than half of all blocks, 33 of 62, mostly at low severity, so a change there has the largest effect. And whichever category changes, the change should cover one category at one checkpoint, with every other threshold held fixed, because a per-category change can be attributed and a change to all categories at once cannot.
+A common question is why self-harm is so dominant. In this question set, low-severity self-harm language appeared in supportive answers; the reason fields on the customer's own data should be checked before generalising.
+The key takeaway is that tuning should be done per category, starting where blocks are driven by low severity.</a:t>
+            </a:r>
+            <a:endParaRPr/>
           </a:p>
         </p:txBody>
       </p:sp>
@@ -812,7 +918,7 @@
             <a:spLocks noGrp="1"/>
           </p:cNvSpPr>
           <p:nvPr>
-            <p:ph type="sldNum" idx="5" sz="quarter"/>
+            <p:ph type="sldNum" sz="quarter" idx="5"/>
           </p:nvPr>
         </p:nvSpPr>
         <p:spPr/>
@@ -826,7 +932,7 @@
 </file>
 
 <file path=ppt/notesSlides/notesSlide13.xml><?xml version="1.0" encoding="utf-8"?>
-<p:notes xmlns:a="http://schemas.openxmlformats.org/drawingml/2006/main" xmlns:p="http://schemas.openxmlformats.org/presentationml/2006/main" xmlns:r="http://schemas.openxmlformats.org/officeDocument/2006/relationships">
+<p:notes xmlns:a="http://schemas.openxmlformats.org/drawingml/2006/main" xmlns:r="http://schemas.openxmlformats.org/officeDocument/2006/relationships" xmlns:p="http://schemas.openxmlformats.org/presentationml/2006/main">
   <p:cSld>
     <p:spTree>
       <p:nvGrpSpPr>
@@ -846,7 +952,7 @@
         <p:nvSpPr>
           <p:cNvPr id="2" name="Slide Image Placeholder 1"/>
           <p:cNvSpPr>
-            <a:spLocks noGrp="1"/>
+            <a:spLocks noGrp="1" noRot="1" noChangeAspect="1"/>
           </p:cNvSpPr>
           <p:nvPr>
             <p:ph type="sldImg" idx="2"/>
@@ -861,7 +967,7 @@
             <a:spLocks noGrp="1"/>
           </p:cNvSpPr>
           <p:nvPr>
-            <p:ph type="body" idx="3" sz="quarter"/>
+            <p:ph type="body" sz="quarter" idx="3"/>
           </p:nvPr>
         </p:nvSpPr>
         <p:spPr/>
@@ -870,28 +976,25 @@
           <a:lstStyle/>
           <a:p>
             <a:r>
-              <a:t>The goal is the least restrictive setting that still keeps measured risk within what the workload accepts, confirmed with evidence from both layers.</a:t>
-            </a:r>
-          </a:p>
-          <a:p>
-            <a:r>
-              <a:t>One, start from a measured baseline. In this test, MediumBlocking blocked 16 pairs instead of 62 while failed evaluations went from 30 to 28. Two, change one category at a time: self-harm and hate accounted for 38 of the 62 strictest-setting blocks, 31 of them at low severity. Three, measure before enforcing: annotate-only returns the annotations without blocking, so you can see what a setting would stop before it stops anything; for completions this needs approval for modified guardrails. Four, record the full configuration with every result. Five, rerun the same versioned question set after each change.</a:t>
-            </a:r>
-          </a:p>
-          <a:p>
-            <a:r>
-              <a:t>The documented best practice is to start restrictive, test before production and measure after every change; this procedure is how to relax with evidence.</a:t>
-            </a:r>
-          </a:p>
-          <a:p>
-            <a:r>
-              <a:t>The limitations on the right are real. Synthetic data needs human review, evaluation and data generation are region-dependent, the two layers judged separate answers, and replay varies between runs.</a:t>
-            </a:r>
-          </a:p>
-          <a:p>
-            <a:r>
-              <a:t>Likely question: who owns this decision? The workload owner with the responsible AI reviewer; the measurement makes it a product decision instead of a guess.</a:t>
-            </a:r>
+              <a:rPr lang="en-US"/>
+              <a:t>This slide lists the tuning guidance on the left and the limitations of these results on the right.
+The core idea is that the goal is the least restrictive setting that still keeps measured risk within what the workload accepts, confirmed with evidence from both layers.
+First, start from a measured baseline.
+In this test, MediumBlocking blocked 16 of 266 pairs instead of 62, while failed evaluations went from 30 to 28.
+Second, change one category at a time.
+Self-harm and hate accounted for 38 of the 62 blocks under HighestBlocking, 31 of them at low severity.
+Third, measure before enforcing.
+Annotate-only returns the annotations without blocking, so operators can see what a setting would stop before it stops anything. For completions, this needs approval for modified guardrails.
+Fourth, keep a configuration record.
+The full configuration is recorded with every result: the guardrail name, the thresholds per category and checkpoint, the evaluator threshold, the dataset version, the deployment and the run date.
+Fifth, rerun the same question set after each change.
+The same versioned question set is rerun after every change, because results from different question sets or dataset versions are not comparable.
+The documented best practice is to start restrictive, test before production and measure after every change; this procedure is how to relax with evidence.
+The limitations on the right are real. Synthetic questions and answers need human review before they drive a configuration decision. Data generation and evaluation run only in supported regions. The two layers judged separate answers, so an evaluator result does not measure whether a blocked answer was safe. And replay is not deterministic, so small differences between settings are inconclusive.
+A common question is who owns this decision. It belongs to the workload owner together with the responsible AI reviewer; the measurement makes it a product decision instead of a guess.
+The key takeaway is to relax a guardrail one category at a time, with the same question set and a full configuration record behind every change.</a:t>
+            </a:r>
+            <a:endParaRPr/>
           </a:p>
         </p:txBody>
       </p:sp>
@@ -902,7 +1005,7 @@
             <a:spLocks noGrp="1"/>
           </p:cNvSpPr>
           <p:nvPr>
-            <p:ph type="sldNum" idx="5" sz="quarter"/>
+            <p:ph type="sldNum" sz="quarter" idx="5"/>
           </p:nvPr>
         </p:nvSpPr>
         <p:spPr/>
@@ -916,7 +1019,7 @@
 </file>
 
 <file path=ppt/notesSlides/notesSlide14.xml><?xml version="1.0" encoding="utf-8"?>
-<p:notes xmlns:a="http://schemas.openxmlformats.org/drawingml/2006/main" xmlns:p="http://schemas.openxmlformats.org/presentationml/2006/main" xmlns:r="http://schemas.openxmlformats.org/officeDocument/2006/relationships">
+<p:notes xmlns:a="http://schemas.openxmlformats.org/drawingml/2006/main" xmlns:r="http://schemas.openxmlformats.org/officeDocument/2006/relationships" xmlns:p="http://schemas.openxmlformats.org/presentationml/2006/main">
   <p:cSld>
     <p:spTree>
       <p:nvGrpSpPr>
@@ -936,7 +1039,7 @@
         <p:nvSpPr>
           <p:cNvPr id="2" name="Slide Image Placeholder 1"/>
           <p:cNvSpPr>
-            <a:spLocks noGrp="1"/>
+            <a:spLocks noGrp="1" noRot="1" noChangeAspect="1"/>
           </p:cNvSpPr>
           <p:nvPr>
             <p:ph type="sldImg" idx="2"/>
@@ -951,7 +1054,7 @@
             <a:spLocks noGrp="1"/>
           </p:cNvSpPr>
           <p:nvPr>
-            <p:ph type="body" idx="3" sz="quarter"/>
+            <p:ph type="body" sz="quarter" idx="3"/>
           </p:nvPr>
         </p:nvSpPr>
         <p:spPr/>
@@ -960,28 +1063,20 @@
           <a:lstStyle/>
           <a:p>
             <a:r>
-              <a:t>These are the pages behind every statement in the deck, all fetched on 11 October 2026, plus the reference implementation that produced the numbers. The repository contains the notebook, the configuration and the exported results tagged by guardrail name, so the measurement can be rerun on a customer's own question set.</a:t>
-            </a:r>
-          </a:p>
-          <a:p>
-            <a:r>
-              <a:t>On status: guardrails for models, the content-harm controls, Prompt Shields, the risk and safety evaluators and the content_filters field in the Responses API are generally available. Agent guardrails, including the tool call and tool response intervention points, are preview, as are spotlighting, groundedness, personally identifiable information and task adherence controls, and the synthetic data source used inside a cloud evaluation run.</a:t>
-            </a:r>
-          </a:p>
-          <a:p>
-            <a:r>
-              <a:t>Presenter note: verify before presenting whether standalone synthetic evaluation dataset generation is still labelled preview; the page lost its preview label on 8 October 2026, while the evaluation data source type still carries a preview name.</a:t>
-            </a:r>
-          </a:p>
-          <a:p>
-            <a:r>
-              <a:t>Presenter note: verify the portal blocking labels, because the severity table and the portal describe the direction differently.</a:t>
-            </a:r>
-          </a:p>
-          <a:p>
-            <a:r>
-              <a:t>Likely question: where do we start with a customer? With step one of the tuning procedure on their own fifty to one hundred representative questions, run in a non-production project.</a:t>
-            </a:r>
+              <a:rPr lang="en-US"/>
+              <a:t>This slide lists the references behind the deck and the feature status at the edition date.
+The core idea is that every statement in the deck traces to an official documentation page or to the reference implementation that produced the numbers.
+First, the official documentation.
+These are the pages behind every statement in the deck, all fetched on 11 October 2026: the guardrails overview, configuring guardrails and controls, harm categories and severity levels, guardrails in the Responses API, the risk and safety evaluators, cloud evaluation, and the synthetic evaluation dataset.
+Second, the reference implementation.
+The foundry-content-safety-eval repository on GitHub produced the numbers. It contains the notebook, the configuration and the exported results tagged by guardrail name, so the measurement can be rerun on a customer's own question set.
+Third, the status at edition date.
+Guardrails for models, the content-harm controls, Prompt Shields, the risk and safety evaluators and the content_filters field in the Responses API are generally available. Agent guardrails, including the tool call and tool response intervention points, are in preview, as are spotlighting, groundedness, personally identifiable information and task adherence controls, and the synthetic data source used inside a cloud evaluation run. Preview items carry no service level agreement.
+Two status points remain open. The synthetic evaluation dataset generation page lost its preview label on 8 October 2026, while the evaluation data source type still carries a preview name, so whether standalone generation is still labelled preview should be confirmed before presenting. The severity table and the portal also describe the blocking direction differently, so the portal blocking labels should be confirmed before presenting.
+A common question is where to start with a customer. The starting point is step one of the tuning procedure, on the customer's own fifty to one hundred representative questions, run in a non-production project.
+The key takeaway is that the method and the code are public, so the measurement can be repeated on customer data rather than taken from this test.</a:t>
+            </a:r>
+            <a:endParaRPr/>
           </a:p>
         </p:txBody>
       </p:sp>
@@ -992,7 +1087,7 @@
             <a:spLocks noGrp="1"/>
           </p:cNvSpPr>
           <p:nvPr>
-            <p:ph type="sldNum" idx="5" sz="quarter"/>
+            <p:ph type="sldNum" sz="quarter" idx="5"/>
           </p:nvPr>
         </p:nvSpPr>
         <p:spPr/>
@@ -1006,7 +1101,7 @@
 </file>
 
 <file path=ppt/notesSlides/notesSlide2.xml><?xml version="1.0" encoding="utf-8"?>
-<p:notes xmlns:a="http://schemas.openxmlformats.org/drawingml/2006/main" xmlns:p="http://schemas.openxmlformats.org/presentationml/2006/main" xmlns:r="http://schemas.openxmlformats.org/officeDocument/2006/relationships">
+<p:notes xmlns:a="http://schemas.openxmlformats.org/drawingml/2006/main" xmlns:r="http://schemas.openxmlformats.org/officeDocument/2006/relationships" xmlns:p="http://schemas.openxmlformats.org/presentationml/2006/main">
   <p:cSld>
     <p:spTree>
       <p:nvGrpSpPr>
@@ -1026,7 +1121,7 @@
         <p:nvSpPr>
           <p:cNvPr id="2" name="Slide Image Placeholder 1"/>
           <p:cNvSpPr>
-            <a:spLocks noGrp="1"/>
+            <a:spLocks noGrp="1" noRot="1" noChangeAspect="1"/>
           </p:cNvSpPr>
           <p:nvPr>
             <p:ph type="sldImg" idx="2"/>
@@ -1041,7 +1136,7 @@
             <a:spLocks noGrp="1"/>
           </p:cNvSpPr>
           <p:nvPr>
-            <p:ph type="body" idx="3" sz="quarter"/>
+            <p:ph type="body" sz="quarter" idx="3"/>
           </p:nvPr>
         </p:nvSpPr>
         <p:spPr/>
@@ -1050,28 +1145,18 @@
           <a:lstStyle/>
           <a:p>
             <a:r>
-              <a:t>The session has five parts and the order matters, because the tuning recommendations at the end only make sense once the two layers are clearly separated.</a:t>
-            </a:r>
-          </a:p>
-          <a:p>
-            <a:r>
-              <a:t>Part one places the two safety layers on one diagram: the guardrail in the request path, the evaluators after the response. Part two goes into the guardrail itself: what a control is, how the severity thresholds work, including a naming trap between the portal and the API, and how decisions come back in the Responses API. Part three covers the evaluator output and puts both layers side by side.</a:t>
-            </a:r>
-          </a:p>
-          <a:p>
-            <a:r>
-              <a:t>Part four is the experiment. The same synthetic questions go through a cloud evaluation run and through direct replay against the deployment, and each question ends up with two verdicts. Those verdicts form an agreement matrix, and the matrix is what lets us talk about unnecessary blocking and missed risk with numbers.</a:t>
-            </a:r>
-          </a:p>
-          <a:p>
-            <a:r>
-              <a:t>Part five turns the numbers into a tuning procedure and lists the limitations of the test honestly.</a:t>
-            </a:r>
-          </a:p>
-          <a:p>
-            <a:r>
-              <a:t>Likely question: how long does the measurement take to repeat? Once the dataset exists, a rerun is one evaluation run plus one replay per configuration, typically minutes, not days.</a:t>
-            </a:r>
+              <a:rPr lang="en-US"/>
+              <a:t>Today we will look at guardrail tuning in five parts, from the two safety layers to measured tuning guidance.
+The order matters, because the tuning recommendations at the end only make sense once the two layers are clearly separated. One thread runs through all five parts: one question set, two layers, and the same verdict recorded by each.
+We begin with the two safety layers, on slide 3. This part places both layers on one diagram: the guardrail in the request path and the evaluators after the response, showing where each layer runs and what it can see.
+We then examine the runtime guardrail itself, on slides 4 to 6. This covers what a control is, how the severity thresholds work, including a naming trap between the portal and the API, and how decisions come back in the Responses API.
+The third section, on slides 7 and 8, covers the safety evaluators: the evaluator output, and a comparison that puts both layers side by side.
+The fourth section, on slides 9 to 12, is the experiment. The same synthetic questions go through a cloud evaluation run and through direct replay against the deployment, so each question ends up with two verdicts. Those verdicts form an agreement matrix, and the matrix is what makes it possible to discuss unnecessary blocking and missed risk with numbers. This section covers the test design, the agreement matrix and the results.
+We close with tuning guidance on slides 13 and 14. This part turns the numbers into a tuning procedure, lists the limitations of the test honestly, and gives the sources.
+A common question is how long the measurement takes to repeat. Once the dataset exists, a rerun is one evaluation run plus one replay per configuration, which typically takes minutes, not days.
+The overall narrative is simple: separate the two layers, understand how each one reports, measure both against the same questions, and then tune with evidence.</a:t>
+            </a:r>
+            <a:endParaRPr/>
           </a:p>
         </p:txBody>
       </p:sp>
@@ -1082,7 +1167,7 @@
             <a:spLocks noGrp="1"/>
           </p:cNvSpPr>
           <p:nvPr>
-            <p:ph type="sldNum" idx="5" sz="quarter"/>
+            <p:ph type="sldNum" sz="quarter" idx="5"/>
           </p:nvPr>
         </p:nvSpPr>
         <p:spPr/>
@@ -1096,7 +1181,7 @@
 </file>
 
 <file path=ppt/notesSlides/notesSlide3.xml><?xml version="1.0" encoding="utf-8"?>
-<p:notes xmlns:a="http://schemas.openxmlformats.org/drawingml/2006/main" xmlns:p="http://schemas.openxmlformats.org/presentationml/2006/main" xmlns:r="http://schemas.openxmlformats.org/officeDocument/2006/relationships">
+<p:notes xmlns:a="http://schemas.openxmlformats.org/drawingml/2006/main" xmlns:r="http://schemas.openxmlformats.org/officeDocument/2006/relationships" xmlns:p="http://schemas.openxmlformats.org/presentationml/2006/main">
   <p:cSld>
     <p:spTree>
       <p:nvGrpSpPr>
@@ -1116,7 +1201,7 @@
         <p:nvSpPr>
           <p:cNvPr id="2" name="Slide Image Placeholder 1"/>
           <p:cNvSpPr>
-            <a:spLocks noGrp="1"/>
+            <a:spLocks noGrp="1" noRot="1" noChangeAspect="1"/>
           </p:cNvSpPr>
           <p:nvPr>
             <p:ph type="sldImg" idx="2"/>
@@ -1131,7 +1216,7 @@
             <a:spLocks noGrp="1"/>
           </p:cNvSpPr>
           <p:nvPr>
-            <p:ph type="body" idx="3" sz="quarter"/>
+            <p:ph type="body" sz="quarter" idx="3"/>
           </p:nvPr>
         </p:nvSpPr>
         <p:spPr/>
@@ -1140,23 +1225,20 @@
           <a:lstStyle/>
           <a:p>
             <a:r>
-              <a:t>This diagram is the frame for the whole session. The top lane is the runtime path. Step one, the client sends a request. Step two, the guardrail checks the user input and either passes it to the model or rejects it. Step three, the model generates an answer. Step four, the guardrail checks that output and either returns it or blocks it. For agents, it can also check tool calls and tool responses, in preview.</a:t>
-            </a:r>
-          </a:p>
-          <a:p>
-            <a:r>
-              <a:t>The bottom lane is evaluation. Step five, a test dataset feeds an evaluation run. Step six, the run sends each response to the risk and safety evaluators, Microsoft-hosted models that need no judge deployment. Step seven, each response receives a severity score from zero to seven, a pass or fail verdict and a written reason.</a:t>
-            </a:r>
-          </a:p>
-          <a:p>
-            <a:r>
-              <a:t>The dashed line matters: when the run uses a live target, it calls the deployment, so the deployment's guardrail is in the path. Anything it blocks never reaches the evaluator. When the run scores stored responses, the model is not called at all.</a:t>
-            </a:r>
-          </a:p>
-          <a:p>
-            <a:r>
-              <a:t>Likely question: can an evaluator result change the guardrail? No. There is no link between the two; they are configured and read separately.</a:t>
-            </a:r>
+              <a:rPr lang="en-US"/>
+              <a:t>This slide shows the two content safety layers on one diagram, and it is the frame for the whole session. Read it as two lanes: the runtime path at the top and evaluation at the bottom.
+The core idea is that a guardrail acts in the request path, while risk and safety evaluators score responses afterwards.
+First, the runtime lane, steps one to four.
+In step one, the client application sends a request. In step two, the guardrail checks the user input and either passes it to the model or rejects it. In step three, the model deployment generates the answer. In step four, the guardrail checks that output and either returns it or blocks it. For agents, the guardrail can also check tool calls and tool responses, in preview.
+Second, the evaluation lane, steps five to seven.
+In step five, a test dataset of questions, with optional answers, feeds an evaluation run. In step six, the run sends each response to the risk and safety evaluators, which are Microsoft-hosted models that need no judge deployment. In step seven, each response receives a severity score from zero to seven, a pass or fail verdict and a written reason.
+Third, the dashed line between the lanes.
+When the run uses a live target, it calls the deployment, so the deployment's guardrail is in the path, and anything it blocks never reaches an evaluator. When the run scores stored responses instead, the model is not called at all.
+The three cards at the bottom state the consequence. The guardrail question is what was stopped, at which point and at what severity. The evaluator question is how much risk remains in the responses that were returned. The shared blind spot is that a guardrail cannot judge its own blocks, and an evaluator never sees them.
+A common question is whether an evaluator result can change the guardrail. It cannot: there is no link between the two, and they are configured and read separately.
+The key takeaway is that each layer answers a different question, and neither one can see what the other one decided.</a:t>
+            </a:r>
+            <a:endParaRPr/>
           </a:p>
         </p:txBody>
       </p:sp>
@@ -1167,7 +1249,7 @@
             <a:spLocks noGrp="1"/>
           </p:cNvSpPr>
           <p:nvPr>
-            <p:ph type="sldNum" idx="5" sz="quarter"/>
+            <p:ph type="sldNum" sz="quarter" idx="5"/>
           </p:nvPr>
         </p:nvSpPr>
         <p:spPr/>
@@ -1181,7 +1263,7 @@
 </file>
 
 <file path=ppt/notesSlides/notesSlide4.xml><?xml version="1.0" encoding="utf-8"?>
-<p:notes xmlns:a="http://schemas.openxmlformats.org/drawingml/2006/main" xmlns:p="http://schemas.openxmlformats.org/presentationml/2006/main" xmlns:r="http://schemas.openxmlformats.org/officeDocument/2006/relationships">
+<p:notes xmlns:a="http://schemas.openxmlformats.org/drawingml/2006/main" xmlns:r="http://schemas.openxmlformats.org/officeDocument/2006/relationships" xmlns:p="http://schemas.openxmlformats.org/presentationml/2006/main">
   <p:cSld>
     <p:spTree>
       <p:nvGrpSpPr>
@@ -1201,7 +1283,7 @@
         <p:nvSpPr>
           <p:cNvPr id="2" name="Slide Image Placeholder 1"/>
           <p:cNvSpPr>
-            <a:spLocks noGrp="1"/>
+            <a:spLocks noGrp="1" noRot="1" noChangeAspect="1"/>
           </p:cNvSpPr>
           <p:nvPr>
             <p:ph type="sldImg" idx="2"/>
@@ -1216,7 +1298,7 @@
             <a:spLocks noGrp="1"/>
           </p:cNvSpPr>
           <p:nvPr>
-            <p:ph type="body" idx="3" sz="quarter"/>
+            <p:ph type="body" sz="quarter" idx="3"/>
           </p:nvPr>
         </p:nvSpPr>
         <p:spPr/>
@@ -1225,33 +1307,20 @@
           <a:lstStyle/>
           <a:p>
             <a:r>
-              <a:t>A guardrail in Microsoft Foundry is a named collection of controls, and each control answers three questions: which risk to detect, where to look for it, and what to do when it is found.</a:t>
-            </a:r>
-          </a:p>
-          <a:p>
-            <a:r>
-              <a:t>There are four intervention points. User input and output apply to models and agents. Tool call and tool response apply to agents only and are preview, as is the whole agent guardrail capability.</a:t>
-            </a:r>
-          </a:p>
-          <a:p>
-            <a:r>
-              <a:t>The table lists the main risks. The four content-harm categories run on user input and output. User prompt attacks, also called jailbreak, are only meaningful on user input. Indirect attacks look at document content and, for agents, at tool responses.</a:t>
-            </a:r>
-          </a:p>
-          <a:p>
-            <a:r>
-              <a:t>Two details catch teams out. First, an agent's own guardrail fully overrides the guardrail of its model deployment; without one, the agent inherits the model's. Second, the content-harm controls on input and output cannot be deleted, only overridden with a different threshold.</a:t>
-            </a:r>
-          </a:p>
-          <a:p>
-            <a:r>
-              <a:t>Presenter note: verify the intervention points per risk for agents on the intervention points page before presenting, because preview coverage changes.</a:t>
-            </a:r>
-          </a:p>
-          <a:p>
-            <a:r>
-              <a:t>Likely question: can one guardrail serve several deployments? Yes. One guardrail can be assigned to many models and agents in a project.</a:t>
-            </a:r>
+              <a:rPr lang="en-US"/>
+              <a:t>This slide explains the anatomy of a guardrail control. Read the formula at the top first, then the intervention points, then the table of risks.
+The core idea is that a guardrail in Microsoft Foundry is a named collection of controls, and each control answers three questions: which risk to detect, where to look for it, and what to do when it is found.
+First, the intervention points.
+There are four. User input and output apply to models and agents. Tool call and tool response apply to agents only and are in preview, as is the whole agent guardrail capability.
+Second, the risks.
+The four content-harm categories, hate, sexual, violence and self-harm, run on user input and output. User prompt attacks, also called jailbreak, are only meaningful on user input. Indirect attacks look at document content and, for agents, at tool responses. Protected material, for text and code, is checked on the output. Spotlighting, in preview, applies to document content in user input, for models only. Groundedness, personally identifiable information and task adherence controls are also available in preview, as are custom blocklists.
+Third, the actions and assignment rules.
+There are two actions. Annotate applies to models only, and approval may apply. Annotate and block applies to models and to agents. By default, models use Microsoft.DefaultV2. Two details catch teams out. An agent's own guardrail fully overrides the guardrail of its model deployment; without one, the agent inherits the model's. And the content-harm controls on input and output cannot be deleted, only overridden with a different threshold.
+Preview items carry no service level agreement. Because preview coverage changes, the intervention points per risk for agents should be confirmed on the intervention points page before presenting.
+A common question is whether one guardrail can serve several deployments. It can: one guardrail can be assigned to many models and agents in a project.
+The key takeaway is that every control is a combination of risk, intervention point and action, and that an agent's own guardrail replaces the model's rather than adding to it.</a:t>
+            </a:r>
+            <a:endParaRPr/>
           </a:p>
         </p:txBody>
       </p:sp>
@@ -1262,7 +1331,7 @@
             <a:spLocks noGrp="1"/>
           </p:cNvSpPr>
           <p:nvPr>
-            <p:ph type="sldNum" idx="5" sz="quarter"/>
+            <p:ph type="sldNum" sz="quarter" idx="5"/>
           </p:nvPr>
         </p:nvSpPr>
         <p:spPr/>
@@ -1276,7 +1345,7 @@
 </file>
 
 <file path=ppt/notesSlides/notesSlide5.xml><?xml version="1.0" encoding="utf-8"?>
-<p:notes xmlns:a="http://schemas.openxmlformats.org/drawingml/2006/main" xmlns:p="http://schemas.openxmlformats.org/presentationml/2006/main" xmlns:r="http://schemas.openxmlformats.org/officeDocument/2006/relationships">
+<p:notes xmlns:a="http://schemas.openxmlformats.org/drawingml/2006/main" xmlns:r="http://schemas.openxmlformats.org/officeDocument/2006/relationships" xmlns:p="http://schemas.openxmlformats.org/presentationml/2006/main">
   <p:cSld>
     <p:spTree>
       <p:nvGrpSpPr>
@@ -1296,7 +1365,7 @@
         <p:nvSpPr>
           <p:cNvPr id="2" name="Slide Image Placeholder 1"/>
           <p:cNvSpPr>
-            <a:spLocks noGrp="1"/>
+            <a:spLocks noGrp="1" noRot="1" noChangeAspect="1"/>
           </p:cNvSpPr>
           <p:nvPr>
             <p:ph type="sldImg" idx="2"/>
@@ -1311,7 +1380,7 @@
             <a:spLocks noGrp="1"/>
           </p:cNvSpPr>
           <p:nvPr>
-            <p:ph type="body" idx="3" sz="quarter"/>
+            <p:ph type="body" sz="quarter" idx="3"/>
           </p:nvPr>
         </p:nvSpPr>
         <p:spPr/>
@@ -1320,28 +1389,22 @@
           <a:lstStyle/>
           <a:p>
             <a:r>
-              <a:t>This slide covers a naming trap that costs customers hours. The API threshold is named after the lowest severity that triggers a block. A threshold of Low blocks low, medium and high content, so it blocks the most. A threshold of High blocks only high-severity content, so it blocks the least.</a:t>
-            </a:r>
-          </a:p>
-          <a:p>
-            <a:r>
-              <a:t>The portal slider is named after the outcome instead: highest blocking corresponds to the API threshold Low, lowest blocking to High. The two scales run in opposite directions, and the severity table on the guardrails overview page adds to the confusion by calling Low least restrictive. Rely on the behaviour, not the label, and always name both: highest blocking, which is threshold Low.</a:t>
-            </a:r>
-          </a:p>
-          <a:p>
-            <a:r>
-              <a:t>Turning detection off requires approval for modified guardrails. Annotate only keeps detection running and returns annotations without blocking; for completions on Azure OpenAI models it also requires approval.</a:t>
-            </a:r>
-          </a:p>
-          <a:p>
-            <a:r>
-              <a:t>Presenter note: verify the portal labels on the day; they were read from the Foundry portal during the test, and the documentation describes the direction inconsistently.</a:t>
-            </a:r>
-          </a:p>
-          <a:p>
-            <a:r>
-              <a:t>Likely question: what is the default? The default configuration filters at medium for prompts and completions in all four categories.</a:t>
-            </a:r>
+              <a:rPr lang="en-US"/>
+              <a:t>This slide explains the severity thresholds and blocking levels, and a naming trap that costs customers hours. Read the table from left to right, from the setting that blocks less content to the setting that blocks more.
+The core idea is that each content-harm control blocks from a chosen severity upwards, and safe content is never blocked.
+First, the API threshold.
+It is named after the lowest severity that triggers a block. A threshold of Low blocks low, medium and high content, so it blocks the most. A threshold of High blocks only high-severity content, so it blocks the least.
+Second, the portal setting.
+The portal slider is named after the outcome instead: highest blocking corresponds to the API threshold Low, and lowest blocking to High. The two scales run in opposite directions. The severity table on the guardrails overview page adds to the confusion by calling Low least restrictive, although in behaviour Low blocks the most content. The safe approach is to rely on the behaviour, not the label, and always to name both, for example highest blocking, which is threshold Low.
+Third, the settings that do not block.
+Turning detection off requires approval for modified guardrails. Annotate only keeps detection running and returns annotations without blocking; for completions on Azure OpenAI models it also requires approval. In every setting other than off, all severities are returned as annotations.
+Fourth, safe content.
+It is always annotated, never blocked, and this is not configurable.
+The portal labels were read from the Foundry portal during the test, and the documentation describes the direction inconsistently, so the labels should be confirmed on the day before presenting.
+A common question is what the default is. The default configuration filters at medium for prompts and completions in all four categories.
+The key takeaway is to describe a setting by what it blocks, and to state both the portal label and the API threshold whenever a configuration is discussed.</a:t>
+            </a:r>
+            <a:endParaRPr/>
           </a:p>
         </p:txBody>
       </p:sp>
@@ -1352,7 +1415,7 @@
             <a:spLocks noGrp="1"/>
           </p:cNvSpPr>
           <p:nvPr>
-            <p:ph type="sldNum" idx="5" sz="quarter"/>
+            <p:ph type="sldNum" sz="quarter" idx="5"/>
           </p:nvPr>
         </p:nvSpPr>
         <p:spPr/>
@@ -1366,7 +1429,7 @@
 </file>
 
 <file path=ppt/notesSlides/notesSlide6.xml><?xml version="1.0" encoding="utf-8"?>
-<p:notes xmlns:a="http://schemas.openxmlformats.org/drawingml/2006/main" xmlns:p="http://schemas.openxmlformats.org/presentationml/2006/main" xmlns:r="http://schemas.openxmlformats.org/officeDocument/2006/relationships">
+<p:notes xmlns:a="http://schemas.openxmlformats.org/drawingml/2006/main" xmlns:r="http://schemas.openxmlformats.org/officeDocument/2006/relationships" xmlns:p="http://schemas.openxmlformats.org/presentationml/2006/main">
   <p:cSld>
     <p:spTree>
       <p:nvGrpSpPr>
@@ -1386,7 +1449,7 @@
         <p:nvSpPr>
           <p:cNvPr id="2" name="Slide Image Placeholder 1"/>
           <p:cNvSpPr>
-            <a:spLocks noGrp="1"/>
+            <a:spLocks noGrp="1" noRot="1" noChangeAspect="1"/>
           </p:cNvSpPr>
           <p:nvPr>
             <p:ph type="sldImg" idx="2"/>
@@ -1401,7 +1464,7 @@
             <a:spLocks noGrp="1"/>
           </p:cNvSpPr>
           <p:nvPr>
-            <p:ph type="body" idx="3" sz="quarter"/>
+            <p:ph type="body" sz="quarter" idx="3"/>
           </p:nvPr>
         </p:nvSpPr>
         <p:spPr/>
@@ -1410,33 +1473,23 @@
           <a:lstStyle/>
           <a:p>
             <a:r>
-              <a:t>When a request goes through the Responses API, the guardrail decision comes back as a top-level array called content_filters. Read each entry with three questions.</a:t>
-            </a:r>
-          </a:p>
-          <a:p>
-            <a:r>
-              <a:t>One, source_type: where was the check applied? Prompt means the user input, completion means the model output.</a:t>
-            </a:r>
-          </a:p>
-          <a:p>
-            <a:r>
-              <a:t>Two, blocked: was the content stopped? In this example, the prompt passed and the completion was blocked, so the user received nothing of that answer.</a:t>
-            </a:r>
-          </a:p>
-          <a:p>
-            <a:r>
-              <a:t>Three, content_filter_results: why? For each category, the severity it was rated and whether that rating caused a block.</a:t>
-            </a:r>
-          </a:p>
-          <a:p>
-            <a:r>
-              <a:t>Three handling details matter in application code. A blocked input does not return this structure at all; it fails with HTTP 400 and the code content_filter, which carries no category detail, so input blocks are harder to diagnose than output blocks. The content_filters array is a Microsoft Foundry extension to the OpenAI schema, so the Python SDK exposes it through model_extra. And in the test, blocked completions sometimes returned an empty results object, so log the block itself, not only the categories.</a:t>
-            </a:r>
-          </a:p>
-          <a:p>
-            <a:r>
-              <a:t>Likely question: what should we log? The guardrail name, the checkpoint, blocked, category and severity on every call. That is the evidence needed later to tell protection from over-blocking.</a:t>
-            </a:r>
+              <a:rPr lang="en-US"/>
+              <a:t>This slide shows how guardrail results come back in the Responses API. Read the abridged example on the left with the three numbered fields on the right.
+The core idea is that each response lists where a check ran, whether it blocked, and the category and severity behind it, in a top-level array called content_filters.
+First, source_type.
+It states where the check was applied. Prompt means the user input, and completion means the model output.
+Second, blocked.
+It states whether the content was stopped. In this example, the prompt passed and the completion was blocked, so the user received nothing of that answer.
+Third, content_filter_results.
+It explains why the guardrail acted. For each category, it holds the severity the content was rated, safe, low, medium or high, and whether that rating caused a block through the filtered flag.
+Three handling details then matter in application code.
+A blocked input does not return this structure at all. It fails with HTTP 400 and the code content_filter, which carries no category detail, so input blocks are harder to diagnose than output blocks.
+The content_filters array is a Microsoft Foundry extension to the OpenAI schema, so the Python SDK exposes it through model_extra.
+And in the test, blocked completions sometimes returned an empty results object, so the application should log the block itself, not only the categories.
+A common question is what the application should log. On every call, it should record the guardrail name, the checkpoint, the blocked flag, the category and the severity. That is the evidence needed later to tell protection from over-blocking.
+The key takeaway is that the guardrail decision is only useful if the client application records it on every call, including blocks that arrive without category detail.</a:t>
+            </a:r>
+            <a:endParaRPr/>
           </a:p>
         </p:txBody>
       </p:sp>
@@ -1447,7 +1500,7 @@
             <a:spLocks noGrp="1"/>
           </p:cNvSpPr>
           <p:nvPr>
-            <p:ph type="sldNum" idx="5" sz="quarter"/>
+            <p:ph type="sldNum" sz="quarter" idx="5"/>
           </p:nvPr>
         </p:nvSpPr>
         <p:spPr/>
@@ -1461,7 +1514,7 @@
 </file>
 
 <file path=ppt/notesSlides/notesSlide7.xml><?xml version="1.0" encoding="utf-8"?>
-<p:notes xmlns:a="http://schemas.openxmlformats.org/drawingml/2006/main" xmlns:p="http://schemas.openxmlformats.org/presentationml/2006/main" xmlns:r="http://schemas.openxmlformats.org/officeDocument/2006/relationships">
+<p:notes xmlns:a="http://schemas.openxmlformats.org/drawingml/2006/main" xmlns:r="http://schemas.openxmlformats.org/officeDocument/2006/relationships" xmlns:p="http://schemas.openxmlformats.org/presentationml/2006/main">
   <p:cSld>
     <p:spTree>
       <p:nvGrpSpPr>
@@ -1481,7 +1534,7 @@
         <p:nvSpPr>
           <p:cNvPr id="2" name="Slide Image Placeholder 1"/>
           <p:cNvSpPr>
-            <a:spLocks noGrp="1"/>
+            <a:spLocks noGrp="1" noRot="1" noChangeAspect="1"/>
           </p:cNvSpPr>
           <p:nvPr>
             <p:ph type="sldImg" idx="2"/>
@@ -1496,7 +1549,7 @@
             <a:spLocks noGrp="1"/>
           </p:cNvSpPr>
           <p:nvPr>
-            <p:ph type="body" idx="3" sz="quarter"/>
+            <p:ph type="body" sz="quarter" idx="3"/>
           </p:nvPr>
         </p:nvSpPr>
         <p:spPr/>
@@ -1505,28 +1558,21 @@
           <a:lstStyle/>
           <a:p>
             <a:r>
-              <a:t>This is the second layer. Risk and safety evaluators run in the Foundry Evaluation service on Microsoft-hosted safety models, need no judge deployment, and never change production behaviour.</a:t>
-            </a:r>
-          </a:p>
-          <a:p>
-            <a:r>
-              <a:t>For the four content-safety evaluators, every response gets a severity score from zero to seven per category: zero to one is very low, two to three low, four to five medium, six to seven high. The result passes when the score is at or below the threshold, which defaults to three, and fails above it. The threshold is a parameter of the evaluation run, not of the deployment, so the same scores can produce a different pass rate under a different threshold. That is why a defect rate should always be reported together with its threshold.</a:t>
-            </a:r>
-          </a:p>
-          <a:p>
-            <a:r>
-              <a:t>The reason field justifies each score and is the fastest way to triage a surprising result.</a:t>
-            </a:r>
-          </a:p>
-          <a:p>
-            <a:r>
-              <a:t>The other evaluators return pass or fail only. Indirect attack applies to models only; prohibited actions and sensitive data leakage are preview and agent-only.</a:t>
-            </a:r>
-          </a:p>
-          <a:p>
-            <a:r>
-              <a:t>Likely question: are these the same classifiers as the guardrail? They share the harm category names, but they are a different mechanism with a different scale and purpose, as the next slide shows.</a:t>
-            </a:r>
+              <a:rPr lang="en-US"/>
+              <a:t>This slide shows the output of the second layer, the risk and safety evaluators. Read the evaluator result on the left, the severity scale in the middle and the list of evaluators on the right.
+The core idea is that each response receives a severity score from zero to seven per category, a verdict against a threshold, and a written reason.
+First, where the evaluators run.
+They run in the Foundry Evaluation service on Microsoft-hosted safety models, need no judge deployment, and never change production behaviour.
+Second, the score and the threshold.
+For the four content-safety evaluators, every response gets a severity score per category: zero to one is very low, two to three low, four to five medium, and six to seven high. The result passes when the score is at or below the threshold, which defaults to three, and fails above it. The important distinction is that the threshold is a parameter of the evaluation run, not of the deployment, so the same scores can produce a different pass rate under a different threshold. That is why a defect rate should always be reported together with its threshold.
+Third, the reason field.
+It justifies each score and is the fastest way to triage a surprising result.
+Fourth, the other risk and safety evaluators.
+Protected material, indirect attack, code vulnerability, ungrounded attributes, prohibited actions and sensitive data leakage return pass or fail only. Indirect attack applies to models only. Prohibited actions and sensitive data leakage are in preview, with no service level agreement, and apply to agents only.
+A common question is whether these are the same classifiers as the guardrail. They are not: they share the harm category names, but they are a different mechanism with a different scale and a different purpose, as the next slide shows.
+The key takeaway is that an evaluator result is a score judged against a run-level threshold, so a pass rate means nothing without the threshold that produced it.</a:t>
+            </a:r>
+            <a:endParaRPr/>
           </a:p>
         </p:txBody>
       </p:sp>
@@ -1537,7 +1583,7 @@
             <a:spLocks noGrp="1"/>
           </p:cNvSpPr>
           <p:nvPr>
-            <p:ph type="sldNum" idx="5" sz="quarter"/>
+            <p:ph type="sldNum" sz="quarter" idx="5"/>
           </p:nvPr>
         </p:nvSpPr>
         <p:spPr/>
@@ -1551,7 +1597,7 @@
 </file>
 
 <file path=ppt/notesSlides/notesSlide8.xml><?xml version="1.0" encoding="utf-8"?>
-<p:notes xmlns:a="http://schemas.openxmlformats.org/drawingml/2006/main" xmlns:p="http://schemas.openxmlformats.org/presentationml/2006/main" xmlns:r="http://schemas.openxmlformats.org/officeDocument/2006/relationships">
+<p:notes xmlns:a="http://schemas.openxmlformats.org/drawingml/2006/main" xmlns:r="http://schemas.openxmlformats.org/officeDocument/2006/relationships" xmlns:p="http://schemas.openxmlformats.org/presentationml/2006/main">
   <p:cSld>
     <p:spTree>
       <p:nvGrpSpPr>
@@ -1571,7 +1617,7 @@
         <p:nvSpPr>
           <p:cNvPr id="2" name="Slide Image Placeholder 1"/>
           <p:cNvSpPr>
-            <a:spLocks noGrp="1"/>
+            <a:spLocks noGrp="1" noRot="1" noChangeAspect="1"/>
           </p:cNvSpPr>
           <p:nvPr>
             <p:ph type="sldImg" idx="2"/>
@@ -1586,7 +1632,7 @@
             <a:spLocks noGrp="1"/>
           </p:cNvSpPr>
           <p:nvPr>
-            <p:ph type="body" idx="3" sz="quarter"/>
+            <p:ph type="body" sz="quarter" idx="3"/>
           </p:nvPr>
         </p:nvSpPr>
         <p:spPr/>
@@ -1595,33 +1641,23 @@
           <a:lstStyle/>
           <a:p>
             <a:r>
-              <a:t>This table is the mandatory comparison, because guardrails and evaluators are the two things customers most often confuse in this area. Every row asks the same question of both.</a:t>
-            </a:r>
-          </a:p>
-          <a:p>
-            <a:r>
-              <a:t>The guardrail runs on every call inside the request path and can block; a blocked answer never reaches the user. The evaluator runs later, as an evaluation run, and only reports. The guardrail speaks in four severity levels with a filtered flag; the evaluator speaks in a zero-to-seven score with a pass or fail against a threshold.</a:t>
-            </a:r>
-          </a:p>
-          <a:p>
-            <a:r>
-              <a:t>Configuration lives in different places too. A guardrail is attached to a deployment or an agent, and for testing it can be overridden per request with the x-policy-id header. The evaluator threshold belongs to the run.</a:t>
-            </a:r>
-          </a:p>
-          <a:p>
-            <a:r>
-              <a:t>The guardrail adds roughly fifty to one hundred milliseconds per intervention point, which matters for high-throughput workloads; the evaluator adds nothing to production traffic.</a:t>
-            </a:r>
-          </a:p>
-          <a:p>
-            <a:r>
-              <a:t>The last row is the reason for the experiment: each layer is blind exactly where the other one acts.</a:t>
-            </a:r>
-          </a:p>
-          <a:p>
-            <a:r>
-              <a:t>Likely question: can the evaluator replace the guardrail in production? No. It does not stop anything; it measures. Use it to choose and confirm the guardrail setting, not instead of it.</a:t>
-            </a:r>
+              <a:rPr lang="en-US"/>
+              <a:t>This slide compares guardrails and evaluators, the two things customers most often confuse in this area. Read the table row by row: every row asks the same question of both layers.
+The core idea is that the two layers share the harm category names but differ in scale, in timing and in effect.
+First, when each layer runs and what it does.
+The guardrail runs on every call inside the request path and can block; a blocked answer never reaches the user. It inspects user input and output, and for agents tool calls and tool responses, in preview. The evaluator runs later, as an evaluation run, on the returned responses, and only reports, so production behaviour is unchanged.
+Second, the scale.
+The guardrail speaks in four severity levels, safe, low, medium and high, with a filtered flag. The evaluator speaks in a zero-to-seven score, with a pass or fail against a threshold that defaults to three.
+Third, where each layer is configured.
+A guardrail is attached to a deployment or an agent, and for testing it can be overridden per request with the x-policy-id header. The evaluator threshold belongs to the run, as an analysis parameter.
+Fourth, latency.
+The guardrail adds roughly fifty to one hundred milliseconds per intervention point, which matters for high-throughput workloads. The evaluator adds nothing to production traffic.
+Fifth, what each layer cannot show.
+This last row is the reason for the experiment. The guardrail cannot show whether a block was correct, and the evaluator cannot show anything the guardrail blocked. Each layer is blind exactly where the other one acts.
+A common question is whether the evaluator can replace the guardrail in production. It cannot: it does not stop anything, it measures. It should be used to choose and confirm the guardrail setting, not instead of it.
+The key takeaway is that enforcement and measurement are complementary, and the relationship becomes visible only when the same question carries a verdict from each.</a:t>
+            </a:r>
+            <a:endParaRPr/>
           </a:p>
         </p:txBody>
       </p:sp>
@@ -1632,7 +1668,7 @@
             <a:spLocks noGrp="1"/>
           </p:cNvSpPr>
           <p:nvPr>
-            <p:ph type="sldNum" idx="5" sz="quarter"/>
+            <p:ph type="sldNum" sz="quarter" idx="5"/>
           </p:nvPr>
         </p:nvSpPr>
         <p:spPr/>
@@ -1646,7 +1682,7 @@
 </file>
 
 <file path=ppt/notesSlides/notesSlide9.xml><?xml version="1.0" encoding="utf-8"?>
-<p:notes xmlns:a="http://schemas.openxmlformats.org/drawingml/2006/main" xmlns:p="http://schemas.openxmlformats.org/presentationml/2006/main" xmlns:r="http://schemas.openxmlformats.org/officeDocument/2006/relationships">
+<p:notes xmlns:a="http://schemas.openxmlformats.org/drawingml/2006/main" xmlns:r="http://schemas.openxmlformats.org/officeDocument/2006/relationships" xmlns:p="http://schemas.openxmlformats.org/presentationml/2006/main">
   <p:cSld>
     <p:spTree>
       <p:nvGrpSpPr>
@@ -1666,7 +1702,7 @@
         <p:nvSpPr>
           <p:cNvPr id="2" name="Slide Image Placeholder 1"/>
           <p:cNvSpPr>
-            <a:spLocks noGrp="1"/>
+            <a:spLocks noGrp="1" noRot="1" noChangeAspect="1"/>
           </p:cNvSpPr>
           <p:nvPr>
             <p:ph type="sldImg" idx="2"/>
@@ -1681,7 +1717,7 @@
             <a:spLocks noGrp="1"/>
           </p:cNvSpPr>
           <p:nvPr>
-            <p:ph type="body" idx="3" sz="quarter"/>
+            <p:ph type="body" sz="quarter" idx="3"/>
           </p:nvPr>
         </p:nvSpPr>
         <p:spPr/>
@@ -1690,33 +1726,25 @@
           <a:lstStyle/>
           <a:p>
             <a:r>
-              <a:t>The test turns the blind spot from the comparison slide into numbers. Step one: design the questions across four harm categories and four intent levels, and generate one synthetic dataset from that brief. The dataset is versioned, so every later run reuses exactly the same questions.</a:t>
-            </a:r>
-          </a:p>
-          <a:p>
-            <a:r>
-              <a:t>Steps two and three are the fork. The same questions go into a cloud evaluation run, where Foundry calls the deployment and four content safety evaluators score the answers, and into a direct replay through the Responses API, where we read the guardrail's own content_filters annotations.</a:t>
-            </a:r>
-          </a:p>
-          <a:p>
-            <a:r>
-              <a:t>Step four joins both results on deployment and question text. Step five produces the agreement matrix on the next slide.</a:t>
-            </a:r>
-          </a:p>
-          <a:p>
-            <a:r>
-              <a:t>The test used two deployments, gpt-5.4-mini and gpt-5.6-sol, for 266 question-and-model pairs, and three guardrail configurations swapped between runs. The x-policy-id header could do the swap per request instead, except for image input.</a:t>
-            </a:r>
-          </a:p>
-          <a:p>
-            <a:r>
-              <a:t>Presenter note: verify the preview status of synthetic dataset generation and of the synthetic data source for cloud evaluation on the day; the documentation changed during October 2026.</a:t>
-            </a:r>
-          </a:p>
-          <a:p>
-            <a:r>
-              <a:t>Likely question: why synthetic data? It gives controlled coverage before real traffic exists; it still needs human review before it drives a decision.</a:t>
-            </a:r>
+              <a:rPr lang="en-US"/>
+              <a:t>This slide shows the test design. Read the five numbered steps from left to right, then the three cards below them.
+The core idea is that one synthetic question set is sent through both layers, and the results are joined question by question. This turns the blind spot from the comparison slide into numbers.
+First, question design.
+The questions are designed across four harm categories and four intent levels.
+Second, the synthetic dataset.
+One synthetic dataset is generated once from that brief and versioned, so every later run reuses exactly the same questions.
+Third, the fork into two paths.
+The same questions go into a cloud evaluation run, where Foundry calls the deployment and four content safety evaluators score the answers on the zero-to-seven scale. They also go into a direct replay through the Responses API, where the guardrail's own content_filters annotations are read.
+Fourth, the join.
+Both results are joined on deployment and question text.
+Fifth, the agreement matrix.
+The join produces two verdicts per pair, which form the agreement matrix on the next slide.
+The cards below set the scope. The test used two model deployments, gpt-5.4-mini and gpt-5.6-sol, for 266 question-and-model pairs in total, 133 per deployment. Three guardrail configurations, HighestBlocking, MediumBlocking and LowestBlocking, were swapped between runs over the same questions. The x-policy-id header could do the swap per request instead, except for image input. Every exported result carries the name of the guardrail in effect, so runs stay comparable instead of overwriting each other.
+The documentation changed during October 2026, so the preview status of synthetic dataset generation and of the synthetic data source for cloud evaluation should be confirmed on the day before presenting.
+A common question is why the test uses synthetic data. It gives controlled coverage before real traffic exists, but it still needs human review before it drives a decision.
+The key takeaway is that a fixed, versioned question set sent through both layers is what makes the two verdicts comparable.</a:t>
+            </a:r>
+            <a:endParaRPr/>
           </a:p>
         </p:txBody>
       </p:sp>
@@ -1727,7 +1755,7 @@
             <a:spLocks noGrp="1"/>
           </p:cNvSpPr>
           <p:nvPr>
-            <p:ph type="sldNum" idx="5" sz="quarter"/>
+            <p:ph type="sldNum" sz="quarter" idx="5"/>
           </p:nvPr>
         </p:nvSpPr>
         <p:spPr/>
@@ -1778,10 +1806,9 @@
           <a:lstStyle/>
           <a:p>
             <a:r>
-              <a:rPr lang="en-US" smtClean="0"/>
+              <a:rPr lang="en-US"/>
               <a:t>Click to edit Master title style</a:t>
             </a:r>
-            <a:endParaRPr lang="en-US"/>
           </a:p>
         </p:txBody>
       </p:sp>
@@ -1897,10 +1924,9 @@
           </a:lstStyle>
           <a:p>
             <a:r>
-              <a:rPr lang="en-US" smtClean="0"/>
+              <a:rPr lang="en-US"/>
               <a:t>Click to edit Master subtitle style</a:t>
             </a:r>
-            <a:endParaRPr lang="en-US"/>
           </a:p>
         </p:txBody>
       </p:sp>
@@ -1921,7 +1947,7 @@
           <a:p>
             <a:fld id="{5BCAD085-E8A6-8845-BD4E-CB4CCA059FC4}" type="datetimeFigureOut">
               <a:rPr lang="en-US" smtClean="0"/>
-              <a:t>1/27/13</a:t>
+              <a:t>10/14/2026</a:t>
             </a:fld>
             <a:endParaRPr lang="en-US"/>
           </a:p>
@@ -2015,10 +2041,9 @@
           <a:lstStyle/>
           <a:p>
             <a:r>
-              <a:rPr lang="en-US" smtClean="0"/>
+              <a:rPr lang="en-US"/>
               <a:t>Click to edit Master title style</a:t>
             </a:r>
-            <a:endParaRPr lang="en-US"/>
           </a:p>
         </p:txBody>
       </p:sp>
@@ -2039,38 +2064,37 @@
           <a:p>
             <a:pPr lvl="0"/>
             <a:r>
-              <a:rPr lang="en-US" smtClean="0"/>
+              <a:rPr lang="en-US"/>
               <a:t>Click to edit Master text styles</a:t>
             </a:r>
           </a:p>
           <a:p>
             <a:pPr lvl="1"/>
             <a:r>
-              <a:rPr lang="en-US" smtClean="0"/>
+              <a:rPr lang="en-US"/>
               <a:t>Second level</a:t>
             </a:r>
           </a:p>
           <a:p>
             <a:pPr lvl="2"/>
             <a:r>
-              <a:rPr lang="en-US" smtClean="0"/>
+              <a:rPr lang="en-US"/>
               <a:t>Third level</a:t>
             </a:r>
           </a:p>
           <a:p>
             <a:pPr lvl="3"/>
             <a:r>
-              <a:rPr lang="en-US" smtClean="0"/>
+              <a:rPr lang="en-US"/>
               <a:t>Fourth level</a:t>
             </a:r>
           </a:p>
           <a:p>
             <a:pPr lvl="4"/>
             <a:r>
-              <a:rPr lang="en-US" smtClean="0"/>
+              <a:rPr lang="en-US"/>
               <a:t>Fifth level</a:t>
             </a:r>
-            <a:endParaRPr lang="en-US"/>
           </a:p>
         </p:txBody>
       </p:sp>
@@ -2091,7 +2115,7 @@
           <a:p>
             <a:fld id="{5BCAD085-E8A6-8845-BD4E-CB4CCA059FC4}" type="datetimeFigureOut">
               <a:rPr lang="en-US" smtClean="0"/>
-              <a:t>1/27/13</a:t>
+              <a:t>10/14/2026</a:t>
             </a:fld>
             <a:endParaRPr lang="en-US"/>
           </a:p>
@@ -2190,10 +2214,9 @@
           <a:lstStyle/>
           <a:p>
             <a:r>
-              <a:rPr lang="en-US" smtClean="0"/>
+              <a:rPr lang="en-US"/>
               <a:t>Click to edit Master title style</a:t>
             </a:r>
-            <a:endParaRPr lang="en-US"/>
           </a:p>
         </p:txBody>
       </p:sp>
@@ -2219,38 +2242,37 @@
           <a:p>
             <a:pPr lvl="0"/>
             <a:r>
-              <a:rPr lang="en-US" smtClean="0"/>
+              <a:rPr lang="en-US"/>
               <a:t>Click to edit Master text styles</a:t>
             </a:r>
           </a:p>
           <a:p>
             <a:pPr lvl="1"/>
             <a:r>
-              <a:rPr lang="en-US" smtClean="0"/>
+              <a:rPr lang="en-US"/>
               <a:t>Second level</a:t>
             </a:r>
           </a:p>
           <a:p>
             <a:pPr lvl="2"/>
             <a:r>
-              <a:rPr lang="en-US" smtClean="0"/>
+              <a:rPr lang="en-US"/>
               <a:t>Third level</a:t>
             </a:r>
           </a:p>
           <a:p>
             <a:pPr lvl="3"/>
             <a:r>
-              <a:rPr lang="en-US" smtClean="0"/>
+              <a:rPr lang="en-US"/>
               <a:t>Fourth level</a:t>
             </a:r>
           </a:p>
           <a:p>
             <a:pPr lvl="4"/>
             <a:r>
-              <a:rPr lang="en-US" smtClean="0"/>
+              <a:rPr lang="en-US"/>
               <a:t>Fifth level</a:t>
             </a:r>
-            <a:endParaRPr lang="en-US"/>
           </a:p>
         </p:txBody>
       </p:sp>
@@ -2271,7 +2293,7 @@
           <a:p>
             <a:fld id="{5BCAD085-E8A6-8845-BD4E-CB4CCA059FC4}" type="datetimeFigureOut">
               <a:rPr lang="en-US" smtClean="0"/>
-              <a:t>1/27/13</a:t>
+              <a:t>10/14/2026</a:t>
             </a:fld>
             <a:endParaRPr lang="en-US"/>
           </a:p>
@@ -2365,10 +2387,9 @@
           <a:lstStyle/>
           <a:p>
             <a:r>
-              <a:rPr lang="en-US" smtClean="0"/>
+              <a:rPr lang="en-US"/>
               <a:t>Click to edit Master title style</a:t>
             </a:r>
-            <a:endParaRPr lang="en-US"/>
           </a:p>
         </p:txBody>
       </p:sp>
@@ -2389,38 +2410,37 @@
           <a:p>
             <a:pPr lvl="0"/>
             <a:r>
-              <a:rPr lang="en-US" smtClean="0"/>
+              <a:rPr lang="en-US"/>
               <a:t>Click to edit Master text styles</a:t>
             </a:r>
           </a:p>
           <a:p>
             <a:pPr lvl="1"/>
             <a:r>
-              <a:rPr lang="en-US" smtClean="0"/>
+              <a:rPr lang="en-US"/>
               <a:t>Second level</a:t>
             </a:r>
           </a:p>
           <a:p>
             <a:pPr lvl="2"/>
             <a:r>
-              <a:rPr lang="en-US" smtClean="0"/>
+              <a:rPr lang="en-US"/>
               <a:t>Third level</a:t>
             </a:r>
           </a:p>
           <a:p>
             <a:pPr lvl="3"/>
             <a:r>
-              <a:rPr lang="en-US" smtClean="0"/>
+              <a:rPr lang="en-US"/>
               <a:t>Fourth level</a:t>
             </a:r>
           </a:p>
           <a:p>
             <a:pPr lvl="4"/>
             <a:r>
-              <a:rPr lang="en-US" smtClean="0"/>
+              <a:rPr lang="en-US"/>
               <a:t>Fifth level</a:t>
             </a:r>
-            <a:endParaRPr lang="en-US"/>
           </a:p>
         </p:txBody>
       </p:sp>
@@ -2441,7 +2461,7 @@
           <a:p>
             <a:fld id="{5BCAD085-E8A6-8845-BD4E-CB4CCA059FC4}" type="datetimeFigureOut">
               <a:rPr lang="en-US" smtClean="0"/>
-              <a:t>1/27/13</a:t>
+              <a:t>10/14/2026</a:t>
             </a:fld>
             <a:endParaRPr lang="en-US"/>
           </a:p>
@@ -2544,10 +2564,9 @@
           </a:lstStyle>
           <a:p>
             <a:r>
-              <a:rPr lang="en-US" smtClean="0"/>
+              <a:rPr lang="en-US"/>
               <a:t>Click to edit Master title style</a:t>
             </a:r>
-            <a:endParaRPr lang="en-US"/>
           </a:p>
         </p:txBody>
       </p:sp>
@@ -2664,7 +2683,7 @@
           <a:p>
             <a:pPr lvl="0"/>
             <a:r>
-              <a:rPr lang="en-US" smtClean="0"/>
+              <a:rPr lang="en-US"/>
               <a:t>Click to edit Master text styles</a:t>
             </a:r>
           </a:p>
@@ -2687,7 +2706,7 @@
           <a:p>
             <a:fld id="{5BCAD085-E8A6-8845-BD4E-CB4CCA059FC4}" type="datetimeFigureOut">
               <a:rPr lang="en-US" smtClean="0"/>
-              <a:t>1/27/13</a:t>
+              <a:t>10/14/2026</a:t>
             </a:fld>
             <a:endParaRPr lang="en-US"/>
           </a:p>
@@ -2781,10 +2800,9 @@
           <a:lstStyle/>
           <a:p>
             <a:r>
-              <a:rPr lang="en-US" smtClean="0"/>
+              <a:rPr lang="en-US"/>
               <a:t>Click to edit Master title style</a:t>
             </a:r>
-            <a:endParaRPr lang="en-US"/>
           </a:p>
         </p:txBody>
       </p:sp>
@@ -2838,38 +2856,37 @@
           <a:p>
             <a:pPr lvl="0"/>
             <a:r>
-              <a:rPr lang="en-US" smtClean="0"/>
+              <a:rPr lang="en-US"/>
               <a:t>Click to edit Master text styles</a:t>
             </a:r>
           </a:p>
           <a:p>
             <a:pPr lvl="1"/>
             <a:r>
-              <a:rPr lang="en-US" smtClean="0"/>
+              <a:rPr lang="en-US"/>
               <a:t>Second level</a:t>
             </a:r>
           </a:p>
           <a:p>
             <a:pPr lvl="2"/>
             <a:r>
-              <a:rPr lang="en-US" smtClean="0"/>
+              <a:rPr lang="en-US"/>
               <a:t>Third level</a:t>
             </a:r>
           </a:p>
           <a:p>
             <a:pPr lvl="3"/>
             <a:r>
-              <a:rPr lang="en-US" smtClean="0"/>
+              <a:rPr lang="en-US"/>
               <a:t>Fourth level</a:t>
             </a:r>
           </a:p>
           <a:p>
             <a:pPr lvl="4"/>
             <a:r>
-              <a:rPr lang="en-US" smtClean="0"/>
+              <a:rPr lang="en-US"/>
               <a:t>Fifth level</a:t>
             </a:r>
-            <a:endParaRPr lang="en-US"/>
           </a:p>
         </p:txBody>
       </p:sp>
@@ -2923,38 +2940,37 @@
           <a:p>
             <a:pPr lvl="0"/>
             <a:r>
-              <a:rPr lang="en-US" smtClean="0"/>
+              <a:rPr lang="en-US"/>
               <a:t>Click to edit Master text styles</a:t>
             </a:r>
           </a:p>
           <a:p>
             <a:pPr lvl="1"/>
             <a:r>
-              <a:rPr lang="en-US" smtClean="0"/>
+              <a:rPr lang="en-US"/>
               <a:t>Second level</a:t>
             </a:r>
           </a:p>
           <a:p>
             <a:pPr lvl="2"/>
             <a:r>
-              <a:rPr lang="en-US" smtClean="0"/>
+              <a:rPr lang="en-US"/>
               <a:t>Third level</a:t>
             </a:r>
           </a:p>
           <a:p>
             <a:pPr lvl="3"/>
             <a:r>
-              <a:rPr lang="en-US" smtClean="0"/>
+              <a:rPr lang="en-US"/>
               <a:t>Fourth level</a:t>
             </a:r>
           </a:p>
           <a:p>
             <a:pPr lvl="4"/>
             <a:r>
-              <a:rPr lang="en-US" smtClean="0"/>
+              <a:rPr lang="en-US"/>
               <a:t>Fifth level</a:t>
             </a:r>
-            <a:endParaRPr lang="en-US"/>
           </a:p>
         </p:txBody>
       </p:sp>
@@ -2975,7 +2991,7 @@
           <a:p>
             <a:fld id="{5BCAD085-E8A6-8845-BD4E-CB4CCA059FC4}" type="datetimeFigureOut">
               <a:rPr lang="en-US" smtClean="0"/>
-              <a:t>1/27/13</a:t>
+              <a:t>10/14/2026</a:t>
             </a:fld>
             <a:endParaRPr lang="en-US"/>
           </a:p>
@@ -3073,10 +3089,9 @@
           </a:lstStyle>
           <a:p>
             <a:r>
-              <a:rPr lang="en-US" smtClean="0"/>
+              <a:rPr lang="en-US"/>
               <a:t>Click to edit Master title style</a:t>
             </a:r>
-            <a:endParaRPr lang="en-US"/>
           </a:p>
         </p:txBody>
       </p:sp>
@@ -3139,7 +3154,7 @@
           <a:p>
             <a:pPr lvl="0"/>
             <a:r>
-              <a:rPr lang="en-US" smtClean="0"/>
+              <a:rPr lang="en-US"/>
               <a:t>Click to edit Master text styles</a:t>
             </a:r>
           </a:p>
@@ -3195,38 +3210,37 @@
           <a:p>
             <a:pPr lvl="0"/>
             <a:r>
-              <a:rPr lang="en-US" smtClean="0"/>
+              <a:rPr lang="en-US"/>
               <a:t>Click to edit Master text styles</a:t>
             </a:r>
           </a:p>
           <a:p>
             <a:pPr lvl="1"/>
             <a:r>
-              <a:rPr lang="en-US" smtClean="0"/>
+              <a:rPr lang="en-US"/>
               <a:t>Second level</a:t>
             </a:r>
           </a:p>
           <a:p>
             <a:pPr lvl="2"/>
             <a:r>
-              <a:rPr lang="en-US" smtClean="0"/>
+              <a:rPr lang="en-US"/>
               <a:t>Third level</a:t>
             </a:r>
           </a:p>
           <a:p>
             <a:pPr lvl="3"/>
             <a:r>
-              <a:rPr lang="en-US" smtClean="0"/>
+              <a:rPr lang="en-US"/>
               <a:t>Fourth level</a:t>
             </a:r>
           </a:p>
           <a:p>
             <a:pPr lvl="4"/>
             <a:r>
-              <a:rPr lang="en-US" smtClean="0"/>
+              <a:rPr lang="en-US"/>
               <a:t>Fifth level</a:t>
             </a:r>
-            <a:endParaRPr lang="en-US"/>
           </a:p>
         </p:txBody>
       </p:sp>
@@ -3289,7 +3303,7 @@
           <a:p>
             <a:pPr lvl="0"/>
             <a:r>
-              <a:rPr lang="en-US" smtClean="0"/>
+              <a:rPr lang="en-US"/>
               <a:t>Click to edit Master text styles</a:t>
             </a:r>
           </a:p>
@@ -3345,38 +3359,37 @@
           <a:p>
             <a:pPr lvl="0"/>
             <a:r>
-              <a:rPr lang="en-US" smtClean="0"/>
+              <a:rPr lang="en-US"/>
               <a:t>Click to edit Master text styles</a:t>
             </a:r>
           </a:p>
           <a:p>
             <a:pPr lvl="1"/>
             <a:r>
-              <a:rPr lang="en-US" smtClean="0"/>
+              <a:rPr lang="en-US"/>
               <a:t>Second level</a:t>
             </a:r>
           </a:p>
           <a:p>
             <a:pPr lvl="2"/>
             <a:r>
-              <a:rPr lang="en-US" smtClean="0"/>
+              <a:rPr lang="en-US"/>
               <a:t>Third level</a:t>
             </a:r>
           </a:p>
           <a:p>
             <a:pPr lvl="3"/>
             <a:r>
-              <a:rPr lang="en-US" smtClean="0"/>
+              <a:rPr lang="en-US"/>
               <a:t>Fourth level</a:t>
             </a:r>
           </a:p>
           <a:p>
             <a:pPr lvl="4"/>
             <a:r>
-              <a:rPr lang="en-US" smtClean="0"/>
+              <a:rPr lang="en-US"/>
               <a:t>Fifth level</a:t>
             </a:r>
-            <a:endParaRPr lang="en-US"/>
           </a:p>
         </p:txBody>
       </p:sp>
@@ -3397,7 +3410,7 @@
           <a:p>
             <a:fld id="{5BCAD085-E8A6-8845-BD4E-CB4CCA059FC4}" type="datetimeFigureOut">
               <a:rPr lang="en-US" smtClean="0"/>
-              <a:t>1/27/13</a:t>
+              <a:t>10/14/2026</a:t>
             </a:fld>
             <a:endParaRPr lang="en-US"/>
           </a:p>
@@ -3491,10 +3504,9 @@
           <a:lstStyle/>
           <a:p>
             <a:r>
-              <a:rPr lang="en-US" smtClean="0"/>
+              <a:rPr lang="en-US"/>
               <a:t>Click to edit Master title style</a:t>
             </a:r>
-            <a:endParaRPr lang="en-US"/>
           </a:p>
         </p:txBody>
       </p:sp>
@@ -3515,7 +3527,7 @@
           <a:p>
             <a:fld id="{5BCAD085-E8A6-8845-BD4E-CB4CCA059FC4}" type="datetimeFigureOut">
               <a:rPr lang="en-US" smtClean="0"/>
-              <a:t>1/27/13</a:t>
+              <a:t>10/14/2026</a:t>
             </a:fld>
             <a:endParaRPr lang="en-US"/>
           </a:p>
@@ -3610,7 +3622,7 @@
           <a:p>
             <a:fld id="{5BCAD085-E8A6-8845-BD4E-CB4CCA059FC4}" type="datetimeFigureOut">
               <a:rPr lang="en-US" smtClean="0"/>
-              <a:t>1/27/13</a:t>
+              <a:t>10/14/2026</a:t>
             </a:fld>
             <a:endParaRPr lang="en-US"/>
           </a:p>
@@ -3713,10 +3725,9 @@
           </a:lstStyle>
           <a:p>
             <a:r>
-              <a:rPr lang="en-US" smtClean="0"/>
+              <a:rPr lang="en-US"/>
               <a:t>Click to edit Master title style</a:t>
             </a:r>
-            <a:endParaRPr lang="en-US"/>
           </a:p>
         </p:txBody>
       </p:sp>
@@ -3770,38 +3781,37 @@
           <a:p>
             <a:pPr lvl="0"/>
             <a:r>
-              <a:rPr lang="en-US" smtClean="0"/>
+              <a:rPr lang="en-US"/>
               <a:t>Click to edit Master text styles</a:t>
             </a:r>
           </a:p>
           <a:p>
             <a:pPr lvl="1"/>
             <a:r>
-              <a:rPr lang="en-US" smtClean="0"/>
+              <a:rPr lang="en-US"/>
               <a:t>Second level</a:t>
             </a:r>
           </a:p>
           <a:p>
             <a:pPr lvl="2"/>
             <a:r>
-              <a:rPr lang="en-US" smtClean="0"/>
+              <a:rPr lang="en-US"/>
               <a:t>Third level</a:t>
             </a:r>
           </a:p>
           <a:p>
             <a:pPr lvl="3"/>
             <a:r>
-              <a:rPr lang="en-US" smtClean="0"/>
+              <a:rPr lang="en-US"/>
               <a:t>Fourth level</a:t>
             </a:r>
           </a:p>
           <a:p>
             <a:pPr lvl="4"/>
             <a:r>
-              <a:rPr lang="en-US" smtClean="0"/>
+              <a:rPr lang="en-US"/>
               <a:t>Fifth level</a:t>
             </a:r>
-            <a:endParaRPr lang="en-US"/>
           </a:p>
         </p:txBody>
       </p:sp>
@@ -3864,7 +3874,7 @@
           <a:p>
             <a:pPr lvl="0"/>
             <a:r>
-              <a:rPr lang="en-US" smtClean="0"/>
+              <a:rPr lang="en-US"/>
               <a:t>Click to edit Master text styles</a:t>
             </a:r>
           </a:p>
@@ -3887,7 +3897,7 @@
           <a:p>
             <a:fld id="{5BCAD085-E8A6-8845-BD4E-CB4CCA059FC4}" type="datetimeFigureOut">
               <a:rPr lang="en-US" smtClean="0"/>
-              <a:t>1/27/13</a:t>
+              <a:t>10/14/2026</a:t>
             </a:fld>
             <a:endParaRPr lang="en-US"/>
           </a:p>
@@ -3990,10 +4000,9 @@
           </a:lstStyle>
           <a:p>
             <a:r>
-              <a:rPr lang="en-US" smtClean="0"/>
+              <a:rPr lang="en-US"/>
               <a:t>Click to edit Master title style</a:t>
             </a:r>
-            <a:endParaRPr lang="en-US"/>
           </a:p>
         </p:txBody>
       </p:sp>
@@ -4117,7 +4126,7 @@
           <a:p>
             <a:pPr lvl="0"/>
             <a:r>
-              <a:rPr lang="en-US" smtClean="0"/>
+              <a:rPr lang="en-US"/>
               <a:t>Click to edit Master text styles</a:t>
             </a:r>
           </a:p>
@@ -4140,7 +4149,7 @@
           <a:p>
             <a:fld id="{5BCAD085-E8A6-8845-BD4E-CB4CCA059FC4}" type="datetimeFigureOut">
               <a:rPr lang="en-US" smtClean="0"/>
-              <a:t>1/27/13</a:t>
+              <a:t>10/14/2026</a:t>
             </a:fld>
             <a:endParaRPr lang="en-US"/>
           </a:p>
@@ -4249,10 +4258,9 @@
           <a:lstStyle/>
           <a:p>
             <a:r>
-              <a:rPr lang="en-US" smtClean="0"/>
+              <a:rPr lang="en-US"/>
               <a:t>Click to edit Master title style</a:t>
             </a:r>
-            <a:endParaRPr lang="en-US"/>
           </a:p>
         </p:txBody>
       </p:sp>
@@ -4283,38 +4291,37 @@
           <a:p>
             <a:pPr lvl="0"/>
             <a:r>
-              <a:rPr lang="en-US" smtClean="0"/>
+              <a:rPr lang="en-US"/>
               <a:t>Click to edit Master text styles</a:t>
             </a:r>
           </a:p>
           <a:p>
             <a:pPr lvl="1"/>
             <a:r>
-              <a:rPr lang="en-US" smtClean="0"/>
+              <a:rPr lang="en-US"/>
               <a:t>Second level</a:t>
             </a:r>
           </a:p>
           <a:p>
             <a:pPr lvl="2"/>
             <a:r>
-              <a:rPr lang="en-US" smtClean="0"/>
+              <a:rPr lang="en-US"/>
               <a:t>Third level</a:t>
             </a:r>
           </a:p>
           <a:p>
             <a:pPr lvl="3"/>
             <a:r>
-              <a:rPr lang="en-US" smtClean="0"/>
+              <a:rPr lang="en-US"/>
               <a:t>Fourth level</a:t>
             </a:r>
           </a:p>
           <a:p>
             <a:pPr lvl="4"/>
             <a:r>
-              <a:rPr lang="en-US" smtClean="0"/>
+              <a:rPr lang="en-US"/>
               <a:t>Fifth level</a:t>
             </a:r>
-            <a:endParaRPr lang="en-US"/>
           </a:p>
         </p:txBody>
       </p:sp>
@@ -4353,7 +4360,7 @@
           <a:p>
             <a:fld id="{5BCAD085-E8A6-8845-BD4E-CB4CCA059FC4}" type="datetimeFigureOut">
               <a:rPr lang="en-US" smtClean="0"/>
-              <a:t>1/27/13</a:t>
+              <a:t>10/14/2026</a:t>
             </a:fld>
             <a:endParaRPr lang="en-US"/>
           </a:p>
@@ -4712,7 +4719,7 @@
 </file>
 
 <file path=ppt/slides/slide1.xml><?xml version="1.0" encoding="utf-8"?>
-<p:sld xmlns:a="http://schemas.openxmlformats.org/drawingml/2006/main" xmlns:p="http://schemas.openxmlformats.org/presentationml/2006/main" xmlns:r="http://schemas.openxmlformats.org/officeDocument/2006/relationships">
+<p:sld xmlns:a="http://schemas.openxmlformats.org/drawingml/2006/main" xmlns:r="http://schemas.openxmlformats.org/officeDocument/2006/relationships" xmlns:p="http://schemas.openxmlformats.org/presentationml/2006/main">
   <p:cSld>
     <p:spTree>
       <p:nvGrpSpPr>
@@ -4720,7 +4727,14 @@
         <p:cNvGrpSpPr/>
         <p:nvPr/>
       </p:nvGrpSpPr>
-      <p:grpSpPr/>
+      <p:grpSpPr>
+        <a:xfrm>
+          <a:off x="0" y="0"/>
+          <a:ext cx="0" cy="0"/>
+          <a:chOff x="0" y="0"/>
+          <a:chExt cx="0" cy="0"/>
+        </a:xfrm>
+      </p:grpSpPr>
       <p:sp>
         <p:nvSpPr>
           <p:cNvPr id="2" name="Rectangle 1"/>
@@ -4744,9 +4758,11 @@
           <a:effectLst/>
         </p:spPr>
         <p:txBody>
-          <a:bodyPr rtlCol="0" anchor="ctr" wrap="square"/>
-          <a:lstStyle/>
-          <a:p/>
+          <a:bodyPr wrap="square" rtlCol="0" anchor="ctr"/>
+          <a:lstStyle/>
+          <a:p>
+            <a:endParaRPr/>
+          </a:p>
         </p:txBody>
       </p:sp>
       <p:sp>
@@ -4772,9 +4788,11 @@
           <a:effectLst/>
         </p:spPr>
         <p:txBody>
-          <a:bodyPr rtlCol="0" anchor="ctr" wrap="square"/>
-          <a:lstStyle/>
-          <a:p/>
+          <a:bodyPr wrap="square" rtlCol="0" anchor="ctr"/>
+          <a:lstStyle/>
+          <a:p>
+            <a:endParaRPr/>
+          </a:p>
         </p:txBody>
       </p:sp>
       <p:sp>
@@ -4794,7 +4812,7 @@
           <a:noFill/>
         </p:spPr>
         <p:txBody>
-          <a:bodyPr wrap="square" lIns="0" rIns="0" tIns="0" bIns="0" anchor="t">
+          <a:bodyPr wrap="square" lIns="0" tIns="0" rIns="0" bIns="0" anchor="t">
             <a:spAutoFit/>
           </a:bodyPr>
           <a:lstStyle/>
@@ -4805,7 +4823,7 @@
               </a:lnSpc>
             </a:pPr>
             <a:r>
-              <a:rPr sz="900" b="1" i="0" dirty="0" spc="160">
+              <a:rPr sz="900" b="1" i="0" spc="160" dirty="0">
                 <a:solidFill>
                   <a:srgbClr val="00B39F"/>
                 </a:solidFill>
@@ -4834,7 +4852,7 @@
           <a:noFill/>
         </p:spPr>
         <p:txBody>
-          <a:bodyPr wrap="none" lIns="0" rIns="0" tIns="0" bIns="0" anchor="t">
+          <a:bodyPr wrap="none" lIns="0" tIns="0" rIns="0" bIns="0" anchor="t">
             <a:spAutoFit/>
           </a:bodyPr>
           <a:lstStyle/>
@@ -4874,7 +4892,7 @@
           <a:noFill/>
         </p:spPr>
         <p:txBody>
-          <a:bodyPr wrap="square" lIns="0" rIns="0" tIns="0" bIns="0" anchor="t">
+          <a:bodyPr wrap="square" lIns="0" tIns="0" rIns="0" bIns="0" anchor="t">
             <a:spAutoFit/>
           </a:bodyPr>
           <a:lstStyle/>
@@ -4952,7 +4970,7 @@
           <a:noFill/>
         </p:spPr>
         <p:txBody>
-          <a:bodyPr wrap="square" lIns="0" rIns="0" tIns="0" bIns="0" anchor="t">
+          <a:bodyPr wrap="square" lIns="0" tIns="0" rIns="0" bIns="0" anchor="t">
             <a:spAutoFit/>
           </a:bodyPr>
           <a:lstStyle/>
@@ -4963,7 +4981,7 @@
               </a:lnSpc>
             </a:pPr>
             <a:r>
-              <a:rPr sz="750" b="1" i="0" dirty="0" spc="120">
+              <a:rPr sz="750" b="1" i="0" spc="120" dirty="0">
                 <a:solidFill>
                   <a:srgbClr val="00B39F"/>
                 </a:solidFill>
@@ -4992,7 +5010,7 @@
           <a:noFill/>
         </p:spPr>
         <p:txBody>
-          <a:bodyPr wrap="square" lIns="0" rIns="0" tIns="0" bIns="0" anchor="t">
+          <a:bodyPr wrap="square" lIns="0" tIns="0" rIns="0" bIns="0" anchor="t">
             <a:spAutoFit/>
           </a:bodyPr>
           <a:lstStyle/>
@@ -5049,7 +5067,7 @@
           <a:noFill/>
         </p:spPr>
         <p:txBody>
-          <a:bodyPr wrap="square" lIns="0" rIns="0" tIns="0" bIns="0" anchor="t">
+          <a:bodyPr wrap="square" lIns="0" tIns="0" rIns="0" bIns="0" anchor="t">
             <a:spAutoFit/>
           </a:bodyPr>
           <a:lstStyle/>
@@ -5060,7 +5078,7 @@
               </a:lnSpc>
             </a:pPr>
             <a:r>
-              <a:rPr sz="750" b="1" i="0" dirty="0" spc="120">
+              <a:rPr sz="750" b="1" i="0" spc="120" dirty="0">
                 <a:solidFill>
                   <a:srgbClr val="00B39F"/>
                 </a:solidFill>
@@ -5089,7 +5107,7 @@
           <a:noFill/>
         </p:spPr>
         <p:txBody>
-          <a:bodyPr wrap="square" lIns="0" rIns="0" tIns="0" bIns="0" anchor="t">
+          <a:bodyPr wrap="square" lIns="0" tIns="0" rIns="0" bIns="0" anchor="t">
             <a:spAutoFit/>
           </a:bodyPr>
           <a:lstStyle/>
@@ -5146,7 +5164,7 @@
           <a:noFill/>
         </p:spPr>
         <p:txBody>
-          <a:bodyPr wrap="square" lIns="0" rIns="0" tIns="0" bIns="0" anchor="t">
+          <a:bodyPr wrap="square" lIns="0" tIns="0" rIns="0" bIns="0" anchor="t">
             <a:spAutoFit/>
           </a:bodyPr>
           <a:lstStyle/>
@@ -5157,7 +5175,7 @@
               </a:lnSpc>
             </a:pPr>
             <a:r>
-              <a:rPr sz="750" b="1" i="0" dirty="0" spc="120">
+              <a:rPr sz="750" b="1" i="0" spc="120" dirty="0">
                 <a:solidFill>
                   <a:srgbClr val="00B39F"/>
                 </a:solidFill>
@@ -5186,7 +5204,7 @@
           <a:noFill/>
         </p:spPr>
         <p:txBody>
-          <a:bodyPr wrap="square" lIns="0" rIns="0" tIns="0" bIns="0" anchor="t">
+          <a:bodyPr wrap="square" lIns="0" tIns="0" rIns="0" bIns="0" anchor="t">
             <a:spAutoFit/>
           </a:bodyPr>
           <a:lstStyle/>
@@ -5243,7 +5261,7 @@
           <a:noFill/>
         </p:spPr>
         <p:txBody>
-          <a:bodyPr wrap="square" lIns="0" rIns="0" tIns="0" bIns="0" anchor="t">
+          <a:bodyPr wrap="square" lIns="0" tIns="0" rIns="0" bIns="0" anchor="t">
             <a:spAutoFit/>
           </a:bodyPr>
           <a:lstStyle/>
@@ -5283,7 +5301,7 @@
           <a:noFill/>
         </p:spPr>
         <p:txBody>
-          <a:bodyPr wrap="square" lIns="0" rIns="0" tIns="0" bIns="0" anchor="t">
+          <a:bodyPr wrap="square" lIns="0" tIns="0" rIns="0" bIns="0" anchor="t">
             <a:spAutoFit/>
           </a:bodyPr>
           <a:lstStyle/>
@@ -5315,7 +5333,7 @@
 </file>
 
 <file path=ppt/slides/slide10.xml><?xml version="1.0" encoding="utf-8"?>
-<p:sld xmlns:a="http://schemas.openxmlformats.org/drawingml/2006/main" xmlns:p="http://schemas.openxmlformats.org/presentationml/2006/main" xmlns:r="http://schemas.openxmlformats.org/officeDocument/2006/relationships">
+<p:sld xmlns:a="http://schemas.openxmlformats.org/drawingml/2006/main" xmlns:r="http://schemas.openxmlformats.org/officeDocument/2006/relationships" xmlns:p="http://schemas.openxmlformats.org/presentationml/2006/main">
   <p:cSld>
     <p:spTree>
       <p:nvGrpSpPr>
@@ -5323,7 +5341,14 @@
         <p:cNvGrpSpPr/>
         <p:nvPr/>
       </p:nvGrpSpPr>
-      <p:grpSpPr/>
+      <p:grpSpPr>
+        <a:xfrm>
+          <a:off x="0" y="0"/>
+          <a:ext cx="0" cy="0"/>
+          <a:chOff x="0" y="0"/>
+          <a:chExt cx="0" cy="0"/>
+        </a:xfrm>
+      </p:grpSpPr>
       <p:sp>
         <p:nvSpPr>
           <p:cNvPr id="2" name="TextBox 1"/>
@@ -5341,7 +5366,7 @@
           <a:noFill/>
         </p:spPr>
         <p:txBody>
-          <a:bodyPr wrap="square" lIns="0" rIns="0" tIns="0" bIns="0" anchor="t">
+          <a:bodyPr wrap="square" lIns="0" tIns="0" rIns="0" bIns="0" anchor="t">
             <a:spAutoFit/>
           </a:bodyPr>
           <a:lstStyle/>
@@ -5352,7 +5377,7 @@
               </a:lnSpc>
             </a:pPr>
             <a:r>
-              <a:rPr sz="800" b="1" i="0" dirty="0" spc="140">
+              <a:rPr sz="800" b="1" i="0" spc="140" dirty="0">
                 <a:solidFill>
                   <a:srgbClr val="008173"/>
                 </a:solidFill>
@@ -5381,7 +5406,7 @@
           <a:noFill/>
         </p:spPr>
         <p:txBody>
-          <a:bodyPr wrap="square" lIns="0" rIns="0" tIns="0" bIns="0" anchor="t">
+          <a:bodyPr wrap="square" lIns="0" tIns="0" rIns="0" bIns="0" anchor="t">
             <a:spAutoFit/>
           </a:bodyPr>
           <a:lstStyle/>
@@ -5421,7 +5446,7 @@
           <a:noFill/>
         </p:spPr>
         <p:txBody>
-          <a:bodyPr wrap="square" lIns="0" rIns="0" tIns="0" bIns="0" anchor="t">
+          <a:bodyPr wrap="square" lIns="0" tIns="0" rIns="0" bIns="0" anchor="t">
             <a:spAutoFit/>
           </a:bodyPr>
           <a:lstStyle/>
@@ -5461,7 +5486,7 @@
           <a:noFill/>
         </p:spPr>
         <p:txBody>
-          <a:bodyPr wrap="square" lIns="0" rIns="0" tIns="0" bIns="0" anchor="t">
+          <a:bodyPr wrap="square" lIns="0" tIns="0" rIns="0" bIns="0" anchor="t">
             <a:spAutoFit/>
           </a:bodyPr>
           <a:lstStyle/>
@@ -5501,7 +5526,7 @@
           <a:noFill/>
         </p:spPr>
         <p:txBody>
-          <a:bodyPr wrap="square" lIns="0" rIns="0" tIns="0" bIns="0" anchor="t">
+          <a:bodyPr wrap="square" lIns="0" tIns="0" rIns="0" bIns="0" anchor="t">
             <a:spAutoFit/>
           </a:bodyPr>
           <a:lstStyle/>
@@ -5547,7 +5572,7 @@
           <a:effectLst/>
         </p:spPr>
         <p:txBody>
-          <a:bodyPr rtlCol="0" anchor="ctr" wrap="square" lIns="54864" rIns="54864" tIns="18288" bIns="18288"/>
+          <a:bodyPr wrap="square" lIns="54864" tIns="18288" rIns="54864" bIns="18288" rtlCol="0" anchor="ctr"/>
           <a:lstStyle/>
           <a:p>
             <a:pPr algn="ctr">
@@ -5591,7 +5616,7 @@
           <a:effectLst/>
         </p:spPr>
         <p:txBody>
-          <a:bodyPr rtlCol="0" anchor="ctr" wrap="square" lIns="54864" rIns="54864" tIns="18288" bIns="18288"/>
+          <a:bodyPr wrap="square" lIns="54864" tIns="18288" rIns="54864" bIns="18288" rtlCol="0" anchor="ctr"/>
           <a:lstStyle/>
           <a:p>
             <a:pPr algn="ctr">
@@ -5635,7 +5660,7 @@
           <a:effectLst/>
         </p:spPr>
         <p:txBody>
-          <a:bodyPr rtlCol="0" anchor="ctr" wrap="square" lIns="54864" rIns="54864" tIns="18288" bIns="18288"/>
+          <a:bodyPr wrap="square" lIns="54864" tIns="18288" rIns="54864" bIns="18288" rtlCol="0" anchor="ctr"/>
           <a:lstStyle/>
           <a:p>
             <a:pPr algn="ctr">
@@ -5696,7 +5721,7 @@
           <a:effectLst/>
         </p:spPr>
         <p:txBody>
-          <a:bodyPr rtlCol="0" anchor="ctr" wrap="square" lIns="54864" rIns="54864" tIns="18288" bIns="18288"/>
+          <a:bodyPr wrap="square" lIns="54864" tIns="18288" rIns="54864" bIns="18288" rtlCol="0" anchor="ctr"/>
           <a:lstStyle/>
           <a:p>
             <a:pPr algn="ctr">
@@ -5759,9 +5784,11 @@
           <a:effectLst/>
         </p:spPr>
         <p:txBody>
-          <a:bodyPr rtlCol="0" anchor="ctr" wrap="square"/>
-          <a:lstStyle/>
-          <a:p/>
+          <a:bodyPr wrap="square" rtlCol="0" anchor="ctr"/>
+          <a:lstStyle/>
+          <a:p>
+            <a:endParaRPr/>
+          </a:p>
         </p:txBody>
       </p:sp>
       <p:sp>
@@ -5781,7 +5808,7 @@
           <a:noFill/>
         </p:spPr>
         <p:txBody>
-          <a:bodyPr wrap="square" lIns="0" rIns="0" tIns="0" bIns="0" anchor="t">
+          <a:bodyPr wrap="square" lIns="0" tIns="0" rIns="0" bIns="0" anchor="t">
             <a:spAutoFit/>
           </a:bodyPr>
           <a:lstStyle/>
@@ -5821,7 +5848,7 @@
           <a:noFill/>
         </p:spPr>
         <p:txBody>
-          <a:bodyPr wrap="square" lIns="0" rIns="0" tIns="0" bIns="0" anchor="t">
+          <a:bodyPr wrap="square" lIns="0" tIns="0" rIns="0" bIns="0" anchor="t">
             <a:spAutoFit/>
           </a:bodyPr>
           <a:lstStyle/>
@@ -5861,7 +5888,7 @@
           <a:noFill/>
         </p:spPr>
         <p:txBody>
-          <a:bodyPr wrap="square" lIns="0" rIns="0" tIns="0" bIns="0" anchor="t">
+          <a:bodyPr wrap="square" lIns="0" tIns="0" rIns="0" bIns="0" anchor="t">
             <a:spAutoFit/>
           </a:bodyPr>
           <a:lstStyle/>
@@ -5901,7 +5928,7 @@
           <a:noFill/>
         </p:spPr>
         <p:txBody>
-          <a:bodyPr wrap="square" lIns="0" rIns="0" tIns="0" bIns="0" anchor="t">
+          <a:bodyPr wrap="square" lIns="0" tIns="0" rIns="0" bIns="0" anchor="t">
             <a:spAutoFit/>
           </a:bodyPr>
           <a:lstStyle/>
@@ -5949,9 +5976,11 @@
           <a:effectLst/>
         </p:spPr>
         <p:txBody>
-          <a:bodyPr rtlCol="0" anchor="ctr" wrap="square"/>
-          <a:lstStyle/>
-          <a:p/>
+          <a:bodyPr wrap="square" rtlCol="0" anchor="ctr"/>
+          <a:lstStyle/>
+          <a:p>
+            <a:endParaRPr/>
+          </a:p>
         </p:txBody>
       </p:sp>
       <p:sp>
@@ -5971,7 +6000,7 @@
           <a:noFill/>
         </p:spPr>
         <p:txBody>
-          <a:bodyPr wrap="square" lIns="0" rIns="0" tIns="0" bIns="0" anchor="t">
+          <a:bodyPr wrap="square" lIns="0" tIns="0" rIns="0" bIns="0" anchor="t">
             <a:spAutoFit/>
           </a:bodyPr>
           <a:lstStyle/>
@@ -6011,7 +6040,7 @@
           <a:noFill/>
         </p:spPr>
         <p:txBody>
-          <a:bodyPr wrap="square" lIns="0" rIns="0" tIns="0" bIns="0" anchor="t">
+          <a:bodyPr wrap="square" lIns="0" tIns="0" rIns="0" bIns="0" anchor="t">
             <a:spAutoFit/>
           </a:bodyPr>
           <a:lstStyle/>
@@ -6051,7 +6080,7 @@
           <a:noFill/>
         </p:spPr>
         <p:txBody>
-          <a:bodyPr wrap="square" lIns="0" rIns="0" tIns="0" bIns="0" anchor="t">
+          <a:bodyPr wrap="square" lIns="0" tIns="0" rIns="0" bIns="0" anchor="t">
             <a:spAutoFit/>
           </a:bodyPr>
           <a:lstStyle/>
@@ -6091,7 +6120,7 @@
           <a:noFill/>
         </p:spPr>
         <p:txBody>
-          <a:bodyPr wrap="square" lIns="0" rIns="0" tIns="0" bIns="0" anchor="t">
+          <a:bodyPr wrap="square" lIns="0" tIns="0" rIns="0" bIns="0" anchor="t">
             <a:spAutoFit/>
           </a:bodyPr>
           <a:lstStyle/>
@@ -6139,9 +6168,11 @@
           <a:effectLst/>
         </p:spPr>
         <p:txBody>
-          <a:bodyPr rtlCol="0" anchor="ctr" wrap="square"/>
-          <a:lstStyle/>
-          <a:p/>
+          <a:bodyPr wrap="square" rtlCol="0" anchor="ctr"/>
+          <a:lstStyle/>
+          <a:p>
+            <a:endParaRPr/>
+          </a:p>
         </p:txBody>
       </p:sp>
       <p:sp>
@@ -6161,7 +6192,7 @@
           <a:noFill/>
         </p:spPr>
         <p:txBody>
-          <a:bodyPr wrap="square" lIns="0" rIns="0" tIns="0" bIns="0" anchor="t">
+          <a:bodyPr wrap="square" lIns="0" tIns="0" rIns="0" bIns="0" anchor="t">
             <a:spAutoFit/>
           </a:bodyPr>
           <a:lstStyle/>
@@ -6201,7 +6232,7 @@
           <a:noFill/>
         </p:spPr>
         <p:txBody>
-          <a:bodyPr wrap="square" lIns="0" rIns="0" tIns="0" bIns="0" anchor="t">
+          <a:bodyPr wrap="square" lIns="0" tIns="0" rIns="0" bIns="0" anchor="t">
             <a:spAutoFit/>
           </a:bodyPr>
           <a:lstStyle/>
@@ -6241,7 +6272,7 @@
           <a:noFill/>
         </p:spPr>
         <p:txBody>
-          <a:bodyPr wrap="square" lIns="0" rIns="0" tIns="0" bIns="0" anchor="t">
+          <a:bodyPr wrap="square" lIns="0" tIns="0" rIns="0" bIns="0" anchor="t">
             <a:spAutoFit/>
           </a:bodyPr>
           <a:lstStyle/>
@@ -6281,7 +6312,7 @@
           <a:noFill/>
         </p:spPr>
         <p:txBody>
-          <a:bodyPr wrap="square" lIns="0" rIns="0" tIns="0" bIns="0" anchor="t">
+          <a:bodyPr wrap="square" lIns="0" tIns="0" rIns="0" bIns="0" anchor="t">
             <a:spAutoFit/>
           </a:bodyPr>
           <a:lstStyle/>
@@ -6329,9 +6360,11 @@
           <a:effectLst/>
         </p:spPr>
         <p:txBody>
-          <a:bodyPr rtlCol="0" anchor="ctr" wrap="square"/>
-          <a:lstStyle/>
-          <a:p/>
+          <a:bodyPr wrap="square" rtlCol="0" anchor="ctr"/>
+          <a:lstStyle/>
+          <a:p>
+            <a:endParaRPr/>
+          </a:p>
         </p:txBody>
       </p:sp>
       <p:sp>
@@ -6351,7 +6384,7 @@
           <a:noFill/>
         </p:spPr>
         <p:txBody>
-          <a:bodyPr wrap="square" lIns="0" rIns="0" tIns="0" bIns="0" anchor="t">
+          <a:bodyPr wrap="square" lIns="0" tIns="0" rIns="0" bIns="0" anchor="t">
             <a:spAutoFit/>
           </a:bodyPr>
           <a:lstStyle/>
@@ -6391,7 +6424,7 @@
           <a:noFill/>
         </p:spPr>
         <p:txBody>
-          <a:bodyPr wrap="square" lIns="0" rIns="0" tIns="0" bIns="0" anchor="t">
+          <a:bodyPr wrap="square" lIns="0" tIns="0" rIns="0" bIns="0" anchor="t">
             <a:spAutoFit/>
           </a:bodyPr>
           <a:lstStyle/>
@@ -6431,7 +6464,7 @@
           <a:noFill/>
         </p:spPr>
         <p:txBody>
-          <a:bodyPr wrap="square" lIns="0" rIns="0" tIns="0" bIns="0" anchor="t">
+          <a:bodyPr wrap="square" lIns="0" tIns="0" rIns="0" bIns="0" anchor="t">
             <a:spAutoFit/>
           </a:bodyPr>
           <a:lstStyle/>
@@ -6471,7 +6504,7 @@
           <a:noFill/>
         </p:spPr>
         <p:txBody>
-          <a:bodyPr wrap="square" lIns="0" rIns="0" tIns="0" bIns="0" anchor="t">
+          <a:bodyPr wrap="square" lIns="0" tIns="0" rIns="0" bIns="0" anchor="t">
             <a:spAutoFit/>
           </a:bodyPr>
           <a:lstStyle/>
@@ -6519,9 +6552,11 @@
           <a:effectLst/>
         </p:spPr>
         <p:txBody>
-          <a:bodyPr rtlCol="0" anchor="ctr" wrap="square"/>
-          <a:lstStyle/>
-          <a:p/>
+          <a:bodyPr wrap="square" rtlCol="0" anchor="ctr"/>
+          <a:lstStyle/>
+          <a:p>
+            <a:endParaRPr/>
+          </a:p>
         </p:txBody>
       </p:sp>
       <p:sp>
@@ -6547,9 +6582,11 @@
           <a:effectLst/>
         </p:spPr>
         <p:txBody>
-          <a:bodyPr rtlCol="0" anchor="ctr" wrap="square"/>
-          <a:lstStyle/>
-          <a:p/>
+          <a:bodyPr wrap="square" rtlCol="0" anchor="ctr"/>
+          <a:lstStyle/>
+          <a:p>
+            <a:endParaRPr/>
+          </a:p>
         </p:txBody>
       </p:sp>
       <p:sp>
@@ -6569,7 +6606,7 @@
           <a:noFill/>
         </p:spPr>
         <p:txBody>
-          <a:bodyPr wrap="square" lIns="0" rIns="0" tIns="0" bIns="0" anchor="t">
+          <a:bodyPr wrap="square" lIns="0" tIns="0" rIns="0" bIns="0" anchor="t">
             <a:spAutoFit/>
           </a:bodyPr>
           <a:lstStyle/>
@@ -6609,7 +6646,7 @@
           <a:noFill/>
         </p:spPr>
         <p:txBody>
-          <a:bodyPr wrap="square" lIns="0" rIns="0" tIns="0" bIns="0" anchor="t">
+          <a:bodyPr wrap="square" lIns="0" tIns="0" rIns="0" bIns="0" anchor="t">
             <a:spAutoFit/>
           </a:bodyPr>
           <a:lstStyle/>
@@ -6680,9 +6717,11 @@
           <a:effectLst/>
         </p:spPr>
         <p:txBody>
-          <a:bodyPr rtlCol="0" anchor="ctr" wrap="square"/>
-          <a:lstStyle/>
-          <a:p/>
+          <a:bodyPr wrap="square" rtlCol="0" anchor="ctr"/>
+          <a:lstStyle/>
+          <a:p>
+            <a:endParaRPr/>
+          </a:p>
         </p:txBody>
       </p:sp>
       <p:sp>
@@ -6708,9 +6747,11 @@
           <a:effectLst/>
         </p:spPr>
         <p:txBody>
-          <a:bodyPr rtlCol="0" anchor="ctr" wrap="square"/>
-          <a:lstStyle/>
-          <a:p/>
+          <a:bodyPr wrap="square" rtlCol="0" anchor="ctr"/>
+          <a:lstStyle/>
+          <a:p>
+            <a:endParaRPr/>
+          </a:p>
         </p:txBody>
       </p:sp>
       <p:sp>
@@ -6730,7 +6771,7 @@
           <a:noFill/>
         </p:spPr>
         <p:txBody>
-          <a:bodyPr wrap="square" lIns="0" rIns="0" tIns="0" bIns="0" anchor="t">
+          <a:bodyPr wrap="square" lIns="0" tIns="0" rIns="0" bIns="0" anchor="t">
             <a:spAutoFit/>
           </a:bodyPr>
           <a:lstStyle/>
@@ -6770,7 +6811,7 @@
           <a:noFill/>
         </p:spPr>
         <p:txBody>
-          <a:bodyPr wrap="square" lIns="0" rIns="0" tIns="0" bIns="0" anchor="t">
+          <a:bodyPr wrap="square" lIns="0" tIns="0" rIns="0" bIns="0" anchor="t">
             <a:spAutoFit/>
           </a:bodyPr>
           <a:lstStyle/>
@@ -6841,9 +6882,11 @@
           <a:effectLst/>
         </p:spPr>
         <p:txBody>
-          <a:bodyPr rtlCol="0" anchor="ctr" wrap="square"/>
-          <a:lstStyle/>
-          <a:p/>
+          <a:bodyPr wrap="square" rtlCol="0" anchor="ctr"/>
+          <a:lstStyle/>
+          <a:p>
+            <a:endParaRPr/>
+          </a:p>
         </p:txBody>
       </p:sp>
       <p:sp>
@@ -6869,9 +6912,11 @@
           <a:effectLst/>
         </p:spPr>
         <p:txBody>
-          <a:bodyPr rtlCol="0" anchor="ctr" wrap="square"/>
-          <a:lstStyle/>
-          <a:p/>
+          <a:bodyPr wrap="square" rtlCol="0" anchor="ctr"/>
+          <a:lstStyle/>
+          <a:p>
+            <a:endParaRPr/>
+          </a:p>
         </p:txBody>
       </p:sp>
       <p:sp>
@@ -6891,7 +6936,7 @@
           <a:noFill/>
         </p:spPr>
         <p:txBody>
-          <a:bodyPr wrap="square" lIns="0" rIns="0" tIns="0" bIns="0" anchor="t">
+          <a:bodyPr wrap="square" lIns="0" tIns="0" rIns="0" bIns="0" anchor="t">
             <a:spAutoFit/>
           </a:bodyPr>
           <a:lstStyle/>
@@ -6931,7 +6976,7 @@
           <a:noFill/>
         </p:spPr>
         <p:txBody>
-          <a:bodyPr wrap="square" lIns="0" rIns="0" tIns="0" bIns="0" anchor="t">
+          <a:bodyPr wrap="square" lIns="0" tIns="0" rIns="0" bIns="0" anchor="t">
             <a:spAutoFit/>
           </a:bodyPr>
           <a:lstStyle/>
@@ -6994,7 +7039,7 @@
           <a:noFill/>
         </p:spPr>
         <p:txBody>
-          <a:bodyPr wrap="square" lIns="0" rIns="0" tIns="0" bIns="0" anchor="t">
+          <a:bodyPr wrap="square" lIns="0" tIns="0" rIns="0" bIns="0" anchor="t">
             <a:spAutoFit/>
           </a:bodyPr>
           <a:lstStyle/>
@@ -7026,7 +7071,7 @@
 </file>
 
 <file path=ppt/slides/slide11.xml><?xml version="1.0" encoding="utf-8"?>
-<p:sld xmlns:a="http://schemas.openxmlformats.org/drawingml/2006/main" xmlns:p="http://schemas.openxmlformats.org/presentationml/2006/main" xmlns:r="http://schemas.openxmlformats.org/officeDocument/2006/relationships">
+<p:sld xmlns:a="http://schemas.openxmlformats.org/drawingml/2006/main" xmlns:r="http://schemas.openxmlformats.org/officeDocument/2006/relationships" xmlns:p="http://schemas.openxmlformats.org/presentationml/2006/main">
   <p:cSld>
     <p:spTree>
       <p:nvGrpSpPr>
@@ -7034,7 +7079,14 @@
         <p:cNvGrpSpPr/>
         <p:nvPr/>
       </p:nvGrpSpPr>
-      <p:grpSpPr/>
+      <p:grpSpPr>
+        <a:xfrm>
+          <a:off x="0" y="0"/>
+          <a:ext cx="0" cy="0"/>
+          <a:chOff x="0" y="0"/>
+          <a:chExt cx="0" cy="0"/>
+        </a:xfrm>
+      </p:grpSpPr>
       <p:sp>
         <p:nvSpPr>
           <p:cNvPr id="2" name="TextBox 1"/>
@@ -7052,7 +7104,7 @@
           <a:noFill/>
         </p:spPr>
         <p:txBody>
-          <a:bodyPr wrap="square" lIns="0" rIns="0" tIns="0" bIns="0" anchor="t">
+          <a:bodyPr wrap="square" lIns="0" tIns="0" rIns="0" bIns="0" anchor="t">
             <a:spAutoFit/>
           </a:bodyPr>
           <a:lstStyle/>
@@ -7063,7 +7115,7 @@
               </a:lnSpc>
             </a:pPr>
             <a:r>
-              <a:rPr sz="800" b="1" i="0" dirty="0" spc="140">
+              <a:rPr sz="800" b="1" i="0" spc="140" dirty="0">
                 <a:solidFill>
                   <a:srgbClr val="008173"/>
                 </a:solidFill>
@@ -7092,7 +7144,7 @@
           <a:noFill/>
         </p:spPr>
         <p:txBody>
-          <a:bodyPr wrap="square" lIns="0" rIns="0" tIns="0" bIns="0" anchor="t">
+          <a:bodyPr wrap="square" lIns="0" tIns="0" rIns="0" bIns="0" anchor="t">
             <a:spAutoFit/>
           </a:bodyPr>
           <a:lstStyle/>
@@ -7132,7 +7184,7 @@
           <a:noFill/>
         </p:spPr>
         <p:txBody>
-          <a:bodyPr wrap="square" lIns="0" rIns="0" tIns="0" bIns="0" anchor="t">
+          <a:bodyPr wrap="square" lIns="0" tIns="0" rIns="0" bIns="0" anchor="t">
             <a:spAutoFit/>
           </a:bodyPr>
           <a:lstStyle/>
@@ -7172,7 +7224,7 @@
           <a:noFill/>
         </p:spPr>
         <p:txBody>
-          <a:bodyPr wrap="square" lIns="0" rIns="0" tIns="0" bIns="0" anchor="t">
+          <a:bodyPr wrap="square" lIns="0" tIns="0" rIns="0" bIns="0" anchor="t">
             <a:spAutoFit/>
           </a:bodyPr>
           <a:lstStyle/>
@@ -7212,7 +7264,7 @@
           <a:noFill/>
         </p:spPr>
         <p:txBody>
-          <a:bodyPr wrap="square" lIns="0" rIns="0" tIns="0" bIns="0" anchor="t">
+          <a:bodyPr wrap="square" lIns="0" tIns="0" rIns="0" bIns="0" anchor="t">
             <a:spAutoFit/>
           </a:bodyPr>
           <a:lstStyle/>
@@ -7260,9 +7312,11 @@
           <a:effectLst/>
         </p:spPr>
         <p:txBody>
-          <a:bodyPr rtlCol="0" anchor="ctr" wrap="square"/>
-          <a:lstStyle/>
-          <a:p/>
+          <a:bodyPr wrap="square" rtlCol="0" anchor="ctr"/>
+          <a:lstStyle/>
+          <a:p>
+            <a:endParaRPr/>
+          </a:p>
         </p:txBody>
       </p:sp>
       <p:sp>
@@ -7288,9 +7342,11 @@
           <a:effectLst/>
         </p:spPr>
         <p:txBody>
-          <a:bodyPr rtlCol="0" anchor="ctr" wrap="square"/>
-          <a:lstStyle/>
-          <a:p/>
+          <a:bodyPr wrap="square" rtlCol="0" anchor="ctr"/>
+          <a:lstStyle/>
+          <a:p>
+            <a:endParaRPr/>
+          </a:p>
         </p:txBody>
       </p:sp>
       <p:sp>
@@ -7310,7 +7366,7 @@
           <a:noFill/>
         </p:spPr>
         <p:txBody>
-          <a:bodyPr wrap="square" lIns="0" rIns="0" tIns="0" bIns="0" anchor="t">
+          <a:bodyPr wrap="square" lIns="0" tIns="0" rIns="0" bIns="0" anchor="t">
             <a:spAutoFit/>
           </a:bodyPr>
           <a:lstStyle/>
@@ -7350,7 +7406,7 @@
           <a:noFill/>
         </p:spPr>
         <p:txBody>
-          <a:bodyPr wrap="square" lIns="0" rIns="0" tIns="0" bIns="0" anchor="t">
+          <a:bodyPr wrap="square" lIns="0" tIns="0" rIns="0" bIns="0" anchor="t">
             <a:spAutoFit/>
           </a:bodyPr>
           <a:lstStyle/>
@@ -7390,7 +7446,7 @@
           <a:noFill/>
         </p:spPr>
         <p:txBody>
-          <a:bodyPr wrap="square" lIns="0" rIns="0" tIns="0" bIns="0" anchor="t">
+          <a:bodyPr wrap="square" lIns="0" tIns="0" rIns="0" bIns="0" anchor="t">
             <a:spAutoFit/>
           </a:bodyPr>
           <a:lstStyle/>
@@ -7430,7 +7486,7 @@
           <a:noFill/>
         </p:spPr>
         <p:txBody>
-          <a:bodyPr wrap="square" lIns="0" rIns="0" tIns="0" bIns="0" anchor="t">
+          <a:bodyPr wrap="square" lIns="0" tIns="0" rIns="0" bIns="0" anchor="t">
             <a:spAutoFit/>
           </a:bodyPr>
           <a:lstStyle/>
@@ -7491,7 +7547,7 @@
           <a:noFill/>
         </p:spPr>
         <p:txBody>
-          <a:bodyPr wrap="square" lIns="0" rIns="0" tIns="0" bIns="0" anchor="t">
+          <a:bodyPr wrap="square" lIns="0" tIns="0" rIns="0" bIns="0" anchor="t">
             <a:spAutoFit/>
           </a:bodyPr>
           <a:lstStyle/>
@@ -7539,9 +7595,11 @@
           <a:effectLst/>
         </p:spPr>
         <p:txBody>
-          <a:bodyPr rtlCol="0" anchor="ctr" wrap="square"/>
-          <a:lstStyle/>
-          <a:p/>
+          <a:bodyPr wrap="square" rtlCol="0" anchor="ctr"/>
+          <a:lstStyle/>
+          <a:p>
+            <a:endParaRPr/>
+          </a:p>
         </p:txBody>
       </p:sp>
       <p:sp>
@@ -7567,9 +7625,11 @@
           <a:effectLst/>
         </p:spPr>
         <p:txBody>
-          <a:bodyPr rtlCol="0" anchor="ctr" wrap="square"/>
-          <a:lstStyle/>
-          <a:p/>
+          <a:bodyPr wrap="square" rtlCol="0" anchor="ctr"/>
+          <a:lstStyle/>
+          <a:p>
+            <a:endParaRPr/>
+          </a:p>
         </p:txBody>
       </p:sp>
       <p:sp>
@@ -7589,7 +7649,7 @@
           <a:noFill/>
         </p:spPr>
         <p:txBody>
-          <a:bodyPr wrap="square" lIns="0" rIns="0" tIns="0" bIns="0" anchor="t">
+          <a:bodyPr wrap="square" lIns="0" tIns="0" rIns="0" bIns="0" anchor="t">
             <a:spAutoFit/>
           </a:bodyPr>
           <a:lstStyle/>
@@ -7629,7 +7689,7 @@
           <a:noFill/>
         </p:spPr>
         <p:txBody>
-          <a:bodyPr wrap="square" lIns="0" rIns="0" tIns="0" bIns="0" anchor="t">
+          <a:bodyPr wrap="square" lIns="0" tIns="0" rIns="0" bIns="0" anchor="t">
             <a:spAutoFit/>
           </a:bodyPr>
           <a:lstStyle/>
@@ -7669,7 +7729,7 @@
           <a:noFill/>
         </p:spPr>
         <p:txBody>
-          <a:bodyPr wrap="square" lIns="0" rIns="0" tIns="0" bIns="0" anchor="t">
+          <a:bodyPr wrap="square" lIns="0" tIns="0" rIns="0" bIns="0" anchor="t">
             <a:spAutoFit/>
           </a:bodyPr>
           <a:lstStyle/>
@@ -7709,7 +7769,7 @@
           <a:noFill/>
         </p:spPr>
         <p:txBody>
-          <a:bodyPr wrap="square" lIns="0" rIns="0" tIns="0" bIns="0" anchor="t">
+          <a:bodyPr wrap="square" lIns="0" tIns="0" rIns="0" bIns="0" anchor="t">
             <a:spAutoFit/>
           </a:bodyPr>
           <a:lstStyle/>
@@ -7770,7 +7830,7 @@
           <a:noFill/>
         </p:spPr>
         <p:txBody>
-          <a:bodyPr wrap="square" lIns="0" rIns="0" tIns="0" bIns="0" anchor="t">
+          <a:bodyPr wrap="square" lIns="0" tIns="0" rIns="0" bIns="0" anchor="t">
             <a:spAutoFit/>
           </a:bodyPr>
           <a:lstStyle/>
@@ -7818,9 +7878,11 @@
           <a:effectLst/>
         </p:spPr>
         <p:txBody>
-          <a:bodyPr rtlCol="0" anchor="ctr" wrap="square"/>
-          <a:lstStyle/>
-          <a:p/>
+          <a:bodyPr wrap="square" rtlCol="0" anchor="ctr"/>
+          <a:lstStyle/>
+          <a:p>
+            <a:endParaRPr/>
+          </a:p>
         </p:txBody>
       </p:sp>
       <p:sp>
@@ -7846,9 +7908,11 @@
           <a:effectLst/>
         </p:spPr>
         <p:txBody>
-          <a:bodyPr rtlCol="0" anchor="ctr" wrap="square"/>
-          <a:lstStyle/>
-          <a:p/>
+          <a:bodyPr wrap="square" rtlCol="0" anchor="ctr"/>
+          <a:lstStyle/>
+          <a:p>
+            <a:endParaRPr/>
+          </a:p>
         </p:txBody>
       </p:sp>
       <p:sp>
@@ -7868,7 +7932,7 @@
           <a:noFill/>
         </p:spPr>
         <p:txBody>
-          <a:bodyPr wrap="square" lIns="0" rIns="0" tIns="0" bIns="0" anchor="t">
+          <a:bodyPr wrap="square" lIns="0" tIns="0" rIns="0" bIns="0" anchor="t">
             <a:spAutoFit/>
           </a:bodyPr>
           <a:lstStyle/>
@@ -7908,7 +7972,7 @@
           <a:noFill/>
         </p:spPr>
         <p:txBody>
-          <a:bodyPr wrap="square" lIns="0" rIns="0" tIns="0" bIns="0" anchor="t">
+          <a:bodyPr wrap="square" lIns="0" tIns="0" rIns="0" bIns="0" anchor="t">
             <a:spAutoFit/>
           </a:bodyPr>
           <a:lstStyle/>
@@ -7948,7 +8012,7 @@
           <a:noFill/>
         </p:spPr>
         <p:txBody>
-          <a:bodyPr wrap="square" lIns="0" rIns="0" tIns="0" bIns="0" anchor="t">
+          <a:bodyPr wrap="square" lIns="0" tIns="0" rIns="0" bIns="0" anchor="t">
             <a:spAutoFit/>
           </a:bodyPr>
           <a:lstStyle/>
@@ -7988,7 +8052,7 @@
           <a:noFill/>
         </p:spPr>
         <p:txBody>
-          <a:bodyPr wrap="square" lIns="0" rIns="0" tIns="0" bIns="0" anchor="t">
+          <a:bodyPr wrap="square" lIns="0" tIns="0" rIns="0" bIns="0" anchor="t">
             <a:spAutoFit/>
           </a:bodyPr>
           <a:lstStyle/>
@@ -8049,7 +8113,7 @@
           <a:noFill/>
         </p:spPr>
         <p:txBody>
-          <a:bodyPr wrap="square" lIns="0" rIns="0" tIns="0" bIns="0" anchor="t">
+          <a:bodyPr wrap="square" lIns="0" tIns="0" rIns="0" bIns="0" anchor="t">
             <a:spAutoFit/>
           </a:bodyPr>
           <a:lstStyle/>
@@ -8089,7 +8153,7 @@
           <a:noFill/>
         </p:spPr>
         <p:txBody>
-          <a:bodyPr wrap="square" lIns="0" rIns="0" tIns="0" bIns="0" anchor="t">
+          <a:bodyPr wrap="square" lIns="0" tIns="0" rIns="0" bIns="0" anchor="t">
             <a:spAutoFit/>
           </a:bodyPr>
           <a:lstStyle/>
@@ -8100,7 +8164,7 @@
               </a:lnSpc>
             </a:pPr>
             <a:r>
-              <a:rPr sz="800" b="1" i="0" dirty="0" spc="120">
+              <a:rPr sz="800" b="1" i="0" spc="120" dirty="0">
                 <a:solidFill>
                   <a:srgbClr val="008173"/>
                 </a:solidFill>
@@ -8135,9 +8199,11 @@
           <a:effectLst/>
         </p:spPr>
         <p:txBody>
-          <a:bodyPr rtlCol="0" anchor="ctr" wrap="square"/>
-          <a:lstStyle/>
-          <a:p/>
+          <a:bodyPr wrap="square" rtlCol="0" anchor="ctr"/>
+          <a:lstStyle/>
+          <a:p>
+            <a:endParaRPr/>
+          </a:p>
         </p:txBody>
       </p:sp>
       <p:sp>
@@ -8157,7 +8223,7 @@
           <a:noFill/>
         </p:spPr>
         <p:txBody>
-          <a:bodyPr wrap="square" lIns="0" rIns="0" tIns="0" bIns="0" anchor="t">
+          <a:bodyPr wrap="square" lIns="0" tIns="0" rIns="0" bIns="0" anchor="t">
             <a:spAutoFit/>
           </a:bodyPr>
           <a:lstStyle/>
@@ -8203,9 +8269,11 @@
           <a:effectLst/>
         </p:spPr>
         <p:txBody>
-          <a:bodyPr rtlCol="0" anchor="ctr" wrap="square"/>
-          <a:lstStyle/>
-          <a:p/>
+          <a:bodyPr wrap="square" rtlCol="0" anchor="ctr"/>
+          <a:lstStyle/>
+          <a:p>
+            <a:endParaRPr/>
+          </a:p>
         </p:txBody>
       </p:sp>
       <p:sp>
@@ -8225,7 +8293,7 @@
           <a:noFill/>
         </p:spPr>
         <p:txBody>
-          <a:bodyPr wrap="square" lIns="0" rIns="0" tIns="0" bIns="0" anchor="t">
+          <a:bodyPr wrap="square" lIns="0" tIns="0" rIns="0" bIns="0" anchor="t">
             <a:spAutoFit/>
           </a:bodyPr>
           <a:lstStyle/>
@@ -8265,7 +8333,7 @@
           <a:noFill/>
         </p:spPr>
         <p:txBody>
-          <a:bodyPr wrap="square" lIns="0" rIns="0" tIns="0" bIns="0" anchor="t">
+          <a:bodyPr wrap="square" lIns="0" tIns="0" rIns="0" bIns="0" anchor="t">
             <a:spAutoFit/>
           </a:bodyPr>
           <a:lstStyle/>
@@ -8311,9 +8379,11 @@
           <a:effectLst/>
         </p:spPr>
         <p:txBody>
-          <a:bodyPr rtlCol="0" anchor="ctr" wrap="square"/>
-          <a:lstStyle/>
-          <a:p/>
+          <a:bodyPr wrap="square" rtlCol="0" anchor="ctr"/>
+          <a:lstStyle/>
+          <a:p>
+            <a:endParaRPr/>
+          </a:p>
         </p:txBody>
       </p:sp>
       <p:sp>
@@ -8333,7 +8403,7 @@
           <a:noFill/>
         </p:spPr>
         <p:txBody>
-          <a:bodyPr wrap="square" lIns="0" rIns="0" tIns="0" bIns="0" anchor="t">
+          <a:bodyPr wrap="square" lIns="0" tIns="0" rIns="0" bIns="0" anchor="t">
             <a:spAutoFit/>
           </a:bodyPr>
           <a:lstStyle/>
@@ -8379,9 +8449,11 @@
           <a:effectLst/>
         </p:spPr>
         <p:txBody>
-          <a:bodyPr rtlCol="0" anchor="ctr" wrap="square"/>
-          <a:lstStyle/>
-          <a:p/>
+          <a:bodyPr wrap="square" rtlCol="0" anchor="ctr"/>
+          <a:lstStyle/>
+          <a:p>
+            <a:endParaRPr/>
+          </a:p>
         </p:txBody>
       </p:sp>
       <p:sp>
@@ -8401,7 +8473,7 @@
           <a:noFill/>
         </p:spPr>
         <p:txBody>
-          <a:bodyPr wrap="square" lIns="0" rIns="0" tIns="0" bIns="0" anchor="t">
+          <a:bodyPr wrap="square" lIns="0" tIns="0" rIns="0" bIns="0" anchor="t">
             <a:spAutoFit/>
           </a:bodyPr>
           <a:lstStyle/>
@@ -8441,7 +8513,7 @@
           <a:noFill/>
         </p:spPr>
         <p:txBody>
-          <a:bodyPr wrap="square" lIns="0" rIns="0" tIns="0" bIns="0" anchor="t">
+          <a:bodyPr wrap="square" lIns="0" tIns="0" rIns="0" bIns="0" anchor="t">
             <a:spAutoFit/>
           </a:bodyPr>
           <a:lstStyle/>
@@ -8487,9 +8559,11 @@
           <a:effectLst/>
         </p:spPr>
         <p:txBody>
-          <a:bodyPr rtlCol="0" anchor="ctr" wrap="square"/>
-          <a:lstStyle/>
-          <a:p/>
+          <a:bodyPr wrap="square" rtlCol="0" anchor="ctr"/>
+          <a:lstStyle/>
+          <a:p>
+            <a:endParaRPr/>
+          </a:p>
         </p:txBody>
       </p:sp>
       <p:sp>
@@ -8509,7 +8583,7 @@
           <a:noFill/>
         </p:spPr>
         <p:txBody>
-          <a:bodyPr wrap="square" lIns="0" rIns="0" tIns="0" bIns="0" anchor="t">
+          <a:bodyPr wrap="square" lIns="0" tIns="0" rIns="0" bIns="0" anchor="t">
             <a:spAutoFit/>
           </a:bodyPr>
           <a:lstStyle/>
@@ -8555,9 +8629,11 @@
           <a:effectLst/>
         </p:spPr>
         <p:txBody>
-          <a:bodyPr rtlCol="0" anchor="ctr" wrap="square"/>
-          <a:lstStyle/>
-          <a:p/>
+          <a:bodyPr wrap="square" rtlCol="0" anchor="ctr"/>
+          <a:lstStyle/>
+          <a:p>
+            <a:endParaRPr/>
+          </a:p>
         </p:txBody>
       </p:sp>
       <p:sp>
@@ -8577,7 +8653,7 @@
           <a:noFill/>
         </p:spPr>
         <p:txBody>
-          <a:bodyPr wrap="square" lIns="0" rIns="0" tIns="0" bIns="0" anchor="t">
+          <a:bodyPr wrap="square" lIns="0" tIns="0" rIns="0" bIns="0" anchor="t">
             <a:spAutoFit/>
           </a:bodyPr>
           <a:lstStyle/>
@@ -8617,7 +8693,7 @@
           <a:noFill/>
         </p:spPr>
         <p:txBody>
-          <a:bodyPr wrap="square" lIns="0" rIns="0" tIns="0" bIns="0" anchor="t">
+          <a:bodyPr wrap="square" lIns="0" tIns="0" rIns="0" bIns="0" anchor="t">
             <a:spAutoFit/>
           </a:bodyPr>
           <a:lstStyle/>
@@ -8684,9 +8760,11 @@
           <a:effectLst/>
         </p:spPr>
         <p:txBody>
-          <a:bodyPr rtlCol="0" anchor="ctr" wrap="square"/>
-          <a:lstStyle/>
-          <a:p/>
+          <a:bodyPr wrap="square" rtlCol="0" anchor="ctr"/>
+          <a:lstStyle/>
+          <a:p>
+            <a:endParaRPr/>
+          </a:p>
         </p:txBody>
       </p:sp>
       <p:sp>
@@ -8706,7 +8784,7 @@
           <a:noFill/>
         </p:spPr>
         <p:txBody>
-          <a:bodyPr wrap="none" lIns="0" rIns="0" tIns="0" bIns="0" anchor="t">
+          <a:bodyPr wrap="none" lIns="0" tIns="0" rIns="0" bIns="0" anchor="t">
             <a:spAutoFit/>
           </a:bodyPr>
           <a:lstStyle/>
@@ -8752,9 +8830,11 @@
           <a:effectLst/>
         </p:spPr>
         <p:txBody>
-          <a:bodyPr rtlCol="0" anchor="ctr" wrap="square"/>
-          <a:lstStyle/>
-          <a:p/>
+          <a:bodyPr wrap="square" rtlCol="0" anchor="ctr"/>
+          <a:lstStyle/>
+          <a:p>
+            <a:endParaRPr/>
+          </a:p>
         </p:txBody>
       </p:sp>
       <p:sp>
@@ -8774,7 +8854,7 @@
           <a:noFill/>
         </p:spPr>
         <p:txBody>
-          <a:bodyPr wrap="none" lIns="0" rIns="0" tIns="0" bIns="0" anchor="t">
+          <a:bodyPr wrap="none" lIns="0" tIns="0" rIns="0" bIns="0" anchor="t">
             <a:spAutoFit/>
           </a:bodyPr>
           <a:lstStyle/>
@@ -8820,9 +8900,11 @@
           <a:effectLst/>
         </p:spPr>
         <p:txBody>
-          <a:bodyPr rtlCol="0" anchor="ctr" wrap="square"/>
-          <a:lstStyle/>
-          <a:p/>
+          <a:bodyPr wrap="square" rtlCol="0" anchor="ctr"/>
+          <a:lstStyle/>
+          <a:p>
+            <a:endParaRPr/>
+          </a:p>
         </p:txBody>
       </p:sp>
       <p:sp>
@@ -8842,7 +8924,7 @@
           <a:noFill/>
         </p:spPr>
         <p:txBody>
-          <a:bodyPr wrap="none" lIns="0" rIns="0" tIns="0" bIns="0" anchor="t">
+          <a:bodyPr wrap="none" lIns="0" tIns="0" rIns="0" bIns="0" anchor="t">
             <a:spAutoFit/>
           </a:bodyPr>
           <a:lstStyle/>
@@ -8882,7 +8964,7 @@
           <a:noFill/>
         </p:spPr>
         <p:txBody>
-          <a:bodyPr wrap="none" lIns="0" rIns="0" tIns="0" bIns="0" anchor="t">
+          <a:bodyPr wrap="none" lIns="0" tIns="0" rIns="0" bIns="0" anchor="t">
             <a:spAutoFit/>
           </a:bodyPr>
           <a:lstStyle/>
@@ -8922,7 +9004,7 @@
           <a:noFill/>
         </p:spPr>
         <p:txBody>
-          <a:bodyPr wrap="none" lIns="0" rIns="0" tIns="0" bIns="0" anchor="t">
+          <a:bodyPr wrap="none" lIns="0" tIns="0" rIns="0" bIns="0" anchor="t">
             <a:spAutoFit/>
           </a:bodyPr>
           <a:lstStyle/>
@@ -8968,9 +9050,11 @@
           <a:effectLst/>
         </p:spPr>
         <p:txBody>
-          <a:bodyPr rtlCol="0" anchor="ctr" wrap="square"/>
-          <a:lstStyle/>
-          <a:p/>
+          <a:bodyPr wrap="square" rtlCol="0" anchor="ctr"/>
+          <a:lstStyle/>
+          <a:p>
+            <a:endParaRPr/>
+          </a:p>
         </p:txBody>
       </p:sp>
       <p:cxnSp>
@@ -9011,7 +9095,7 @@
           <a:noFill/>
         </p:spPr>
         <p:txBody>
-          <a:bodyPr wrap="square" lIns="0" rIns="0" tIns="0" bIns="0" anchor="ctr">
+          <a:bodyPr wrap="square" lIns="0" tIns="0" rIns="0" bIns="0" anchor="ctr">
             <a:spAutoFit/>
           </a:bodyPr>
           <a:lstStyle/>
@@ -9051,7 +9135,7 @@
           <a:noFill/>
         </p:spPr>
         <p:txBody>
-          <a:bodyPr wrap="square" lIns="0" rIns="0" tIns="0" bIns="0" anchor="ctr">
+          <a:bodyPr wrap="square" lIns="0" tIns="0" rIns="0" bIns="0" anchor="ctr">
             <a:spAutoFit/>
           </a:bodyPr>
           <a:lstStyle/>
@@ -9091,7 +9175,7 @@
           <a:noFill/>
         </p:spPr>
         <p:txBody>
-          <a:bodyPr wrap="square" lIns="0" rIns="0" tIns="0" bIns="0" anchor="ctr">
+          <a:bodyPr wrap="square" lIns="0" tIns="0" rIns="0" bIns="0" anchor="ctr">
             <a:spAutoFit/>
           </a:bodyPr>
           <a:lstStyle/>
@@ -9152,7 +9236,7 @@
           <a:noFill/>
         </p:spPr>
         <p:txBody>
-          <a:bodyPr wrap="square" lIns="0" rIns="0" tIns="0" bIns="0" anchor="ctr">
+          <a:bodyPr wrap="square" lIns="0" tIns="0" rIns="0" bIns="0" anchor="ctr">
             <a:spAutoFit/>
           </a:bodyPr>
           <a:lstStyle/>
@@ -9192,7 +9276,7 @@
           <a:noFill/>
         </p:spPr>
         <p:txBody>
-          <a:bodyPr wrap="square" lIns="0" rIns="0" tIns="0" bIns="0" anchor="ctr">
+          <a:bodyPr wrap="square" lIns="0" tIns="0" rIns="0" bIns="0" anchor="ctr">
             <a:spAutoFit/>
           </a:bodyPr>
           <a:lstStyle/>
@@ -9232,7 +9316,7 @@
           <a:noFill/>
         </p:spPr>
         <p:txBody>
-          <a:bodyPr wrap="square" lIns="0" rIns="0" tIns="0" bIns="0" anchor="ctr">
+          <a:bodyPr wrap="square" lIns="0" tIns="0" rIns="0" bIns="0" anchor="ctr">
             <a:spAutoFit/>
           </a:bodyPr>
           <a:lstStyle/>
@@ -9314,7 +9398,7 @@
           <a:noFill/>
         </p:spPr>
         <p:txBody>
-          <a:bodyPr wrap="square" lIns="0" rIns="0" tIns="0" bIns="0" anchor="t">
+          <a:bodyPr wrap="square" lIns="0" tIns="0" rIns="0" bIns="0" anchor="t">
             <a:spAutoFit/>
           </a:bodyPr>
           <a:lstStyle/>
@@ -9377,9 +9461,11 @@
           <a:effectLst/>
         </p:spPr>
         <p:txBody>
-          <a:bodyPr rtlCol="0" anchor="ctr" wrap="square"/>
-          <a:lstStyle/>
-          <a:p/>
+          <a:bodyPr wrap="square" rtlCol="0" anchor="ctr"/>
+          <a:lstStyle/>
+          <a:p>
+            <a:endParaRPr/>
+          </a:p>
         </p:txBody>
       </p:sp>
       <p:sp>
@@ -9405,9 +9491,11 @@
           <a:effectLst/>
         </p:spPr>
         <p:txBody>
-          <a:bodyPr rtlCol="0" anchor="ctr" wrap="square"/>
-          <a:lstStyle/>
-          <a:p/>
+          <a:bodyPr wrap="square" rtlCol="0" anchor="ctr"/>
+          <a:lstStyle/>
+          <a:p>
+            <a:endParaRPr/>
+          </a:p>
         </p:txBody>
       </p:sp>
       <p:sp>
@@ -9427,7 +9515,7 @@
           <a:noFill/>
         </p:spPr>
         <p:txBody>
-          <a:bodyPr wrap="square" lIns="0" rIns="0" tIns="0" bIns="0" anchor="t">
+          <a:bodyPr wrap="square" lIns="0" tIns="0" rIns="0" bIns="0" anchor="t">
             <a:spAutoFit/>
           </a:bodyPr>
           <a:lstStyle/>
@@ -9459,7 +9547,7 @@
 </file>
 
 <file path=ppt/slides/slide12.xml><?xml version="1.0" encoding="utf-8"?>
-<p:sld xmlns:a="http://schemas.openxmlformats.org/drawingml/2006/main" xmlns:p="http://schemas.openxmlformats.org/presentationml/2006/main" xmlns:r="http://schemas.openxmlformats.org/officeDocument/2006/relationships">
+<p:sld xmlns:a="http://schemas.openxmlformats.org/drawingml/2006/main" xmlns:r="http://schemas.openxmlformats.org/officeDocument/2006/relationships" xmlns:p="http://schemas.openxmlformats.org/presentationml/2006/main">
   <p:cSld>
     <p:spTree>
       <p:nvGrpSpPr>
@@ -9467,7 +9555,14 @@
         <p:cNvGrpSpPr/>
         <p:nvPr/>
       </p:nvGrpSpPr>
-      <p:grpSpPr/>
+      <p:grpSpPr>
+        <a:xfrm>
+          <a:off x="0" y="0"/>
+          <a:ext cx="0" cy="0"/>
+          <a:chOff x="0" y="0"/>
+          <a:chExt cx="0" cy="0"/>
+        </a:xfrm>
+      </p:grpSpPr>
       <p:sp>
         <p:nvSpPr>
           <p:cNvPr id="2" name="TextBox 1"/>
@@ -9485,7 +9580,7 @@
           <a:noFill/>
         </p:spPr>
         <p:txBody>
-          <a:bodyPr wrap="square" lIns="0" rIns="0" tIns="0" bIns="0" anchor="t">
+          <a:bodyPr wrap="square" lIns="0" tIns="0" rIns="0" bIns="0" anchor="t">
             <a:spAutoFit/>
           </a:bodyPr>
           <a:lstStyle/>
@@ -9496,7 +9591,7 @@
               </a:lnSpc>
             </a:pPr>
             <a:r>
-              <a:rPr sz="800" b="1" i="0" dirty="0" spc="140">
+              <a:rPr sz="800" b="1" i="0" spc="140" dirty="0">
                 <a:solidFill>
                   <a:srgbClr val="008173"/>
                 </a:solidFill>
@@ -9525,7 +9620,7 @@
           <a:noFill/>
         </p:spPr>
         <p:txBody>
-          <a:bodyPr wrap="square" lIns="0" rIns="0" tIns="0" bIns="0" anchor="t">
+          <a:bodyPr wrap="square" lIns="0" tIns="0" rIns="0" bIns="0" anchor="t">
             <a:spAutoFit/>
           </a:bodyPr>
           <a:lstStyle/>
@@ -9565,7 +9660,7 @@
           <a:noFill/>
         </p:spPr>
         <p:txBody>
-          <a:bodyPr wrap="square" lIns="0" rIns="0" tIns="0" bIns="0" anchor="t">
+          <a:bodyPr wrap="square" lIns="0" tIns="0" rIns="0" bIns="0" anchor="t">
             <a:spAutoFit/>
           </a:bodyPr>
           <a:lstStyle/>
@@ -9605,7 +9700,7 @@
           <a:noFill/>
         </p:spPr>
         <p:txBody>
-          <a:bodyPr wrap="square" lIns="0" rIns="0" tIns="0" bIns="0" anchor="t">
+          <a:bodyPr wrap="square" lIns="0" tIns="0" rIns="0" bIns="0" anchor="t">
             <a:spAutoFit/>
           </a:bodyPr>
           <a:lstStyle/>
@@ -9645,7 +9740,7 @@
           <a:noFill/>
         </p:spPr>
         <p:txBody>
-          <a:bodyPr wrap="square" lIns="0" rIns="0" tIns="0" bIns="0" anchor="t">
+          <a:bodyPr wrap="square" lIns="0" tIns="0" rIns="0" bIns="0" anchor="t">
             <a:spAutoFit/>
           </a:bodyPr>
           <a:lstStyle/>
@@ -9691,9 +9786,11 @@
           <a:effectLst/>
         </p:spPr>
         <p:txBody>
-          <a:bodyPr rtlCol="0" anchor="ctr" wrap="square"/>
-          <a:lstStyle/>
-          <a:p/>
+          <a:bodyPr wrap="square" rtlCol="0" anchor="ctr"/>
+          <a:lstStyle/>
+          <a:p>
+            <a:endParaRPr/>
+          </a:p>
         </p:txBody>
       </p:sp>
       <p:sp>
@@ -9713,7 +9810,7 @@
           <a:noFill/>
         </p:spPr>
         <p:txBody>
-          <a:bodyPr wrap="none" lIns="0" rIns="0" tIns="0" bIns="0" anchor="t">
+          <a:bodyPr wrap="none" lIns="0" tIns="0" rIns="0" bIns="0" anchor="t">
             <a:spAutoFit/>
           </a:bodyPr>
           <a:lstStyle/>
@@ -9753,7 +9850,7 @@
           <a:noFill/>
         </p:spPr>
         <p:txBody>
-          <a:bodyPr wrap="none" lIns="0" rIns="0" tIns="0" bIns="0" anchor="t">
+          <a:bodyPr wrap="none" lIns="0" tIns="0" rIns="0" bIns="0" anchor="t">
             <a:spAutoFit/>
           </a:bodyPr>
           <a:lstStyle/>
@@ -9793,7 +9890,7 @@
           <a:noFill/>
         </p:spPr>
         <p:txBody>
-          <a:bodyPr wrap="none" lIns="0" rIns="0" tIns="0" bIns="0" anchor="t">
+          <a:bodyPr wrap="none" lIns="0" tIns="0" rIns="0" bIns="0" anchor="t">
             <a:spAutoFit/>
           </a:bodyPr>
           <a:lstStyle/>
@@ -9833,7 +9930,7 @@
           <a:noFill/>
         </p:spPr>
         <p:txBody>
-          <a:bodyPr wrap="none" lIns="0" rIns="0" tIns="0" bIns="0" anchor="t">
+          <a:bodyPr wrap="none" lIns="0" tIns="0" rIns="0" bIns="0" anchor="t">
             <a:spAutoFit/>
           </a:bodyPr>
           <a:lstStyle/>
@@ -9873,7 +9970,7 @@
           <a:noFill/>
         </p:spPr>
         <p:txBody>
-          <a:bodyPr wrap="none" lIns="0" rIns="0" tIns="0" bIns="0" anchor="t">
+          <a:bodyPr wrap="none" lIns="0" tIns="0" rIns="0" bIns="0" anchor="t">
             <a:spAutoFit/>
           </a:bodyPr>
           <a:lstStyle/>
@@ -9913,7 +10010,7 @@
           <a:noFill/>
         </p:spPr>
         <p:txBody>
-          <a:bodyPr wrap="none" lIns="0" rIns="0" tIns="0" bIns="0" anchor="t">
+          <a:bodyPr wrap="none" lIns="0" tIns="0" rIns="0" bIns="0" anchor="t">
             <a:spAutoFit/>
           </a:bodyPr>
           <a:lstStyle/>
@@ -9959,9 +10056,11 @@
           <a:effectLst/>
         </p:spPr>
         <p:txBody>
-          <a:bodyPr rtlCol="0" anchor="ctr" wrap="square"/>
-          <a:lstStyle/>
-          <a:p/>
+          <a:bodyPr wrap="square" rtlCol="0" anchor="ctr"/>
+          <a:lstStyle/>
+          <a:p>
+            <a:endParaRPr/>
+          </a:p>
         </p:txBody>
       </p:sp>
       <p:cxnSp>
@@ -10002,7 +10101,7 @@
           <a:noFill/>
         </p:spPr>
         <p:txBody>
-          <a:bodyPr wrap="square" lIns="0" rIns="0" tIns="0" bIns="0" anchor="ctr">
+          <a:bodyPr wrap="square" lIns="0" tIns="0" rIns="0" bIns="0" anchor="ctr">
             <a:spAutoFit/>
           </a:bodyPr>
           <a:lstStyle/>
@@ -10042,7 +10141,7 @@
           <a:noFill/>
         </p:spPr>
         <p:txBody>
-          <a:bodyPr wrap="square" lIns="0" rIns="0" tIns="0" bIns="0" anchor="ctr">
+          <a:bodyPr wrap="square" lIns="0" tIns="0" rIns="0" bIns="0" anchor="ctr">
             <a:spAutoFit/>
           </a:bodyPr>
           <a:lstStyle/>
@@ -10082,7 +10181,7 @@
           <a:noFill/>
         </p:spPr>
         <p:txBody>
-          <a:bodyPr wrap="square" lIns="0" rIns="0" tIns="0" bIns="0" anchor="ctr">
+          <a:bodyPr wrap="square" lIns="0" tIns="0" rIns="0" bIns="0" anchor="ctr">
             <a:spAutoFit/>
           </a:bodyPr>
           <a:lstStyle/>
@@ -10122,7 +10221,7 @@
           <a:noFill/>
         </p:spPr>
         <p:txBody>
-          <a:bodyPr wrap="square" lIns="0" rIns="0" tIns="0" bIns="0" anchor="ctr">
+          <a:bodyPr wrap="square" lIns="0" tIns="0" rIns="0" bIns="0" anchor="ctr">
             <a:spAutoFit/>
           </a:bodyPr>
           <a:lstStyle/>
@@ -10162,7 +10261,7 @@
           <a:noFill/>
         </p:spPr>
         <p:txBody>
-          <a:bodyPr wrap="square" lIns="0" rIns="0" tIns="0" bIns="0" anchor="ctr">
+          <a:bodyPr wrap="square" lIns="0" tIns="0" rIns="0" bIns="0" anchor="ctr">
             <a:spAutoFit/>
           </a:bodyPr>
           <a:lstStyle/>
@@ -10202,7 +10301,7 @@
           <a:noFill/>
         </p:spPr>
         <p:txBody>
-          <a:bodyPr wrap="square" lIns="0" rIns="0" tIns="0" bIns="0" anchor="ctr">
+          <a:bodyPr wrap="square" lIns="0" tIns="0" rIns="0" bIns="0" anchor="ctr">
             <a:spAutoFit/>
           </a:bodyPr>
           <a:lstStyle/>
@@ -10263,7 +10362,7 @@
           <a:noFill/>
         </p:spPr>
         <p:txBody>
-          <a:bodyPr wrap="square" lIns="0" rIns="0" tIns="0" bIns="0" anchor="ctr">
+          <a:bodyPr wrap="square" lIns="0" tIns="0" rIns="0" bIns="0" anchor="ctr">
             <a:spAutoFit/>
           </a:bodyPr>
           <a:lstStyle/>
@@ -10303,7 +10402,7 @@
           <a:noFill/>
         </p:spPr>
         <p:txBody>
-          <a:bodyPr wrap="square" lIns="0" rIns="0" tIns="0" bIns="0" anchor="ctr">
+          <a:bodyPr wrap="square" lIns="0" tIns="0" rIns="0" bIns="0" anchor="ctr">
             <a:spAutoFit/>
           </a:bodyPr>
           <a:lstStyle/>
@@ -10343,7 +10442,7 @@
           <a:noFill/>
         </p:spPr>
         <p:txBody>
-          <a:bodyPr wrap="square" lIns="0" rIns="0" tIns="0" bIns="0" anchor="ctr">
+          <a:bodyPr wrap="square" lIns="0" tIns="0" rIns="0" bIns="0" anchor="ctr">
             <a:spAutoFit/>
           </a:bodyPr>
           <a:lstStyle/>
@@ -10383,7 +10482,7 @@
           <a:noFill/>
         </p:spPr>
         <p:txBody>
-          <a:bodyPr wrap="square" lIns="0" rIns="0" tIns="0" bIns="0" anchor="ctr">
+          <a:bodyPr wrap="square" lIns="0" tIns="0" rIns="0" bIns="0" anchor="ctr">
             <a:spAutoFit/>
           </a:bodyPr>
           <a:lstStyle/>
@@ -10423,7 +10522,7 @@
           <a:noFill/>
         </p:spPr>
         <p:txBody>
-          <a:bodyPr wrap="square" lIns="0" rIns="0" tIns="0" bIns="0" anchor="ctr">
+          <a:bodyPr wrap="square" lIns="0" tIns="0" rIns="0" bIns="0" anchor="ctr">
             <a:spAutoFit/>
           </a:bodyPr>
           <a:lstStyle/>
@@ -10463,7 +10562,7 @@
           <a:noFill/>
         </p:spPr>
         <p:txBody>
-          <a:bodyPr wrap="square" lIns="0" rIns="0" tIns="0" bIns="0" anchor="ctr">
+          <a:bodyPr wrap="square" lIns="0" tIns="0" rIns="0" bIns="0" anchor="ctr">
             <a:spAutoFit/>
           </a:bodyPr>
           <a:lstStyle/>
@@ -10509,9 +10608,11 @@
           <a:effectLst/>
         </p:spPr>
         <p:txBody>
-          <a:bodyPr rtlCol="0" anchor="ctr" wrap="square"/>
-          <a:lstStyle/>
-          <a:p/>
+          <a:bodyPr wrap="square" rtlCol="0" anchor="ctr"/>
+          <a:lstStyle/>
+          <a:p>
+            <a:endParaRPr/>
+          </a:p>
         </p:txBody>
       </p:sp>
       <p:cxnSp>
@@ -10552,7 +10653,7 @@
           <a:noFill/>
         </p:spPr>
         <p:txBody>
-          <a:bodyPr wrap="square" lIns="0" rIns="0" tIns="0" bIns="0" anchor="ctr">
+          <a:bodyPr wrap="square" lIns="0" tIns="0" rIns="0" bIns="0" anchor="ctr">
             <a:spAutoFit/>
           </a:bodyPr>
           <a:lstStyle/>
@@ -10592,7 +10693,7 @@
           <a:noFill/>
         </p:spPr>
         <p:txBody>
-          <a:bodyPr wrap="square" lIns="0" rIns="0" tIns="0" bIns="0" anchor="ctr">
+          <a:bodyPr wrap="square" lIns="0" tIns="0" rIns="0" bIns="0" anchor="ctr">
             <a:spAutoFit/>
           </a:bodyPr>
           <a:lstStyle/>
@@ -10632,7 +10733,7 @@
           <a:noFill/>
         </p:spPr>
         <p:txBody>
-          <a:bodyPr wrap="square" lIns="0" rIns="0" tIns="0" bIns="0" anchor="ctr">
+          <a:bodyPr wrap="square" lIns="0" tIns="0" rIns="0" bIns="0" anchor="ctr">
             <a:spAutoFit/>
           </a:bodyPr>
           <a:lstStyle/>
@@ -10672,7 +10773,7 @@
           <a:noFill/>
         </p:spPr>
         <p:txBody>
-          <a:bodyPr wrap="square" lIns="0" rIns="0" tIns="0" bIns="0" anchor="ctr">
+          <a:bodyPr wrap="square" lIns="0" tIns="0" rIns="0" bIns="0" anchor="ctr">
             <a:spAutoFit/>
           </a:bodyPr>
           <a:lstStyle/>
@@ -10712,7 +10813,7 @@
           <a:noFill/>
         </p:spPr>
         <p:txBody>
-          <a:bodyPr wrap="square" lIns="0" rIns="0" tIns="0" bIns="0" anchor="ctr">
+          <a:bodyPr wrap="square" lIns="0" tIns="0" rIns="0" bIns="0" anchor="ctr">
             <a:spAutoFit/>
           </a:bodyPr>
           <a:lstStyle/>
@@ -10752,7 +10853,7 @@
           <a:noFill/>
         </p:spPr>
         <p:txBody>
-          <a:bodyPr wrap="square" lIns="0" rIns="0" tIns="0" bIns="0" anchor="ctr">
+          <a:bodyPr wrap="square" lIns="0" tIns="0" rIns="0" bIns="0" anchor="ctr">
             <a:spAutoFit/>
           </a:bodyPr>
           <a:lstStyle/>
@@ -10813,7 +10914,7 @@
           <a:noFill/>
         </p:spPr>
         <p:txBody>
-          <a:bodyPr wrap="square" lIns="0" rIns="0" tIns="0" bIns="0" anchor="ctr">
+          <a:bodyPr wrap="square" lIns="0" tIns="0" rIns="0" bIns="0" anchor="ctr">
             <a:spAutoFit/>
           </a:bodyPr>
           <a:lstStyle/>
@@ -10853,7 +10954,7 @@
           <a:noFill/>
         </p:spPr>
         <p:txBody>
-          <a:bodyPr wrap="square" lIns="0" rIns="0" tIns="0" bIns="0" anchor="ctr">
+          <a:bodyPr wrap="square" lIns="0" tIns="0" rIns="0" bIns="0" anchor="ctr">
             <a:spAutoFit/>
           </a:bodyPr>
           <a:lstStyle/>
@@ -10893,7 +10994,7 @@
           <a:noFill/>
         </p:spPr>
         <p:txBody>
-          <a:bodyPr wrap="square" lIns="0" rIns="0" tIns="0" bIns="0" anchor="ctr">
+          <a:bodyPr wrap="square" lIns="0" tIns="0" rIns="0" bIns="0" anchor="ctr">
             <a:spAutoFit/>
           </a:bodyPr>
           <a:lstStyle/>
@@ -10933,7 +11034,7 @@
           <a:noFill/>
         </p:spPr>
         <p:txBody>
-          <a:bodyPr wrap="square" lIns="0" rIns="0" tIns="0" bIns="0" anchor="ctr">
+          <a:bodyPr wrap="square" lIns="0" tIns="0" rIns="0" bIns="0" anchor="ctr">
             <a:spAutoFit/>
           </a:bodyPr>
           <a:lstStyle/>
@@ -10973,7 +11074,7 @@
           <a:noFill/>
         </p:spPr>
         <p:txBody>
-          <a:bodyPr wrap="square" lIns="0" rIns="0" tIns="0" bIns="0" anchor="ctr">
+          <a:bodyPr wrap="square" lIns="0" tIns="0" rIns="0" bIns="0" anchor="ctr">
             <a:spAutoFit/>
           </a:bodyPr>
           <a:lstStyle/>
@@ -11013,7 +11114,7 @@
           <a:noFill/>
         </p:spPr>
         <p:txBody>
-          <a:bodyPr wrap="square" lIns="0" rIns="0" tIns="0" bIns="0" anchor="ctr">
+          <a:bodyPr wrap="square" lIns="0" tIns="0" rIns="0" bIns="0" anchor="ctr">
             <a:spAutoFit/>
           </a:bodyPr>
           <a:lstStyle/>
@@ -11059,9 +11160,11 @@
           <a:effectLst/>
         </p:spPr>
         <p:txBody>
-          <a:bodyPr rtlCol="0" anchor="ctr" wrap="square"/>
-          <a:lstStyle/>
-          <a:p/>
+          <a:bodyPr wrap="square" rtlCol="0" anchor="ctr"/>
+          <a:lstStyle/>
+          <a:p>
+            <a:endParaRPr/>
+          </a:p>
         </p:txBody>
       </p:sp>
       <p:cxnSp>
@@ -11102,7 +11205,7 @@
           <a:noFill/>
         </p:spPr>
         <p:txBody>
-          <a:bodyPr wrap="square" lIns="0" rIns="0" tIns="0" bIns="0" anchor="ctr">
+          <a:bodyPr wrap="square" lIns="0" tIns="0" rIns="0" bIns="0" anchor="ctr">
             <a:spAutoFit/>
           </a:bodyPr>
           <a:lstStyle/>
@@ -11142,7 +11245,7 @@
           <a:noFill/>
         </p:spPr>
         <p:txBody>
-          <a:bodyPr wrap="square" lIns="0" rIns="0" tIns="0" bIns="0" anchor="ctr">
+          <a:bodyPr wrap="square" lIns="0" tIns="0" rIns="0" bIns="0" anchor="ctr">
             <a:spAutoFit/>
           </a:bodyPr>
           <a:lstStyle/>
@@ -11182,7 +11285,7 @@
           <a:noFill/>
         </p:spPr>
         <p:txBody>
-          <a:bodyPr wrap="square" lIns="0" rIns="0" tIns="0" bIns="0" anchor="ctr">
+          <a:bodyPr wrap="square" lIns="0" tIns="0" rIns="0" bIns="0" anchor="ctr">
             <a:spAutoFit/>
           </a:bodyPr>
           <a:lstStyle/>
@@ -11222,7 +11325,7 @@
           <a:noFill/>
         </p:spPr>
         <p:txBody>
-          <a:bodyPr wrap="square" lIns="0" rIns="0" tIns="0" bIns="0" anchor="ctr">
+          <a:bodyPr wrap="square" lIns="0" tIns="0" rIns="0" bIns="0" anchor="ctr">
             <a:spAutoFit/>
           </a:bodyPr>
           <a:lstStyle/>
@@ -11262,7 +11365,7 @@
           <a:noFill/>
         </p:spPr>
         <p:txBody>
-          <a:bodyPr wrap="square" lIns="0" rIns="0" tIns="0" bIns="0" anchor="ctr">
+          <a:bodyPr wrap="square" lIns="0" tIns="0" rIns="0" bIns="0" anchor="ctr">
             <a:spAutoFit/>
           </a:bodyPr>
           <a:lstStyle/>
@@ -11302,7 +11405,7 @@
           <a:noFill/>
         </p:spPr>
         <p:txBody>
-          <a:bodyPr wrap="square" lIns="0" rIns="0" tIns="0" bIns="0" anchor="ctr">
+          <a:bodyPr wrap="square" lIns="0" tIns="0" rIns="0" bIns="0" anchor="ctr">
             <a:spAutoFit/>
           </a:bodyPr>
           <a:lstStyle/>
@@ -11447,7 +11550,7 @@
           <a:noFill/>
         </p:spPr>
         <p:txBody>
-          <a:bodyPr wrap="square" lIns="0" rIns="0" tIns="0" bIns="0" anchor="t">
+          <a:bodyPr wrap="square" lIns="0" tIns="0" rIns="0" bIns="0" anchor="t">
             <a:spAutoFit/>
           </a:bodyPr>
           <a:lstStyle/>
@@ -11495,9 +11598,11 @@
           <a:effectLst/>
         </p:spPr>
         <p:txBody>
-          <a:bodyPr rtlCol="0" anchor="ctr" wrap="square"/>
-          <a:lstStyle/>
-          <a:p/>
+          <a:bodyPr wrap="square" rtlCol="0" anchor="ctr"/>
+          <a:lstStyle/>
+          <a:p>
+            <a:endParaRPr/>
+          </a:p>
         </p:txBody>
       </p:sp>
       <p:sp>
@@ -11517,7 +11622,7 @@
           <a:noFill/>
         </p:spPr>
         <p:txBody>
-          <a:bodyPr wrap="square" lIns="0" rIns="0" tIns="0" bIns="0" anchor="ctr">
+          <a:bodyPr wrap="square" lIns="0" tIns="0" rIns="0" bIns="0" anchor="ctr">
             <a:spAutoFit/>
           </a:bodyPr>
           <a:lstStyle/>
@@ -11557,7 +11662,7 @@
           <a:noFill/>
         </p:spPr>
         <p:txBody>
-          <a:bodyPr wrap="square" lIns="0" rIns="0" tIns="0" bIns="0" anchor="ctr">
+          <a:bodyPr wrap="square" lIns="0" tIns="0" rIns="0" bIns="0" anchor="ctr">
             <a:spAutoFit/>
           </a:bodyPr>
           <a:lstStyle/>
@@ -11605,9 +11710,11 @@
           <a:effectLst/>
         </p:spPr>
         <p:txBody>
-          <a:bodyPr rtlCol="0" anchor="ctr" wrap="square"/>
-          <a:lstStyle/>
-          <a:p/>
+          <a:bodyPr wrap="square" rtlCol="0" anchor="ctr"/>
+          <a:lstStyle/>
+          <a:p>
+            <a:endParaRPr/>
+          </a:p>
         </p:txBody>
       </p:sp>
       <p:sp>
@@ -11627,7 +11734,7 @@
           <a:noFill/>
         </p:spPr>
         <p:txBody>
-          <a:bodyPr wrap="square" lIns="0" rIns="0" tIns="0" bIns="0" anchor="ctr">
+          <a:bodyPr wrap="square" lIns="0" tIns="0" rIns="0" bIns="0" anchor="ctr">
             <a:spAutoFit/>
           </a:bodyPr>
           <a:lstStyle/>
@@ -11667,7 +11774,7 @@
           <a:noFill/>
         </p:spPr>
         <p:txBody>
-          <a:bodyPr wrap="square" lIns="0" rIns="0" tIns="0" bIns="0" anchor="ctr">
+          <a:bodyPr wrap="square" lIns="0" tIns="0" rIns="0" bIns="0" anchor="ctr">
             <a:spAutoFit/>
           </a:bodyPr>
           <a:lstStyle/>
@@ -11715,9 +11822,11 @@
           <a:effectLst/>
         </p:spPr>
         <p:txBody>
-          <a:bodyPr rtlCol="0" anchor="ctr" wrap="square"/>
-          <a:lstStyle/>
-          <a:p/>
+          <a:bodyPr wrap="square" rtlCol="0" anchor="ctr"/>
+          <a:lstStyle/>
+          <a:p>
+            <a:endParaRPr/>
+          </a:p>
         </p:txBody>
       </p:sp>
       <p:sp>
@@ -11737,7 +11846,7 @@
           <a:noFill/>
         </p:spPr>
         <p:txBody>
-          <a:bodyPr wrap="square" lIns="0" rIns="0" tIns="0" bIns="0" anchor="ctr">
+          <a:bodyPr wrap="square" lIns="0" tIns="0" rIns="0" bIns="0" anchor="ctr">
             <a:spAutoFit/>
           </a:bodyPr>
           <a:lstStyle/>
@@ -11777,7 +11886,7 @@
           <a:noFill/>
         </p:spPr>
         <p:txBody>
-          <a:bodyPr wrap="square" lIns="0" rIns="0" tIns="0" bIns="0" anchor="ctr">
+          <a:bodyPr wrap="square" lIns="0" tIns="0" rIns="0" bIns="0" anchor="ctr">
             <a:spAutoFit/>
           </a:bodyPr>
           <a:lstStyle/>
@@ -11825,9 +11934,11 @@
           <a:effectLst/>
         </p:spPr>
         <p:txBody>
-          <a:bodyPr rtlCol="0" anchor="ctr" wrap="square"/>
-          <a:lstStyle/>
-          <a:p/>
+          <a:bodyPr wrap="square" rtlCol="0" anchor="ctr"/>
+          <a:lstStyle/>
+          <a:p>
+            <a:endParaRPr/>
+          </a:p>
         </p:txBody>
       </p:sp>
       <p:sp>
@@ -11869,7 +11980,7 @@
           </a:fontRef>
         </p:style>
         <p:txBody>
-          <a:bodyPr rtlCol="0" anchor="ctr" wrap="square" lIns="0" rIns="0" tIns="18288" bIns="18288"/>
+          <a:bodyPr wrap="square" lIns="0" tIns="18288" rIns="0" bIns="18288" rtlCol="0" anchor="ctr"/>
           <a:lstStyle/>
           <a:p>
             <a:pPr algn="ctr">
@@ -11907,7 +12018,7 @@
           <a:noFill/>
         </p:spPr>
         <p:txBody>
-          <a:bodyPr wrap="square" lIns="0" rIns="0" tIns="0" bIns="0" anchor="t">
+          <a:bodyPr wrap="square" lIns="0" tIns="0" rIns="0" bIns="0" anchor="t">
             <a:spAutoFit/>
           </a:bodyPr>
           <a:lstStyle/>
@@ -11947,7 +12058,7 @@
           <a:noFill/>
         </p:spPr>
         <p:txBody>
-          <a:bodyPr wrap="square" lIns="0" rIns="0" tIns="0" bIns="0" anchor="t">
+          <a:bodyPr wrap="square" lIns="0" tIns="0" rIns="0" bIns="0" anchor="t">
             <a:spAutoFit/>
           </a:bodyPr>
           <a:lstStyle/>
@@ -12012,9 +12123,11 @@
           <a:effectLst/>
         </p:spPr>
         <p:txBody>
-          <a:bodyPr rtlCol="0" anchor="ctr" wrap="square"/>
-          <a:lstStyle/>
-          <a:p/>
+          <a:bodyPr wrap="square" rtlCol="0" anchor="ctr"/>
+          <a:lstStyle/>
+          <a:p>
+            <a:endParaRPr/>
+          </a:p>
         </p:txBody>
       </p:sp>
       <p:sp>
@@ -12056,7 +12169,7 @@
           </a:fontRef>
         </p:style>
         <p:txBody>
-          <a:bodyPr rtlCol="0" anchor="ctr" wrap="square" lIns="0" rIns="0" tIns="18288" bIns="18288"/>
+          <a:bodyPr wrap="square" lIns="0" tIns="18288" rIns="0" bIns="18288" rtlCol="0" anchor="ctr"/>
           <a:lstStyle/>
           <a:p>
             <a:pPr algn="ctr">
@@ -12094,7 +12207,7 @@
           <a:noFill/>
         </p:spPr>
         <p:txBody>
-          <a:bodyPr wrap="square" lIns="0" rIns="0" tIns="0" bIns="0" anchor="t">
+          <a:bodyPr wrap="square" lIns="0" tIns="0" rIns="0" bIns="0" anchor="t">
             <a:spAutoFit/>
           </a:bodyPr>
           <a:lstStyle/>
@@ -12134,7 +12247,7 @@
           <a:noFill/>
         </p:spPr>
         <p:txBody>
-          <a:bodyPr wrap="square" lIns="0" rIns="0" tIns="0" bIns="0" anchor="t">
+          <a:bodyPr wrap="square" lIns="0" tIns="0" rIns="0" bIns="0" anchor="t">
             <a:spAutoFit/>
           </a:bodyPr>
           <a:lstStyle/>
@@ -12199,9 +12312,11 @@
           <a:effectLst/>
         </p:spPr>
         <p:txBody>
-          <a:bodyPr rtlCol="0" anchor="ctr" wrap="square"/>
-          <a:lstStyle/>
-          <a:p/>
+          <a:bodyPr wrap="square" rtlCol="0" anchor="ctr"/>
+          <a:lstStyle/>
+          <a:p>
+            <a:endParaRPr/>
+          </a:p>
         </p:txBody>
       </p:sp>
       <p:sp>
@@ -12243,7 +12358,7 @@
           </a:fontRef>
         </p:style>
         <p:txBody>
-          <a:bodyPr rtlCol="0" anchor="ctr" wrap="square" lIns="0" rIns="0" tIns="18288" bIns="18288"/>
+          <a:bodyPr wrap="square" lIns="0" tIns="18288" rIns="0" bIns="18288" rtlCol="0" anchor="ctr"/>
           <a:lstStyle/>
           <a:p>
             <a:pPr algn="ctr">
@@ -12281,7 +12396,7 @@
           <a:noFill/>
         </p:spPr>
         <p:txBody>
-          <a:bodyPr wrap="square" lIns="0" rIns="0" tIns="0" bIns="0" anchor="t">
+          <a:bodyPr wrap="square" lIns="0" tIns="0" rIns="0" bIns="0" anchor="t">
             <a:spAutoFit/>
           </a:bodyPr>
           <a:lstStyle/>
@@ -12321,7 +12436,7 @@
           <a:noFill/>
         </p:spPr>
         <p:txBody>
-          <a:bodyPr wrap="square" lIns="0" rIns="0" tIns="0" bIns="0" anchor="t">
+          <a:bodyPr wrap="square" lIns="0" tIns="0" rIns="0" bIns="0" anchor="t">
             <a:spAutoFit/>
           </a:bodyPr>
           <a:lstStyle/>
@@ -12386,9 +12501,11 @@
           <a:effectLst/>
         </p:spPr>
         <p:txBody>
-          <a:bodyPr rtlCol="0" anchor="ctr" wrap="square"/>
-          <a:lstStyle/>
-          <a:p/>
+          <a:bodyPr wrap="square" rtlCol="0" anchor="ctr"/>
+          <a:lstStyle/>
+          <a:p>
+            <a:endParaRPr/>
+          </a:p>
         </p:txBody>
       </p:sp>
       <p:sp>
@@ -12430,7 +12547,7 @@
           </a:fontRef>
         </p:style>
         <p:txBody>
-          <a:bodyPr rtlCol="0" anchor="ctr" wrap="square" lIns="0" rIns="0" tIns="18288" bIns="18288"/>
+          <a:bodyPr wrap="square" lIns="0" tIns="18288" rIns="0" bIns="18288" rtlCol="0" anchor="ctr"/>
           <a:lstStyle/>
           <a:p>
             <a:pPr algn="ctr">
@@ -12468,7 +12585,7 @@
           <a:noFill/>
         </p:spPr>
         <p:txBody>
-          <a:bodyPr wrap="square" lIns="0" rIns="0" tIns="0" bIns="0" anchor="t">
+          <a:bodyPr wrap="square" lIns="0" tIns="0" rIns="0" bIns="0" anchor="t">
             <a:spAutoFit/>
           </a:bodyPr>
           <a:lstStyle/>
@@ -12508,7 +12625,7 @@
           <a:noFill/>
         </p:spPr>
         <p:txBody>
-          <a:bodyPr wrap="square" lIns="0" rIns="0" tIns="0" bIns="0" anchor="t">
+          <a:bodyPr wrap="square" lIns="0" tIns="0" rIns="0" bIns="0" anchor="t">
             <a:spAutoFit/>
           </a:bodyPr>
           <a:lstStyle/>
@@ -12571,9 +12688,11 @@
           <a:effectLst/>
         </p:spPr>
         <p:txBody>
-          <a:bodyPr rtlCol="0" anchor="ctr" wrap="square"/>
-          <a:lstStyle/>
-          <a:p/>
+          <a:bodyPr wrap="square" rtlCol="0" anchor="ctr"/>
+          <a:lstStyle/>
+          <a:p>
+            <a:endParaRPr/>
+          </a:p>
         </p:txBody>
       </p:sp>
       <p:sp>
@@ -12599,9 +12718,11 @@
           <a:effectLst/>
         </p:spPr>
         <p:txBody>
-          <a:bodyPr rtlCol="0" anchor="ctr" wrap="square"/>
-          <a:lstStyle/>
-          <a:p/>
+          <a:bodyPr wrap="square" rtlCol="0" anchor="ctr"/>
+          <a:lstStyle/>
+          <a:p>
+            <a:endParaRPr/>
+          </a:p>
         </p:txBody>
       </p:sp>
       <p:sp>
@@ -12621,7 +12742,7 @@
           <a:noFill/>
         </p:spPr>
         <p:txBody>
-          <a:bodyPr wrap="square" lIns="0" rIns="0" tIns="0" bIns="0" anchor="t">
+          <a:bodyPr wrap="square" lIns="0" tIns="0" rIns="0" bIns="0" anchor="t">
             <a:spAutoFit/>
           </a:bodyPr>
           <a:lstStyle/>
@@ -12653,7 +12774,7 @@
 </file>
 
 <file path=ppt/slides/slide13.xml><?xml version="1.0" encoding="utf-8"?>
-<p:sld xmlns:a="http://schemas.openxmlformats.org/drawingml/2006/main" xmlns:p="http://schemas.openxmlformats.org/presentationml/2006/main" xmlns:r="http://schemas.openxmlformats.org/officeDocument/2006/relationships">
+<p:sld xmlns:a="http://schemas.openxmlformats.org/drawingml/2006/main" xmlns:r="http://schemas.openxmlformats.org/officeDocument/2006/relationships" xmlns:p="http://schemas.openxmlformats.org/presentationml/2006/main">
   <p:cSld>
     <p:spTree>
       <p:nvGrpSpPr>
@@ -12661,7 +12782,14 @@
         <p:cNvGrpSpPr/>
         <p:nvPr/>
       </p:nvGrpSpPr>
-      <p:grpSpPr/>
+      <p:grpSpPr>
+        <a:xfrm>
+          <a:off x="0" y="0"/>
+          <a:ext cx="0" cy="0"/>
+          <a:chOff x="0" y="0"/>
+          <a:chExt cx="0" cy="0"/>
+        </a:xfrm>
+      </p:grpSpPr>
       <p:sp>
         <p:nvSpPr>
           <p:cNvPr id="2" name="TextBox 1"/>
@@ -12679,7 +12807,7 @@
           <a:noFill/>
         </p:spPr>
         <p:txBody>
-          <a:bodyPr wrap="square" lIns="0" rIns="0" tIns="0" bIns="0" anchor="t">
+          <a:bodyPr wrap="square" lIns="0" tIns="0" rIns="0" bIns="0" anchor="t">
             <a:spAutoFit/>
           </a:bodyPr>
           <a:lstStyle/>
@@ -12690,7 +12818,7 @@
               </a:lnSpc>
             </a:pPr>
             <a:r>
-              <a:rPr sz="800" b="1" i="0" dirty="0" spc="140">
+              <a:rPr sz="800" b="1" i="0" spc="140" dirty="0">
                 <a:solidFill>
                   <a:srgbClr val="008173"/>
                 </a:solidFill>
@@ -12719,7 +12847,7 @@
           <a:noFill/>
         </p:spPr>
         <p:txBody>
-          <a:bodyPr wrap="square" lIns="0" rIns="0" tIns="0" bIns="0" anchor="t">
+          <a:bodyPr wrap="square" lIns="0" tIns="0" rIns="0" bIns="0" anchor="t">
             <a:spAutoFit/>
           </a:bodyPr>
           <a:lstStyle/>
@@ -12759,7 +12887,7 @@
           <a:noFill/>
         </p:spPr>
         <p:txBody>
-          <a:bodyPr wrap="square" lIns="0" rIns="0" tIns="0" bIns="0" anchor="t">
+          <a:bodyPr wrap="square" lIns="0" tIns="0" rIns="0" bIns="0" anchor="t">
             <a:spAutoFit/>
           </a:bodyPr>
           <a:lstStyle/>
@@ -12799,7 +12927,7 @@
           <a:noFill/>
         </p:spPr>
         <p:txBody>
-          <a:bodyPr wrap="square" lIns="0" rIns="0" tIns="0" bIns="0" anchor="t">
+          <a:bodyPr wrap="square" lIns="0" tIns="0" rIns="0" bIns="0" anchor="t">
             <a:spAutoFit/>
           </a:bodyPr>
           <a:lstStyle/>
@@ -12839,7 +12967,7 @@
           <a:noFill/>
         </p:spPr>
         <p:txBody>
-          <a:bodyPr wrap="square" lIns="0" rIns="0" tIns="0" bIns="0" anchor="t">
+          <a:bodyPr wrap="square" lIns="0" tIns="0" rIns="0" bIns="0" anchor="t">
             <a:spAutoFit/>
           </a:bodyPr>
           <a:lstStyle/>
@@ -12887,9 +13015,11 @@
           <a:effectLst/>
         </p:spPr>
         <p:txBody>
-          <a:bodyPr rtlCol="0" anchor="ctr" wrap="square"/>
-          <a:lstStyle/>
-          <a:p/>
+          <a:bodyPr wrap="square" rtlCol="0" anchor="ctr"/>
+          <a:lstStyle/>
+          <a:p>
+            <a:endParaRPr/>
+          </a:p>
         </p:txBody>
       </p:sp>
       <p:sp>
@@ -12931,7 +13061,7 @@
           </a:fontRef>
         </p:style>
         <p:txBody>
-          <a:bodyPr rtlCol="0" anchor="ctr" wrap="square" lIns="0" rIns="0" tIns="18288" bIns="18288"/>
+          <a:bodyPr wrap="square" lIns="0" tIns="18288" rIns="0" bIns="18288" rtlCol="0" anchor="ctr"/>
           <a:lstStyle/>
           <a:p>
             <a:pPr algn="ctr">
@@ -12969,7 +13099,7 @@
           <a:noFill/>
         </p:spPr>
         <p:txBody>
-          <a:bodyPr wrap="square" lIns="0" rIns="0" tIns="0" bIns="0" anchor="t">
+          <a:bodyPr wrap="square" lIns="0" tIns="0" rIns="0" bIns="0" anchor="t">
             <a:spAutoFit/>
           </a:bodyPr>
           <a:lstStyle/>
@@ -13009,7 +13139,7 @@
           <a:noFill/>
         </p:spPr>
         <p:txBody>
-          <a:bodyPr wrap="square" lIns="0" rIns="0" tIns="0" bIns="0" anchor="t">
+          <a:bodyPr wrap="square" lIns="0" tIns="0" rIns="0" bIns="0" anchor="t">
             <a:spAutoFit/>
           </a:bodyPr>
           <a:lstStyle/>
@@ -13057,9 +13187,11 @@
           <a:effectLst/>
         </p:spPr>
         <p:txBody>
-          <a:bodyPr rtlCol="0" anchor="ctr" wrap="square"/>
-          <a:lstStyle/>
-          <a:p/>
+          <a:bodyPr wrap="square" rtlCol="0" anchor="ctr"/>
+          <a:lstStyle/>
+          <a:p>
+            <a:endParaRPr/>
+          </a:p>
         </p:txBody>
       </p:sp>
       <p:sp>
@@ -13101,7 +13233,7 @@
           </a:fontRef>
         </p:style>
         <p:txBody>
-          <a:bodyPr rtlCol="0" anchor="ctr" wrap="square" lIns="0" rIns="0" tIns="18288" bIns="18288"/>
+          <a:bodyPr wrap="square" lIns="0" tIns="18288" rIns="0" bIns="18288" rtlCol="0" anchor="ctr"/>
           <a:lstStyle/>
           <a:p>
             <a:pPr algn="ctr">
@@ -13139,7 +13271,7 @@
           <a:noFill/>
         </p:spPr>
         <p:txBody>
-          <a:bodyPr wrap="square" lIns="0" rIns="0" tIns="0" bIns="0" anchor="t">
+          <a:bodyPr wrap="square" lIns="0" tIns="0" rIns="0" bIns="0" anchor="t">
             <a:spAutoFit/>
           </a:bodyPr>
           <a:lstStyle/>
@@ -13179,7 +13311,7 @@
           <a:noFill/>
         </p:spPr>
         <p:txBody>
-          <a:bodyPr wrap="square" lIns="0" rIns="0" tIns="0" bIns="0" anchor="t">
+          <a:bodyPr wrap="square" lIns="0" tIns="0" rIns="0" bIns="0" anchor="t">
             <a:spAutoFit/>
           </a:bodyPr>
           <a:lstStyle/>
@@ -13227,9 +13359,11 @@
           <a:effectLst/>
         </p:spPr>
         <p:txBody>
-          <a:bodyPr rtlCol="0" anchor="ctr" wrap="square"/>
-          <a:lstStyle/>
-          <a:p/>
+          <a:bodyPr wrap="square" rtlCol="0" anchor="ctr"/>
+          <a:lstStyle/>
+          <a:p>
+            <a:endParaRPr/>
+          </a:p>
         </p:txBody>
       </p:sp>
       <p:sp>
@@ -13271,7 +13405,7 @@
           </a:fontRef>
         </p:style>
         <p:txBody>
-          <a:bodyPr rtlCol="0" anchor="ctr" wrap="square" lIns="0" rIns="0" tIns="18288" bIns="18288"/>
+          <a:bodyPr wrap="square" lIns="0" tIns="18288" rIns="0" bIns="18288" rtlCol="0" anchor="ctr"/>
           <a:lstStyle/>
           <a:p>
             <a:pPr algn="ctr">
@@ -13309,7 +13443,7 @@
           <a:noFill/>
         </p:spPr>
         <p:txBody>
-          <a:bodyPr wrap="square" lIns="0" rIns="0" tIns="0" bIns="0" anchor="t">
+          <a:bodyPr wrap="square" lIns="0" tIns="0" rIns="0" bIns="0" anchor="t">
             <a:spAutoFit/>
           </a:bodyPr>
           <a:lstStyle/>
@@ -13349,7 +13483,7 @@
           <a:noFill/>
         </p:spPr>
         <p:txBody>
-          <a:bodyPr wrap="square" lIns="0" rIns="0" tIns="0" bIns="0" anchor="t">
+          <a:bodyPr wrap="square" lIns="0" tIns="0" rIns="0" bIns="0" anchor="t">
             <a:spAutoFit/>
           </a:bodyPr>
           <a:lstStyle/>
@@ -13397,9 +13531,11 @@
           <a:effectLst/>
         </p:spPr>
         <p:txBody>
-          <a:bodyPr rtlCol="0" anchor="ctr" wrap="square"/>
-          <a:lstStyle/>
-          <a:p/>
+          <a:bodyPr wrap="square" rtlCol="0" anchor="ctr"/>
+          <a:lstStyle/>
+          <a:p>
+            <a:endParaRPr/>
+          </a:p>
         </p:txBody>
       </p:sp>
       <p:sp>
@@ -13441,7 +13577,7 @@
           </a:fontRef>
         </p:style>
         <p:txBody>
-          <a:bodyPr rtlCol="0" anchor="ctr" wrap="square" lIns="0" rIns="0" tIns="18288" bIns="18288"/>
+          <a:bodyPr wrap="square" lIns="0" tIns="18288" rIns="0" bIns="18288" rtlCol="0" anchor="ctr"/>
           <a:lstStyle/>
           <a:p>
             <a:pPr algn="ctr">
@@ -13479,7 +13615,7 @@
           <a:noFill/>
         </p:spPr>
         <p:txBody>
-          <a:bodyPr wrap="square" lIns="0" rIns="0" tIns="0" bIns="0" anchor="t">
+          <a:bodyPr wrap="square" lIns="0" tIns="0" rIns="0" bIns="0" anchor="t">
             <a:spAutoFit/>
           </a:bodyPr>
           <a:lstStyle/>
@@ -13519,7 +13655,7 @@
           <a:noFill/>
         </p:spPr>
         <p:txBody>
-          <a:bodyPr wrap="square" lIns="0" rIns="0" tIns="0" bIns="0" anchor="t">
+          <a:bodyPr wrap="square" lIns="0" tIns="0" rIns="0" bIns="0" anchor="t">
             <a:spAutoFit/>
           </a:bodyPr>
           <a:lstStyle/>
@@ -13584,9 +13720,11 @@
           <a:effectLst/>
         </p:spPr>
         <p:txBody>
-          <a:bodyPr rtlCol="0" anchor="ctr" wrap="square"/>
-          <a:lstStyle/>
-          <a:p/>
+          <a:bodyPr wrap="square" rtlCol="0" anchor="ctr"/>
+          <a:lstStyle/>
+          <a:p>
+            <a:endParaRPr/>
+          </a:p>
         </p:txBody>
       </p:sp>
       <p:sp>
@@ -13628,7 +13766,7 @@
           </a:fontRef>
         </p:style>
         <p:txBody>
-          <a:bodyPr rtlCol="0" anchor="ctr" wrap="square" lIns="0" rIns="0" tIns="18288" bIns="18288"/>
+          <a:bodyPr wrap="square" lIns="0" tIns="18288" rIns="0" bIns="18288" rtlCol="0" anchor="ctr"/>
           <a:lstStyle/>
           <a:p>
             <a:pPr algn="ctr">
@@ -13666,7 +13804,7 @@
           <a:noFill/>
         </p:spPr>
         <p:txBody>
-          <a:bodyPr wrap="square" lIns="0" rIns="0" tIns="0" bIns="0" anchor="t">
+          <a:bodyPr wrap="square" lIns="0" tIns="0" rIns="0" bIns="0" anchor="t">
             <a:spAutoFit/>
           </a:bodyPr>
           <a:lstStyle/>
@@ -13706,7 +13844,7 @@
           <a:noFill/>
         </p:spPr>
         <p:txBody>
-          <a:bodyPr wrap="square" lIns="0" rIns="0" tIns="0" bIns="0" anchor="t">
+          <a:bodyPr wrap="square" lIns="0" tIns="0" rIns="0" bIns="0" anchor="t">
             <a:spAutoFit/>
           </a:bodyPr>
           <a:lstStyle/>
@@ -13752,9 +13890,11 @@
           <a:effectLst/>
         </p:spPr>
         <p:txBody>
-          <a:bodyPr rtlCol="0" anchor="ctr" wrap="square"/>
-          <a:lstStyle/>
-          <a:p/>
+          <a:bodyPr wrap="square" rtlCol="0" anchor="ctr"/>
+          <a:lstStyle/>
+          <a:p>
+            <a:endParaRPr/>
+          </a:p>
         </p:txBody>
       </p:sp>
       <p:sp>
@@ -13774,7 +13914,7 @@
           <a:noFill/>
         </p:spPr>
         <p:txBody>
-          <a:bodyPr wrap="square" lIns="0" rIns="0" tIns="0" bIns="0" anchor="t">
+          <a:bodyPr wrap="square" lIns="0" tIns="0" rIns="0" bIns="0" anchor="t">
             <a:spAutoFit/>
           </a:bodyPr>
           <a:lstStyle/>
@@ -13785,7 +13925,7 @@
               </a:lnSpc>
             </a:pPr>
             <a:r>
-              <a:rPr sz="800" b="1" i="0" dirty="0" spc="120">
+              <a:rPr sz="800" b="1" i="0" spc="120" dirty="0">
                 <a:solidFill>
                   <a:srgbClr val="00B39F"/>
                 </a:solidFill>
@@ -13814,7 +13954,7 @@
           <a:noFill/>
         </p:spPr>
         <p:txBody>
-          <a:bodyPr wrap="square" lIns="0" rIns="0" tIns="0" bIns="0" anchor="t">
+          <a:bodyPr wrap="square" lIns="0" tIns="0" rIns="0" bIns="0" anchor="t">
             <a:spAutoFit/>
           </a:bodyPr>
           <a:lstStyle/>
@@ -13854,7 +13994,7 @@
           <a:noFill/>
         </p:spPr>
         <p:txBody>
-          <a:bodyPr wrap="square" lIns="0" rIns="0" tIns="0" bIns="0" anchor="t">
+          <a:bodyPr wrap="square" lIns="0" tIns="0" rIns="0" bIns="0" anchor="t">
             <a:spAutoFit/>
           </a:bodyPr>
           <a:lstStyle/>
@@ -13894,7 +14034,7 @@
           <a:noFill/>
         </p:spPr>
         <p:txBody>
-          <a:bodyPr wrap="square" lIns="0" rIns="0" tIns="0" bIns="0" anchor="t">
+          <a:bodyPr wrap="square" lIns="0" tIns="0" rIns="0" bIns="0" anchor="t">
             <a:spAutoFit/>
           </a:bodyPr>
           <a:lstStyle/>
@@ -13934,7 +14074,7 @@
           <a:noFill/>
         </p:spPr>
         <p:txBody>
-          <a:bodyPr wrap="square" lIns="0" rIns="0" tIns="0" bIns="0" anchor="t">
+          <a:bodyPr wrap="square" lIns="0" tIns="0" rIns="0" bIns="0" anchor="t">
             <a:spAutoFit/>
           </a:bodyPr>
           <a:lstStyle/>
@@ -13974,7 +14114,7 @@
           <a:noFill/>
         </p:spPr>
         <p:txBody>
-          <a:bodyPr wrap="square" lIns="0" rIns="0" tIns="0" bIns="0" anchor="t">
+          <a:bodyPr wrap="square" lIns="0" tIns="0" rIns="0" bIns="0" anchor="t">
             <a:spAutoFit/>
           </a:bodyPr>
           <a:lstStyle/>
@@ -14014,7 +14154,7 @@
           <a:noFill/>
         </p:spPr>
         <p:txBody>
-          <a:bodyPr wrap="square" lIns="0" rIns="0" tIns="0" bIns="0" anchor="t">
+          <a:bodyPr wrap="square" lIns="0" tIns="0" rIns="0" bIns="0" anchor="t">
             <a:spAutoFit/>
           </a:bodyPr>
           <a:lstStyle/>
@@ -14054,7 +14194,7 @@
           <a:noFill/>
         </p:spPr>
         <p:txBody>
-          <a:bodyPr wrap="square" lIns="0" rIns="0" tIns="0" bIns="0" anchor="t">
+          <a:bodyPr wrap="square" lIns="0" tIns="0" rIns="0" bIns="0" anchor="t">
             <a:spAutoFit/>
           </a:bodyPr>
           <a:lstStyle/>
@@ -14094,7 +14234,7 @@
           <a:noFill/>
         </p:spPr>
         <p:txBody>
-          <a:bodyPr wrap="square" lIns="0" rIns="0" tIns="0" bIns="0" anchor="t">
+          <a:bodyPr wrap="square" lIns="0" tIns="0" rIns="0" bIns="0" anchor="t">
             <a:spAutoFit/>
           </a:bodyPr>
           <a:lstStyle/>
@@ -14126,7 +14266,7 @@
 </file>
 
 <file path=ppt/slides/slide14.xml><?xml version="1.0" encoding="utf-8"?>
-<p:sld xmlns:a="http://schemas.openxmlformats.org/drawingml/2006/main" xmlns:p="http://schemas.openxmlformats.org/presentationml/2006/main" xmlns:r="http://schemas.openxmlformats.org/officeDocument/2006/relationships">
+<p:sld xmlns:a="http://schemas.openxmlformats.org/drawingml/2006/main" xmlns:r="http://schemas.openxmlformats.org/officeDocument/2006/relationships" xmlns:p="http://schemas.openxmlformats.org/presentationml/2006/main">
   <p:cSld>
     <p:spTree>
       <p:nvGrpSpPr>
@@ -14134,7 +14274,14 @@
         <p:cNvGrpSpPr/>
         <p:nvPr/>
       </p:nvGrpSpPr>
-      <p:grpSpPr/>
+      <p:grpSpPr>
+        <a:xfrm>
+          <a:off x="0" y="0"/>
+          <a:ext cx="0" cy="0"/>
+          <a:chOff x="0" y="0"/>
+          <a:chExt cx="0" cy="0"/>
+        </a:xfrm>
+      </p:grpSpPr>
       <p:sp>
         <p:nvSpPr>
           <p:cNvPr id="2" name="TextBox 1"/>
@@ -14152,7 +14299,7 @@
           <a:noFill/>
         </p:spPr>
         <p:txBody>
-          <a:bodyPr wrap="square" lIns="0" rIns="0" tIns="0" bIns="0" anchor="t">
+          <a:bodyPr wrap="square" lIns="0" tIns="0" rIns="0" bIns="0" anchor="t">
             <a:spAutoFit/>
           </a:bodyPr>
           <a:lstStyle/>
@@ -14163,7 +14310,7 @@
               </a:lnSpc>
             </a:pPr>
             <a:r>
-              <a:rPr sz="800" b="1" i="0" dirty="0" spc="140">
+              <a:rPr sz="800" b="1" i="0" spc="140" dirty="0">
                 <a:solidFill>
                   <a:srgbClr val="008173"/>
                 </a:solidFill>
@@ -14192,7 +14339,7 @@
           <a:noFill/>
         </p:spPr>
         <p:txBody>
-          <a:bodyPr wrap="square" lIns="0" rIns="0" tIns="0" bIns="0" anchor="t">
+          <a:bodyPr wrap="square" lIns="0" tIns="0" rIns="0" bIns="0" anchor="t">
             <a:spAutoFit/>
           </a:bodyPr>
           <a:lstStyle/>
@@ -14232,7 +14379,7 @@
           <a:noFill/>
         </p:spPr>
         <p:txBody>
-          <a:bodyPr wrap="square" lIns="0" rIns="0" tIns="0" bIns="0" anchor="t">
+          <a:bodyPr wrap="square" lIns="0" tIns="0" rIns="0" bIns="0" anchor="t">
             <a:spAutoFit/>
           </a:bodyPr>
           <a:lstStyle/>
@@ -14272,7 +14419,7 @@
           <a:noFill/>
         </p:spPr>
         <p:txBody>
-          <a:bodyPr wrap="square" lIns="0" rIns="0" tIns="0" bIns="0" anchor="t">
+          <a:bodyPr wrap="square" lIns="0" tIns="0" rIns="0" bIns="0" anchor="t">
             <a:spAutoFit/>
           </a:bodyPr>
           <a:lstStyle/>
@@ -14312,7 +14459,7 @@
           <a:noFill/>
         </p:spPr>
         <p:txBody>
-          <a:bodyPr wrap="square" lIns="0" rIns="0" tIns="0" bIns="0" anchor="t">
+          <a:bodyPr wrap="square" lIns="0" tIns="0" rIns="0" bIns="0" anchor="t">
             <a:spAutoFit/>
           </a:bodyPr>
           <a:lstStyle/>
@@ -14352,7 +14499,7 @@
           <a:noFill/>
         </p:spPr>
         <p:txBody>
-          <a:bodyPr wrap="square" lIns="0" rIns="0" tIns="0" bIns="0" anchor="t">
+          <a:bodyPr wrap="square" lIns="0" tIns="0" rIns="0" bIns="0" anchor="t">
             <a:spAutoFit/>
           </a:bodyPr>
           <a:lstStyle/>
@@ -14363,7 +14510,7 @@
               </a:lnSpc>
             </a:pPr>
             <a:r>
-              <a:rPr sz="800" b="1" i="0" dirty="0" spc="120">
+              <a:rPr sz="800" b="1" i="0" spc="120" dirty="0">
                 <a:solidFill>
                   <a:srgbClr val="008173"/>
                 </a:solidFill>
@@ -14392,7 +14539,7 @@
           <a:noFill/>
         </p:spPr>
         <p:txBody>
-          <a:bodyPr wrap="square" lIns="0" rIns="0" tIns="0" bIns="0" anchor="ctr">
+          <a:bodyPr wrap="square" lIns="0" tIns="0" rIns="0" bIns="0" anchor="ctr">
             <a:spAutoFit/>
           </a:bodyPr>
           <a:lstStyle/>
@@ -14432,7 +14579,7 @@
           <a:noFill/>
         </p:spPr>
         <p:txBody>
-          <a:bodyPr wrap="square" lIns="0" rIns="0" tIns="0" bIns="0" anchor="ctr">
+          <a:bodyPr wrap="square" lIns="0" tIns="0" rIns="0" bIns="0" anchor="ctr">
             <a:spAutoFit/>
           </a:bodyPr>
           <a:lstStyle/>
@@ -14493,7 +14640,7 @@
           <a:noFill/>
         </p:spPr>
         <p:txBody>
-          <a:bodyPr wrap="square" lIns="0" rIns="0" tIns="0" bIns="0" anchor="ctr">
+          <a:bodyPr wrap="square" lIns="0" tIns="0" rIns="0" bIns="0" anchor="ctr">
             <a:spAutoFit/>
           </a:bodyPr>
           <a:lstStyle/>
@@ -14533,7 +14680,7 @@
           <a:noFill/>
         </p:spPr>
         <p:txBody>
-          <a:bodyPr wrap="square" lIns="0" rIns="0" tIns="0" bIns="0" anchor="ctr">
+          <a:bodyPr wrap="square" lIns="0" tIns="0" rIns="0" bIns="0" anchor="ctr">
             <a:spAutoFit/>
           </a:bodyPr>
           <a:lstStyle/>
@@ -14594,7 +14741,7 @@
           <a:noFill/>
         </p:spPr>
         <p:txBody>
-          <a:bodyPr wrap="square" lIns="0" rIns="0" tIns="0" bIns="0" anchor="ctr">
+          <a:bodyPr wrap="square" lIns="0" tIns="0" rIns="0" bIns="0" anchor="ctr">
             <a:spAutoFit/>
           </a:bodyPr>
           <a:lstStyle/>
@@ -14634,7 +14781,7 @@
           <a:noFill/>
         </p:spPr>
         <p:txBody>
-          <a:bodyPr wrap="square" lIns="0" rIns="0" tIns="0" bIns="0" anchor="ctr">
+          <a:bodyPr wrap="square" lIns="0" tIns="0" rIns="0" bIns="0" anchor="ctr">
             <a:spAutoFit/>
           </a:bodyPr>
           <a:lstStyle/>
@@ -14695,7 +14842,7 @@
           <a:noFill/>
         </p:spPr>
         <p:txBody>
-          <a:bodyPr wrap="square" lIns="0" rIns="0" tIns="0" bIns="0" anchor="ctr">
+          <a:bodyPr wrap="square" lIns="0" tIns="0" rIns="0" bIns="0" anchor="ctr">
             <a:spAutoFit/>
           </a:bodyPr>
           <a:lstStyle/>
@@ -14735,7 +14882,7 @@
           <a:noFill/>
         </p:spPr>
         <p:txBody>
-          <a:bodyPr wrap="square" lIns="0" rIns="0" tIns="0" bIns="0" anchor="ctr">
+          <a:bodyPr wrap="square" lIns="0" tIns="0" rIns="0" bIns="0" anchor="ctr">
             <a:spAutoFit/>
           </a:bodyPr>
           <a:lstStyle/>
@@ -14796,7 +14943,7 @@
           <a:noFill/>
         </p:spPr>
         <p:txBody>
-          <a:bodyPr wrap="square" lIns="0" rIns="0" tIns="0" bIns="0" anchor="ctr">
+          <a:bodyPr wrap="square" lIns="0" tIns="0" rIns="0" bIns="0" anchor="ctr">
             <a:spAutoFit/>
           </a:bodyPr>
           <a:lstStyle/>
@@ -14836,7 +14983,7 @@
           <a:noFill/>
         </p:spPr>
         <p:txBody>
-          <a:bodyPr wrap="square" lIns="0" rIns="0" tIns="0" bIns="0" anchor="ctr">
+          <a:bodyPr wrap="square" lIns="0" tIns="0" rIns="0" bIns="0" anchor="ctr">
             <a:spAutoFit/>
           </a:bodyPr>
           <a:lstStyle/>
@@ -14897,7 +15044,7 @@
           <a:noFill/>
         </p:spPr>
         <p:txBody>
-          <a:bodyPr wrap="square" lIns="0" rIns="0" tIns="0" bIns="0" anchor="ctr">
+          <a:bodyPr wrap="square" lIns="0" tIns="0" rIns="0" bIns="0" anchor="ctr">
             <a:spAutoFit/>
           </a:bodyPr>
           <a:lstStyle/>
@@ -14937,7 +15084,7 @@
           <a:noFill/>
         </p:spPr>
         <p:txBody>
-          <a:bodyPr wrap="square" lIns="0" rIns="0" tIns="0" bIns="0" anchor="ctr">
+          <a:bodyPr wrap="square" lIns="0" tIns="0" rIns="0" bIns="0" anchor="ctr">
             <a:spAutoFit/>
           </a:bodyPr>
           <a:lstStyle/>
@@ -14998,7 +15145,7 @@
           <a:noFill/>
         </p:spPr>
         <p:txBody>
-          <a:bodyPr wrap="square" lIns="0" rIns="0" tIns="0" bIns="0" anchor="ctr">
+          <a:bodyPr wrap="square" lIns="0" tIns="0" rIns="0" bIns="0" anchor="ctr">
             <a:spAutoFit/>
           </a:bodyPr>
           <a:lstStyle/>
@@ -15038,7 +15185,7 @@
           <a:noFill/>
         </p:spPr>
         <p:txBody>
-          <a:bodyPr wrap="square" lIns="0" rIns="0" tIns="0" bIns="0" anchor="ctr">
+          <a:bodyPr wrap="square" lIns="0" tIns="0" rIns="0" bIns="0" anchor="ctr">
             <a:spAutoFit/>
           </a:bodyPr>
           <a:lstStyle/>
@@ -15099,7 +15246,7 @@
           <a:noFill/>
         </p:spPr>
         <p:txBody>
-          <a:bodyPr wrap="square" lIns="0" rIns="0" tIns="0" bIns="0" anchor="t">
+          <a:bodyPr wrap="square" lIns="0" tIns="0" rIns="0" bIns="0" anchor="t">
             <a:spAutoFit/>
           </a:bodyPr>
           <a:lstStyle/>
@@ -15110,7 +15257,7 @@
               </a:lnSpc>
             </a:pPr>
             <a:r>
-              <a:rPr sz="800" b="1" i="0" dirty="0" spc="120">
+              <a:rPr sz="800" b="1" i="0" spc="120" dirty="0">
                 <a:solidFill>
                   <a:srgbClr val="008173"/>
                 </a:solidFill>
@@ -15139,7 +15286,7 @@
           <a:noFill/>
         </p:spPr>
         <p:txBody>
-          <a:bodyPr wrap="square" lIns="0" rIns="0" tIns="0" bIns="0" anchor="ctr">
+          <a:bodyPr wrap="square" lIns="0" tIns="0" rIns="0" bIns="0" anchor="ctr">
             <a:spAutoFit/>
           </a:bodyPr>
           <a:lstStyle/>
@@ -15179,7 +15326,7 @@
           <a:noFill/>
         </p:spPr>
         <p:txBody>
-          <a:bodyPr wrap="square" lIns="0" rIns="0" tIns="0" bIns="0" anchor="ctr">
+          <a:bodyPr wrap="square" lIns="0" tIns="0" rIns="0" bIns="0" anchor="ctr">
             <a:spAutoFit/>
           </a:bodyPr>
           <a:lstStyle/>
@@ -15240,7 +15387,7 @@
           <a:noFill/>
         </p:spPr>
         <p:txBody>
-          <a:bodyPr wrap="square" lIns="0" rIns="0" tIns="0" bIns="0" anchor="t">
+          <a:bodyPr wrap="square" lIns="0" tIns="0" rIns="0" bIns="0" anchor="t">
             <a:spAutoFit/>
           </a:bodyPr>
           <a:lstStyle/>
@@ -15251,7 +15398,7 @@
               </a:lnSpc>
             </a:pPr>
             <a:r>
-              <a:rPr sz="800" b="1" i="0" dirty="0" spc="120">
+              <a:rPr sz="800" b="1" i="0" spc="120" dirty="0">
                 <a:solidFill>
                   <a:srgbClr val="008173"/>
                 </a:solidFill>
@@ -15280,7 +15427,7 @@
           <a:noFill/>
         </p:spPr>
         <p:txBody>
-          <a:bodyPr wrap="square" lIns="0" rIns="0" tIns="0" bIns="0" anchor="t">
+          <a:bodyPr wrap="square" lIns="0" tIns="0" rIns="0" bIns="0" anchor="t">
             <a:spAutoFit/>
           </a:bodyPr>
           <a:lstStyle/>
@@ -15326,7 +15473,7 @@
           <a:effectLst/>
         </p:spPr>
         <p:txBody>
-          <a:bodyPr rtlCol="0" anchor="ctr" wrap="square" lIns="54864" rIns="54864" tIns="18288" bIns="18288"/>
+          <a:bodyPr wrap="square" lIns="54864" tIns="18288" rIns="54864" bIns="18288" rtlCol="0" anchor="ctr"/>
           <a:lstStyle/>
           <a:p>
             <a:pPr algn="ctr">
@@ -15370,7 +15517,7 @@
           <a:effectLst/>
         </p:spPr>
         <p:txBody>
-          <a:bodyPr rtlCol="0" anchor="ctr" wrap="square" lIns="54864" rIns="54864" tIns="18288" bIns="18288"/>
+          <a:bodyPr wrap="square" lIns="54864" tIns="18288" rIns="54864" bIns="18288" rtlCol="0" anchor="ctr"/>
           <a:lstStyle/>
           <a:p>
             <a:pPr algn="ctr">
@@ -15414,7 +15561,7 @@
           <a:effectLst/>
         </p:spPr>
         <p:txBody>
-          <a:bodyPr rtlCol="0" anchor="ctr" wrap="square" lIns="54864" rIns="54864" tIns="18288" bIns="18288"/>
+          <a:bodyPr wrap="square" lIns="54864" tIns="18288" rIns="54864" bIns="18288" rtlCol="0" anchor="ctr"/>
           <a:lstStyle/>
           <a:p>
             <a:pPr algn="ctr">
@@ -15458,7 +15605,7 @@
           <a:effectLst/>
         </p:spPr>
         <p:txBody>
-          <a:bodyPr rtlCol="0" anchor="ctr" wrap="square" lIns="54864" rIns="54864" tIns="18288" bIns="18288"/>
+          <a:bodyPr wrap="square" lIns="54864" tIns="18288" rIns="54864" bIns="18288" rtlCol="0" anchor="ctr"/>
           <a:lstStyle/>
           <a:p>
             <a:pPr algn="ctr">
@@ -15502,7 +15649,7 @@
           <a:effectLst/>
         </p:spPr>
         <p:txBody>
-          <a:bodyPr rtlCol="0" anchor="ctr" wrap="square" lIns="54864" rIns="54864" tIns="18288" bIns="18288"/>
+          <a:bodyPr wrap="square" lIns="54864" tIns="18288" rIns="54864" bIns="18288" rtlCol="0" anchor="ctr"/>
           <a:lstStyle/>
           <a:p>
             <a:pPr algn="ctr">
@@ -15540,7 +15687,7 @@
           <a:noFill/>
         </p:spPr>
         <p:txBody>
-          <a:bodyPr wrap="square" lIns="0" rIns="0" tIns="0" bIns="0" anchor="t">
+          <a:bodyPr wrap="square" lIns="0" tIns="0" rIns="0" bIns="0" anchor="t">
             <a:spAutoFit/>
           </a:bodyPr>
           <a:lstStyle/>
@@ -15588,7 +15735,7 @@
           <a:effectLst/>
         </p:spPr>
         <p:txBody>
-          <a:bodyPr rtlCol="0" anchor="ctr" wrap="square" lIns="54864" rIns="54864" tIns="18288" bIns="18288"/>
+          <a:bodyPr wrap="square" lIns="54864" tIns="18288" rIns="54864" bIns="18288" rtlCol="0" anchor="ctr"/>
           <a:lstStyle/>
           <a:p>
             <a:pPr algn="ctr">
@@ -15634,7 +15781,7 @@
           <a:effectLst/>
         </p:spPr>
         <p:txBody>
-          <a:bodyPr rtlCol="0" anchor="ctr" wrap="square" lIns="54864" rIns="54864" tIns="18288" bIns="18288"/>
+          <a:bodyPr wrap="square" lIns="54864" tIns="18288" rIns="54864" bIns="18288" rtlCol="0" anchor="ctr"/>
           <a:lstStyle/>
           <a:p>
             <a:pPr algn="ctr">
@@ -15680,7 +15827,7 @@
           <a:effectLst/>
         </p:spPr>
         <p:txBody>
-          <a:bodyPr rtlCol="0" anchor="ctr" wrap="square" lIns="54864" rIns="54864" tIns="18288" bIns="18288"/>
+          <a:bodyPr wrap="square" lIns="54864" tIns="18288" rIns="54864" bIns="18288" rtlCol="0" anchor="ctr"/>
           <a:lstStyle/>
           <a:p>
             <a:pPr algn="ctr">
@@ -15726,7 +15873,7 @@
           <a:effectLst/>
         </p:spPr>
         <p:txBody>
-          <a:bodyPr rtlCol="0" anchor="ctr" wrap="square" lIns="54864" rIns="54864" tIns="18288" bIns="18288"/>
+          <a:bodyPr wrap="square" lIns="54864" tIns="18288" rIns="54864" bIns="18288" rtlCol="0" anchor="ctr"/>
           <a:lstStyle/>
           <a:p>
             <a:pPr algn="ctr">
@@ -15772,7 +15919,7 @@
           <a:effectLst/>
         </p:spPr>
         <p:txBody>
-          <a:bodyPr rtlCol="0" anchor="ctr" wrap="square" lIns="54864" rIns="54864" tIns="18288" bIns="18288"/>
+          <a:bodyPr wrap="square" lIns="54864" tIns="18288" rIns="54864" bIns="18288" rtlCol="0" anchor="ctr"/>
           <a:lstStyle/>
           <a:p>
             <a:pPr algn="ctr">
@@ -15818,7 +15965,7 @@
           <a:effectLst/>
         </p:spPr>
         <p:txBody>
-          <a:bodyPr rtlCol="0" anchor="ctr" wrap="square" lIns="54864" rIns="54864" tIns="18288" bIns="18288"/>
+          <a:bodyPr wrap="square" lIns="54864" tIns="18288" rIns="54864" bIns="18288" rtlCol="0" anchor="ctr"/>
           <a:lstStyle/>
           <a:p>
             <a:pPr algn="ctr">
@@ -15856,7 +16003,7 @@
           <a:noFill/>
         </p:spPr>
         <p:txBody>
-          <a:bodyPr wrap="square" lIns="0" rIns="0" tIns="0" bIns="0" anchor="t">
+          <a:bodyPr wrap="square" lIns="0" tIns="0" rIns="0" bIns="0" anchor="t">
             <a:spAutoFit/>
           </a:bodyPr>
           <a:lstStyle/>
@@ -15888,7 +16035,7 @@
 </file>
 
 <file path=ppt/slides/slide2.xml><?xml version="1.0" encoding="utf-8"?>
-<p:sld xmlns:a="http://schemas.openxmlformats.org/drawingml/2006/main" xmlns:p="http://schemas.openxmlformats.org/presentationml/2006/main" xmlns:r="http://schemas.openxmlformats.org/officeDocument/2006/relationships">
+<p:sld xmlns:a="http://schemas.openxmlformats.org/drawingml/2006/main" xmlns:r="http://schemas.openxmlformats.org/officeDocument/2006/relationships" xmlns:p="http://schemas.openxmlformats.org/presentationml/2006/main">
   <p:cSld>
     <p:spTree>
       <p:nvGrpSpPr>
@@ -15896,7 +16043,14 @@
         <p:cNvGrpSpPr/>
         <p:nvPr/>
       </p:nvGrpSpPr>
-      <p:grpSpPr/>
+      <p:grpSpPr>
+        <a:xfrm>
+          <a:off x="0" y="0"/>
+          <a:ext cx="0" cy="0"/>
+          <a:chOff x="0" y="0"/>
+          <a:chExt cx="0" cy="0"/>
+        </a:xfrm>
+      </p:grpSpPr>
       <p:sp>
         <p:nvSpPr>
           <p:cNvPr id="2" name="TextBox 1"/>
@@ -15914,7 +16068,7 @@
           <a:noFill/>
         </p:spPr>
         <p:txBody>
-          <a:bodyPr wrap="square" lIns="0" rIns="0" tIns="0" bIns="0" anchor="t">
+          <a:bodyPr wrap="square" lIns="0" tIns="0" rIns="0" bIns="0" anchor="t">
             <a:spAutoFit/>
           </a:bodyPr>
           <a:lstStyle/>
@@ -15925,7 +16079,7 @@
               </a:lnSpc>
             </a:pPr>
             <a:r>
-              <a:rPr sz="800" b="1" i="0" dirty="0" spc="140">
+              <a:rPr sz="800" b="1" i="0" spc="140" dirty="0">
                 <a:solidFill>
                   <a:srgbClr val="008173"/>
                 </a:solidFill>
@@ -15954,7 +16108,7 @@
           <a:noFill/>
         </p:spPr>
         <p:txBody>
-          <a:bodyPr wrap="square" lIns="0" rIns="0" tIns="0" bIns="0" anchor="t">
+          <a:bodyPr wrap="square" lIns="0" tIns="0" rIns="0" bIns="0" anchor="t">
             <a:spAutoFit/>
           </a:bodyPr>
           <a:lstStyle/>
@@ -15994,7 +16148,7 @@
           <a:noFill/>
         </p:spPr>
         <p:txBody>
-          <a:bodyPr wrap="square" lIns="0" rIns="0" tIns="0" bIns="0" anchor="t">
+          <a:bodyPr wrap="square" lIns="0" tIns="0" rIns="0" bIns="0" anchor="t">
             <a:spAutoFit/>
           </a:bodyPr>
           <a:lstStyle/>
@@ -16034,7 +16188,7 @@
           <a:noFill/>
         </p:spPr>
         <p:txBody>
-          <a:bodyPr wrap="square" lIns="0" rIns="0" tIns="0" bIns="0" anchor="t">
+          <a:bodyPr wrap="square" lIns="0" tIns="0" rIns="0" bIns="0" anchor="t">
             <a:spAutoFit/>
           </a:bodyPr>
           <a:lstStyle/>
@@ -16074,7 +16228,7 @@
           <a:noFill/>
         </p:spPr>
         <p:txBody>
-          <a:bodyPr wrap="square" lIns="0" rIns="0" tIns="0" bIns="0" anchor="t">
+          <a:bodyPr wrap="square" lIns="0" tIns="0" rIns="0" bIns="0" anchor="t">
             <a:spAutoFit/>
           </a:bodyPr>
           <a:lstStyle/>
@@ -16122,9 +16276,11 @@
           <a:effectLst/>
         </p:spPr>
         <p:txBody>
-          <a:bodyPr rtlCol="0" anchor="ctr" wrap="square"/>
-          <a:lstStyle/>
-          <a:p/>
+          <a:bodyPr wrap="square" rtlCol="0" anchor="ctr"/>
+          <a:lstStyle/>
+          <a:p>
+            <a:endParaRPr/>
+          </a:p>
         </p:txBody>
       </p:sp>
       <p:sp>
@@ -16150,9 +16306,11 @@
           <a:effectLst/>
         </p:spPr>
         <p:txBody>
-          <a:bodyPr rtlCol="0" anchor="ctr" wrap="square"/>
-          <a:lstStyle/>
-          <a:p/>
+          <a:bodyPr wrap="square" rtlCol="0" anchor="ctr"/>
+          <a:lstStyle/>
+          <a:p>
+            <a:endParaRPr/>
+          </a:p>
         </p:txBody>
       </p:sp>
       <p:sp>
@@ -16172,7 +16330,7 @@
           <a:noFill/>
         </p:spPr>
         <p:txBody>
-          <a:bodyPr wrap="square" lIns="0" rIns="0" tIns="0" bIns="0" anchor="t">
+          <a:bodyPr wrap="square" lIns="0" tIns="0" rIns="0" bIns="0" anchor="t">
             <a:spAutoFit/>
           </a:bodyPr>
           <a:lstStyle/>
@@ -16212,7 +16370,7 @@
           <a:noFill/>
         </p:spPr>
         <p:txBody>
-          <a:bodyPr wrap="square" lIns="0" rIns="0" tIns="0" bIns="0" anchor="t">
+          <a:bodyPr wrap="square" lIns="0" tIns="0" rIns="0" bIns="0" anchor="t">
             <a:spAutoFit/>
           </a:bodyPr>
           <a:lstStyle/>
@@ -16252,7 +16410,7 @@
           <a:noFill/>
         </p:spPr>
         <p:txBody>
-          <a:bodyPr wrap="square" lIns="0" rIns="0" tIns="0" bIns="0" anchor="t">
+          <a:bodyPr wrap="square" lIns="0" tIns="0" rIns="0" bIns="0" anchor="t">
             <a:spAutoFit/>
           </a:bodyPr>
           <a:lstStyle/>
@@ -16313,7 +16471,7 @@
           <a:noFill/>
         </p:spPr>
         <p:txBody>
-          <a:bodyPr wrap="square" lIns="0" rIns="0" tIns="0" bIns="0" anchor="t">
+          <a:bodyPr wrap="square" lIns="0" tIns="0" rIns="0" bIns="0" anchor="t">
             <a:spAutoFit/>
           </a:bodyPr>
           <a:lstStyle/>
@@ -16361,9 +16519,11 @@
           <a:effectLst/>
         </p:spPr>
         <p:txBody>
-          <a:bodyPr rtlCol="0" anchor="ctr" wrap="square"/>
-          <a:lstStyle/>
-          <a:p/>
+          <a:bodyPr wrap="square" rtlCol="0" anchor="ctr"/>
+          <a:lstStyle/>
+          <a:p>
+            <a:endParaRPr/>
+          </a:p>
         </p:txBody>
       </p:sp>
       <p:sp>
@@ -16389,9 +16549,11 @@
           <a:effectLst/>
         </p:spPr>
         <p:txBody>
-          <a:bodyPr rtlCol="0" anchor="ctr" wrap="square"/>
-          <a:lstStyle/>
-          <a:p/>
+          <a:bodyPr wrap="square" rtlCol="0" anchor="ctr"/>
+          <a:lstStyle/>
+          <a:p>
+            <a:endParaRPr/>
+          </a:p>
         </p:txBody>
       </p:sp>
       <p:sp>
@@ -16411,7 +16573,7 @@
           <a:noFill/>
         </p:spPr>
         <p:txBody>
-          <a:bodyPr wrap="square" lIns="0" rIns="0" tIns="0" bIns="0" anchor="t">
+          <a:bodyPr wrap="square" lIns="0" tIns="0" rIns="0" bIns="0" anchor="t">
             <a:spAutoFit/>
           </a:bodyPr>
           <a:lstStyle/>
@@ -16451,7 +16613,7 @@
           <a:noFill/>
         </p:spPr>
         <p:txBody>
-          <a:bodyPr wrap="square" lIns="0" rIns="0" tIns="0" bIns="0" anchor="t">
+          <a:bodyPr wrap="square" lIns="0" tIns="0" rIns="0" bIns="0" anchor="t">
             <a:spAutoFit/>
           </a:bodyPr>
           <a:lstStyle/>
@@ -16491,7 +16653,7 @@
           <a:noFill/>
         </p:spPr>
         <p:txBody>
-          <a:bodyPr wrap="square" lIns="0" rIns="0" tIns="0" bIns="0" anchor="t">
+          <a:bodyPr wrap="square" lIns="0" tIns="0" rIns="0" bIns="0" anchor="t">
             <a:spAutoFit/>
           </a:bodyPr>
           <a:lstStyle/>
@@ -16552,7 +16714,7 @@
           <a:noFill/>
         </p:spPr>
         <p:txBody>
-          <a:bodyPr wrap="square" lIns="0" rIns="0" tIns="0" bIns="0" anchor="t">
+          <a:bodyPr wrap="square" lIns="0" tIns="0" rIns="0" bIns="0" anchor="t">
             <a:spAutoFit/>
           </a:bodyPr>
           <a:lstStyle/>
@@ -16600,9 +16762,11 @@
           <a:effectLst/>
         </p:spPr>
         <p:txBody>
-          <a:bodyPr rtlCol="0" anchor="ctr" wrap="square"/>
-          <a:lstStyle/>
-          <a:p/>
+          <a:bodyPr wrap="square" rtlCol="0" anchor="ctr"/>
+          <a:lstStyle/>
+          <a:p>
+            <a:endParaRPr/>
+          </a:p>
         </p:txBody>
       </p:sp>
       <p:sp>
@@ -16628,9 +16792,11 @@
           <a:effectLst/>
         </p:spPr>
         <p:txBody>
-          <a:bodyPr rtlCol="0" anchor="ctr" wrap="square"/>
-          <a:lstStyle/>
-          <a:p/>
+          <a:bodyPr wrap="square" rtlCol="0" anchor="ctr"/>
+          <a:lstStyle/>
+          <a:p>
+            <a:endParaRPr/>
+          </a:p>
         </p:txBody>
       </p:sp>
       <p:sp>
@@ -16650,7 +16816,7 @@
           <a:noFill/>
         </p:spPr>
         <p:txBody>
-          <a:bodyPr wrap="square" lIns="0" rIns="0" tIns="0" bIns="0" anchor="t">
+          <a:bodyPr wrap="square" lIns="0" tIns="0" rIns="0" bIns="0" anchor="t">
             <a:spAutoFit/>
           </a:bodyPr>
           <a:lstStyle/>
@@ -16690,7 +16856,7 @@
           <a:noFill/>
         </p:spPr>
         <p:txBody>
-          <a:bodyPr wrap="square" lIns="0" rIns="0" tIns="0" bIns="0" anchor="t">
+          <a:bodyPr wrap="square" lIns="0" tIns="0" rIns="0" bIns="0" anchor="t">
             <a:spAutoFit/>
           </a:bodyPr>
           <a:lstStyle/>
@@ -16730,7 +16896,7 @@
           <a:noFill/>
         </p:spPr>
         <p:txBody>
-          <a:bodyPr wrap="square" lIns="0" rIns="0" tIns="0" bIns="0" anchor="t">
+          <a:bodyPr wrap="square" lIns="0" tIns="0" rIns="0" bIns="0" anchor="t">
             <a:spAutoFit/>
           </a:bodyPr>
           <a:lstStyle/>
@@ -16791,7 +16957,7 @@
           <a:noFill/>
         </p:spPr>
         <p:txBody>
-          <a:bodyPr wrap="square" lIns="0" rIns="0" tIns="0" bIns="0" anchor="t">
+          <a:bodyPr wrap="square" lIns="0" tIns="0" rIns="0" bIns="0" anchor="t">
             <a:spAutoFit/>
           </a:bodyPr>
           <a:lstStyle/>
@@ -16839,9 +17005,11 @@
           <a:effectLst/>
         </p:spPr>
         <p:txBody>
-          <a:bodyPr rtlCol="0" anchor="ctr" wrap="square"/>
-          <a:lstStyle/>
-          <a:p/>
+          <a:bodyPr wrap="square" rtlCol="0" anchor="ctr"/>
+          <a:lstStyle/>
+          <a:p>
+            <a:endParaRPr/>
+          </a:p>
         </p:txBody>
       </p:sp>
       <p:sp>
@@ -16867,9 +17035,11 @@
           <a:effectLst/>
         </p:spPr>
         <p:txBody>
-          <a:bodyPr rtlCol="0" anchor="ctr" wrap="square"/>
-          <a:lstStyle/>
-          <a:p/>
+          <a:bodyPr wrap="square" rtlCol="0" anchor="ctr"/>
+          <a:lstStyle/>
+          <a:p>
+            <a:endParaRPr/>
+          </a:p>
         </p:txBody>
       </p:sp>
       <p:sp>
@@ -16889,7 +17059,7 @@
           <a:noFill/>
         </p:spPr>
         <p:txBody>
-          <a:bodyPr wrap="square" lIns="0" rIns="0" tIns="0" bIns="0" anchor="t">
+          <a:bodyPr wrap="square" lIns="0" tIns="0" rIns="0" bIns="0" anchor="t">
             <a:spAutoFit/>
           </a:bodyPr>
           <a:lstStyle/>
@@ -16929,7 +17099,7 @@
           <a:noFill/>
         </p:spPr>
         <p:txBody>
-          <a:bodyPr wrap="square" lIns="0" rIns="0" tIns="0" bIns="0" anchor="t">
+          <a:bodyPr wrap="square" lIns="0" tIns="0" rIns="0" bIns="0" anchor="t">
             <a:spAutoFit/>
           </a:bodyPr>
           <a:lstStyle/>
@@ -16969,7 +17139,7 @@
           <a:noFill/>
         </p:spPr>
         <p:txBody>
-          <a:bodyPr wrap="square" lIns="0" rIns="0" tIns="0" bIns="0" anchor="t">
+          <a:bodyPr wrap="square" lIns="0" tIns="0" rIns="0" bIns="0" anchor="t">
             <a:spAutoFit/>
           </a:bodyPr>
           <a:lstStyle/>
@@ -17030,7 +17200,7 @@
           <a:noFill/>
         </p:spPr>
         <p:txBody>
-          <a:bodyPr wrap="square" lIns="0" rIns="0" tIns="0" bIns="0" anchor="t">
+          <a:bodyPr wrap="square" lIns="0" tIns="0" rIns="0" bIns="0" anchor="t">
             <a:spAutoFit/>
           </a:bodyPr>
           <a:lstStyle/>
@@ -17078,9 +17248,11 @@
           <a:effectLst/>
         </p:spPr>
         <p:txBody>
-          <a:bodyPr rtlCol="0" anchor="ctr" wrap="square"/>
-          <a:lstStyle/>
-          <a:p/>
+          <a:bodyPr wrap="square" rtlCol="0" anchor="ctr"/>
+          <a:lstStyle/>
+          <a:p>
+            <a:endParaRPr/>
+          </a:p>
         </p:txBody>
       </p:sp>
       <p:sp>
@@ -17106,9 +17278,11 @@
           <a:effectLst/>
         </p:spPr>
         <p:txBody>
-          <a:bodyPr rtlCol="0" anchor="ctr" wrap="square"/>
-          <a:lstStyle/>
-          <a:p/>
+          <a:bodyPr wrap="square" rtlCol="0" anchor="ctr"/>
+          <a:lstStyle/>
+          <a:p>
+            <a:endParaRPr/>
+          </a:p>
         </p:txBody>
       </p:sp>
       <p:sp>
@@ -17128,7 +17302,7 @@
           <a:noFill/>
         </p:spPr>
         <p:txBody>
-          <a:bodyPr wrap="square" lIns="0" rIns="0" tIns="0" bIns="0" anchor="t">
+          <a:bodyPr wrap="square" lIns="0" tIns="0" rIns="0" bIns="0" anchor="t">
             <a:spAutoFit/>
           </a:bodyPr>
           <a:lstStyle/>
@@ -17168,7 +17342,7 @@
           <a:noFill/>
         </p:spPr>
         <p:txBody>
-          <a:bodyPr wrap="square" lIns="0" rIns="0" tIns="0" bIns="0" anchor="t">
+          <a:bodyPr wrap="square" lIns="0" tIns="0" rIns="0" bIns="0" anchor="t">
             <a:spAutoFit/>
           </a:bodyPr>
           <a:lstStyle/>
@@ -17208,7 +17382,7 @@
           <a:noFill/>
         </p:spPr>
         <p:txBody>
-          <a:bodyPr wrap="square" lIns="0" rIns="0" tIns="0" bIns="0" anchor="t">
+          <a:bodyPr wrap="square" lIns="0" tIns="0" rIns="0" bIns="0" anchor="t">
             <a:spAutoFit/>
           </a:bodyPr>
           <a:lstStyle/>
@@ -17269,7 +17443,7 @@
           <a:noFill/>
         </p:spPr>
         <p:txBody>
-          <a:bodyPr wrap="square" lIns="0" rIns="0" tIns="0" bIns="0" anchor="t">
+          <a:bodyPr wrap="square" lIns="0" tIns="0" rIns="0" bIns="0" anchor="t">
             <a:spAutoFit/>
           </a:bodyPr>
           <a:lstStyle/>
@@ -17315,9 +17489,11 @@
           <a:effectLst/>
         </p:spPr>
         <p:txBody>
-          <a:bodyPr rtlCol="0" anchor="ctr" wrap="square"/>
-          <a:lstStyle/>
-          <a:p/>
+          <a:bodyPr wrap="square" rtlCol="0" anchor="ctr"/>
+          <a:lstStyle/>
+          <a:p>
+            <a:endParaRPr/>
+          </a:p>
         </p:txBody>
       </p:sp>
       <p:sp>
@@ -17343,9 +17519,11 @@
           <a:effectLst/>
         </p:spPr>
         <p:txBody>
-          <a:bodyPr rtlCol="0" anchor="ctr" wrap="square"/>
-          <a:lstStyle/>
-          <a:p/>
+          <a:bodyPr wrap="square" rtlCol="0" anchor="ctr"/>
+          <a:lstStyle/>
+          <a:p>
+            <a:endParaRPr/>
+          </a:p>
         </p:txBody>
       </p:sp>
       <p:sp>
@@ -17365,7 +17543,7 @@
           <a:noFill/>
         </p:spPr>
         <p:txBody>
-          <a:bodyPr wrap="square" lIns="0" rIns="0" tIns="0" bIns="0" anchor="t">
+          <a:bodyPr wrap="square" lIns="0" tIns="0" rIns="0" bIns="0" anchor="t">
             <a:spAutoFit/>
           </a:bodyPr>
           <a:lstStyle/>
@@ -17397,7 +17575,7 @@
 </file>
 
 <file path=ppt/slides/slide3.xml><?xml version="1.0" encoding="utf-8"?>
-<p:sld xmlns:a="http://schemas.openxmlformats.org/drawingml/2006/main" xmlns:p="http://schemas.openxmlformats.org/presentationml/2006/main" xmlns:r="http://schemas.openxmlformats.org/officeDocument/2006/relationships">
+<p:sld xmlns:a="http://schemas.openxmlformats.org/drawingml/2006/main" xmlns:r="http://schemas.openxmlformats.org/officeDocument/2006/relationships" xmlns:p="http://schemas.openxmlformats.org/presentationml/2006/main">
   <p:cSld>
     <p:spTree>
       <p:nvGrpSpPr>
@@ -17405,7 +17583,14 @@
         <p:cNvGrpSpPr/>
         <p:nvPr/>
       </p:nvGrpSpPr>
-      <p:grpSpPr/>
+      <p:grpSpPr>
+        <a:xfrm>
+          <a:off x="0" y="0"/>
+          <a:ext cx="0" cy="0"/>
+          <a:chOff x="0" y="0"/>
+          <a:chExt cx="0" cy="0"/>
+        </a:xfrm>
+      </p:grpSpPr>
       <p:sp>
         <p:nvSpPr>
           <p:cNvPr id="2" name="TextBox 1"/>
@@ -17423,7 +17608,7 @@
           <a:noFill/>
         </p:spPr>
         <p:txBody>
-          <a:bodyPr wrap="square" lIns="0" rIns="0" tIns="0" bIns="0" anchor="t">
+          <a:bodyPr wrap="square" lIns="0" tIns="0" rIns="0" bIns="0" anchor="t">
             <a:spAutoFit/>
           </a:bodyPr>
           <a:lstStyle/>
@@ -17434,7 +17619,7 @@
               </a:lnSpc>
             </a:pPr>
             <a:r>
-              <a:rPr sz="800" b="1" i="0" dirty="0" spc="140">
+              <a:rPr sz="800" b="1" i="0" spc="140" dirty="0">
                 <a:solidFill>
                   <a:srgbClr val="008173"/>
                 </a:solidFill>
@@ -17463,7 +17648,7 @@
           <a:noFill/>
         </p:spPr>
         <p:txBody>
-          <a:bodyPr wrap="square" lIns="0" rIns="0" tIns="0" bIns="0" anchor="t">
+          <a:bodyPr wrap="square" lIns="0" tIns="0" rIns="0" bIns="0" anchor="t">
             <a:spAutoFit/>
           </a:bodyPr>
           <a:lstStyle/>
@@ -17503,7 +17688,7 @@
           <a:noFill/>
         </p:spPr>
         <p:txBody>
-          <a:bodyPr wrap="square" lIns="0" rIns="0" tIns="0" bIns="0" anchor="t">
+          <a:bodyPr wrap="square" lIns="0" tIns="0" rIns="0" bIns="0" anchor="t">
             <a:spAutoFit/>
           </a:bodyPr>
           <a:lstStyle/>
@@ -17543,7 +17728,7 @@
           <a:noFill/>
         </p:spPr>
         <p:txBody>
-          <a:bodyPr wrap="square" lIns="0" rIns="0" tIns="0" bIns="0" anchor="t">
+          <a:bodyPr wrap="square" lIns="0" tIns="0" rIns="0" bIns="0" anchor="t">
             <a:spAutoFit/>
           </a:bodyPr>
           <a:lstStyle/>
@@ -17583,7 +17768,7 @@
           <a:noFill/>
         </p:spPr>
         <p:txBody>
-          <a:bodyPr wrap="square" lIns="0" rIns="0" tIns="0" bIns="0" anchor="t">
+          <a:bodyPr wrap="square" lIns="0" tIns="0" rIns="0" bIns="0" anchor="t">
             <a:spAutoFit/>
           </a:bodyPr>
           <a:lstStyle/>
@@ -17623,7 +17808,7 @@
           <a:noFill/>
         </p:spPr>
         <p:txBody>
-          <a:bodyPr wrap="square" lIns="0" rIns="0" tIns="0" bIns="0" anchor="t">
+          <a:bodyPr wrap="square" lIns="0" tIns="0" rIns="0" bIns="0" anchor="t">
             <a:spAutoFit/>
           </a:bodyPr>
           <a:lstStyle/>
@@ -17634,7 +17819,7 @@
               </a:lnSpc>
             </a:pPr>
             <a:r>
-              <a:rPr sz="800" b="1" i="0" dirty="0" spc="120">
+              <a:rPr sz="800" b="1" i="0" spc="120" dirty="0">
                 <a:solidFill>
                   <a:srgbClr val="008173"/>
                 </a:solidFill>
@@ -17669,7 +17854,7 @@
           <a:effectLst/>
         </p:spPr>
         <p:txBody>
-          <a:bodyPr rtlCol="0" anchor="ctr" wrap="square" lIns="54864" rIns="54864" tIns="18288" bIns="18288"/>
+          <a:bodyPr wrap="square" lIns="54864" tIns="18288" rIns="54864" bIns="18288" rtlCol="0" anchor="ctr"/>
           <a:lstStyle/>
           <a:p>
             <a:pPr algn="ctr">
@@ -17713,7 +17898,7 @@
           <a:effectLst/>
         </p:spPr>
         <p:txBody>
-          <a:bodyPr rtlCol="0" anchor="ctr" wrap="square" lIns="54864" rIns="54864" tIns="18288" bIns="18288"/>
+          <a:bodyPr wrap="square" lIns="54864" tIns="18288" rIns="54864" bIns="18288" rtlCol="0" anchor="ctr"/>
           <a:lstStyle/>
           <a:p>
             <a:pPr algn="ctr">
@@ -17776,7 +17961,7 @@
           <a:effectLst/>
         </p:spPr>
         <p:txBody>
-          <a:bodyPr rtlCol="0" anchor="ctr" wrap="square" lIns="54864" rIns="54864" tIns="18288" bIns="18288"/>
+          <a:bodyPr wrap="square" lIns="54864" tIns="18288" rIns="54864" bIns="18288" rtlCol="0" anchor="ctr"/>
           <a:lstStyle/>
           <a:p>
             <a:pPr algn="ctr">
@@ -17837,7 +18022,7 @@
           <a:effectLst/>
         </p:spPr>
         <p:txBody>
-          <a:bodyPr rtlCol="0" anchor="ctr" wrap="square" lIns="54864" rIns="54864" tIns="18288" bIns="18288"/>
+          <a:bodyPr wrap="square" lIns="54864" tIns="18288" rIns="54864" bIns="18288" rtlCol="0" anchor="ctr"/>
           <a:lstStyle/>
           <a:p>
             <a:pPr algn="ctr">
@@ -17898,7 +18083,7 @@
           <a:effectLst/>
         </p:spPr>
         <p:txBody>
-          <a:bodyPr rtlCol="0" anchor="ctr" wrap="square" lIns="54864" rIns="54864" tIns="18288" bIns="18288"/>
+          <a:bodyPr wrap="square" lIns="54864" tIns="18288" rIns="54864" bIns="18288" rtlCol="0" anchor="ctr"/>
           <a:lstStyle/>
           <a:p>
             <a:pPr algn="ctr">
@@ -17997,7 +18182,7 @@
           </a:fontRef>
         </p:style>
         <p:txBody>
-          <a:bodyPr rtlCol="0" anchor="ctr" wrap="square" lIns="0" rIns="0" tIns="18288" bIns="18288"/>
+          <a:bodyPr wrap="square" lIns="0" tIns="18288" rIns="0" bIns="18288" rtlCol="0" anchor="ctr"/>
           <a:lstStyle/>
           <a:p>
             <a:pPr algn="ctr">
@@ -18079,7 +18264,7 @@
           </a:fontRef>
         </p:style>
         <p:txBody>
-          <a:bodyPr rtlCol="0" anchor="ctr" wrap="square" lIns="0" rIns="0" tIns="18288" bIns="18288"/>
+          <a:bodyPr wrap="square" lIns="0" tIns="18288" rIns="0" bIns="18288" rtlCol="0" anchor="ctr"/>
           <a:lstStyle/>
           <a:p>
             <a:pPr algn="ctr">
@@ -18161,7 +18346,7 @@
           </a:fontRef>
         </p:style>
         <p:txBody>
-          <a:bodyPr rtlCol="0" anchor="ctr" wrap="square" lIns="0" rIns="0" tIns="18288" bIns="18288"/>
+          <a:bodyPr wrap="square" lIns="0" tIns="18288" rIns="0" bIns="18288" rtlCol="0" anchor="ctr"/>
           <a:lstStyle/>
           <a:p>
             <a:pPr algn="ctr">
@@ -18243,7 +18428,7 @@
           </a:fontRef>
         </p:style>
         <p:txBody>
-          <a:bodyPr rtlCol="0" anchor="ctr" wrap="square" lIns="0" rIns="0" tIns="18288" bIns="18288"/>
+          <a:bodyPr wrap="square" lIns="0" tIns="18288" rIns="0" bIns="18288" rtlCol="0" anchor="ctr"/>
           <a:lstStyle/>
           <a:p>
             <a:pPr algn="ctr">
@@ -18281,7 +18466,7 @@
           <a:noFill/>
         </p:spPr>
         <p:txBody>
-          <a:bodyPr wrap="square" lIns="0" rIns="0" tIns="0" bIns="0" anchor="t">
+          <a:bodyPr wrap="square" lIns="0" tIns="0" rIns="0" bIns="0" anchor="t">
             <a:spAutoFit/>
           </a:bodyPr>
           <a:lstStyle/>
@@ -18292,7 +18477,7 @@
               </a:lnSpc>
             </a:pPr>
             <a:r>
-              <a:rPr sz="800" b="1" i="0" dirty="0" spc="120">
+              <a:rPr sz="800" b="1" i="0" spc="120" dirty="0">
                 <a:solidFill>
                   <a:srgbClr val="008173"/>
                 </a:solidFill>
@@ -18327,7 +18512,7 @@
           <a:effectLst/>
         </p:spPr>
         <p:txBody>
-          <a:bodyPr rtlCol="0" anchor="ctr" wrap="square" lIns="54864" rIns="54864" tIns="18288" bIns="18288"/>
+          <a:bodyPr wrap="square" lIns="54864" tIns="18288" rIns="54864" bIns="18288" rtlCol="0" anchor="ctr"/>
           <a:lstStyle/>
           <a:p>
             <a:pPr algn="ctr">
@@ -18390,7 +18575,7 @@
           <a:effectLst/>
         </p:spPr>
         <p:txBody>
-          <a:bodyPr rtlCol="0" anchor="ctr" wrap="square" lIns="54864" rIns="54864" tIns="18288" bIns="18288"/>
+          <a:bodyPr wrap="square" lIns="54864" tIns="18288" rIns="54864" bIns="18288" rtlCol="0" anchor="ctr"/>
           <a:lstStyle/>
           <a:p>
             <a:pPr algn="ctr">
@@ -18451,7 +18636,7 @@
           <a:effectLst/>
         </p:spPr>
         <p:txBody>
-          <a:bodyPr rtlCol="0" anchor="ctr" wrap="square" lIns="54864" rIns="54864" tIns="18288" bIns="18288"/>
+          <a:bodyPr wrap="square" lIns="54864" tIns="18288" rIns="54864" bIns="18288" rtlCol="0" anchor="ctr"/>
           <a:lstStyle/>
           <a:p>
             <a:pPr algn="ctr">
@@ -18512,7 +18697,7 @@
           <a:effectLst/>
         </p:spPr>
         <p:txBody>
-          <a:bodyPr rtlCol="0" anchor="ctr" wrap="square" lIns="54864" rIns="54864" tIns="18288" bIns="18288"/>
+          <a:bodyPr wrap="square" lIns="54864" tIns="18288" rIns="54864" bIns="18288" rtlCol="0" anchor="ctr"/>
           <a:lstStyle/>
           <a:p>
             <a:pPr algn="ctr">
@@ -18611,7 +18796,7 @@
           </a:fontRef>
         </p:style>
         <p:txBody>
-          <a:bodyPr rtlCol="0" anchor="ctr" wrap="square" lIns="0" rIns="0" tIns="18288" bIns="18288"/>
+          <a:bodyPr wrap="square" lIns="0" tIns="18288" rIns="0" bIns="18288" rtlCol="0" anchor="ctr"/>
           <a:lstStyle/>
           <a:p>
             <a:pPr algn="ctr">
@@ -18693,7 +18878,7 @@
           </a:fontRef>
         </p:style>
         <p:txBody>
-          <a:bodyPr rtlCol="0" anchor="ctr" wrap="square" lIns="0" rIns="0" tIns="18288" bIns="18288"/>
+          <a:bodyPr wrap="square" lIns="0" tIns="18288" rIns="0" bIns="18288" rtlCol="0" anchor="ctr"/>
           <a:lstStyle/>
           <a:p>
             <a:pPr algn="ctr">
@@ -18775,7 +18960,7 @@
           </a:fontRef>
         </p:style>
         <p:txBody>
-          <a:bodyPr rtlCol="0" anchor="ctr" wrap="square" lIns="0" rIns="0" tIns="18288" bIns="18288"/>
+          <a:bodyPr wrap="square" lIns="0" tIns="18288" rIns="0" bIns="18288" rtlCol="0" anchor="ctr"/>
           <a:lstStyle/>
           <a:p>
             <a:pPr algn="ctr">
@@ -18880,7 +19065,7 @@
           <a:noFill/>
         </p:spPr>
         <p:txBody>
-          <a:bodyPr wrap="square" lIns="0" rIns="0" tIns="0" bIns="0" anchor="t">
+          <a:bodyPr wrap="square" lIns="0" tIns="0" rIns="0" bIns="0" anchor="t">
             <a:spAutoFit/>
           </a:bodyPr>
           <a:lstStyle/>
@@ -18927,7 +19112,7 @@
           <a:effectLst/>
         </p:spPr>
         <p:txBody>
-          <a:bodyPr rtlCol="0" anchor="ctr" wrap="square" lIns="54864" rIns="54864" tIns="18288" bIns="18288"/>
+          <a:bodyPr wrap="square" lIns="54864" tIns="18288" rIns="54864" bIns="18288" rtlCol="0" anchor="ctr"/>
           <a:lstStyle/>
           <a:p>
             <a:pPr algn="ctr">
@@ -18990,9 +19175,11 @@
           <a:effectLst/>
         </p:spPr>
         <p:txBody>
-          <a:bodyPr rtlCol="0" anchor="ctr" wrap="square"/>
-          <a:lstStyle/>
-          <a:p/>
+          <a:bodyPr wrap="square" rtlCol="0" anchor="ctr"/>
+          <a:lstStyle/>
+          <a:p>
+            <a:endParaRPr/>
+          </a:p>
         </p:txBody>
       </p:sp>
       <p:sp>
@@ -19018,9 +19205,11 @@
           <a:effectLst/>
         </p:spPr>
         <p:txBody>
-          <a:bodyPr rtlCol="0" anchor="ctr" wrap="square"/>
-          <a:lstStyle/>
-          <a:p/>
+          <a:bodyPr wrap="square" rtlCol="0" anchor="ctr"/>
+          <a:lstStyle/>
+          <a:p>
+            <a:endParaRPr/>
+          </a:p>
         </p:txBody>
       </p:sp>
       <p:sp>
@@ -19040,7 +19229,7 @@
           <a:noFill/>
         </p:spPr>
         <p:txBody>
-          <a:bodyPr wrap="square" lIns="0" rIns="0" tIns="0" bIns="0" anchor="t">
+          <a:bodyPr wrap="square" lIns="0" tIns="0" rIns="0" bIns="0" anchor="t">
             <a:spAutoFit/>
           </a:bodyPr>
           <a:lstStyle/>
@@ -19080,7 +19269,7 @@
           <a:noFill/>
         </p:spPr>
         <p:txBody>
-          <a:bodyPr wrap="square" lIns="0" rIns="0" tIns="0" bIns="0" anchor="t">
+          <a:bodyPr wrap="square" lIns="0" tIns="0" rIns="0" bIns="0" anchor="t">
             <a:spAutoFit/>
           </a:bodyPr>
           <a:lstStyle/>
@@ -19131,9 +19320,11 @@
           <a:effectLst/>
         </p:spPr>
         <p:txBody>
-          <a:bodyPr rtlCol="0" anchor="ctr" wrap="square"/>
-          <a:lstStyle/>
-          <a:p/>
+          <a:bodyPr wrap="square" rtlCol="0" anchor="ctr"/>
+          <a:lstStyle/>
+          <a:p>
+            <a:endParaRPr/>
+          </a:p>
         </p:txBody>
       </p:sp>
       <p:sp>
@@ -19159,9 +19350,11 @@
           <a:effectLst/>
         </p:spPr>
         <p:txBody>
-          <a:bodyPr rtlCol="0" anchor="ctr" wrap="square"/>
-          <a:lstStyle/>
-          <a:p/>
+          <a:bodyPr wrap="square" rtlCol="0" anchor="ctr"/>
+          <a:lstStyle/>
+          <a:p>
+            <a:endParaRPr/>
+          </a:p>
         </p:txBody>
       </p:sp>
       <p:sp>
@@ -19181,7 +19374,7 @@
           <a:noFill/>
         </p:spPr>
         <p:txBody>
-          <a:bodyPr wrap="square" lIns="0" rIns="0" tIns="0" bIns="0" anchor="t">
+          <a:bodyPr wrap="square" lIns="0" tIns="0" rIns="0" bIns="0" anchor="t">
             <a:spAutoFit/>
           </a:bodyPr>
           <a:lstStyle/>
@@ -19221,7 +19414,7 @@
           <a:noFill/>
         </p:spPr>
         <p:txBody>
-          <a:bodyPr wrap="square" lIns="0" rIns="0" tIns="0" bIns="0" anchor="t">
+          <a:bodyPr wrap="square" lIns="0" tIns="0" rIns="0" bIns="0" anchor="t">
             <a:spAutoFit/>
           </a:bodyPr>
           <a:lstStyle/>
@@ -19272,9 +19465,11 @@
           <a:effectLst/>
         </p:spPr>
         <p:txBody>
-          <a:bodyPr rtlCol="0" anchor="ctr" wrap="square"/>
-          <a:lstStyle/>
-          <a:p/>
+          <a:bodyPr wrap="square" rtlCol="0" anchor="ctr"/>
+          <a:lstStyle/>
+          <a:p>
+            <a:endParaRPr/>
+          </a:p>
         </p:txBody>
       </p:sp>
       <p:sp>
@@ -19300,9 +19495,11 @@
           <a:effectLst/>
         </p:spPr>
         <p:txBody>
-          <a:bodyPr rtlCol="0" anchor="ctr" wrap="square"/>
-          <a:lstStyle/>
-          <a:p/>
+          <a:bodyPr wrap="square" rtlCol="0" anchor="ctr"/>
+          <a:lstStyle/>
+          <a:p>
+            <a:endParaRPr/>
+          </a:p>
         </p:txBody>
       </p:sp>
       <p:sp>
@@ -19322,7 +19519,7 @@
           <a:noFill/>
         </p:spPr>
         <p:txBody>
-          <a:bodyPr wrap="square" lIns="0" rIns="0" tIns="0" bIns="0" anchor="t">
+          <a:bodyPr wrap="square" lIns="0" tIns="0" rIns="0" bIns="0" anchor="t">
             <a:spAutoFit/>
           </a:bodyPr>
           <a:lstStyle/>
@@ -19362,7 +19559,7 @@
           <a:noFill/>
         </p:spPr>
         <p:txBody>
-          <a:bodyPr wrap="square" lIns="0" rIns="0" tIns="0" bIns="0" anchor="t">
+          <a:bodyPr wrap="square" lIns="0" tIns="0" rIns="0" bIns="0" anchor="t">
             <a:spAutoFit/>
           </a:bodyPr>
           <a:lstStyle/>
@@ -19411,9 +19608,11 @@
           <a:effectLst/>
         </p:spPr>
         <p:txBody>
-          <a:bodyPr rtlCol="0" anchor="ctr" wrap="square"/>
-          <a:lstStyle/>
-          <a:p/>
+          <a:bodyPr wrap="square" rtlCol="0" anchor="ctr"/>
+          <a:lstStyle/>
+          <a:p>
+            <a:endParaRPr/>
+          </a:p>
         </p:txBody>
       </p:sp>
       <p:sp>
@@ -19433,7 +19632,7 @@
           <a:noFill/>
         </p:spPr>
         <p:txBody>
-          <a:bodyPr wrap="none" lIns="0" rIns="0" tIns="0" bIns="0" anchor="t">
+          <a:bodyPr wrap="none" lIns="0" tIns="0" rIns="0" bIns="0" anchor="t">
             <a:spAutoFit/>
           </a:bodyPr>
           <a:lstStyle/>
@@ -19479,9 +19678,11 @@
           <a:effectLst/>
         </p:spPr>
         <p:txBody>
-          <a:bodyPr rtlCol="0" anchor="ctr" wrap="square"/>
-          <a:lstStyle/>
-          <a:p/>
+          <a:bodyPr wrap="square" rtlCol="0" anchor="ctr"/>
+          <a:lstStyle/>
+          <a:p>
+            <a:endParaRPr/>
+          </a:p>
         </p:txBody>
       </p:sp>
       <p:sp>
@@ -19501,7 +19702,7 @@
           <a:noFill/>
         </p:spPr>
         <p:txBody>
-          <a:bodyPr wrap="none" lIns="0" rIns="0" tIns="0" bIns="0" anchor="t">
+          <a:bodyPr wrap="none" lIns="0" tIns="0" rIns="0" bIns="0" anchor="t">
             <a:spAutoFit/>
           </a:bodyPr>
           <a:lstStyle/>
@@ -19549,9 +19750,11 @@
           <a:effectLst/>
         </p:spPr>
         <p:txBody>
-          <a:bodyPr rtlCol="0" anchor="ctr" wrap="square"/>
-          <a:lstStyle/>
-          <a:p/>
+          <a:bodyPr wrap="square" rtlCol="0" anchor="ctr"/>
+          <a:lstStyle/>
+          <a:p>
+            <a:endParaRPr/>
+          </a:p>
         </p:txBody>
       </p:sp>
       <p:sp>
@@ -19571,7 +19774,7 @@
           <a:noFill/>
         </p:spPr>
         <p:txBody>
-          <a:bodyPr wrap="none" lIns="0" rIns="0" tIns="0" bIns="0" anchor="t">
+          <a:bodyPr wrap="none" lIns="0" tIns="0" rIns="0" bIns="0" anchor="t">
             <a:spAutoFit/>
           </a:bodyPr>
           <a:lstStyle/>
@@ -19617,9 +19820,11 @@
           <a:effectLst/>
         </p:spPr>
         <p:txBody>
-          <a:bodyPr rtlCol="0" anchor="ctr" wrap="square"/>
-          <a:lstStyle/>
-          <a:p/>
+          <a:bodyPr wrap="square" rtlCol="0" anchor="ctr"/>
+          <a:lstStyle/>
+          <a:p>
+            <a:endParaRPr/>
+          </a:p>
         </p:txBody>
       </p:sp>
       <p:sp>
@@ -19639,7 +19844,7 @@
           <a:noFill/>
         </p:spPr>
         <p:txBody>
-          <a:bodyPr wrap="none" lIns="0" rIns="0" tIns="0" bIns="0" anchor="t">
+          <a:bodyPr wrap="none" lIns="0" tIns="0" rIns="0" bIns="0" anchor="t">
             <a:spAutoFit/>
           </a:bodyPr>
           <a:lstStyle/>
@@ -19700,7 +19905,7 @@
           <a:noFill/>
         </p:spPr>
         <p:txBody>
-          <a:bodyPr wrap="none" lIns="0" rIns="0" tIns="0" bIns="0" anchor="t">
+          <a:bodyPr wrap="none" lIns="0" tIns="0" rIns="0" bIns="0" anchor="t">
             <a:spAutoFit/>
           </a:bodyPr>
           <a:lstStyle/>
@@ -19762,7 +19967,7 @@
           <a:noFill/>
         </p:spPr>
         <p:txBody>
-          <a:bodyPr wrap="none" lIns="0" rIns="0" tIns="0" bIns="0" anchor="t">
+          <a:bodyPr wrap="none" lIns="0" tIns="0" rIns="0" bIns="0" anchor="t">
             <a:spAutoFit/>
           </a:bodyPr>
           <a:lstStyle/>
@@ -19809,9 +20014,11 @@
           <a:effectLst/>
         </p:spPr>
         <p:txBody>
-          <a:bodyPr rtlCol="0" anchor="ctr" wrap="square"/>
-          <a:lstStyle/>
-          <a:p/>
+          <a:bodyPr wrap="square" rtlCol="0" anchor="ctr"/>
+          <a:lstStyle/>
+          <a:p>
+            <a:endParaRPr/>
+          </a:p>
         </p:txBody>
       </p:sp>
       <p:sp>
@@ -19831,7 +20038,7 @@
           <a:noFill/>
         </p:spPr>
         <p:txBody>
-          <a:bodyPr wrap="none" lIns="0" rIns="0" tIns="0" bIns="0" anchor="t">
+          <a:bodyPr wrap="none" lIns="0" tIns="0" rIns="0" bIns="0" anchor="t">
             <a:spAutoFit/>
           </a:bodyPr>
           <a:lstStyle/>
@@ -19863,7 +20070,7 @@
 </file>
 
 <file path=ppt/slides/slide4.xml><?xml version="1.0" encoding="utf-8"?>
-<p:sld xmlns:a="http://schemas.openxmlformats.org/drawingml/2006/main" xmlns:p="http://schemas.openxmlformats.org/presentationml/2006/main" xmlns:r="http://schemas.openxmlformats.org/officeDocument/2006/relationships">
+<p:sld xmlns:a="http://schemas.openxmlformats.org/drawingml/2006/main" xmlns:r="http://schemas.openxmlformats.org/officeDocument/2006/relationships" xmlns:p="http://schemas.openxmlformats.org/presentationml/2006/main">
   <p:cSld>
     <p:spTree>
       <p:nvGrpSpPr>
@@ -19871,7 +20078,14 @@
         <p:cNvGrpSpPr/>
         <p:nvPr/>
       </p:nvGrpSpPr>
-      <p:grpSpPr/>
+      <p:grpSpPr>
+        <a:xfrm>
+          <a:off x="0" y="0"/>
+          <a:ext cx="0" cy="0"/>
+          <a:chOff x="0" y="0"/>
+          <a:chExt cx="0" cy="0"/>
+        </a:xfrm>
+      </p:grpSpPr>
       <p:sp>
         <p:nvSpPr>
           <p:cNvPr id="2" name="TextBox 1"/>
@@ -19889,7 +20103,7 @@
           <a:noFill/>
         </p:spPr>
         <p:txBody>
-          <a:bodyPr wrap="square" lIns="0" rIns="0" tIns="0" bIns="0" anchor="t">
+          <a:bodyPr wrap="square" lIns="0" tIns="0" rIns="0" bIns="0" anchor="t">
             <a:spAutoFit/>
           </a:bodyPr>
           <a:lstStyle/>
@@ -19900,7 +20114,7 @@
               </a:lnSpc>
             </a:pPr>
             <a:r>
-              <a:rPr sz="800" b="1" i="0" dirty="0" spc="140">
+              <a:rPr sz="800" b="1" i="0" spc="140" dirty="0">
                 <a:solidFill>
                   <a:srgbClr val="008173"/>
                 </a:solidFill>
@@ -19929,7 +20143,7 @@
           <a:noFill/>
         </p:spPr>
         <p:txBody>
-          <a:bodyPr wrap="square" lIns="0" rIns="0" tIns="0" bIns="0" anchor="t">
+          <a:bodyPr wrap="square" lIns="0" tIns="0" rIns="0" bIns="0" anchor="t">
             <a:spAutoFit/>
           </a:bodyPr>
           <a:lstStyle/>
@@ -19969,7 +20183,7 @@
           <a:noFill/>
         </p:spPr>
         <p:txBody>
-          <a:bodyPr wrap="square" lIns="0" rIns="0" tIns="0" bIns="0" anchor="t">
+          <a:bodyPr wrap="square" lIns="0" tIns="0" rIns="0" bIns="0" anchor="t">
             <a:spAutoFit/>
           </a:bodyPr>
           <a:lstStyle/>
@@ -20009,7 +20223,7 @@
           <a:noFill/>
         </p:spPr>
         <p:txBody>
-          <a:bodyPr wrap="square" lIns="0" rIns="0" tIns="0" bIns="0" anchor="t">
+          <a:bodyPr wrap="square" lIns="0" tIns="0" rIns="0" bIns="0" anchor="t">
             <a:spAutoFit/>
           </a:bodyPr>
           <a:lstStyle/>
@@ -20049,7 +20263,7 @@
           <a:noFill/>
         </p:spPr>
         <p:txBody>
-          <a:bodyPr wrap="square" lIns="0" rIns="0" tIns="0" bIns="0" anchor="t">
+          <a:bodyPr wrap="square" lIns="0" tIns="0" rIns="0" bIns="0" anchor="t">
             <a:spAutoFit/>
           </a:bodyPr>
           <a:lstStyle/>
@@ -20095,7 +20309,7 @@
           <a:effectLst/>
         </p:spPr>
         <p:txBody>
-          <a:bodyPr rtlCol="0" anchor="ctr" wrap="square" lIns="54864" rIns="54864" tIns="18288" bIns="18288"/>
+          <a:bodyPr wrap="square" lIns="54864" tIns="18288" rIns="54864" bIns="18288" rtlCol="0" anchor="ctr"/>
           <a:lstStyle/>
           <a:p>
             <a:pPr algn="ctr">
@@ -20133,7 +20347,7 @@
           <a:noFill/>
         </p:spPr>
         <p:txBody>
-          <a:bodyPr wrap="square" lIns="0" rIns="0" tIns="0" bIns="0" anchor="ctr">
+          <a:bodyPr wrap="square" lIns="0" tIns="0" rIns="0" bIns="0" anchor="ctr">
             <a:spAutoFit/>
           </a:bodyPr>
           <a:lstStyle/>
@@ -20179,7 +20393,7 @@
           <a:effectLst/>
         </p:spPr>
         <p:txBody>
-          <a:bodyPr rtlCol="0" anchor="ctr" wrap="square" lIns="54864" rIns="54864" tIns="18288" bIns="18288"/>
+          <a:bodyPr wrap="square" lIns="54864" tIns="18288" rIns="54864" bIns="18288" rtlCol="0" anchor="ctr"/>
           <a:lstStyle/>
           <a:p>
             <a:pPr algn="ctr">
@@ -20217,7 +20431,7 @@
           <a:noFill/>
         </p:spPr>
         <p:txBody>
-          <a:bodyPr wrap="square" lIns="0" rIns="0" tIns="0" bIns="0" anchor="ctr">
+          <a:bodyPr wrap="square" lIns="0" tIns="0" rIns="0" bIns="0" anchor="ctr">
             <a:spAutoFit/>
           </a:bodyPr>
           <a:lstStyle/>
@@ -20263,7 +20477,7 @@
           <a:effectLst/>
         </p:spPr>
         <p:txBody>
-          <a:bodyPr rtlCol="0" anchor="ctr" wrap="square" lIns="54864" rIns="54864" tIns="18288" bIns="18288"/>
+          <a:bodyPr wrap="square" lIns="54864" tIns="18288" rIns="54864" bIns="18288" rtlCol="0" anchor="ctr"/>
           <a:lstStyle/>
           <a:p>
             <a:pPr algn="ctr">
@@ -20301,7 +20515,7 @@
           <a:noFill/>
         </p:spPr>
         <p:txBody>
-          <a:bodyPr wrap="square" lIns="0" rIns="0" tIns="0" bIns="0" anchor="ctr">
+          <a:bodyPr wrap="square" lIns="0" tIns="0" rIns="0" bIns="0" anchor="ctr">
             <a:spAutoFit/>
           </a:bodyPr>
           <a:lstStyle/>
@@ -20347,7 +20561,7 @@
           <a:effectLst/>
         </p:spPr>
         <p:txBody>
-          <a:bodyPr rtlCol="0" anchor="ctr" wrap="square" lIns="54864" rIns="54864" tIns="18288" bIns="18288"/>
+          <a:bodyPr wrap="square" lIns="54864" tIns="18288" rIns="54864" bIns="18288" rtlCol="0" anchor="ctr"/>
           <a:lstStyle/>
           <a:p>
             <a:pPr algn="ctr">
@@ -20385,7 +20599,7 @@
           <a:noFill/>
         </p:spPr>
         <p:txBody>
-          <a:bodyPr wrap="square" lIns="0" rIns="0" tIns="0" bIns="0" anchor="t">
+          <a:bodyPr wrap="square" lIns="0" tIns="0" rIns="0" bIns="0" anchor="t">
             <a:spAutoFit/>
           </a:bodyPr>
           <a:lstStyle/>
@@ -20396,7 +20610,7 @@
               </a:lnSpc>
             </a:pPr>
             <a:r>
-              <a:rPr sz="800" b="1" i="0" dirty="0" spc="120">
+              <a:rPr sz="800" b="1" i="0" spc="120" dirty="0">
                 <a:solidFill>
                   <a:srgbClr val="008173"/>
                 </a:solidFill>
@@ -20431,7 +20645,7 @@
           <a:effectLst/>
         </p:spPr>
         <p:txBody>
-          <a:bodyPr rtlCol="0" anchor="ctr" wrap="square" lIns="54864" rIns="54864" tIns="18288" bIns="18288"/>
+          <a:bodyPr wrap="square" lIns="54864" tIns="18288" rIns="54864" bIns="18288" rtlCol="0" anchor="ctr"/>
           <a:lstStyle/>
           <a:p>
             <a:pPr algn="ctr">
@@ -20516,7 +20730,7 @@
           <a:effectLst/>
         </p:spPr>
         <p:txBody>
-          <a:bodyPr rtlCol="0" anchor="ctr" wrap="square" lIns="54864" rIns="54864" tIns="18288" bIns="18288"/>
+          <a:bodyPr wrap="square" lIns="54864" tIns="18288" rIns="54864" bIns="18288" rtlCol="0" anchor="ctr"/>
           <a:lstStyle/>
           <a:p>
             <a:pPr algn="ctr">
@@ -20601,7 +20815,7 @@
           <a:effectLst/>
         </p:spPr>
         <p:txBody>
-          <a:bodyPr rtlCol="0" anchor="ctr" wrap="square" lIns="54864" rIns="54864" tIns="18288" bIns="18288"/>
+          <a:bodyPr wrap="square" lIns="54864" tIns="18288" rIns="54864" bIns="18288" rtlCol="0" anchor="ctr"/>
           <a:lstStyle/>
           <a:p>
             <a:pPr algn="ctr">
@@ -20684,7 +20898,7 @@
           <a:effectLst/>
         </p:spPr>
         <p:txBody>
-          <a:bodyPr rtlCol="0" anchor="ctr" wrap="square" lIns="54864" rIns="54864" tIns="18288" bIns="18288"/>
+          <a:bodyPr wrap="square" lIns="54864" tIns="18288" rIns="54864" bIns="18288" rtlCol="0" anchor="ctr"/>
           <a:lstStyle/>
           <a:p>
             <a:pPr algn="ctr">
@@ -20745,9 +20959,11 @@
           <a:effectLst/>
         </p:spPr>
         <p:txBody>
-          <a:bodyPr rtlCol="0" anchor="ctr" wrap="square"/>
-          <a:lstStyle/>
-          <a:p/>
+          <a:bodyPr wrap="square" rtlCol="0" anchor="ctr"/>
+          <a:lstStyle/>
+          <a:p>
+            <a:endParaRPr/>
+          </a:p>
         </p:txBody>
       </p:sp>
       <p:sp>
@@ -20767,7 +20983,7 @@
           <a:noFill/>
         </p:spPr>
         <p:txBody>
-          <a:bodyPr wrap="none" lIns="0" rIns="0" tIns="0" bIns="0" anchor="t">
+          <a:bodyPr wrap="none" lIns="0" tIns="0" rIns="0" bIns="0" anchor="t">
             <a:spAutoFit/>
           </a:bodyPr>
           <a:lstStyle/>
@@ -20807,7 +21023,7 @@
           <a:noFill/>
         </p:spPr>
         <p:txBody>
-          <a:bodyPr wrap="none" lIns="0" rIns="0" tIns="0" bIns="0" anchor="t">
+          <a:bodyPr wrap="none" lIns="0" tIns="0" rIns="0" bIns="0" anchor="t">
             <a:spAutoFit/>
           </a:bodyPr>
           <a:lstStyle/>
@@ -20847,7 +21063,7 @@
           <a:noFill/>
         </p:spPr>
         <p:txBody>
-          <a:bodyPr wrap="none" lIns="0" rIns="0" tIns="0" bIns="0" anchor="t">
+          <a:bodyPr wrap="none" lIns="0" tIns="0" rIns="0" bIns="0" anchor="t">
             <a:spAutoFit/>
           </a:bodyPr>
           <a:lstStyle/>
@@ -20893,9 +21109,11 @@
           <a:effectLst/>
         </p:spPr>
         <p:txBody>
-          <a:bodyPr rtlCol="0" anchor="ctr" wrap="square"/>
-          <a:lstStyle/>
-          <a:p/>
+          <a:bodyPr wrap="square" rtlCol="0" anchor="ctr"/>
+          <a:lstStyle/>
+          <a:p>
+            <a:endParaRPr/>
+          </a:p>
         </p:txBody>
       </p:sp>
       <p:cxnSp>
@@ -20936,7 +21154,7 @@
           <a:noFill/>
         </p:spPr>
         <p:txBody>
-          <a:bodyPr wrap="square" lIns="0" rIns="0" tIns="0" bIns="0" anchor="ctr">
+          <a:bodyPr wrap="square" lIns="0" tIns="0" rIns="0" bIns="0" anchor="ctr">
             <a:spAutoFit/>
           </a:bodyPr>
           <a:lstStyle/>
@@ -20976,7 +21194,7 @@
           <a:noFill/>
         </p:spPr>
         <p:txBody>
-          <a:bodyPr wrap="square" lIns="0" rIns="0" tIns="0" bIns="0" anchor="ctr">
+          <a:bodyPr wrap="square" lIns="0" tIns="0" rIns="0" bIns="0" anchor="ctr">
             <a:spAutoFit/>
           </a:bodyPr>
           <a:lstStyle/>
@@ -21016,7 +21234,7 @@
           <a:noFill/>
         </p:spPr>
         <p:txBody>
-          <a:bodyPr wrap="square" lIns="0" rIns="0" tIns="0" bIns="0" anchor="ctr">
+          <a:bodyPr wrap="square" lIns="0" tIns="0" rIns="0" bIns="0" anchor="ctr">
             <a:spAutoFit/>
           </a:bodyPr>
           <a:lstStyle/>
@@ -21077,7 +21295,7 @@
           <a:noFill/>
         </p:spPr>
         <p:txBody>
-          <a:bodyPr wrap="square" lIns="0" rIns="0" tIns="0" bIns="0" anchor="ctr">
+          <a:bodyPr wrap="square" lIns="0" tIns="0" rIns="0" bIns="0" anchor="ctr">
             <a:spAutoFit/>
           </a:bodyPr>
           <a:lstStyle/>
@@ -21117,7 +21335,7 @@
           <a:noFill/>
         </p:spPr>
         <p:txBody>
-          <a:bodyPr wrap="square" lIns="0" rIns="0" tIns="0" bIns="0" anchor="ctr">
+          <a:bodyPr wrap="square" lIns="0" tIns="0" rIns="0" bIns="0" anchor="ctr">
             <a:spAutoFit/>
           </a:bodyPr>
           <a:lstStyle/>
@@ -21157,7 +21375,7 @@
           <a:noFill/>
         </p:spPr>
         <p:txBody>
-          <a:bodyPr wrap="square" lIns="0" rIns="0" tIns="0" bIns="0" anchor="ctr">
+          <a:bodyPr wrap="square" lIns="0" tIns="0" rIns="0" bIns="0" anchor="ctr">
             <a:spAutoFit/>
           </a:bodyPr>
           <a:lstStyle/>
@@ -21203,9 +21421,11 @@
           <a:effectLst/>
         </p:spPr>
         <p:txBody>
-          <a:bodyPr rtlCol="0" anchor="ctr" wrap="square"/>
-          <a:lstStyle/>
-          <a:p/>
+          <a:bodyPr wrap="square" rtlCol="0" anchor="ctr"/>
+          <a:lstStyle/>
+          <a:p>
+            <a:endParaRPr/>
+          </a:p>
         </p:txBody>
       </p:sp>
       <p:cxnSp>
@@ -21246,7 +21466,7 @@
           <a:noFill/>
         </p:spPr>
         <p:txBody>
-          <a:bodyPr wrap="square" lIns="0" rIns="0" tIns="0" bIns="0" anchor="ctr">
+          <a:bodyPr wrap="square" lIns="0" tIns="0" rIns="0" bIns="0" anchor="ctr">
             <a:spAutoFit/>
           </a:bodyPr>
           <a:lstStyle/>
@@ -21286,7 +21506,7 @@
           <a:noFill/>
         </p:spPr>
         <p:txBody>
-          <a:bodyPr wrap="square" lIns="0" rIns="0" tIns="0" bIns="0" anchor="ctr">
+          <a:bodyPr wrap="square" lIns="0" tIns="0" rIns="0" bIns="0" anchor="ctr">
             <a:spAutoFit/>
           </a:bodyPr>
           <a:lstStyle/>
@@ -21326,7 +21546,7 @@
           <a:noFill/>
         </p:spPr>
         <p:txBody>
-          <a:bodyPr wrap="square" lIns="0" rIns="0" tIns="0" bIns="0" anchor="ctr">
+          <a:bodyPr wrap="square" lIns="0" tIns="0" rIns="0" bIns="0" anchor="ctr">
             <a:spAutoFit/>
           </a:bodyPr>
           <a:lstStyle/>
@@ -21387,7 +21607,7 @@
           <a:noFill/>
         </p:spPr>
         <p:txBody>
-          <a:bodyPr wrap="square" lIns="0" rIns="0" tIns="0" bIns="0" anchor="ctr">
+          <a:bodyPr wrap="square" lIns="0" tIns="0" rIns="0" bIns="0" anchor="ctr">
             <a:spAutoFit/>
           </a:bodyPr>
           <a:lstStyle/>
@@ -21427,7 +21647,7 @@
           <a:noFill/>
         </p:spPr>
         <p:txBody>
-          <a:bodyPr wrap="square" lIns="0" rIns="0" tIns="0" bIns="0" anchor="ctr">
+          <a:bodyPr wrap="square" lIns="0" tIns="0" rIns="0" bIns="0" anchor="ctr">
             <a:spAutoFit/>
           </a:bodyPr>
           <a:lstStyle/>
@@ -21467,7 +21687,7 @@
           <a:noFill/>
         </p:spPr>
         <p:txBody>
-          <a:bodyPr wrap="square" lIns="0" rIns="0" tIns="0" bIns="0" anchor="ctr">
+          <a:bodyPr wrap="square" lIns="0" tIns="0" rIns="0" bIns="0" anchor="ctr">
             <a:spAutoFit/>
           </a:bodyPr>
           <a:lstStyle/>
@@ -21513,9 +21733,11 @@
           <a:effectLst/>
         </p:spPr>
         <p:txBody>
-          <a:bodyPr rtlCol="0" anchor="ctr" wrap="square"/>
-          <a:lstStyle/>
-          <a:p/>
+          <a:bodyPr wrap="square" rtlCol="0" anchor="ctr"/>
+          <a:lstStyle/>
+          <a:p>
+            <a:endParaRPr/>
+          </a:p>
         </p:txBody>
       </p:sp>
       <p:cxnSp>
@@ -21556,7 +21778,7 @@
           <a:noFill/>
         </p:spPr>
         <p:txBody>
-          <a:bodyPr wrap="square" lIns="0" rIns="0" tIns="0" bIns="0" anchor="ctr">
+          <a:bodyPr wrap="square" lIns="0" tIns="0" rIns="0" bIns="0" anchor="ctr">
             <a:spAutoFit/>
           </a:bodyPr>
           <a:lstStyle/>
@@ -21596,7 +21818,7 @@
           <a:noFill/>
         </p:spPr>
         <p:txBody>
-          <a:bodyPr wrap="square" lIns="0" rIns="0" tIns="0" bIns="0" anchor="ctr">
+          <a:bodyPr wrap="square" lIns="0" tIns="0" rIns="0" bIns="0" anchor="ctr">
             <a:spAutoFit/>
           </a:bodyPr>
           <a:lstStyle/>
@@ -21636,7 +21858,7 @@
           <a:noFill/>
         </p:spPr>
         <p:txBody>
-          <a:bodyPr wrap="square" lIns="0" rIns="0" tIns="0" bIns="0" anchor="ctr">
+          <a:bodyPr wrap="square" lIns="0" tIns="0" rIns="0" bIns="0" anchor="ctr">
             <a:spAutoFit/>
           </a:bodyPr>
           <a:lstStyle/>
@@ -21726,9 +21948,11 @@
           <a:effectLst/>
         </p:spPr>
         <p:txBody>
-          <a:bodyPr rtlCol="0" anchor="ctr" wrap="square"/>
-          <a:lstStyle/>
-          <a:p/>
+          <a:bodyPr wrap="square" rtlCol="0" anchor="ctr"/>
+          <a:lstStyle/>
+          <a:p>
+            <a:endParaRPr/>
+          </a:p>
         </p:txBody>
       </p:sp>
       <p:sp>
@@ -21754,9 +21978,11 @@
           <a:effectLst/>
         </p:spPr>
         <p:txBody>
-          <a:bodyPr rtlCol="0" anchor="ctr" wrap="square"/>
-          <a:lstStyle/>
-          <a:p/>
+          <a:bodyPr wrap="square" rtlCol="0" anchor="ctr"/>
+          <a:lstStyle/>
+          <a:p>
+            <a:endParaRPr/>
+          </a:p>
         </p:txBody>
       </p:sp>
       <p:sp>
@@ -21776,7 +22002,7 @@
           <a:noFill/>
         </p:spPr>
         <p:txBody>
-          <a:bodyPr wrap="square" lIns="0" rIns="0" tIns="0" bIns="0" anchor="t">
+          <a:bodyPr wrap="square" lIns="0" tIns="0" rIns="0" bIns="0" anchor="t">
             <a:spAutoFit/>
           </a:bodyPr>
           <a:lstStyle/>
@@ -21816,7 +22042,7 @@
           <a:noFill/>
         </p:spPr>
         <p:txBody>
-          <a:bodyPr wrap="square" lIns="0" rIns="0" tIns="0" bIns="0" anchor="t">
+          <a:bodyPr wrap="square" lIns="0" tIns="0" rIns="0" bIns="0" anchor="t">
             <a:spAutoFit/>
           </a:bodyPr>
           <a:lstStyle/>
@@ -21887,9 +22113,11 @@
           <a:effectLst/>
         </p:spPr>
         <p:txBody>
-          <a:bodyPr rtlCol="0" anchor="ctr" wrap="square"/>
-          <a:lstStyle/>
-          <a:p/>
+          <a:bodyPr wrap="square" rtlCol="0" anchor="ctr"/>
+          <a:lstStyle/>
+          <a:p>
+            <a:endParaRPr/>
+          </a:p>
         </p:txBody>
       </p:sp>
       <p:sp>
@@ -21915,9 +22143,11 @@
           <a:effectLst/>
         </p:spPr>
         <p:txBody>
-          <a:bodyPr rtlCol="0" anchor="ctr" wrap="square"/>
-          <a:lstStyle/>
-          <a:p/>
+          <a:bodyPr wrap="square" rtlCol="0" anchor="ctr"/>
+          <a:lstStyle/>
+          <a:p>
+            <a:endParaRPr/>
+          </a:p>
         </p:txBody>
       </p:sp>
       <p:sp>
@@ -21937,7 +22167,7 @@
           <a:noFill/>
         </p:spPr>
         <p:txBody>
-          <a:bodyPr wrap="square" lIns="0" rIns="0" tIns="0" bIns="0" anchor="t">
+          <a:bodyPr wrap="square" lIns="0" tIns="0" rIns="0" bIns="0" anchor="t">
             <a:spAutoFit/>
           </a:bodyPr>
           <a:lstStyle/>
@@ -21977,7 +22207,7 @@
           <a:noFill/>
         </p:spPr>
         <p:txBody>
-          <a:bodyPr wrap="square" lIns="0" rIns="0" tIns="0" bIns="0" anchor="t">
+          <a:bodyPr wrap="square" lIns="0" tIns="0" rIns="0" bIns="0" anchor="t">
             <a:spAutoFit/>
           </a:bodyPr>
           <a:lstStyle/>
@@ -22048,9 +22278,11 @@
           <a:effectLst/>
         </p:spPr>
         <p:txBody>
-          <a:bodyPr rtlCol="0" anchor="ctr" wrap="square"/>
-          <a:lstStyle/>
-          <a:p/>
+          <a:bodyPr wrap="square" rtlCol="0" anchor="ctr"/>
+          <a:lstStyle/>
+          <a:p>
+            <a:endParaRPr/>
+          </a:p>
         </p:txBody>
       </p:sp>
       <p:sp>
@@ -22076,9 +22308,11 @@
           <a:effectLst/>
         </p:spPr>
         <p:txBody>
-          <a:bodyPr rtlCol="0" anchor="ctr" wrap="square"/>
-          <a:lstStyle/>
-          <a:p/>
+          <a:bodyPr wrap="square" rtlCol="0" anchor="ctr"/>
+          <a:lstStyle/>
+          <a:p>
+            <a:endParaRPr/>
+          </a:p>
         </p:txBody>
       </p:sp>
       <p:sp>
@@ -22098,7 +22332,7 @@
           <a:noFill/>
         </p:spPr>
         <p:txBody>
-          <a:bodyPr wrap="square" lIns="0" rIns="0" tIns="0" bIns="0" anchor="t">
+          <a:bodyPr wrap="square" lIns="0" tIns="0" rIns="0" bIns="0" anchor="t">
             <a:spAutoFit/>
           </a:bodyPr>
           <a:lstStyle/>
@@ -22138,7 +22372,7 @@
           <a:noFill/>
         </p:spPr>
         <p:txBody>
-          <a:bodyPr wrap="square" lIns="0" rIns="0" tIns="0" bIns="0" anchor="t">
+          <a:bodyPr wrap="square" lIns="0" tIns="0" rIns="0" bIns="0" anchor="t">
             <a:spAutoFit/>
           </a:bodyPr>
           <a:lstStyle/>
@@ -22201,7 +22435,7 @@
           <a:noFill/>
         </p:spPr>
         <p:txBody>
-          <a:bodyPr wrap="square" lIns="0" rIns="0" tIns="0" bIns="0" anchor="t">
+          <a:bodyPr wrap="square" lIns="0" tIns="0" rIns="0" bIns="0" anchor="t">
             <a:spAutoFit/>
           </a:bodyPr>
           <a:lstStyle/>
@@ -22241,7 +22475,7 @@
           <a:noFill/>
         </p:spPr>
         <p:txBody>
-          <a:bodyPr wrap="square" lIns="0" rIns="0" tIns="0" bIns="0" anchor="t">
+          <a:bodyPr wrap="square" lIns="0" tIns="0" rIns="0" bIns="0" anchor="t">
             <a:spAutoFit/>
           </a:bodyPr>
           <a:lstStyle/>
@@ -22287,9 +22521,11 @@
           <a:effectLst/>
         </p:spPr>
         <p:txBody>
-          <a:bodyPr rtlCol="0" anchor="ctr" wrap="square"/>
-          <a:lstStyle/>
-          <a:p/>
+          <a:bodyPr wrap="square" rtlCol="0" anchor="ctr"/>
+          <a:lstStyle/>
+          <a:p>
+            <a:endParaRPr/>
+          </a:p>
         </p:txBody>
       </p:sp>
       <p:sp>
@@ -22309,7 +22545,7 @@
           <a:noFill/>
         </p:spPr>
         <p:txBody>
-          <a:bodyPr wrap="none" lIns="0" rIns="0" tIns="0" bIns="0" anchor="t">
+          <a:bodyPr wrap="none" lIns="0" tIns="0" rIns="0" bIns="0" anchor="t">
             <a:spAutoFit/>
           </a:bodyPr>
           <a:lstStyle/>
@@ -22357,9 +22593,11 @@
           <a:effectLst/>
         </p:spPr>
         <p:txBody>
-          <a:bodyPr rtlCol="0" anchor="ctr" wrap="square"/>
-          <a:lstStyle/>
-          <a:p/>
+          <a:bodyPr wrap="square" rtlCol="0" anchor="ctr"/>
+          <a:lstStyle/>
+          <a:p>
+            <a:endParaRPr/>
+          </a:p>
         </p:txBody>
       </p:sp>
       <p:sp>
@@ -22379,7 +22617,7 @@
           <a:noFill/>
         </p:spPr>
         <p:txBody>
-          <a:bodyPr wrap="none" lIns="0" rIns="0" tIns="0" bIns="0" anchor="t">
+          <a:bodyPr wrap="none" lIns="0" tIns="0" rIns="0" bIns="0" anchor="t">
             <a:spAutoFit/>
           </a:bodyPr>
           <a:lstStyle/>
@@ -22411,7 +22649,7 @@
 </file>
 
 <file path=ppt/slides/slide5.xml><?xml version="1.0" encoding="utf-8"?>
-<p:sld xmlns:a="http://schemas.openxmlformats.org/drawingml/2006/main" xmlns:p="http://schemas.openxmlformats.org/presentationml/2006/main" xmlns:r="http://schemas.openxmlformats.org/officeDocument/2006/relationships">
+<p:sld xmlns:a="http://schemas.openxmlformats.org/drawingml/2006/main" xmlns:r="http://schemas.openxmlformats.org/officeDocument/2006/relationships" xmlns:p="http://schemas.openxmlformats.org/presentationml/2006/main">
   <p:cSld>
     <p:spTree>
       <p:nvGrpSpPr>
@@ -22419,7 +22657,14 @@
         <p:cNvGrpSpPr/>
         <p:nvPr/>
       </p:nvGrpSpPr>
-      <p:grpSpPr/>
+      <p:grpSpPr>
+        <a:xfrm>
+          <a:off x="0" y="0"/>
+          <a:ext cx="0" cy="0"/>
+          <a:chOff x="0" y="0"/>
+          <a:chExt cx="0" cy="0"/>
+        </a:xfrm>
+      </p:grpSpPr>
       <p:sp>
         <p:nvSpPr>
           <p:cNvPr id="2" name="TextBox 1"/>
@@ -22437,7 +22682,7 @@
           <a:noFill/>
         </p:spPr>
         <p:txBody>
-          <a:bodyPr wrap="square" lIns="0" rIns="0" tIns="0" bIns="0" anchor="t">
+          <a:bodyPr wrap="square" lIns="0" tIns="0" rIns="0" bIns="0" anchor="t">
             <a:spAutoFit/>
           </a:bodyPr>
           <a:lstStyle/>
@@ -22448,7 +22693,7 @@
               </a:lnSpc>
             </a:pPr>
             <a:r>
-              <a:rPr sz="800" b="1" i="0" dirty="0" spc="140">
+              <a:rPr sz="800" b="1" i="0" spc="140" dirty="0">
                 <a:solidFill>
                   <a:srgbClr val="008173"/>
                 </a:solidFill>
@@ -22477,7 +22722,7 @@
           <a:noFill/>
         </p:spPr>
         <p:txBody>
-          <a:bodyPr wrap="square" lIns="0" rIns="0" tIns="0" bIns="0" anchor="t">
+          <a:bodyPr wrap="square" lIns="0" tIns="0" rIns="0" bIns="0" anchor="t">
             <a:spAutoFit/>
           </a:bodyPr>
           <a:lstStyle/>
@@ -22517,7 +22762,7 @@
           <a:noFill/>
         </p:spPr>
         <p:txBody>
-          <a:bodyPr wrap="square" lIns="0" rIns="0" tIns="0" bIns="0" anchor="t">
+          <a:bodyPr wrap="square" lIns="0" tIns="0" rIns="0" bIns="0" anchor="t">
             <a:spAutoFit/>
           </a:bodyPr>
           <a:lstStyle/>
@@ -22557,7 +22802,7 @@
           <a:noFill/>
         </p:spPr>
         <p:txBody>
-          <a:bodyPr wrap="square" lIns="0" rIns="0" tIns="0" bIns="0" anchor="t">
+          <a:bodyPr wrap="square" lIns="0" tIns="0" rIns="0" bIns="0" anchor="t">
             <a:spAutoFit/>
           </a:bodyPr>
           <a:lstStyle/>
@@ -22597,7 +22842,7 @@
           <a:noFill/>
         </p:spPr>
         <p:txBody>
-          <a:bodyPr wrap="square" lIns="0" rIns="0" tIns="0" bIns="0" anchor="t">
+          <a:bodyPr wrap="square" lIns="0" tIns="0" rIns="0" bIns="0" anchor="t">
             <a:spAutoFit/>
           </a:bodyPr>
           <a:lstStyle/>
@@ -22643,9 +22888,11 @@
           <a:effectLst/>
         </p:spPr>
         <p:txBody>
-          <a:bodyPr rtlCol="0" anchor="ctr" wrap="square"/>
-          <a:lstStyle/>
-          <a:p/>
+          <a:bodyPr wrap="square" rtlCol="0" anchor="ctr"/>
+          <a:lstStyle/>
+          <a:p>
+            <a:endParaRPr/>
+          </a:p>
         </p:txBody>
       </p:sp>
       <p:sp>
@@ -22665,7 +22912,7 @@
           <a:noFill/>
         </p:spPr>
         <p:txBody>
-          <a:bodyPr wrap="square" lIns="0" rIns="0" tIns="0" bIns="0" anchor="t">
+          <a:bodyPr wrap="square" lIns="0" tIns="0" rIns="0" bIns="0" anchor="t">
             <a:spAutoFit/>
           </a:bodyPr>
           <a:lstStyle/>
@@ -22676,7 +22923,7 @@
               </a:lnSpc>
             </a:pPr>
             <a:r>
-              <a:rPr sz="800" b="1" i="0" dirty="0" spc="100">
+              <a:rPr sz="800" b="1" i="0" spc="100" dirty="0">
                 <a:solidFill>
                   <a:srgbClr val="101A3C"/>
                 </a:solidFill>
@@ -22705,7 +22952,7 @@
           <a:noFill/>
         </p:spPr>
         <p:txBody>
-          <a:bodyPr wrap="square" lIns="0" rIns="0" tIns="0" bIns="0" anchor="t">
+          <a:bodyPr wrap="square" lIns="0" tIns="0" rIns="0" bIns="0" anchor="t">
             <a:spAutoFit/>
           </a:bodyPr>
           <a:lstStyle/>
@@ -22716,7 +22963,7 @@
               </a:lnSpc>
             </a:pPr>
             <a:r>
-              <a:rPr sz="800" b="1" i="0" dirty="0" spc="100">
+              <a:rPr sz="800" b="1" i="0" spc="100" dirty="0">
                 <a:solidFill>
                   <a:srgbClr val="101A3C"/>
                 </a:solidFill>
@@ -22751,9 +22998,11 @@
           <a:effectLst/>
         </p:spPr>
         <p:txBody>
-          <a:bodyPr rtlCol="0" anchor="ctr" wrap="square"/>
-          <a:lstStyle/>
-          <a:p/>
+          <a:bodyPr wrap="square" rtlCol="0" anchor="ctr"/>
+          <a:lstStyle/>
+          <a:p>
+            <a:endParaRPr/>
+          </a:p>
         </p:txBody>
       </p:sp>
       <p:sp>
@@ -22773,7 +23022,7 @@
           <a:noFill/>
         </p:spPr>
         <p:txBody>
-          <a:bodyPr wrap="none" lIns="0" rIns="0" tIns="0" bIns="0" anchor="t">
+          <a:bodyPr wrap="none" lIns="0" tIns="0" rIns="0" bIns="0" anchor="t">
             <a:spAutoFit/>
           </a:bodyPr>
           <a:lstStyle/>
@@ -22813,7 +23062,7 @@
           <a:noFill/>
         </p:spPr>
         <p:txBody>
-          <a:bodyPr wrap="none" lIns="0" rIns="0" tIns="0" bIns="0" anchor="t">
+          <a:bodyPr wrap="none" lIns="0" tIns="0" rIns="0" bIns="0" anchor="t">
             <a:spAutoFit/>
           </a:bodyPr>
           <a:lstStyle/>
@@ -22853,7 +23102,7 @@
           <a:noFill/>
         </p:spPr>
         <p:txBody>
-          <a:bodyPr wrap="none" lIns="0" rIns="0" tIns="0" bIns="0" anchor="t">
+          <a:bodyPr wrap="none" lIns="0" tIns="0" rIns="0" bIns="0" anchor="t">
             <a:spAutoFit/>
           </a:bodyPr>
           <a:lstStyle/>
@@ -22893,7 +23142,7 @@
           <a:noFill/>
         </p:spPr>
         <p:txBody>
-          <a:bodyPr wrap="none" lIns="0" rIns="0" tIns="0" bIns="0" anchor="t">
+          <a:bodyPr wrap="none" lIns="0" tIns="0" rIns="0" bIns="0" anchor="t">
             <a:spAutoFit/>
           </a:bodyPr>
           <a:lstStyle/>
@@ -22939,9 +23188,11 @@
           <a:effectLst/>
         </p:spPr>
         <p:txBody>
-          <a:bodyPr rtlCol="0" anchor="ctr" wrap="square"/>
-          <a:lstStyle/>
-          <a:p/>
+          <a:bodyPr wrap="square" rtlCol="0" anchor="ctr"/>
+          <a:lstStyle/>
+          <a:p>
+            <a:endParaRPr/>
+          </a:p>
         </p:txBody>
       </p:sp>
       <p:cxnSp>
@@ -22982,7 +23233,7 @@
           <a:noFill/>
         </p:spPr>
         <p:txBody>
-          <a:bodyPr wrap="square" lIns="0" rIns="0" tIns="0" bIns="0" anchor="ctr">
+          <a:bodyPr wrap="square" lIns="0" tIns="0" rIns="0" bIns="0" anchor="ctr">
             <a:spAutoFit/>
           </a:bodyPr>
           <a:lstStyle/>
@@ -23022,7 +23273,7 @@
           <a:noFill/>
         </p:spPr>
         <p:txBody>
-          <a:bodyPr wrap="square" lIns="0" rIns="0" tIns="0" bIns="0" anchor="ctr">
+          <a:bodyPr wrap="square" lIns="0" tIns="0" rIns="0" bIns="0" anchor="ctr">
             <a:spAutoFit/>
           </a:bodyPr>
           <a:lstStyle/>
@@ -23062,7 +23313,7 @@
           <a:noFill/>
         </p:spPr>
         <p:txBody>
-          <a:bodyPr wrap="square" lIns="0" rIns="0" tIns="0" bIns="0" anchor="ctr">
+          <a:bodyPr wrap="square" lIns="0" tIns="0" rIns="0" bIns="0" anchor="ctr">
             <a:spAutoFit/>
           </a:bodyPr>
           <a:lstStyle/>
@@ -23102,7 +23353,7 @@
           <a:noFill/>
         </p:spPr>
         <p:txBody>
-          <a:bodyPr wrap="square" lIns="0" rIns="0" tIns="0" bIns="0" anchor="ctr">
+          <a:bodyPr wrap="square" lIns="0" tIns="0" rIns="0" bIns="0" anchor="ctr">
             <a:spAutoFit/>
           </a:bodyPr>
           <a:lstStyle/>
@@ -23163,7 +23414,7 @@
           <a:noFill/>
         </p:spPr>
         <p:txBody>
-          <a:bodyPr wrap="square" lIns="0" rIns="0" tIns="0" bIns="0" anchor="ctr">
+          <a:bodyPr wrap="square" lIns="0" tIns="0" rIns="0" bIns="0" anchor="ctr">
             <a:spAutoFit/>
           </a:bodyPr>
           <a:lstStyle/>
@@ -23203,7 +23454,7 @@
           <a:noFill/>
         </p:spPr>
         <p:txBody>
-          <a:bodyPr wrap="square" lIns="0" rIns="0" tIns="0" bIns="0" anchor="ctr">
+          <a:bodyPr wrap="square" lIns="0" tIns="0" rIns="0" bIns="0" anchor="ctr">
             <a:spAutoFit/>
           </a:bodyPr>
           <a:lstStyle/>
@@ -23243,7 +23494,7 @@
           <a:noFill/>
         </p:spPr>
         <p:txBody>
-          <a:bodyPr wrap="square" lIns="0" rIns="0" tIns="0" bIns="0" anchor="ctr">
+          <a:bodyPr wrap="square" lIns="0" tIns="0" rIns="0" bIns="0" anchor="ctr">
             <a:spAutoFit/>
           </a:bodyPr>
           <a:lstStyle/>
@@ -23283,7 +23534,7 @@
           <a:noFill/>
         </p:spPr>
         <p:txBody>
-          <a:bodyPr wrap="square" lIns="0" rIns="0" tIns="0" bIns="0" anchor="ctr">
+          <a:bodyPr wrap="square" lIns="0" tIns="0" rIns="0" bIns="0" anchor="ctr">
             <a:spAutoFit/>
           </a:bodyPr>
           <a:lstStyle/>
@@ -23329,9 +23580,11 @@
           <a:effectLst/>
         </p:spPr>
         <p:txBody>
-          <a:bodyPr rtlCol="0" anchor="ctr" wrap="square"/>
-          <a:lstStyle/>
-          <a:p/>
+          <a:bodyPr wrap="square" rtlCol="0" anchor="ctr"/>
+          <a:lstStyle/>
+          <a:p>
+            <a:endParaRPr/>
+          </a:p>
         </p:txBody>
       </p:sp>
       <p:cxnSp>
@@ -23372,7 +23625,7 @@
           <a:noFill/>
         </p:spPr>
         <p:txBody>
-          <a:bodyPr wrap="square" lIns="0" rIns="0" tIns="0" bIns="0" anchor="ctr">
+          <a:bodyPr wrap="square" lIns="0" tIns="0" rIns="0" bIns="0" anchor="ctr">
             <a:spAutoFit/>
           </a:bodyPr>
           <a:lstStyle/>
@@ -23412,7 +23665,7 @@
           <a:noFill/>
         </p:spPr>
         <p:txBody>
-          <a:bodyPr wrap="square" lIns="0" rIns="0" tIns="0" bIns="0" anchor="ctr">
+          <a:bodyPr wrap="square" lIns="0" tIns="0" rIns="0" bIns="0" anchor="ctr">
             <a:spAutoFit/>
           </a:bodyPr>
           <a:lstStyle/>
@@ -23452,7 +23705,7 @@
           <a:noFill/>
         </p:spPr>
         <p:txBody>
-          <a:bodyPr wrap="square" lIns="0" rIns="0" tIns="0" bIns="0" anchor="ctr">
+          <a:bodyPr wrap="square" lIns="0" tIns="0" rIns="0" bIns="0" anchor="ctr">
             <a:spAutoFit/>
           </a:bodyPr>
           <a:lstStyle/>
@@ -23492,7 +23745,7 @@
           <a:noFill/>
         </p:spPr>
         <p:txBody>
-          <a:bodyPr wrap="square" lIns="0" rIns="0" tIns="0" bIns="0" anchor="ctr">
+          <a:bodyPr wrap="square" lIns="0" tIns="0" rIns="0" bIns="0" anchor="ctr">
             <a:spAutoFit/>
           </a:bodyPr>
           <a:lstStyle/>
@@ -23553,7 +23806,7 @@
           <a:noFill/>
         </p:spPr>
         <p:txBody>
-          <a:bodyPr wrap="square" lIns="0" rIns="0" tIns="0" bIns="0" anchor="ctr">
+          <a:bodyPr wrap="square" lIns="0" tIns="0" rIns="0" bIns="0" anchor="ctr">
             <a:spAutoFit/>
           </a:bodyPr>
           <a:lstStyle/>
@@ -23593,7 +23846,7 @@
           <a:noFill/>
         </p:spPr>
         <p:txBody>
-          <a:bodyPr wrap="square" lIns="0" rIns="0" tIns="0" bIns="0" anchor="ctr">
+          <a:bodyPr wrap="square" lIns="0" tIns="0" rIns="0" bIns="0" anchor="ctr">
             <a:spAutoFit/>
           </a:bodyPr>
           <a:lstStyle/>
@@ -23633,7 +23886,7 @@
           <a:noFill/>
         </p:spPr>
         <p:txBody>
-          <a:bodyPr wrap="square" lIns="0" rIns="0" tIns="0" bIns="0" anchor="ctr">
+          <a:bodyPr wrap="square" lIns="0" tIns="0" rIns="0" bIns="0" anchor="ctr">
             <a:spAutoFit/>
           </a:bodyPr>
           <a:lstStyle/>
@@ -23673,7 +23926,7 @@
           <a:noFill/>
         </p:spPr>
         <p:txBody>
-          <a:bodyPr wrap="square" lIns="0" rIns="0" tIns="0" bIns="0" anchor="ctr">
+          <a:bodyPr wrap="square" lIns="0" tIns="0" rIns="0" bIns="0" anchor="ctr">
             <a:spAutoFit/>
           </a:bodyPr>
           <a:lstStyle/>
@@ -23719,9 +23972,11 @@
           <a:effectLst/>
         </p:spPr>
         <p:txBody>
-          <a:bodyPr rtlCol="0" anchor="ctr" wrap="square"/>
-          <a:lstStyle/>
-          <a:p/>
+          <a:bodyPr wrap="square" rtlCol="0" anchor="ctr"/>
+          <a:lstStyle/>
+          <a:p>
+            <a:endParaRPr/>
+          </a:p>
         </p:txBody>
       </p:sp>
       <p:cxnSp>
@@ -23762,7 +24017,7 @@
           <a:noFill/>
         </p:spPr>
         <p:txBody>
-          <a:bodyPr wrap="square" lIns="0" rIns="0" tIns="0" bIns="0" anchor="ctr">
+          <a:bodyPr wrap="square" lIns="0" tIns="0" rIns="0" bIns="0" anchor="ctr">
             <a:spAutoFit/>
           </a:bodyPr>
           <a:lstStyle/>
@@ -23802,7 +24057,7 @@
           <a:noFill/>
         </p:spPr>
         <p:txBody>
-          <a:bodyPr wrap="square" lIns="0" rIns="0" tIns="0" bIns="0" anchor="ctr">
+          <a:bodyPr wrap="square" lIns="0" tIns="0" rIns="0" bIns="0" anchor="ctr">
             <a:spAutoFit/>
           </a:bodyPr>
           <a:lstStyle/>
@@ -23842,7 +24097,7 @@
           <a:noFill/>
         </p:spPr>
         <p:txBody>
-          <a:bodyPr wrap="square" lIns="0" rIns="0" tIns="0" bIns="0" anchor="ctr">
+          <a:bodyPr wrap="square" lIns="0" tIns="0" rIns="0" bIns="0" anchor="ctr">
             <a:spAutoFit/>
           </a:bodyPr>
           <a:lstStyle/>
@@ -23882,7 +24137,7 @@
           <a:noFill/>
         </p:spPr>
         <p:txBody>
-          <a:bodyPr wrap="square" lIns="0" rIns="0" tIns="0" bIns="0" anchor="ctr">
+          <a:bodyPr wrap="square" lIns="0" tIns="0" rIns="0" bIns="0" anchor="ctr">
             <a:spAutoFit/>
           </a:bodyPr>
           <a:lstStyle/>
@@ -23993,9 +24248,11 @@
           <a:effectLst/>
         </p:spPr>
         <p:txBody>
-          <a:bodyPr rtlCol="0" anchor="ctr" wrap="square"/>
-          <a:lstStyle/>
-          <a:p/>
+          <a:bodyPr wrap="square" rtlCol="0" anchor="ctr"/>
+          <a:lstStyle/>
+          <a:p>
+            <a:endParaRPr/>
+          </a:p>
         </p:txBody>
       </p:sp>
       <p:sp>
@@ -24021,9 +24278,11 @@
           <a:effectLst/>
         </p:spPr>
         <p:txBody>
-          <a:bodyPr rtlCol="0" anchor="ctr" wrap="square"/>
-          <a:lstStyle/>
-          <a:p/>
+          <a:bodyPr wrap="square" rtlCol="0" anchor="ctr"/>
+          <a:lstStyle/>
+          <a:p>
+            <a:endParaRPr/>
+          </a:p>
         </p:txBody>
       </p:sp>
       <p:sp>
@@ -24043,7 +24302,7 @@
           <a:noFill/>
         </p:spPr>
         <p:txBody>
-          <a:bodyPr wrap="square" lIns="0" rIns="0" tIns="0" bIns="0" anchor="t">
+          <a:bodyPr wrap="square" lIns="0" tIns="0" rIns="0" bIns="0" anchor="t">
             <a:spAutoFit/>
           </a:bodyPr>
           <a:lstStyle/>
@@ -24083,7 +24342,7 @@
           <a:noFill/>
         </p:spPr>
         <p:txBody>
-          <a:bodyPr wrap="square" lIns="0" rIns="0" tIns="0" bIns="0" anchor="t">
+          <a:bodyPr wrap="square" lIns="0" tIns="0" rIns="0" bIns="0" anchor="t">
             <a:spAutoFit/>
           </a:bodyPr>
           <a:lstStyle/>
@@ -24154,9 +24413,11 @@
           <a:effectLst/>
         </p:spPr>
         <p:txBody>
-          <a:bodyPr rtlCol="0" anchor="ctr" wrap="square"/>
-          <a:lstStyle/>
-          <a:p/>
+          <a:bodyPr wrap="square" rtlCol="0" anchor="ctr"/>
+          <a:lstStyle/>
+          <a:p>
+            <a:endParaRPr/>
+          </a:p>
         </p:txBody>
       </p:sp>
       <p:sp>
@@ -24182,9 +24443,11 @@
           <a:effectLst/>
         </p:spPr>
         <p:txBody>
-          <a:bodyPr rtlCol="0" anchor="ctr" wrap="square"/>
-          <a:lstStyle/>
-          <a:p/>
+          <a:bodyPr wrap="square" rtlCol="0" anchor="ctr"/>
+          <a:lstStyle/>
+          <a:p>
+            <a:endParaRPr/>
+          </a:p>
         </p:txBody>
       </p:sp>
       <p:sp>
@@ -24204,7 +24467,7 @@
           <a:noFill/>
         </p:spPr>
         <p:txBody>
-          <a:bodyPr wrap="square" lIns="0" rIns="0" tIns="0" bIns="0" anchor="t">
+          <a:bodyPr wrap="square" lIns="0" tIns="0" rIns="0" bIns="0" anchor="t">
             <a:spAutoFit/>
           </a:bodyPr>
           <a:lstStyle/>
@@ -24244,7 +24507,7 @@
           <a:noFill/>
         </p:spPr>
         <p:txBody>
-          <a:bodyPr wrap="square" lIns="0" rIns="0" tIns="0" bIns="0" anchor="t">
+          <a:bodyPr wrap="square" lIns="0" tIns="0" rIns="0" bIns="0" anchor="t">
             <a:spAutoFit/>
           </a:bodyPr>
           <a:lstStyle/>
@@ -24315,9 +24578,11 @@
           <a:effectLst/>
         </p:spPr>
         <p:txBody>
-          <a:bodyPr rtlCol="0" anchor="ctr" wrap="square"/>
-          <a:lstStyle/>
-          <a:p/>
+          <a:bodyPr wrap="square" rtlCol="0" anchor="ctr"/>
+          <a:lstStyle/>
+          <a:p>
+            <a:endParaRPr/>
+          </a:p>
         </p:txBody>
       </p:sp>
       <p:sp>
@@ -24343,9 +24608,11 @@
           <a:effectLst/>
         </p:spPr>
         <p:txBody>
-          <a:bodyPr rtlCol="0" anchor="ctr" wrap="square"/>
-          <a:lstStyle/>
-          <a:p/>
+          <a:bodyPr wrap="square" rtlCol="0" anchor="ctr"/>
+          <a:lstStyle/>
+          <a:p>
+            <a:endParaRPr/>
+          </a:p>
         </p:txBody>
       </p:sp>
       <p:sp>
@@ -24365,7 +24632,7 @@
           <a:noFill/>
         </p:spPr>
         <p:txBody>
-          <a:bodyPr wrap="square" lIns="0" rIns="0" tIns="0" bIns="0" anchor="t">
+          <a:bodyPr wrap="square" lIns="0" tIns="0" rIns="0" bIns="0" anchor="t">
             <a:spAutoFit/>
           </a:bodyPr>
           <a:lstStyle/>
@@ -24405,7 +24672,7 @@
           <a:noFill/>
         </p:spPr>
         <p:txBody>
-          <a:bodyPr wrap="square" lIns="0" rIns="0" tIns="0" bIns="0" anchor="t">
+          <a:bodyPr wrap="square" lIns="0" tIns="0" rIns="0" bIns="0" anchor="t">
             <a:spAutoFit/>
           </a:bodyPr>
           <a:lstStyle/>
@@ -24460,7 +24727,7 @@
 </file>
 
 <file path=ppt/slides/slide6.xml><?xml version="1.0" encoding="utf-8"?>
-<p:sld xmlns:a="http://schemas.openxmlformats.org/drawingml/2006/main" xmlns:p="http://schemas.openxmlformats.org/presentationml/2006/main" xmlns:r="http://schemas.openxmlformats.org/officeDocument/2006/relationships">
+<p:sld xmlns:a="http://schemas.openxmlformats.org/drawingml/2006/main" xmlns:r="http://schemas.openxmlformats.org/officeDocument/2006/relationships" xmlns:p="http://schemas.openxmlformats.org/presentationml/2006/main">
   <p:cSld>
     <p:spTree>
       <p:nvGrpSpPr>
@@ -24468,7 +24735,14 @@
         <p:cNvGrpSpPr/>
         <p:nvPr/>
       </p:nvGrpSpPr>
-      <p:grpSpPr/>
+      <p:grpSpPr>
+        <a:xfrm>
+          <a:off x="0" y="0"/>
+          <a:ext cx="0" cy="0"/>
+          <a:chOff x="0" y="0"/>
+          <a:chExt cx="0" cy="0"/>
+        </a:xfrm>
+      </p:grpSpPr>
       <p:sp>
         <p:nvSpPr>
           <p:cNvPr id="2" name="TextBox 1"/>
@@ -24486,7 +24760,7 @@
           <a:noFill/>
         </p:spPr>
         <p:txBody>
-          <a:bodyPr wrap="square" lIns="0" rIns="0" tIns="0" bIns="0" anchor="t">
+          <a:bodyPr wrap="square" lIns="0" tIns="0" rIns="0" bIns="0" anchor="t">
             <a:spAutoFit/>
           </a:bodyPr>
           <a:lstStyle/>
@@ -24497,7 +24771,7 @@
               </a:lnSpc>
             </a:pPr>
             <a:r>
-              <a:rPr sz="800" b="1" i="0" dirty="0" spc="140">
+              <a:rPr sz="800" b="1" i="0" spc="140" dirty="0">
                 <a:solidFill>
                   <a:srgbClr val="008173"/>
                 </a:solidFill>
@@ -24526,7 +24800,7 @@
           <a:noFill/>
         </p:spPr>
         <p:txBody>
-          <a:bodyPr wrap="square" lIns="0" rIns="0" tIns="0" bIns="0" anchor="t">
+          <a:bodyPr wrap="square" lIns="0" tIns="0" rIns="0" bIns="0" anchor="t">
             <a:spAutoFit/>
           </a:bodyPr>
           <a:lstStyle/>
@@ -24566,7 +24840,7 @@
           <a:noFill/>
         </p:spPr>
         <p:txBody>
-          <a:bodyPr wrap="square" lIns="0" rIns="0" tIns="0" bIns="0" anchor="t">
+          <a:bodyPr wrap="square" lIns="0" tIns="0" rIns="0" bIns="0" anchor="t">
             <a:spAutoFit/>
           </a:bodyPr>
           <a:lstStyle/>
@@ -24606,7 +24880,7 @@
           <a:noFill/>
         </p:spPr>
         <p:txBody>
-          <a:bodyPr wrap="square" lIns="0" rIns="0" tIns="0" bIns="0" anchor="t">
+          <a:bodyPr wrap="square" lIns="0" tIns="0" rIns="0" bIns="0" anchor="t">
             <a:spAutoFit/>
           </a:bodyPr>
           <a:lstStyle/>
@@ -24646,7 +24920,7 @@
           <a:noFill/>
         </p:spPr>
         <p:txBody>
-          <a:bodyPr wrap="square" lIns="0" rIns="0" tIns="0" bIns="0" anchor="t">
+          <a:bodyPr wrap="square" lIns="0" tIns="0" rIns="0" bIns="0" anchor="t">
             <a:spAutoFit/>
           </a:bodyPr>
           <a:lstStyle/>
@@ -24692,9 +24966,11 @@
           <a:effectLst/>
         </p:spPr>
         <p:txBody>
-          <a:bodyPr rtlCol="0" anchor="ctr" wrap="square"/>
-          <a:lstStyle/>
-          <a:p/>
+          <a:bodyPr wrap="square" rtlCol="0" anchor="ctr"/>
+          <a:lstStyle/>
+          <a:p>
+            <a:endParaRPr/>
+          </a:p>
         </p:txBody>
       </p:sp>
       <p:sp>
@@ -24714,7 +24990,7 @@
           <a:noFill/>
         </p:spPr>
         <p:txBody>
-          <a:bodyPr wrap="square" lIns="0" rIns="0" tIns="0" bIns="0" anchor="t">
+          <a:bodyPr wrap="square" lIns="0" tIns="0" rIns="0" bIns="0" anchor="t">
             <a:spAutoFit/>
           </a:bodyPr>
           <a:lstStyle/>
@@ -24725,7 +25001,7 @@
               </a:lnSpc>
             </a:pPr>
             <a:r>
-              <a:rPr sz="750" b="1" i="0" dirty="0" spc="110">
+              <a:rPr sz="750" b="1" i="0" spc="110" dirty="0">
                 <a:solidFill>
                   <a:srgbClr val="00B39F"/>
                 </a:solidFill>
@@ -24754,7 +25030,7 @@
           <a:noFill/>
         </p:spPr>
         <p:txBody>
-          <a:bodyPr wrap="none" lIns="0" rIns="0" tIns="0" bIns="0" anchor="t">
+          <a:bodyPr wrap="none" lIns="0" tIns="0" rIns="0" bIns="0" anchor="t">
             <a:spAutoFit/>
           </a:bodyPr>
           <a:lstStyle/>
@@ -25125,9 +25401,11 @@
           <a:effectLst/>
         </p:spPr>
         <p:txBody>
-          <a:bodyPr rtlCol="0" anchor="ctr" wrap="square"/>
-          <a:lstStyle/>
-          <a:p/>
+          <a:bodyPr wrap="square" rtlCol="0" anchor="ctr"/>
+          <a:lstStyle/>
+          <a:p>
+            <a:endParaRPr/>
+          </a:p>
         </p:txBody>
       </p:sp>
       <p:sp>
@@ -25169,7 +25447,7 @@
           </a:fontRef>
         </p:style>
         <p:txBody>
-          <a:bodyPr rtlCol="0" anchor="ctr" wrap="square" lIns="0" rIns="0" tIns="18288" bIns="18288"/>
+          <a:bodyPr wrap="square" lIns="0" tIns="18288" rIns="0" bIns="18288" rtlCol="0" anchor="ctr"/>
           <a:lstStyle/>
           <a:p>
             <a:pPr algn="ctr">
@@ -25207,7 +25485,7 @@
           <a:noFill/>
         </p:spPr>
         <p:txBody>
-          <a:bodyPr wrap="square" lIns="0" rIns="0" tIns="0" bIns="0" anchor="t">
+          <a:bodyPr wrap="square" lIns="0" tIns="0" rIns="0" bIns="0" anchor="t">
             <a:spAutoFit/>
           </a:bodyPr>
           <a:lstStyle/>
@@ -25247,7 +25525,7 @@
           <a:noFill/>
         </p:spPr>
         <p:txBody>
-          <a:bodyPr wrap="square" lIns="0" rIns="0" tIns="0" bIns="0" anchor="t">
+          <a:bodyPr wrap="square" lIns="0" tIns="0" rIns="0" bIns="0" anchor="t">
             <a:spAutoFit/>
           </a:bodyPr>
           <a:lstStyle/>
@@ -25287,7 +25565,7 @@
           <a:noFill/>
         </p:spPr>
         <p:txBody>
-          <a:bodyPr wrap="square" lIns="0" rIns="0" tIns="0" bIns="0" anchor="ctr">
+          <a:bodyPr wrap="square" lIns="0" tIns="0" rIns="0" bIns="0" anchor="ctr">
             <a:spAutoFit/>
           </a:bodyPr>
           <a:lstStyle/>
@@ -25335,9 +25613,11 @@
           <a:effectLst/>
         </p:spPr>
         <p:txBody>
-          <a:bodyPr rtlCol="0" anchor="ctr" wrap="square"/>
-          <a:lstStyle/>
-          <a:p/>
+          <a:bodyPr wrap="square" rtlCol="0" anchor="ctr"/>
+          <a:lstStyle/>
+          <a:p>
+            <a:endParaRPr/>
+          </a:p>
         </p:txBody>
       </p:sp>
       <p:sp>
@@ -25379,7 +25659,7 @@
           </a:fontRef>
         </p:style>
         <p:txBody>
-          <a:bodyPr rtlCol="0" anchor="ctr" wrap="square" lIns="0" rIns="0" tIns="18288" bIns="18288"/>
+          <a:bodyPr wrap="square" lIns="0" tIns="18288" rIns="0" bIns="18288" rtlCol="0" anchor="ctr"/>
           <a:lstStyle/>
           <a:p>
             <a:pPr algn="ctr">
@@ -25417,7 +25697,7 @@
           <a:noFill/>
         </p:spPr>
         <p:txBody>
-          <a:bodyPr wrap="square" lIns="0" rIns="0" tIns="0" bIns="0" anchor="t">
+          <a:bodyPr wrap="square" lIns="0" tIns="0" rIns="0" bIns="0" anchor="t">
             <a:spAutoFit/>
           </a:bodyPr>
           <a:lstStyle/>
@@ -25457,7 +25737,7 @@
           <a:noFill/>
         </p:spPr>
         <p:txBody>
-          <a:bodyPr wrap="square" lIns="0" rIns="0" tIns="0" bIns="0" anchor="t">
+          <a:bodyPr wrap="square" lIns="0" tIns="0" rIns="0" bIns="0" anchor="t">
             <a:spAutoFit/>
           </a:bodyPr>
           <a:lstStyle/>
@@ -25497,7 +25777,7 @@
           <a:noFill/>
         </p:spPr>
         <p:txBody>
-          <a:bodyPr wrap="square" lIns="0" rIns="0" tIns="0" bIns="0" anchor="ctr">
+          <a:bodyPr wrap="square" lIns="0" tIns="0" rIns="0" bIns="0" anchor="ctr">
             <a:spAutoFit/>
           </a:bodyPr>
           <a:lstStyle/>
@@ -25545,9 +25825,11 @@
           <a:effectLst/>
         </p:spPr>
         <p:txBody>
-          <a:bodyPr rtlCol="0" anchor="ctr" wrap="square"/>
-          <a:lstStyle/>
-          <a:p/>
+          <a:bodyPr wrap="square" rtlCol="0" anchor="ctr"/>
+          <a:lstStyle/>
+          <a:p>
+            <a:endParaRPr/>
+          </a:p>
         </p:txBody>
       </p:sp>
       <p:sp>
@@ -25589,7 +25871,7 @@
           </a:fontRef>
         </p:style>
         <p:txBody>
-          <a:bodyPr rtlCol="0" anchor="ctr" wrap="square" lIns="0" rIns="0" tIns="18288" bIns="18288"/>
+          <a:bodyPr wrap="square" lIns="0" tIns="18288" rIns="0" bIns="18288" rtlCol="0" anchor="ctr"/>
           <a:lstStyle/>
           <a:p>
             <a:pPr algn="ctr">
@@ -25627,7 +25909,7 @@
           <a:noFill/>
         </p:spPr>
         <p:txBody>
-          <a:bodyPr wrap="square" lIns="0" rIns="0" tIns="0" bIns="0" anchor="t">
+          <a:bodyPr wrap="square" lIns="0" tIns="0" rIns="0" bIns="0" anchor="t">
             <a:spAutoFit/>
           </a:bodyPr>
           <a:lstStyle/>
@@ -25667,7 +25949,7 @@
           <a:noFill/>
         </p:spPr>
         <p:txBody>
-          <a:bodyPr wrap="square" lIns="0" rIns="0" tIns="0" bIns="0" anchor="t">
+          <a:bodyPr wrap="square" lIns="0" tIns="0" rIns="0" bIns="0" anchor="t">
             <a:spAutoFit/>
           </a:bodyPr>
           <a:lstStyle/>
@@ -25707,7 +25989,7 @@
           <a:noFill/>
         </p:spPr>
         <p:txBody>
-          <a:bodyPr wrap="square" lIns="0" rIns="0" tIns="0" bIns="0" anchor="ctr">
+          <a:bodyPr wrap="square" lIns="0" tIns="0" rIns="0" bIns="0" anchor="ctr">
             <a:spAutoFit/>
           </a:bodyPr>
           <a:lstStyle/>
@@ -25747,7 +26029,7 @@
           <a:noFill/>
         </p:spPr>
         <p:txBody>
-          <a:bodyPr wrap="square" lIns="0" rIns="0" tIns="0" bIns="0" anchor="t">
+          <a:bodyPr wrap="square" lIns="0" tIns="0" rIns="0" bIns="0" anchor="t">
             <a:spAutoFit/>
           </a:bodyPr>
           <a:lstStyle/>
@@ -25758,7 +26040,7 @@
               </a:lnSpc>
             </a:pPr>
             <a:r>
-              <a:rPr sz="800" b="1" i="0" dirty="0" spc="120">
+              <a:rPr sz="800" b="1" i="0" spc="120" dirty="0">
                 <a:solidFill>
                   <a:srgbClr val="008173"/>
                 </a:solidFill>
@@ -25787,7 +26069,7 @@
           <a:noFill/>
         </p:spPr>
         <p:txBody>
-          <a:bodyPr wrap="square" lIns="0" rIns="0" tIns="0" bIns="0" anchor="ctr">
+          <a:bodyPr wrap="square" lIns="0" tIns="0" rIns="0" bIns="0" anchor="ctr">
             <a:spAutoFit/>
           </a:bodyPr>
           <a:lstStyle/>
@@ -25827,7 +26109,7 @@
           <a:noFill/>
         </p:spPr>
         <p:txBody>
-          <a:bodyPr wrap="square" lIns="0" rIns="0" tIns="0" bIns="0" anchor="ctr">
+          <a:bodyPr wrap="square" lIns="0" tIns="0" rIns="0" bIns="0" anchor="ctr">
             <a:spAutoFit/>
           </a:bodyPr>
           <a:lstStyle/>
@@ -25888,7 +26170,7 @@
           <a:noFill/>
         </p:spPr>
         <p:txBody>
-          <a:bodyPr wrap="square" lIns="0" rIns="0" tIns="0" bIns="0" anchor="ctr">
+          <a:bodyPr wrap="square" lIns="0" tIns="0" rIns="0" bIns="0" anchor="ctr">
             <a:spAutoFit/>
           </a:bodyPr>
           <a:lstStyle/>
@@ -25928,7 +26210,7 @@
           <a:noFill/>
         </p:spPr>
         <p:txBody>
-          <a:bodyPr wrap="square" lIns="0" rIns="0" tIns="0" bIns="0" anchor="ctr">
+          <a:bodyPr wrap="square" lIns="0" tIns="0" rIns="0" bIns="0" anchor="ctr">
             <a:spAutoFit/>
           </a:bodyPr>
           <a:lstStyle/>
@@ -25989,7 +26271,7 @@
           <a:noFill/>
         </p:spPr>
         <p:txBody>
-          <a:bodyPr wrap="square" lIns="0" rIns="0" tIns="0" bIns="0" anchor="ctr">
+          <a:bodyPr wrap="square" lIns="0" tIns="0" rIns="0" bIns="0" anchor="ctr">
             <a:spAutoFit/>
           </a:bodyPr>
           <a:lstStyle/>
@@ -26029,7 +26311,7 @@
           <a:noFill/>
         </p:spPr>
         <p:txBody>
-          <a:bodyPr wrap="square" lIns="0" rIns="0" tIns="0" bIns="0" anchor="ctr">
+          <a:bodyPr wrap="square" lIns="0" tIns="0" rIns="0" bIns="0" anchor="ctr">
             <a:spAutoFit/>
           </a:bodyPr>
           <a:lstStyle/>
@@ -26082,7 +26364,7 @@
 </file>
 
 <file path=ppt/slides/slide7.xml><?xml version="1.0" encoding="utf-8"?>
-<p:sld xmlns:a="http://schemas.openxmlformats.org/drawingml/2006/main" xmlns:p="http://schemas.openxmlformats.org/presentationml/2006/main" xmlns:r="http://schemas.openxmlformats.org/officeDocument/2006/relationships">
+<p:sld xmlns:a="http://schemas.openxmlformats.org/drawingml/2006/main" xmlns:r="http://schemas.openxmlformats.org/officeDocument/2006/relationships" xmlns:p="http://schemas.openxmlformats.org/presentationml/2006/main">
   <p:cSld>
     <p:spTree>
       <p:nvGrpSpPr>
@@ -26090,7 +26372,14 @@
         <p:cNvGrpSpPr/>
         <p:nvPr/>
       </p:nvGrpSpPr>
-      <p:grpSpPr/>
+      <p:grpSpPr>
+        <a:xfrm>
+          <a:off x="0" y="0"/>
+          <a:ext cx="0" cy="0"/>
+          <a:chOff x="0" y="0"/>
+          <a:chExt cx="0" cy="0"/>
+        </a:xfrm>
+      </p:grpSpPr>
       <p:sp>
         <p:nvSpPr>
           <p:cNvPr id="2" name="TextBox 1"/>
@@ -26108,7 +26397,7 @@
           <a:noFill/>
         </p:spPr>
         <p:txBody>
-          <a:bodyPr wrap="square" lIns="0" rIns="0" tIns="0" bIns="0" anchor="t">
+          <a:bodyPr wrap="square" lIns="0" tIns="0" rIns="0" bIns="0" anchor="t">
             <a:spAutoFit/>
           </a:bodyPr>
           <a:lstStyle/>
@@ -26119,7 +26408,7 @@
               </a:lnSpc>
             </a:pPr>
             <a:r>
-              <a:rPr sz="800" b="1" i="0" dirty="0" spc="140">
+              <a:rPr sz="800" b="1" i="0" spc="140" dirty="0">
                 <a:solidFill>
                   <a:srgbClr val="008173"/>
                 </a:solidFill>
@@ -26148,7 +26437,7 @@
           <a:noFill/>
         </p:spPr>
         <p:txBody>
-          <a:bodyPr wrap="square" lIns="0" rIns="0" tIns="0" bIns="0" anchor="t">
+          <a:bodyPr wrap="square" lIns="0" tIns="0" rIns="0" bIns="0" anchor="t">
             <a:spAutoFit/>
           </a:bodyPr>
           <a:lstStyle/>
@@ -26188,7 +26477,7 @@
           <a:noFill/>
         </p:spPr>
         <p:txBody>
-          <a:bodyPr wrap="square" lIns="0" rIns="0" tIns="0" bIns="0" anchor="t">
+          <a:bodyPr wrap="square" lIns="0" tIns="0" rIns="0" bIns="0" anchor="t">
             <a:spAutoFit/>
           </a:bodyPr>
           <a:lstStyle/>
@@ -26228,7 +26517,7 @@
           <a:noFill/>
         </p:spPr>
         <p:txBody>
-          <a:bodyPr wrap="square" lIns="0" rIns="0" tIns="0" bIns="0" anchor="t">
+          <a:bodyPr wrap="square" lIns="0" tIns="0" rIns="0" bIns="0" anchor="t">
             <a:spAutoFit/>
           </a:bodyPr>
           <a:lstStyle/>
@@ -26268,7 +26557,7 @@
           <a:noFill/>
         </p:spPr>
         <p:txBody>
-          <a:bodyPr wrap="square" lIns="0" rIns="0" tIns="0" bIns="0" anchor="t">
+          <a:bodyPr wrap="square" lIns="0" tIns="0" rIns="0" bIns="0" anchor="t">
             <a:spAutoFit/>
           </a:bodyPr>
           <a:lstStyle/>
@@ -26314,9 +26603,11 @@
           <a:effectLst/>
         </p:spPr>
         <p:txBody>
-          <a:bodyPr rtlCol="0" anchor="ctr" wrap="square"/>
-          <a:lstStyle/>
-          <a:p/>
+          <a:bodyPr wrap="square" rtlCol="0" anchor="ctr"/>
+          <a:lstStyle/>
+          <a:p>
+            <a:endParaRPr/>
+          </a:p>
         </p:txBody>
       </p:sp>
       <p:sp>
@@ -26336,7 +26627,7 @@
           <a:noFill/>
         </p:spPr>
         <p:txBody>
-          <a:bodyPr wrap="square" lIns="0" rIns="0" tIns="0" bIns="0" anchor="t">
+          <a:bodyPr wrap="square" lIns="0" tIns="0" rIns="0" bIns="0" anchor="t">
             <a:spAutoFit/>
           </a:bodyPr>
           <a:lstStyle/>
@@ -26347,7 +26638,7 @@
               </a:lnSpc>
             </a:pPr>
             <a:r>
-              <a:rPr sz="750" b="1" i="0" dirty="0" spc="110">
+              <a:rPr sz="750" b="1" i="0" spc="110" dirty="0">
                 <a:solidFill>
                   <a:srgbClr val="00B39F"/>
                 </a:solidFill>
@@ -26376,7 +26667,7 @@
           <a:noFill/>
         </p:spPr>
         <p:txBody>
-          <a:bodyPr wrap="none" lIns="0" rIns="0" tIns="0" bIns="0" anchor="t">
+          <a:bodyPr wrap="none" lIns="0" tIns="0" rIns="0" bIns="0" anchor="t">
             <a:spAutoFit/>
           </a:bodyPr>
           <a:lstStyle/>
@@ -26586,7 +26877,7 @@
           <a:noFill/>
         </p:spPr>
         <p:txBody>
-          <a:bodyPr wrap="square" lIns="0" rIns="0" tIns="0" bIns="0" anchor="t">
+          <a:bodyPr wrap="square" lIns="0" tIns="0" rIns="0" bIns="0" anchor="t">
             <a:spAutoFit/>
           </a:bodyPr>
           <a:lstStyle/>
@@ -26597,7 +26888,7 @@
               </a:lnSpc>
             </a:pPr>
             <a:r>
-              <a:rPr sz="800" b="1" i="0" dirty="0" spc="120">
+              <a:rPr sz="800" b="1" i="0" spc="120" dirty="0">
                 <a:solidFill>
                   <a:srgbClr val="008173"/>
                 </a:solidFill>
@@ -26634,7 +26925,7 @@
           <a:effectLst/>
         </p:spPr>
         <p:txBody>
-          <a:bodyPr rtlCol="0" anchor="ctr" wrap="square" lIns="54864" rIns="54864" tIns="18288" bIns="18288"/>
+          <a:bodyPr wrap="square" lIns="54864" tIns="18288" rIns="54864" bIns="18288" rtlCol="0" anchor="ctr"/>
           <a:lstStyle/>
           <a:p>
             <a:pPr algn="ctr">
@@ -26697,7 +26988,7 @@
           <a:effectLst/>
         </p:spPr>
         <p:txBody>
-          <a:bodyPr rtlCol="0" anchor="ctr" wrap="square" lIns="54864" rIns="54864" tIns="18288" bIns="18288"/>
+          <a:bodyPr wrap="square" lIns="54864" tIns="18288" rIns="54864" bIns="18288" rtlCol="0" anchor="ctr"/>
           <a:lstStyle/>
           <a:p>
             <a:pPr algn="ctr">
@@ -26760,7 +27051,7 @@
           <a:effectLst/>
         </p:spPr>
         <p:txBody>
-          <a:bodyPr rtlCol="0" anchor="ctr" wrap="square" lIns="54864" rIns="54864" tIns="18288" bIns="18288"/>
+          <a:bodyPr wrap="square" lIns="54864" tIns="18288" rIns="54864" bIns="18288" rtlCol="0" anchor="ctr"/>
           <a:lstStyle/>
           <a:p>
             <a:pPr algn="ctr">
@@ -26823,7 +27114,7 @@
           <a:effectLst/>
         </p:spPr>
         <p:txBody>
-          <a:bodyPr rtlCol="0" anchor="ctr" wrap="square" lIns="54864" rIns="54864" tIns="18288" bIns="18288"/>
+          <a:bodyPr wrap="square" lIns="54864" tIns="18288" rIns="54864" bIns="18288" rtlCol="0" anchor="ctr"/>
           <a:lstStyle/>
           <a:p>
             <a:pPr algn="ctr">
@@ -26899,7 +27190,7 @@
           <a:noFill/>
         </p:spPr>
         <p:txBody>
-          <a:bodyPr wrap="square" lIns="0" rIns="0" tIns="0" bIns="0" anchor="t">
+          <a:bodyPr wrap="square" lIns="0" tIns="0" rIns="0" bIns="0" anchor="t">
             <a:spAutoFit/>
           </a:bodyPr>
           <a:lstStyle/>
@@ -26939,7 +27230,7 @@
           <a:noFill/>
         </p:spPr>
         <p:txBody>
-          <a:bodyPr wrap="square" lIns="0" rIns="0" tIns="0" bIns="0" anchor="t">
+          <a:bodyPr wrap="square" lIns="0" tIns="0" rIns="0" bIns="0" anchor="t">
             <a:spAutoFit/>
           </a:bodyPr>
           <a:lstStyle/>
@@ -26979,7 +27270,7 @@
           <a:noFill/>
         </p:spPr>
         <p:txBody>
-          <a:bodyPr wrap="square" lIns="0" rIns="0" tIns="0" bIns="0" anchor="ctr">
+          <a:bodyPr wrap="square" lIns="0" tIns="0" rIns="0" bIns="0" anchor="ctr">
             <a:spAutoFit/>
           </a:bodyPr>
           <a:lstStyle/>
@@ -27019,7 +27310,7 @@
           <a:noFill/>
         </p:spPr>
         <p:txBody>
-          <a:bodyPr wrap="square" lIns="0" rIns="0" tIns="0" bIns="0" anchor="ctr">
+          <a:bodyPr wrap="square" lIns="0" tIns="0" rIns="0" bIns="0" anchor="ctr">
             <a:spAutoFit/>
           </a:bodyPr>
           <a:lstStyle/>
@@ -27080,7 +27371,7 @@
           <a:noFill/>
         </p:spPr>
         <p:txBody>
-          <a:bodyPr wrap="square" lIns="0" rIns="0" tIns="0" bIns="0" anchor="ctr">
+          <a:bodyPr wrap="square" lIns="0" tIns="0" rIns="0" bIns="0" anchor="ctr">
             <a:spAutoFit/>
           </a:bodyPr>
           <a:lstStyle/>
@@ -27120,7 +27411,7 @@
           <a:noFill/>
         </p:spPr>
         <p:txBody>
-          <a:bodyPr wrap="square" lIns="0" rIns="0" tIns="0" bIns="0" anchor="ctr">
+          <a:bodyPr wrap="square" lIns="0" tIns="0" rIns="0" bIns="0" anchor="ctr">
             <a:spAutoFit/>
           </a:bodyPr>
           <a:lstStyle/>
@@ -27181,7 +27472,7 @@
           <a:noFill/>
         </p:spPr>
         <p:txBody>
-          <a:bodyPr wrap="square" lIns="0" rIns="0" tIns="0" bIns="0" anchor="ctr">
+          <a:bodyPr wrap="square" lIns="0" tIns="0" rIns="0" bIns="0" anchor="ctr">
             <a:spAutoFit/>
           </a:bodyPr>
           <a:lstStyle/>
@@ -27221,7 +27512,7 @@
           <a:noFill/>
         </p:spPr>
         <p:txBody>
-          <a:bodyPr wrap="square" lIns="0" rIns="0" tIns="0" bIns="0" anchor="ctr">
+          <a:bodyPr wrap="square" lIns="0" tIns="0" rIns="0" bIns="0" anchor="ctr">
             <a:spAutoFit/>
           </a:bodyPr>
           <a:lstStyle/>
@@ -27282,7 +27573,7 @@
           <a:noFill/>
         </p:spPr>
         <p:txBody>
-          <a:bodyPr wrap="square" lIns="0" rIns="0" tIns="0" bIns="0" anchor="ctr">
+          <a:bodyPr wrap="square" lIns="0" tIns="0" rIns="0" bIns="0" anchor="ctr">
             <a:spAutoFit/>
           </a:bodyPr>
           <a:lstStyle/>
@@ -27322,7 +27613,7 @@
           <a:noFill/>
         </p:spPr>
         <p:txBody>
-          <a:bodyPr wrap="square" lIns="0" rIns="0" tIns="0" bIns="0" anchor="ctr">
+          <a:bodyPr wrap="square" lIns="0" tIns="0" rIns="0" bIns="0" anchor="ctr">
             <a:spAutoFit/>
           </a:bodyPr>
           <a:lstStyle/>
@@ -27383,7 +27674,7 @@
           <a:noFill/>
         </p:spPr>
         <p:txBody>
-          <a:bodyPr wrap="square" lIns="0" rIns="0" tIns="0" bIns="0" anchor="t">
+          <a:bodyPr wrap="square" lIns="0" tIns="0" rIns="0" bIns="0" anchor="t">
             <a:spAutoFit/>
           </a:bodyPr>
           <a:lstStyle/>
@@ -27394,7 +27685,7 @@
               </a:lnSpc>
             </a:pPr>
             <a:r>
-              <a:rPr sz="800" b="1" i="0" dirty="0" spc="120">
+              <a:rPr sz="800" b="1" i="0" spc="120" dirty="0">
                 <a:solidFill>
                   <a:srgbClr val="008173"/>
                 </a:solidFill>
@@ -27429,7 +27720,7 @@
           <a:effectLst/>
         </p:spPr>
         <p:txBody>
-          <a:bodyPr rtlCol="0" anchor="ctr" wrap="square" lIns="54864" rIns="54864" tIns="18288" bIns="18288"/>
+          <a:bodyPr wrap="square" lIns="54864" tIns="18288" rIns="54864" bIns="18288" rtlCol="0" anchor="ctr"/>
           <a:lstStyle/>
           <a:p>
             <a:pPr algn="ctr">
@@ -27473,7 +27764,7 @@
           <a:effectLst/>
         </p:spPr>
         <p:txBody>
-          <a:bodyPr rtlCol="0" anchor="ctr" wrap="square" lIns="54864" rIns="54864" tIns="18288" bIns="18288"/>
+          <a:bodyPr wrap="square" lIns="54864" tIns="18288" rIns="54864" bIns="18288" rtlCol="0" anchor="ctr"/>
           <a:lstStyle/>
           <a:p>
             <a:pPr algn="ctr">
@@ -27517,7 +27808,7 @@
           <a:effectLst/>
         </p:spPr>
         <p:txBody>
-          <a:bodyPr rtlCol="0" anchor="ctr" wrap="square" lIns="54864" rIns="54864" tIns="18288" bIns="18288"/>
+          <a:bodyPr wrap="square" lIns="54864" tIns="18288" rIns="54864" bIns="18288" rtlCol="0" anchor="ctr"/>
           <a:lstStyle/>
           <a:p>
             <a:pPr algn="ctr">
@@ -27561,7 +27852,7 @@
           <a:effectLst/>
         </p:spPr>
         <p:txBody>
-          <a:bodyPr rtlCol="0" anchor="ctr" wrap="square" lIns="54864" rIns="54864" tIns="18288" bIns="18288"/>
+          <a:bodyPr wrap="square" lIns="54864" tIns="18288" rIns="54864" bIns="18288" rtlCol="0" anchor="ctr"/>
           <a:lstStyle/>
           <a:p>
             <a:pPr algn="ctr">
@@ -27599,7 +27890,7 @@
           <a:noFill/>
         </p:spPr>
         <p:txBody>
-          <a:bodyPr wrap="square" lIns="0" rIns="0" tIns="0" bIns="0" anchor="t">
+          <a:bodyPr wrap="square" lIns="0" tIns="0" rIns="0" bIns="0" anchor="t">
             <a:spAutoFit/>
           </a:bodyPr>
           <a:lstStyle/>
@@ -27610,7 +27901,7 @@
               </a:lnSpc>
             </a:pPr>
             <a:r>
-              <a:rPr sz="800" b="1" i="0" dirty="0" spc="120">
+              <a:rPr sz="800" b="1" i="0" spc="120" dirty="0">
                 <a:solidFill>
                   <a:srgbClr val="008173"/>
                 </a:solidFill>
@@ -27645,7 +27936,7 @@
           <a:effectLst/>
         </p:spPr>
         <p:txBody>
-          <a:bodyPr rtlCol="0" anchor="ctr" wrap="square" lIns="54864" rIns="54864" tIns="18288" bIns="18288"/>
+          <a:bodyPr wrap="square" lIns="54864" tIns="18288" rIns="54864" bIns="18288" rtlCol="0" anchor="ctr"/>
           <a:lstStyle/>
           <a:p>
             <a:pPr algn="ctr">
@@ -27689,7 +27980,7 @@
           <a:effectLst/>
         </p:spPr>
         <p:txBody>
-          <a:bodyPr rtlCol="0" anchor="ctr" wrap="square" lIns="54864" rIns="54864" tIns="18288" bIns="18288"/>
+          <a:bodyPr wrap="square" lIns="54864" tIns="18288" rIns="54864" bIns="18288" rtlCol="0" anchor="ctr"/>
           <a:lstStyle/>
           <a:p>
             <a:pPr algn="ctr">
@@ -27733,7 +28024,7 @@
           <a:effectLst/>
         </p:spPr>
         <p:txBody>
-          <a:bodyPr rtlCol="0" anchor="ctr" wrap="square" lIns="54864" rIns="54864" tIns="18288" bIns="18288"/>
+          <a:bodyPr wrap="square" lIns="54864" tIns="18288" rIns="54864" bIns="18288" rtlCol="0" anchor="ctr"/>
           <a:lstStyle/>
           <a:p>
             <a:pPr algn="ctr">
@@ -27777,7 +28068,7 @@
           <a:effectLst/>
         </p:spPr>
         <p:txBody>
-          <a:bodyPr rtlCol="0" anchor="ctr" wrap="square" lIns="54864" rIns="54864" tIns="18288" bIns="18288"/>
+          <a:bodyPr wrap="square" lIns="54864" tIns="18288" rIns="54864" bIns="18288" rtlCol="0" anchor="ctr"/>
           <a:lstStyle/>
           <a:p>
             <a:pPr algn="ctr">
@@ -27821,7 +28112,7 @@
           <a:effectLst/>
         </p:spPr>
         <p:txBody>
-          <a:bodyPr rtlCol="0" anchor="ctr" wrap="square" lIns="54864" rIns="54864" tIns="18288" bIns="18288"/>
+          <a:bodyPr wrap="square" lIns="54864" tIns="18288" rIns="54864" bIns="18288" rtlCol="0" anchor="ctr"/>
           <a:lstStyle/>
           <a:p>
             <a:pPr algn="ctr">
@@ -27865,7 +28156,7 @@
           <a:effectLst/>
         </p:spPr>
         <p:txBody>
-          <a:bodyPr rtlCol="0" anchor="ctr" wrap="square" lIns="54864" rIns="54864" tIns="18288" bIns="18288"/>
+          <a:bodyPr wrap="square" lIns="54864" tIns="18288" rIns="54864" bIns="18288" rtlCol="0" anchor="ctr"/>
           <a:lstStyle/>
           <a:p>
             <a:pPr algn="ctr">
@@ -27903,7 +28194,7 @@
           <a:noFill/>
         </p:spPr>
         <p:txBody>
-          <a:bodyPr wrap="square" lIns="0" rIns="0" tIns="0" bIns="0" anchor="t">
+          <a:bodyPr wrap="square" lIns="0" tIns="0" rIns="0" bIns="0" anchor="t">
             <a:spAutoFit/>
           </a:bodyPr>
           <a:lstStyle/>
@@ -27935,7 +28226,7 @@
 </file>
 
 <file path=ppt/slides/slide8.xml><?xml version="1.0" encoding="utf-8"?>
-<p:sld xmlns:a="http://schemas.openxmlformats.org/drawingml/2006/main" xmlns:p="http://schemas.openxmlformats.org/presentationml/2006/main" xmlns:r="http://schemas.openxmlformats.org/officeDocument/2006/relationships">
+<p:sld xmlns:a="http://schemas.openxmlformats.org/drawingml/2006/main" xmlns:r="http://schemas.openxmlformats.org/officeDocument/2006/relationships" xmlns:p="http://schemas.openxmlformats.org/presentationml/2006/main">
   <p:cSld>
     <p:spTree>
       <p:nvGrpSpPr>
@@ -27943,7 +28234,14 @@
         <p:cNvGrpSpPr/>
         <p:nvPr/>
       </p:nvGrpSpPr>
-      <p:grpSpPr/>
+      <p:grpSpPr>
+        <a:xfrm>
+          <a:off x="0" y="0"/>
+          <a:ext cx="0" cy="0"/>
+          <a:chOff x="0" y="0"/>
+          <a:chExt cx="0" cy="0"/>
+        </a:xfrm>
+      </p:grpSpPr>
       <p:sp>
         <p:nvSpPr>
           <p:cNvPr id="2" name="TextBox 1"/>
@@ -27961,7 +28259,7 @@
           <a:noFill/>
         </p:spPr>
         <p:txBody>
-          <a:bodyPr wrap="square" lIns="0" rIns="0" tIns="0" bIns="0" anchor="t">
+          <a:bodyPr wrap="square" lIns="0" tIns="0" rIns="0" bIns="0" anchor="t">
             <a:spAutoFit/>
           </a:bodyPr>
           <a:lstStyle/>
@@ -27972,7 +28270,7 @@
               </a:lnSpc>
             </a:pPr>
             <a:r>
-              <a:rPr sz="800" b="1" i="0" dirty="0" spc="140">
+              <a:rPr sz="800" b="1" i="0" spc="140" dirty="0">
                 <a:solidFill>
                   <a:srgbClr val="008173"/>
                 </a:solidFill>
@@ -28001,7 +28299,7 @@
           <a:noFill/>
         </p:spPr>
         <p:txBody>
-          <a:bodyPr wrap="square" lIns="0" rIns="0" tIns="0" bIns="0" anchor="t">
+          <a:bodyPr wrap="square" lIns="0" tIns="0" rIns="0" bIns="0" anchor="t">
             <a:spAutoFit/>
           </a:bodyPr>
           <a:lstStyle/>
@@ -28041,7 +28339,7 @@
           <a:noFill/>
         </p:spPr>
         <p:txBody>
-          <a:bodyPr wrap="square" lIns="0" rIns="0" tIns="0" bIns="0" anchor="t">
+          <a:bodyPr wrap="square" lIns="0" tIns="0" rIns="0" bIns="0" anchor="t">
             <a:spAutoFit/>
           </a:bodyPr>
           <a:lstStyle/>
@@ -28081,7 +28379,7 @@
           <a:noFill/>
         </p:spPr>
         <p:txBody>
-          <a:bodyPr wrap="square" lIns="0" rIns="0" tIns="0" bIns="0" anchor="t">
+          <a:bodyPr wrap="square" lIns="0" tIns="0" rIns="0" bIns="0" anchor="t">
             <a:spAutoFit/>
           </a:bodyPr>
           <a:lstStyle/>
@@ -28121,7 +28419,7 @@
           <a:noFill/>
         </p:spPr>
         <p:txBody>
-          <a:bodyPr wrap="square" lIns="0" rIns="0" tIns="0" bIns="0" anchor="t">
+          <a:bodyPr wrap="square" lIns="0" tIns="0" rIns="0" bIns="0" anchor="t">
             <a:spAutoFit/>
           </a:bodyPr>
           <a:lstStyle/>
@@ -28167,9 +28465,11 @@
           <a:effectLst/>
         </p:spPr>
         <p:txBody>
-          <a:bodyPr rtlCol="0" anchor="ctr" wrap="square"/>
-          <a:lstStyle/>
-          <a:p/>
+          <a:bodyPr wrap="square" rtlCol="0" anchor="ctr"/>
+          <a:lstStyle/>
+          <a:p>
+            <a:endParaRPr/>
+          </a:p>
         </p:txBody>
       </p:sp>
       <p:sp>
@@ -28189,7 +28489,7 @@
           <a:noFill/>
         </p:spPr>
         <p:txBody>
-          <a:bodyPr wrap="none" lIns="0" rIns="0" tIns="0" bIns="0" anchor="t">
+          <a:bodyPr wrap="none" lIns="0" tIns="0" rIns="0" bIns="0" anchor="t">
             <a:spAutoFit/>
           </a:bodyPr>
           <a:lstStyle/>
@@ -28229,7 +28529,7 @@
           <a:noFill/>
         </p:spPr>
         <p:txBody>
-          <a:bodyPr wrap="none" lIns="0" rIns="0" tIns="0" bIns="0" anchor="t">
+          <a:bodyPr wrap="none" lIns="0" tIns="0" rIns="0" bIns="0" anchor="t">
             <a:spAutoFit/>
           </a:bodyPr>
           <a:lstStyle/>
@@ -28269,7 +28569,7 @@
           <a:noFill/>
         </p:spPr>
         <p:txBody>
-          <a:bodyPr wrap="none" lIns="0" rIns="0" tIns="0" bIns="0" anchor="t">
+          <a:bodyPr wrap="none" lIns="0" tIns="0" rIns="0" bIns="0" anchor="t">
             <a:spAutoFit/>
           </a:bodyPr>
           <a:lstStyle/>
@@ -28315,9 +28615,11 @@
           <a:effectLst/>
         </p:spPr>
         <p:txBody>
-          <a:bodyPr rtlCol="0" anchor="ctr" wrap="square"/>
-          <a:lstStyle/>
-          <a:p/>
+          <a:bodyPr wrap="square" rtlCol="0" anchor="ctr"/>
+          <a:lstStyle/>
+          <a:p>
+            <a:endParaRPr/>
+          </a:p>
         </p:txBody>
       </p:sp>
       <p:cxnSp>
@@ -28358,7 +28660,7 @@
           <a:noFill/>
         </p:spPr>
         <p:txBody>
-          <a:bodyPr wrap="square" lIns="0" rIns="0" tIns="0" bIns="0" anchor="ctr">
+          <a:bodyPr wrap="square" lIns="0" tIns="0" rIns="0" bIns="0" anchor="ctr">
             <a:spAutoFit/>
           </a:bodyPr>
           <a:lstStyle/>
@@ -28398,7 +28700,7 @@
           <a:noFill/>
         </p:spPr>
         <p:txBody>
-          <a:bodyPr wrap="square" lIns="0" rIns="0" tIns="0" bIns="0" anchor="ctr">
+          <a:bodyPr wrap="square" lIns="0" tIns="0" rIns="0" bIns="0" anchor="ctr">
             <a:spAutoFit/>
           </a:bodyPr>
           <a:lstStyle/>
@@ -28438,7 +28740,7 @@
           <a:noFill/>
         </p:spPr>
         <p:txBody>
-          <a:bodyPr wrap="square" lIns="0" rIns="0" tIns="0" bIns="0" anchor="ctr">
+          <a:bodyPr wrap="square" lIns="0" tIns="0" rIns="0" bIns="0" anchor="ctr">
             <a:spAutoFit/>
           </a:bodyPr>
           <a:lstStyle/>
@@ -28499,7 +28801,7 @@
           <a:noFill/>
         </p:spPr>
         <p:txBody>
-          <a:bodyPr wrap="square" lIns="0" rIns="0" tIns="0" bIns="0" anchor="ctr">
+          <a:bodyPr wrap="square" lIns="0" tIns="0" rIns="0" bIns="0" anchor="ctr">
             <a:spAutoFit/>
           </a:bodyPr>
           <a:lstStyle/>
@@ -28539,7 +28841,7 @@
           <a:noFill/>
         </p:spPr>
         <p:txBody>
-          <a:bodyPr wrap="square" lIns="0" rIns="0" tIns="0" bIns="0" anchor="ctr">
+          <a:bodyPr wrap="square" lIns="0" tIns="0" rIns="0" bIns="0" anchor="ctr">
             <a:spAutoFit/>
           </a:bodyPr>
           <a:lstStyle/>
@@ -28579,7 +28881,7 @@
           <a:noFill/>
         </p:spPr>
         <p:txBody>
-          <a:bodyPr wrap="square" lIns="0" rIns="0" tIns="0" bIns="0" anchor="ctr">
+          <a:bodyPr wrap="square" lIns="0" tIns="0" rIns="0" bIns="0" anchor="ctr">
             <a:spAutoFit/>
           </a:bodyPr>
           <a:lstStyle/>
@@ -28625,9 +28927,11 @@
           <a:effectLst/>
         </p:spPr>
         <p:txBody>
-          <a:bodyPr rtlCol="0" anchor="ctr" wrap="square"/>
-          <a:lstStyle/>
-          <a:p/>
+          <a:bodyPr wrap="square" rtlCol="0" anchor="ctr"/>
+          <a:lstStyle/>
+          <a:p>
+            <a:endParaRPr/>
+          </a:p>
         </p:txBody>
       </p:sp>
       <p:cxnSp>
@@ -28668,7 +28972,7 @@
           <a:noFill/>
         </p:spPr>
         <p:txBody>
-          <a:bodyPr wrap="square" lIns="0" rIns="0" tIns="0" bIns="0" anchor="ctr">
+          <a:bodyPr wrap="square" lIns="0" tIns="0" rIns="0" bIns="0" anchor="ctr">
             <a:spAutoFit/>
           </a:bodyPr>
           <a:lstStyle/>
@@ -28708,7 +29012,7 @@
           <a:noFill/>
         </p:spPr>
         <p:txBody>
-          <a:bodyPr wrap="square" lIns="0" rIns="0" tIns="0" bIns="0" anchor="ctr">
+          <a:bodyPr wrap="square" lIns="0" tIns="0" rIns="0" bIns="0" anchor="ctr">
             <a:spAutoFit/>
           </a:bodyPr>
           <a:lstStyle/>
@@ -28748,7 +29052,7 @@
           <a:noFill/>
         </p:spPr>
         <p:txBody>
-          <a:bodyPr wrap="square" lIns="0" rIns="0" tIns="0" bIns="0" anchor="ctr">
+          <a:bodyPr wrap="square" lIns="0" tIns="0" rIns="0" bIns="0" anchor="ctr">
             <a:spAutoFit/>
           </a:bodyPr>
           <a:lstStyle/>
@@ -28809,7 +29113,7 @@
           <a:noFill/>
         </p:spPr>
         <p:txBody>
-          <a:bodyPr wrap="square" lIns="0" rIns="0" tIns="0" bIns="0" anchor="ctr">
+          <a:bodyPr wrap="square" lIns="0" tIns="0" rIns="0" bIns="0" anchor="ctr">
             <a:spAutoFit/>
           </a:bodyPr>
           <a:lstStyle/>
@@ -28849,7 +29153,7 @@
           <a:noFill/>
         </p:spPr>
         <p:txBody>
-          <a:bodyPr wrap="square" lIns="0" rIns="0" tIns="0" bIns="0" anchor="ctr">
+          <a:bodyPr wrap="square" lIns="0" tIns="0" rIns="0" bIns="0" anchor="ctr">
             <a:spAutoFit/>
           </a:bodyPr>
           <a:lstStyle/>
@@ -28889,7 +29193,7 @@
           <a:noFill/>
         </p:spPr>
         <p:txBody>
-          <a:bodyPr wrap="square" lIns="0" rIns="0" tIns="0" bIns="0" anchor="ctr">
+          <a:bodyPr wrap="square" lIns="0" tIns="0" rIns="0" bIns="0" anchor="ctr">
             <a:spAutoFit/>
           </a:bodyPr>
           <a:lstStyle/>
@@ -28935,9 +29239,11 @@
           <a:effectLst/>
         </p:spPr>
         <p:txBody>
-          <a:bodyPr rtlCol="0" anchor="ctr" wrap="square"/>
-          <a:lstStyle/>
-          <a:p/>
+          <a:bodyPr wrap="square" rtlCol="0" anchor="ctr"/>
+          <a:lstStyle/>
+          <a:p>
+            <a:endParaRPr/>
+          </a:p>
         </p:txBody>
       </p:sp>
       <p:cxnSp>
@@ -28978,7 +29284,7 @@
           <a:noFill/>
         </p:spPr>
         <p:txBody>
-          <a:bodyPr wrap="square" lIns="0" rIns="0" tIns="0" bIns="0" anchor="ctr">
+          <a:bodyPr wrap="square" lIns="0" tIns="0" rIns="0" bIns="0" anchor="ctr">
             <a:spAutoFit/>
           </a:bodyPr>
           <a:lstStyle/>
@@ -29018,7 +29324,7 @@
           <a:noFill/>
         </p:spPr>
         <p:txBody>
-          <a:bodyPr wrap="square" lIns="0" rIns="0" tIns="0" bIns="0" anchor="ctr">
+          <a:bodyPr wrap="square" lIns="0" tIns="0" rIns="0" bIns="0" anchor="ctr">
             <a:spAutoFit/>
           </a:bodyPr>
           <a:lstStyle/>
@@ -29058,7 +29364,7 @@
           <a:noFill/>
         </p:spPr>
         <p:txBody>
-          <a:bodyPr wrap="square" lIns="0" rIns="0" tIns="0" bIns="0" anchor="ctr">
+          <a:bodyPr wrap="square" lIns="0" tIns="0" rIns="0" bIns="0" anchor="ctr">
             <a:spAutoFit/>
           </a:bodyPr>
           <a:lstStyle/>
@@ -29119,7 +29425,7 @@
           <a:noFill/>
         </p:spPr>
         <p:txBody>
-          <a:bodyPr wrap="square" lIns="0" rIns="0" tIns="0" bIns="0" anchor="ctr">
+          <a:bodyPr wrap="square" lIns="0" tIns="0" rIns="0" bIns="0" anchor="ctr">
             <a:spAutoFit/>
           </a:bodyPr>
           <a:lstStyle/>
@@ -29159,7 +29465,7 @@
           <a:noFill/>
         </p:spPr>
         <p:txBody>
-          <a:bodyPr wrap="square" lIns="0" rIns="0" tIns="0" bIns="0" anchor="ctr">
+          <a:bodyPr wrap="square" lIns="0" tIns="0" rIns="0" bIns="0" anchor="ctr">
             <a:spAutoFit/>
           </a:bodyPr>
           <a:lstStyle/>
@@ -29199,7 +29505,7 @@
           <a:noFill/>
         </p:spPr>
         <p:txBody>
-          <a:bodyPr wrap="square" lIns="0" rIns="0" tIns="0" bIns="0" anchor="ctr">
+          <a:bodyPr wrap="square" lIns="0" tIns="0" rIns="0" bIns="0" anchor="ctr">
             <a:spAutoFit/>
           </a:bodyPr>
           <a:lstStyle/>
@@ -29245,9 +29551,11 @@
           <a:effectLst/>
         </p:spPr>
         <p:txBody>
-          <a:bodyPr rtlCol="0" anchor="ctr" wrap="square"/>
-          <a:lstStyle/>
-          <a:p/>
+          <a:bodyPr wrap="square" rtlCol="0" anchor="ctr"/>
+          <a:lstStyle/>
+          <a:p>
+            <a:endParaRPr/>
+          </a:p>
         </p:txBody>
       </p:sp>
       <p:cxnSp>
@@ -29288,7 +29596,7 @@
           <a:noFill/>
         </p:spPr>
         <p:txBody>
-          <a:bodyPr wrap="square" lIns="0" rIns="0" tIns="0" bIns="0" anchor="ctr">
+          <a:bodyPr wrap="square" lIns="0" tIns="0" rIns="0" bIns="0" anchor="ctr">
             <a:spAutoFit/>
           </a:bodyPr>
           <a:lstStyle/>
@@ -29328,7 +29636,7 @@
           <a:noFill/>
         </p:spPr>
         <p:txBody>
-          <a:bodyPr wrap="square" lIns="0" rIns="0" tIns="0" bIns="0" anchor="ctr">
+          <a:bodyPr wrap="square" lIns="0" tIns="0" rIns="0" bIns="0" anchor="ctr">
             <a:spAutoFit/>
           </a:bodyPr>
           <a:lstStyle/>
@@ -29368,7 +29676,7 @@
           <a:noFill/>
         </p:spPr>
         <p:txBody>
-          <a:bodyPr wrap="square" lIns="0" rIns="0" tIns="0" bIns="0" anchor="ctr">
+          <a:bodyPr wrap="square" lIns="0" tIns="0" rIns="0" bIns="0" anchor="ctr">
             <a:spAutoFit/>
           </a:bodyPr>
           <a:lstStyle/>
@@ -29456,9 +29764,11 @@
           <a:effectLst/>
         </p:spPr>
         <p:txBody>
-          <a:bodyPr rtlCol="0" anchor="ctr" wrap="square"/>
-          <a:lstStyle/>
-          <a:p/>
+          <a:bodyPr wrap="square" rtlCol="0" anchor="ctr"/>
+          <a:lstStyle/>
+          <a:p>
+            <a:endParaRPr/>
+          </a:p>
         </p:txBody>
       </p:sp>
       <p:sp>
@@ -29484,9 +29794,11 @@
           <a:effectLst/>
         </p:spPr>
         <p:txBody>
-          <a:bodyPr rtlCol="0" anchor="ctr" wrap="square"/>
-          <a:lstStyle/>
-          <a:p/>
+          <a:bodyPr wrap="square" rtlCol="0" anchor="ctr"/>
+          <a:lstStyle/>
+          <a:p>
+            <a:endParaRPr/>
+          </a:p>
         </p:txBody>
       </p:sp>
       <p:sp>
@@ -29506,7 +29818,7 @@
           <a:noFill/>
         </p:spPr>
         <p:txBody>
-          <a:bodyPr wrap="square" lIns="0" rIns="0" tIns="0" bIns="0" anchor="t">
+          <a:bodyPr wrap="square" lIns="0" tIns="0" rIns="0" bIns="0" anchor="t">
             <a:spAutoFit/>
           </a:bodyPr>
           <a:lstStyle/>
@@ -29546,7 +29858,7 @@
           <a:noFill/>
         </p:spPr>
         <p:txBody>
-          <a:bodyPr wrap="square" lIns="0" rIns="0" tIns="0" bIns="0" anchor="t">
+          <a:bodyPr wrap="square" lIns="0" tIns="0" rIns="0" bIns="0" anchor="t">
             <a:spAutoFit/>
           </a:bodyPr>
           <a:lstStyle/>
@@ -29578,7 +29890,7 @@
 </file>
 
 <file path=ppt/slides/slide9.xml><?xml version="1.0" encoding="utf-8"?>
-<p:sld xmlns:a="http://schemas.openxmlformats.org/drawingml/2006/main" xmlns:p="http://schemas.openxmlformats.org/presentationml/2006/main" xmlns:r="http://schemas.openxmlformats.org/officeDocument/2006/relationships">
+<p:sld xmlns:a="http://schemas.openxmlformats.org/drawingml/2006/main" xmlns:r="http://schemas.openxmlformats.org/officeDocument/2006/relationships" xmlns:p="http://schemas.openxmlformats.org/presentationml/2006/main">
   <p:cSld>
     <p:spTree>
       <p:nvGrpSpPr>
@@ -29586,7 +29898,14 @@
         <p:cNvGrpSpPr/>
         <p:nvPr/>
       </p:nvGrpSpPr>
-      <p:grpSpPr/>
+      <p:grpSpPr>
+        <a:xfrm>
+          <a:off x="0" y="0"/>
+          <a:ext cx="0" cy="0"/>
+          <a:chOff x="0" y="0"/>
+          <a:chExt cx="0" cy="0"/>
+        </a:xfrm>
+      </p:grpSpPr>
       <p:sp>
         <p:nvSpPr>
           <p:cNvPr id="2" name="TextBox 1"/>
@@ -29604,7 +29923,7 @@
           <a:noFill/>
         </p:spPr>
         <p:txBody>
-          <a:bodyPr wrap="square" lIns="0" rIns="0" tIns="0" bIns="0" anchor="t">
+          <a:bodyPr wrap="square" lIns="0" tIns="0" rIns="0" bIns="0" anchor="t">
             <a:spAutoFit/>
           </a:bodyPr>
           <a:lstStyle/>
@@ -29615,7 +29934,7 @@
               </a:lnSpc>
             </a:pPr>
             <a:r>
-              <a:rPr sz="800" b="1" i="0" dirty="0" spc="140">
+              <a:rPr sz="800" b="1" i="0" spc="140" dirty="0">
                 <a:solidFill>
                   <a:srgbClr val="008173"/>
                 </a:solidFill>
@@ -29644,7 +29963,7 @@
           <a:noFill/>
         </p:spPr>
         <p:txBody>
-          <a:bodyPr wrap="square" lIns="0" rIns="0" tIns="0" bIns="0" anchor="t">
+          <a:bodyPr wrap="square" lIns="0" tIns="0" rIns="0" bIns="0" anchor="t">
             <a:spAutoFit/>
           </a:bodyPr>
           <a:lstStyle/>
@@ -29684,7 +30003,7 @@
           <a:noFill/>
         </p:spPr>
         <p:txBody>
-          <a:bodyPr wrap="square" lIns="0" rIns="0" tIns="0" bIns="0" anchor="t">
+          <a:bodyPr wrap="square" lIns="0" tIns="0" rIns="0" bIns="0" anchor="t">
             <a:spAutoFit/>
           </a:bodyPr>
           <a:lstStyle/>
@@ -29724,7 +30043,7 @@
           <a:noFill/>
         </p:spPr>
         <p:txBody>
-          <a:bodyPr wrap="square" lIns="0" rIns="0" tIns="0" bIns="0" anchor="t">
+          <a:bodyPr wrap="square" lIns="0" tIns="0" rIns="0" bIns="0" anchor="t">
             <a:spAutoFit/>
           </a:bodyPr>
           <a:lstStyle/>
@@ -29764,7 +30083,7 @@
           <a:noFill/>
         </p:spPr>
         <p:txBody>
-          <a:bodyPr wrap="square" lIns="0" rIns="0" tIns="0" bIns="0" anchor="t">
+          <a:bodyPr wrap="square" lIns="0" tIns="0" rIns="0" bIns="0" anchor="t">
             <a:spAutoFit/>
           </a:bodyPr>
           <a:lstStyle/>
@@ -29810,7 +30129,7 @@
           <a:effectLst/>
         </p:spPr>
         <p:txBody>
-          <a:bodyPr rtlCol="0" anchor="ctr" wrap="square" lIns="54864" rIns="54864" tIns="18288" bIns="18288"/>
+          <a:bodyPr wrap="square" lIns="54864" tIns="18288" rIns="54864" bIns="18288" rtlCol="0" anchor="ctr"/>
           <a:lstStyle/>
           <a:p>
             <a:pPr algn="ctr">
@@ -29873,7 +30192,7 @@
           <a:effectLst/>
         </p:spPr>
         <p:txBody>
-          <a:bodyPr rtlCol="0" anchor="ctr" wrap="square" lIns="54864" rIns="54864" tIns="18288" bIns="18288"/>
+          <a:bodyPr wrap="square" lIns="54864" tIns="18288" rIns="54864" bIns="18288" rtlCol="0" anchor="ctr"/>
           <a:lstStyle/>
           <a:p>
             <a:pPr algn="ctr">
@@ -29934,7 +30253,7 @@
           <a:effectLst/>
         </p:spPr>
         <p:txBody>
-          <a:bodyPr rtlCol="0" anchor="ctr" wrap="square" lIns="54864" rIns="54864" tIns="18288" bIns="18288"/>
+          <a:bodyPr wrap="square" lIns="54864" tIns="18288" rIns="54864" bIns="18288" rtlCol="0" anchor="ctr"/>
           <a:lstStyle/>
           <a:p>
             <a:pPr algn="ctr">
@@ -29995,7 +30314,7 @@
           <a:effectLst/>
         </p:spPr>
         <p:txBody>
-          <a:bodyPr rtlCol="0" anchor="ctr" wrap="square" lIns="54864" rIns="54864" tIns="18288" bIns="18288"/>
+          <a:bodyPr wrap="square" lIns="54864" tIns="18288" rIns="54864" bIns="18288" rtlCol="0" anchor="ctr"/>
           <a:lstStyle/>
           <a:p>
             <a:pPr algn="ctr">
@@ -30058,7 +30377,7 @@
           <a:effectLst/>
         </p:spPr>
         <p:txBody>
-          <a:bodyPr rtlCol="0" anchor="ctr" wrap="square" lIns="54864" rIns="54864" tIns="18288" bIns="18288"/>
+          <a:bodyPr wrap="square" lIns="54864" tIns="18288" rIns="54864" bIns="18288" rtlCol="0" anchor="ctr"/>
           <a:lstStyle/>
           <a:p>
             <a:pPr algn="ctr">
@@ -30119,7 +30438,7 @@
           <a:effectLst/>
         </p:spPr>
         <p:txBody>
-          <a:bodyPr rtlCol="0" anchor="ctr" wrap="square" lIns="54864" rIns="54864" tIns="18288" bIns="18288"/>
+          <a:bodyPr wrap="square" lIns="54864" tIns="18288" rIns="54864" bIns="18288" rtlCol="0" anchor="ctr"/>
           <a:lstStyle/>
           <a:p>
             <a:pPr algn="ctr">
@@ -30218,7 +30537,7 @@
           </a:fontRef>
         </p:style>
         <p:txBody>
-          <a:bodyPr rtlCol="0" anchor="ctr" wrap="square" lIns="0" rIns="0" tIns="18288" bIns="18288"/>
+          <a:bodyPr wrap="square" lIns="0" tIns="18288" rIns="0" bIns="18288" rtlCol="0" anchor="ctr"/>
           <a:lstStyle/>
           <a:p>
             <a:pPr algn="ctr">
@@ -30364,7 +30683,7 @@
           </a:fontRef>
         </p:style>
         <p:txBody>
-          <a:bodyPr rtlCol="0" anchor="ctr" wrap="square" lIns="0" rIns="0" tIns="18288" bIns="18288"/>
+          <a:bodyPr wrap="square" lIns="0" tIns="18288" rIns="0" bIns="18288" rtlCol="0" anchor="ctr"/>
           <a:lstStyle/>
           <a:p>
             <a:pPr algn="ctr">
@@ -30424,7 +30743,7 @@
           </a:fontRef>
         </p:style>
         <p:txBody>
-          <a:bodyPr rtlCol="0" anchor="ctr" wrap="square" lIns="0" rIns="0" tIns="18288" bIns="18288"/>
+          <a:bodyPr wrap="square" lIns="0" tIns="18288" rIns="0" bIns="18288" rtlCol="0" anchor="ctr"/>
           <a:lstStyle/>
           <a:p>
             <a:pPr algn="ctr">
@@ -30569,7 +30888,7 @@
           </a:fontRef>
         </p:style>
         <p:txBody>
-          <a:bodyPr rtlCol="0" anchor="ctr" wrap="square" lIns="0" rIns="0" tIns="18288" bIns="18288"/>
+          <a:bodyPr wrap="square" lIns="0" tIns="18288" rIns="0" bIns="18288" rtlCol="0" anchor="ctr"/>
           <a:lstStyle/>
           <a:p>
             <a:pPr algn="ctr">
@@ -30651,7 +30970,7 @@
           </a:fontRef>
         </p:style>
         <p:txBody>
-          <a:bodyPr rtlCol="0" anchor="ctr" wrap="square" lIns="0" rIns="0" tIns="18288" bIns="18288"/>
+          <a:bodyPr wrap="square" lIns="0" tIns="18288" rIns="0" bIns="18288" rtlCol="0" anchor="ctr"/>
           <a:lstStyle/>
           <a:p>
             <a:pPr algn="ctr">
@@ -30697,9 +31016,11 @@
           <a:effectLst/>
         </p:spPr>
         <p:txBody>
-          <a:bodyPr rtlCol="0" anchor="ctr" wrap="square"/>
-          <a:lstStyle/>
-          <a:p/>
+          <a:bodyPr wrap="square" rtlCol="0" anchor="ctr"/>
+          <a:lstStyle/>
+          <a:p>
+            <a:endParaRPr/>
+          </a:p>
         </p:txBody>
       </p:sp>
       <p:sp>
@@ -30725,9 +31046,11 @@
           <a:effectLst/>
         </p:spPr>
         <p:txBody>
-          <a:bodyPr rtlCol="0" anchor="ctr" wrap="square"/>
-          <a:lstStyle/>
-          <a:p/>
+          <a:bodyPr wrap="square" rtlCol="0" anchor="ctr"/>
+          <a:lstStyle/>
+          <a:p>
+            <a:endParaRPr/>
+          </a:p>
         </p:txBody>
       </p:sp>
       <p:sp>
@@ -30747,7 +31070,7 @@
           <a:noFill/>
         </p:spPr>
         <p:txBody>
-          <a:bodyPr wrap="square" lIns="0" rIns="0" tIns="0" bIns="0" anchor="t">
+          <a:bodyPr wrap="square" lIns="0" tIns="0" rIns="0" bIns="0" anchor="t">
             <a:spAutoFit/>
           </a:bodyPr>
           <a:lstStyle/>
@@ -30787,7 +31110,7 @@
           <a:noFill/>
         </p:spPr>
         <p:txBody>
-          <a:bodyPr wrap="square" lIns="0" rIns="0" tIns="0" bIns="0" anchor="t">
+          <a:bodyPr wrap="square" lIns="0" tIns="0" rIns="0" bIns="0" anchor="t">
             <a:spAutoFit/>
           </a:bodyPr>
           <a:lstStyle/>
@@ -30858,9 +31181,11 @@
           <a:effectLst/>
         </p:spPr>
         <p:txBody>
-          <a:bodyPr rtlCol="0" anchor="ctr" wrap="square"/>
-          <a:lstStyle/>
-          <a:p/>
+          <a:bodyPr wrap="square" rtlCol="0" anchor="ctr"/>
+          <a:lstStyle/>
+          <a:p>
+            <a:endParaRPr/>
+          </a:p>
         </p:txBody>
       </p:sp>
       <p:sp>
@@ -30886,9 +31211,11 @@
           <a:effectLst/>
         </p:spPr>
         <p:txBody>
-          <a:bodyPr rtlCol="0" anchor="ctr" wrap="square"/>
-          <a:lstStyle/>
-          <a:p/>
+          <a:bodyPr wrap="square" rtlCol="0" anchor="ctr"/>
+          <a:lstStyle/>
+          <a:p>
+            <a:endParaRPr/>
+          </a:p>
         </p:txBody>
       </p:sp>
       <p:sp>
@@ -30908,7 +31235,7 @@
           <a:noFill/>
         </p:spPr>
         <p:txBody>
-          <a:bodyPr wrap="square" lIns="0" rIns="0" tIns="0" bIns="0" anchor="t">
+          <a:bodyPr wrap="square" lIns="0" tIns="0" rIns="0" bIns="0" anchor="t">
             <a:spAutoFit/>
           </a:bodyPr>
           <a:lstStyle/>
@@ -30948,7 +31275,7 @@
           <a:noFill/>
         </p:spPr>
         <p:txBody>
-          <a:bodyPr wrap="square" lIns="0" rIns="0" tIns="0" bIns="0" anchor="t">
+          <a:bodyPr wrap="square" lIns="0" tIns="0" rIns="0" bIns="0" anchor="t">
             <a:spAutoFit/>
           </a:bodyPr>
           <a:lstStyle/>
@@ -31019,9 +31346,11 @@
           <a:effectLst/>
         </p:spPr>
         <p:txBody>
-          <a:bodyPr rtlCol="0" anchor="ctr" wrap="square"/>
-          <a:lstStyle/>
-          <a:p/>
+          <a:bodyPr wrap="square" rtlCol="0" anchor="ctr"/>
+          <a:lstStyle/>
+          <a:p>
+            <a:endParaRPr/>
+          </a:p>
         </p:txBody>
       </p:sp>
       <p:sp>
@@ -31047,9 +31376,11 @@
           <a:effectLst/>
         </p:spPr>
         <p:txBody>
-          <a:bodyPr rtlCol="0" anchor="ctr" wrap="square"/>
-          <a:lstStyle/>
-          <a:p/>
+          <a:bodyPr wrap="square" rtlCol="0" anchor="ctr"/>
+          <a:lstStyle/>
+          <a:p>
+            <a:endParaRPr/>
+          </a:p>
         </p:txBody>
       </p:sp>
       <p:sp>
@@ -31069,7 +31400,7 @@
           <a:noFill/>
         </p:spPr>
         <p:txBody>
-          <a:bodyPr wrap="square" lIns="0" rIns="0" tIns="0" bIns="0" anchor="t">
+          <a:bodyPr wrap="square" lIns="0" tIns="0" rIns="0" bIns="0" anchor="t">
             <a:spAutoFit/>
           </a:bodyPr>
           <a:lstStyle/>
@@ -31109,7 +31440,7 @@
           <a:noFill/>
         </p:spPr>
         <p:txBody>
-          <a:bodyPr wrap="square" lIns="0" rIns="0" tIns="0" bIns="0" anchor="t">
+          <a:bodyPr wrap="square" lIns="0" tIns="0" rIns="0" bIns="0" anchor="t">
             <a:spAutoFit/>
           </a:bodyPr>
           <a:lstStyle/>
@@ -31172,7 +31503,7 @@
           <a:noFill/>
         </p:spPr>
         <p:txBody>
-          <a:bodyPr wrap="square" lIns="0" rIns="0" tIns="0" bIns="0" anchor="t">
+          <a:bodyPr wrap="square" lIns="0" tIns="0" rIns="0" bIns="0" anchor="t">
             <a:spAutoFit/>
           </a:bodyPr>
           <a:lstStyle/>
@@ -31218,9 +31549,11 @@
           <a:effectLst/>
         </p:spPr>
         <p:txBody>
-          <a:bodyPr rtlCol="0" anchor="ctr" wrap="square"/>
-          <a:lstStyle/>
-          <a:p/>
+          <a:bodyPr wrap="square" rtlCol="0" anchor="ctr"/>
+          <a:lstStyle/>
+          <a:p>
+            <a:endParaRPr/>
+          </a:p>
         </p:txBody>
       </p:sp>
       <p:sp>
@@ -31240,7 +31573,7 @@
           <a:noFill/>
         </p:spPr>
         <p:txBody>
-          <a:bodyPr wrap="none" lIns="0" rIns="0" tIns="0" bIns="0" anchor="t">
+          <a:bodyPr wrap="none" lIns="0" tIns="0" rIns="0" bIns="0" anchor="t">
             <a:spAutoFit/>
           </a:bodyPr>
           <a:lstStyle/>
@@ -31288,9 +31621,11 @@
           <a:effectLst/>
         </p:spPr>
         <p:txBody>
-          <a:bodyPr rtlCol="0" anchor="ctr" wrap="square"/>
-          <a:lstStyle/>
-          <a:p/>
+          <a:bodyPr wrap="square" rtlCol="0" anchor="ctr"/>
+          <a:lstStyle/>
+          <a:p>
+            <a:endParaRPr/>
+          </a:p>
         </p:txBody>
       </p:sp>
       <p:sp>
@@ -31310,7 +31645,7 @@
           <a:noFill/>
         </p:spPr>
         <p:txBody>
-          <a:bodyPr wrap="none" lIns="0" rIns="0" tIns="0" bIns="0" anchor="t">
+          <a:bodyPr wrap="none" lIns="0" tIns="0" rIns="0" bIns="0" anchor="t">
             <a:spAutoFit/>
           </a:bodyPr>
           <a:lstStyle/>
@@ -31356,9 +31691,11 @@
           <a:effectLst/>
         </p:spPr>
         <p:txBody>
-          <a:bodyPr rtlCol="0" anchor="ctr" wrap="square"/>
-          <a:lstStyle/>
-          <a:p/>
+          <a:bodyPr wrap="square" rtlCol="0" anchor="ctr"/>
+          <a:lstStyle/>
+          <a:p>
+            <a:endParaRPr/>
+          </a:p>
         </p:txBody>
       </p:sp>
       <p:sp>
@@ -31378,7 +31715,7 @@
           <a:noFill/>
         </p:spPr>
         <p:txBody>
-          <a:bodyPr wrap="none" lIns="0" rIns="0" tIns="0" bIns="0" anchor="t">
+          <a:bodyPr wrap="none" lIns="0" tIns="0" rIns="0" bIns="0" anchor="t">
             <a:spAutoFit/>
           </a:bodyPr>
           <a:lstStyle/>
@@ -31424,9 +31761,11 @@
           <a:effectLst/>
         </p:spPr>
         <p:txBody>
-          <a:bodyPr rtlCol="0" anchor="ctr" wrap="square"/>
-          <a:lstStyle/>
-          <a:p/>
+          <a:bodyPr wrap="square" rtlCol="0" anchor="ctr"/>
+          <a:lstStyle/>
+          <a:p>
+            <a:endParaRPr/>
+          </a:p>
         </p:txBody>
       </p:sp>
       <p:sp>
@@ -31446,7 +31785,7 @@
           <a:noFill/>
         </p:spPr>
         <p:txBody>
-          <a:bodyPr wrap="none" lIns="0" rIns="0" tIns="0" bIns="0" anchor="t">
+          <a:bodyPr wrap="none" lIns="0" tIns="0" rIns="0" bIns="0" anchor="t">
             <a:spAutoFit/>
           </a:bodyPr>
           <a:lstStyle/>
@@ -31507,7 +31846,7 @@
           <a:noFill/>
         </p:spPr>
         <p:txBody>
-          <a:bodyPr wrap="none" lIns="0" rIns="0" tIns="0" bIns="0" anchor="t">
+          <a:bodyPr wrap="none" lIns="0" tIns="0" rIns="0" bIns="0" anchor="t">
             <a:spAutoFit/>
           </a:bodyPr>
           <a:lstStyle/>
@@ -31869,44 +32208,44 @@
         <a:sysClr val="window" lastClr="FFFFFF"/>
       </a:lt1>
       <a:dk2>
-        <a:srgbClr val="1F497D"/>
+        <a:srgbClr val="44546A"/>
       </a:dk2>
       <a:lt2>
-        <a:srgbClr val="EEECE1"/>
+        <a:srgbClr val="E7E6E6"/>
       </a:lt2>
       <a:accent1>
-        <a:srgbClr val="4F81BD"/>
+        <a:srgbClr val="4472C4"/>
       </a:accent1>
       <a:accent2>
-        <a:srgbClr val="C0504D"/>
+        <a:srgbClr val="ED7D31"/>
       </a:accent2>
       <a:accent3>
-        <a:srgbClr val="9BBB59"/>
+        <a:srgbClr val="A5A5A5"/>
       </a:accent3>
       <a:accent4>
-        <a:srgbClr val="8064A2"/>
+        <a:srgbClr val="FFC000"/>
       </a:accent4>
       <a:accent5>
-        <a:srgbClr val="4BACC6"/>
+        <a:srgbClr val="5B9BD5"/>
       </a:accent5>
       <a:accent6>
-        <a:srgbClr val="F79646"/>
+        <a:srgbClr val="70AD47"/>
       </a:accent6>
       <a:hlink>
-        <a:srgbClr val="0000FF"/>
+        <a:srgbClr val="0563C1"/>
       </a:hlink>
       <a:folHlink>
-        <a:srgbClr val="800080"/>
+        <a:srgbClr val="954F72"/>
       </a:folHlink>
     </a:clrScheme>
     <a:fontScheme name="Office">
       <a:majorFont>
-        <a:latin typeface="Calibri"/>
+        <a:latin typeface="Calibri Light" panose="020F0302020204030204"/>
         <a:ea typeface=""/>
         <a:cs typeface=""/>
-        <a:font script="Jpan" typeface="ＭＳ Ｐゴシック"/>
+        <a:font script="Jpan" typeface="游ゴシック Light"/>
         <a:font script="Hang" typeface="맑은 고딕"/>
-        <a:font script="Hans" typeface="宋体"/>
+        <a:font script="Hans" typeface="等线 Light"/>
         <a:font script="Hant" typeface="新細明體"/>
         <a:font script="Arab" typeface="Times New Roman"/>
         <a:font script="Hebr" typeface="Times New Roman"/>
@@ -31934,14 +32273,31 @@
         <a:font script="Viet" typeface="Times New Roman"/>
         <a:font script="Uigh" typeface="Microsoft Uighur"/>
         <a:font script="Geor" typeface="Sylfaen"/>
+        <a:font script="Armn" typeface="Arial"/>
+        <a:font script="Bugi" typeface="Leelawadee UI"/>
+        <a:font script="Bopo" typeface="Microsoft JhengHei"/>
+        <a:font script="Java" typeface="Javanese Text"/>
+        <a:font script="Lisu" typeface="Segoe UI"/>
+        <a:font script="Mymr" typeface="Myanmar Text"/>
+        <a:font script="Nkoo" typeface="Ebrima"/>
+        <a:font script="Olck" typeface="Nirmala UI"/>
+        <a:font script="Osma" typeface="Ebrima"/>
+        <a:font script="Phag" typeface="Phagspa"/>
+        <a:font script="Syrn" typeface="Estrangelo Edessa"/>
+        <a:font script="Syrj" typeface="Estrangelo Edessa"/>
+        <a:font script="Syre" typeface="Estrangelo Edessa"/>
+        <a:font script="Sora" typeface="Nirmala UI"/>
+        <a:font script="Tale" typeface="Microsoft Tai Le"/>
+        <a:font script="Talu" typeface="Microsoft New Tai Lue"/>
+        <a:font script="Tfng" typeface="Ebrima"/>
       </a:majorFont>
       <a:minorFont>
-        <a:latin typeface="Calibri"/>
+        <a:latin typeface="Calibri" panose="020F0502020204030204"/>
         <a:ea typeface=""/>
         <a:cs typeface=""/>
-        <a:font script="Jpan" typeface="ＭＳ Ｐゴシック"/>
+        <a:font script="Jpan" typeface="游ゴシック"/>
         <a:font script="Hang" typeface="맑은 고딕"/>
-        <a:font script="Hans" typeface="宋体"/>
+        <a:font script="Hans" typeface="等线"/>
         <a:font script="Hant" typeface="新細明體"/>
         <a:font script="Arab" typeface="Arial"/>
         <a:font script="Hebr" typeface="Arial"/>
@@ -31969,6 +32325,23 @@
         <a:font script="Viet" typeface="Arial"/>
         <a:font script="Uigh" typeface="Microsoft Uighur"/>
         <a:font script="Geor" typeface="Sylfaen"/>
+        <a:font script="Armn" typeface="Arial"/>
+        <a:font script="Bugi" typeface="Leelawadee UI"/>
+        <a:font script="Bopo" typeface="Microsoft JhengHei"/>
+        <a:font script="Java" typeface="Javanese Text"/>
+        <a:font script="Lisu" typeface="Segoe UI"/>
+        <a:font script="Mymr" typeface="Myanmar Text"/>
+        <a:font script="Nkoo" typeface="Ebrima"/>
+        <a:font script="Olck" typeface="Nirmala UI"/>
+        <a:font script="Osma" typeface="Ebrima"/>
+        <a:font script="Phag" typeface="Phagspa"/>
+        <a:font script="Syrn" typeface="Estrangelo Edessa"/>
+        <a:font script="Syrj" typeface="Estrangelo Edessa"/>
+        <a:font script="Syre" typeface="Estrangelo Edessa"/>
+        <a:font script="Sora" typeface="Nirmala UI"/>
+        <a:font script="Tale" typeface="Microsoft Tai Le"/>
+        <a:font script="Talu" typeface="Microsoft New Tai Lue"/>
+        <a:font script="Tfng" typeface="Ebrima"/>
       </a:minorFont>
     </a:fontScheme>
     <a:fmtScheme name="Office">
@@ -31980,200 +32353,141 @@
           <a:gsLst>
             <a:gs pos="0">
               <a:schemeClr val="phClr">
-                <a:tint val="50000"/>
-                <a:satMod val="300000"/>
+                <a:lumMod val="110000"/>
+                <a:satMod val="105000"/>
+                <a:tint val="67000"/>
               </a:schemeClr>
             </a:gs>
-            <a:gs pos="35000">
+            <a:gs pos="50000">
               <a:schemeClr val="phClr">
-                <a:tint val="37000"/>
-                <a:satMod val="300000"/>
+                <a:lumMod val="105000"/>
+                <a:satMod val="103000"/>
+                <a:tint val="73000"/>
               </a:schemeClr>
             </a:gs>
             <a:gs pos="100000">
               <a:schemeClr val="phClr">
-                <a:tint val="15000"/>
-                <a:satMod val="350000"/>
+                <a:lumMod val="105000"/>
+                <a:satMod val="109000"/>
+                <a:tint val="81000"/>
               </a:schemeClr>
             </a:gs>
           </a:gsLst>
-          <a:lin ang="16200000" scaled="1"/>
+          <a:lin ang="5400000" scaled="0"/>
         </a:gradFill>
         <a:gradFill rotWithShape="1">
           <a:gsLst>
             <a:gs pos="0">
               <a:schemeClr val="phClr">
-                <a:tint val="100000"/>
+                <a:satMod val="103000"/>
+                <a:lumMod val="102000"/>
+                <a:tint val="94000"/>
+              </a:schemeClr>
+            </a:gs>
+            <a:gs pos="50000">
+              <a:schemeClr val="phClr">
+                <a:satMod val="110000"/>
+                <a:lumMod val="100000"/>
                 <a:shade val="100000"/>
-                <a:satMod val="130000"/>
               </a:schemeClr>
             </a:gs>
             <a:gs pos="100000">
               <a:schemeClr val="phClr">
-                <a:tint val="50000"/>
-                <a:shade val="100000"/>
-                <a:satMod val="350000"/>
+                <a:lumMod val="99000"/>
+                <a:satMod val="120000"/>
+                <a:shade val="78000"/>
               </a:schemeClr>
             </a:gs>
           </a:gsLst>
-          <a:lin ang="16200000" scaled="0"/>
+          <a:lin ang="5400000" scaled="0"/>
         </a:gradFill>
       </a:fillStyleLst>
       <a:lnStyleLst>
-        <a:ln w="9525" cap="flat" cmpd="sng" algn="ctr">
-          <a:solidFill>
-            <a:schemeClr val="phClr">
-              <a:shade val="95000"/>
-              <a:satMod val="105000"/>
-            </a:schemeClr>
-          </a:solidFill>
-          <a:prstDash val="solid"/>
-        </a:ln>
-        <a:ln w="25400" cap="flat" cmpd="sng" algn="ctr">
+        <a:ln w="6350" cap="flat" cmpd="sng" algn="ctr">
           <a:solidFill>
             <a:schemeClr val="phClr"/>
           </a:solidFill>
           <a:prstDash val="solid"/>
+          <a:miter lim="800000"/>
         </a:ln>
-        <a:ln w="38100" cap="flat" cmpd="sng" algn="ctr">
+        <a:ln w="12700" cap="flat" cmpd="sng" algn="ctr">
           <a:solidFill>
             <a:schemeClr val="phClr"/>
           </a:solidFill>
           <a:prstDash val="solid"/>
+          <a:miter lim="800000"/>
+        </a:ln>
+        <a:ln w="19050" cap="flat" cmpd="sng" algn="ctr">
+          <a:solidFill>
+            <a:schemeClr val="phClr"/>
+          </a:solidFill>
+          <a:prstDash val="solid"/>
+          <a:miter lim="800000"/>
         </a:ln>
       </a:lnStyleLst>
       <a:effectStyleLst>
         <a:effectStyle>
+          <a:effectLst/>
+        </a:effectStyle>
+        <a:effectStyle>
+          <a:effectLst/>
+        </a:effectStyle>
+        <a:effectStyle>
           <a:effectLst>
-            <a:outerShdw blurRad="40000" dist="20000" dir="5400000" rotWithShape="0">
+            <a:outerShdw blurRad="57150" dist="19050" dir="5400000" algn="ctr" rotWithShape="0">
               <a:srgbClr val="000000">
-                <a:alpha val="38000"/>
+                <a:alpha val="63000"/>
               </a:srgbClr>
             </a:outerShdw>
           </a:effectLst>
-        </a:effectStyle>
-        <a:effectStyle>
-          <a:effectLst>
-            <a:outerShdw blurRad="40000" dist="23000" dir="5400000" rotWithShape="0">
-              <a:srgbClr val="000000">
-                <a:alpha val="35000"/>
-              </a:srgbClr>
-            </a:outerShdw>
-          </a:effectLst>
-        </a:effectStyle>
-        <a:effectStyle>
-          <a:effectLst>
-            <a:outerShdw blurRad="40000" dist="23000" dir="5400000" rotWithShape="0">
-              <a:srgbClr val="000000">
-                <a:alpha val="35000"/>
-              </a:srgbClr>
-            </a:outerShdw>
-          </a:effectLst>
-          <a:scene3d>
-            <a:camera prst="orthographicFront">
-              <a:rot lat="0" lon="0" rev="0"/>
-            </a:camera>
-            <a:lightRig rig="threePt" dir="t">
-              <a:rot lat="0" lon="0" rev="1200000"/>
-            </a:lightRig>
-          </a:scene3d>
-          <a:sp3d>
-            <a:bevelT w="63500" h="25400"/>
-          </a:sp3d>
         </a:effectStyle>
       </a:effectStyleLst>
       <a:bgFillStyleLst>
         <a:solidFill>
           <a:schemeClr val="phClr"/>
         </a:solidFill>
+        <a:solidFill>
+          <a:schemeClr val="phClr">
+            <a:tint val="95000"/>
+            <a:satMod val="170000"/>
+          </a:schemeClr>
+        </a:solidFill>
         <a:gradFill rotWithShape="1">
           <a:gsLst>
             <a:gs pos="0">
               <a:schemeClr val="phClr">
-                <a:tint val="40000"/>
-                <a:satMod val="350000"/>
+                <a:tint val="93000"/>
+                <a:satMod val="150000"/>
+                <a:shade val="98000"/>
+                <a:lumMod val="102000"/>
               </a:schemeClr>
             </a:gs>
-            <a:gs pos="40000">
+            <a:gs pos="50000">
               <a:schemeClr val="phClr">
-                <a:tint val="45000"/>
-                <a:shade val="99000"/>
-                <a:satMod val="350000"/>
+                <a:tint val="98000"/>
+                <a:satMod val="130000"/>
+                <a:shade val="90000"/>
+                <a:lumMod val="103000"/>
               </a:schemeClr>
             </a:gs>
             <a:gs pos="100000">
               <a:schemeClr val="phClr">
-                <a:shade val="20000"/>
-                <a:satMod val="255000"/>
+                <a:shade val="63000"/>
+                <a:satMod val="120000"/>
               </a:schemeClr>
             </a:gs>
           </a:gsLst>
-          <a:path path="circle">
-            <a:fillToRect l="50000" t="-80000" r="50000" b="180000"/>
-          </a:path>
-        </a:gradFill>
-        <a:gradFill rotWithShape="1">
-          <a:gsLst>
-            <a:gs pos="0">
-              <a:schemeClr val="phClr">
-                <a:tint val="80000"/>
-                <a:satMod val="300000"/>
-              </a:schemeClr>
-            </a:gs>
-            <a:gs pos="100000">
-              <a:schemeClr val="phClr">
-                <a:shade val="30000"/>
-                <a:satMod val="200000"/>
-              </a:schemeClr>
-            </a:gs>
-          </a:gsLst>
-          <a:path path="circle">
-            <a:fillToRect l="50000" t="50000" r="50000" b="50000"/>
-          </a:path>
+          <a:lin ang="5400000" scaled="0"/>
         </a:gradFill>
       </a:bgFillStyleLst>
     </a:fmtScheme>
   </a:themeElements>
-  <a:objectDefaults>
-    <a:spDef>
-      <a:spPr/>
-      <a:bodyPr/>
-      <a:lstStyle/>
-      <a:style>
-        <a:lnRef idx="1">
-          <a:schemeClr val="accent1"/>
-        </a:lnRef>
-        <a:fillRef idx="3">
-          <a:schemeClr val="accent1"/>
-        </a:fillRef>
-        <a:effectRef idx="2">
-          <a:schemeClr val="accent1"/>
-        </a:effectRef>
-        <a:fontRef idx="minor">
-          <a:schemeClr val="lt1"/>
-        </a:fontRef>
-      </a:style>
-    </a:spDef>
-    <a:lnDef>
-      <a:spPr/>
-      <a:bodyPr/>
-      <a:lstStyle/>
-      <a:style>
-        <a:lnRef idx="2">
-          <a:schemeClr val="accent1"/>
-        </a:lnRef>
-        <a:fillRef idx="0">
-          <a:schemeClr val="accent1"/>
-        </a:fillRef>
-        <a:effectRef idx="1">
-          <a:schemeClr val="accent1"/>
-        </a:effectRef>
-        <a:fontRef idx="minor">
-          <a:schemeClr val="tx1"/>
-        </a:fontRef>
-      </a:style>
-    </a:lnDef>
-  </a:objectDefaults>
+  <a:objectDefaults/>
   <a:extraClrSchemeLst/>
+  <a:extLst>
+    <a:ext uri="{05A4C25C-085E-4340-85A3-A5531E510DB2}">
+      <thm15:themeFamily xmlns:thm15="http://schemas.microsoft.com/office/thememl/2012/main" name="Office Theme" id="{62F939B6-93AF-4DB8-9C6B-D6C7DFDC589F}" vid="{4A3C46E8-61CC-4603-A589-7422A47A8E4A}"/>
+    </a:ext>
+  </a:extLst>
 </a:theme>
 </file>
--- a/decks/Microsoft Foundry Guardrails - Tuning Without Over-Blocking.pptx
+++ b/decks/Microsoft Foundry Guardrails - Tuning Without Over-Blocking.pptx
@@ -139,6 +139,14 @@
 </p:presentation>
 </file>
 
+<file path=ppt/revisionInfo.xml><?xml version="1.0" encoding="utf-8"?>
+<p1510:revInfo xmlns:a="http://schemas.openxmlformats.org/drawingml/2006/main" xmlns:r="http://schemas.openxmlformats.org/officeDocument/2006/relationships" xmlns:p1510="http://schemas.microsoft.com/office/powerpoint/2015/10/main">
+  <p1510:revLst>
+    <p1510:client id="{9F2E0053-6AD3-4BB1-B286-6F91667728FA}" v="2" dt="2026-10-30T08:18:09.535"/>
+  </p1510:revLst>
+</p1510:revInfo>
+</file>
+
 <file path=ppt/changesInfos/changesInfo1.xml><?xml version="1.0" encoding="utf-8"?>
 <pc:chgInfo xmlns:a="http://schemas.openxmlformats.org/drawingml/2006/main" xmlns:r="http://schemas.openxmlformats.org/officeDocument/2006/relationships" xmlns:ac="http://schemas.microsoft.com/office/drawing/2013/main/command" xmlns:pc="http://schemas.microsoft.com/office/powerpoint/2013/main/command">
   <pc:docChgLst>
@@ -248,6 +256,60 @@
       </pc:sldChg>
     </pc:docChg>
   </pc:docChgLst>
+  <pc:docChgLst>
+    <pc:chgData clId="Web-{9F2E0053-6AD3-4BB1-B286-6F91667728FA}"/>
+    <pc:docChg chg="modSld">
+      <pc:chgData name="" userId="" providerId="" clId="Web-{9F2E0053-6AD3-4BB1-B286-6F91667728FA}" dt="2026-10-30T08:18:09.535" v="1" actId="34807"/>
+      <pc:docMkLst>
+        <pc:docMk/>
+      </pc:docMkLst>
+      <pc:sldChg chg="delSp">
+        <pc:chgData name="" userId="" providerId="" clId="Web-{9F2E0053-6AD3-4BB1-B286-6F91667728FA}" dt="2026-10-30T08:18:09.238" v="0" actId="34807"/>
+        <pc:sldMkLst>
+          <pc:docMk/>
+          <pc:sldMk cId="0" sldId="256"/>
+        </pc:sldMkLst>
+        <pc:spChg chg="del">
+          <ac:chgData name="" userId="" providerId="" clId="Web-{9F2E0053-6AD3-4BB1-B286-6F91667728FA}" dt="2026-10-30T08:18:09.238" v="0" actId="34807"/>
+          <ac:spMkLst>
+            <pc:docMk/>
+            <pc:sldMk cId="0" sldId="256"/>
+            <ac:spMk id="14" creationId="{00000000-0000-0000-0000-000000000000}"/>
+          </ac:spMkLst>
+        </pc:spChg>
+      </pc:sldChg>
+      <pc:sldChg chg="modSp">
+        <pc:chgData name="" userId="" providerId="" clId="Web-{9F2E0053-6AD3-4BB1-B286-6F91667728FA}" dt="2026-10-30T08:18:09.535" v="1" actId="34807"/>
+        <pc:sldMkLst>
+          <pc:docMk/>
+          <pc:sldMk cId="0" sldId="261"/>
+        </pc:sldMkLst>
+        <pc:spChg chg="mod">
+          <ac:chgData name="" userId="" providerId="" clId="Web-{9F2E0053-6AD3-4BB1-B286-6F91667728FA}" dt="2026-10-30T08:18:09.535" v="1" actId="34807"/>
+          <ac:spMkLst>
+            <pc:docMk/>
+            <pc:sldMk cId="0" sldId="261"/>
+            <ac:spMk id="25" creationId="{00000000-0000-0000-0000-000000000000}"/>
+          </ac:spMkLst>
+        </pc:spChg>
+      </pc:sldChg>
+      <pc:sldChg chg="modSp">
+        <pc:chgData name="" userId="" providerId="" clId="Web-{9F2E0053-6AD3-4BB1-B286-6F91667728FA}" dt="2026-10-30T08:18:09.535" v="1" actId="34807"/>
+        <pc:sldMkLst>
+          <pc:docMk/>
+          <pc:sldMk cId="0" sldId="269"/>
+        </pc:sldMkLst>
+        <pc:spChg chg="mod">
+          <ac:chgData name="" userId="" providerId="" clId="Web-{9F2E0053-6AD3-4BB1-B286-6F91667728FA}" dt="2026-10-30T08:18:09.535" v="1" actId="34807"/>
+          <ac:spMkLst>
+            <pc:docMk/>
+            <pc:sldMk cId="0" sldId="269"/>
+            <ac:spMk id="33" creationId="{00000000-0000-0000-0000-000000000000}"/>
+          </ac:spMkLst>
+        </pc:spChg>
+      </pc:sldChg>
+    </pc:docChg>
+  </pc:docChgLst>
 </pc:chgInfo>
 </file>
 
@@ -332,7 +394,7 @@
           </a:lstStyle>
           <a:p>
             <a:fld id="{20915448-D9A5-4218-8B1C-61F0674FF8C4}" type="datetimeFigureOut">
-              <a:t>10/14/2026</a:t>
+              <a:t>10/30/2026</a:t>
             </a:fld>
             <a:endParaRPr lang="en-US"/>
           </a:p>
@@ -1947,7 +2009,7 @@
           <a:p>
             <a:fld id="{5BCAD085-E8A6-8845-BD4E-CB4CCA059FC4}" type="datetimeFigureOut">
               <a:rPr lang="en-US" smtClean="0"/>
-              <a:t>10/14/2026</a:t>
+              <a:t>10/30/2026</a:t>
             </a:fld>
             <a:endParaRPr lang="en-US"/>
           </a:p>
@@ -2115,7 +2177,7 @@
           <a:p>
             <a:fld id="{5BCAD085-E8A6-8845-BD4E-CB4CCA059FC4}" type="datetimeFigureOut">
               <a:rPr lang="en-US" smtClean="0"/>
-              <a:t>10/14/2026</a:t>
+              <a:t>10/30/2026</a:t>
             </a:fld>
             <a:endParaRPr lang="en-US"/>
           </a:p>
@@ -2293,7 +2355,7 @@
           <a:p>
             <a:fld id="{5BCAD085-E8A6-8845-BD4E-CB4CCA059FC4}" type="datetimeFigureOut">
               <a:rPr lang="en-US" smtClean="0"/>
-              <a:t>10/14/2026</a:t>
+              <a:t>10/30/2026</a:t>
             </a:fld>
             <a:endParaRPr lang="en-US"/>
           </a:p>
@@ -2461,7 +2523,7 @@
           <a:p>
             <a:fld id="{5BCAD085-E8A6-8845-BD4E-CB4CCA059FC4}" type="datetimeFigureOut">
               <a:rPr lang="en-US" smtClean="0"/>
-              <a:t>10/14/2026</a:t>
+              <a:t>10/30/2026</a:t>
             </a:fld>
             <a:endParaRPr lang="en-US"/>
           </a:p>
@@ -2706,7 +2768,7 @@
           <a:p>
             <a:fld id="{5BCAD085-E8A6-8845-BD4E-CB4CCA059FC4}" type="datetimeFigureOut">
               <a:rPr lang="en-US" smtClean="0"/>
-              <a:t>10/14/2026</a:t>
+              <a:t>10/30/2026</a:t>
             </a:fld>
             <a:endParaRPr lang="en-US"/>
           </a:p>
@@ -2991,7 +3053,7 @@
           <a:p>
             <a:fld id="{5BCAD085-E8A6-8845-BD4E-CB4CCA059FC4}" type="datetimeFigureOut">
               <a:rPr lang="en-US" smtClean="0"/>
-              <a:t>10/14/2026</a:t>
+              <a:t>10/30/2026</a:t>
             </a:fld>
             <a:endParaRPr lang="en-US"/>
           </a:p>
@@ -3410,7 +3472,7 @@
           <a:p>
             <a:fld id="{5BCAD085-E8A6-8845-BD4E-CB4CCA059FC4}" type="datetimeFigureOut">
               <a:rPr lang="en-US" smtClean="0"/>
-              <a:t>10/14/2026</a:t>
+              <a:t>10/30/2026</a:t>
             </a:fld>
             <a:endParaRPr lang="en-US"/>
           </a:p>
@@ -3527,7 +3589,7 @@
           <a:p>
             <a:fld id="{5BCAD085-E8A6-8845-BD4E-CB4CCA059FC4}" type="datetimeFigureOut">
               <a:rPr lang="en-US" smtClean="0"/>
-              <a:t>10/14/2026</a:t>
+              <a:t>10/30/2026</a:t>
             </a:fld>
             <a:endParaRPr lang="en-US"/>
           </a:p>
@@ -3622,7 +3684,7 @@
           <a:p>
             <a:fld id="{5BCAD085-E8A6-8845-BD4E-CB4CCA059FC4}" type="datetimeFigureOut">
               <a:rPr lang="en-US" smtClean="0"/>
-              <a:t>10/14/2026</a:t>
+              <a:t>10/30/2026</a:t>
             </a:fld>
             <a:endParaRPr lang="en-US"/>
           </a:p>
@@ -3897,7 +3959,7 @@
           <a:p>
             <a:fld id="{5BCAD085-E8A6-8845-BD4E-CB4CCA059FC4}" type="datetimeFigureOut">
               <a:rPr lang="en-US" smtClean="0"/>
-              <a:t>10/14/2026</a:t>
+              <a:t>10/30/2026</a:t>
             </a:fld>
             <a:endParaRPr lang="en-US"/>
           </a:p>
@@ -4149,7 +4211,7 @@
           <a:p>
             <a:fld id="{5BCAD085-E8A6-8845-BD4E-CB4CCA059FC4}" type="datetimeFigureOut">
               <a:rPr lang="en-US" smtClean="0"/>
-              <a:t>10/14/2026</a:t>
+              <a:t>10/30/2026</a:t>
             </a:fld>
             <a:endParaRPr lang="en-US"/>
           </a:p>
@@ -4360,7 +4422,7 @@
           <a:p>
             <a:fld id="{5BCAD085-E8A6-8845-BD4E-CB4CCA059FC4}" type="datetimeFigureOut">
               <a:rPr lang="en-US" smtClean="0"/>
-              <a:t>10/14/2026</a:t>
+              <a:t>10/30/2026</a:t>
             </a:fld>
             <a:endParaRPr lang="en-US"/>
           </a:p>
@@ -5246,46 +5308,6 @@
       </p:sp>
       <p:sp>
         <p:nvSpPr>
-          <p:cNvPr id="14" name="TextBox 13"/>
-          <p:cNvSpPr txBox="1"/>
-          <p:nvPr/>
-        </p:nvSpPr>
-        <p:spPr>
-          <a:xfrm>
-            <a:off x="914400" y="5897880"/>
-            <a:ext cx="7315200" cy="182880"/>
-          </a:xfrm>
-          <a:prstGeom prst="rect">
-            <a:avLst/>
-          </a:prstGeom>
-          <a:noFill/>
-        </p:spPr>
-        <p:txBody>
-          <a:bodyPr wrap="square" lIns="0" tIns="0" rIns="0" bIns="0" anchor="t">
-            <a:spAutoFit/>
-          </a:bodyPr>
-          <a:lstStyle/>
-          <a:p>
-            <a:pPr algn="l">
-              <a:lnSpc>
-                <a:spcPct val="100000"/>
-              </a:lnSpc>
-            </a:pPr>
-            <a:r>
-              <a:rPr sz="950" b="0" i="0" dirty="0">
-                <a:solidFill>
-                  <a:srgbClr val="B9C2D6"/>
-                </a:solidFill>
-                <a:latin typeface="Segoe UI"/>
-                <a:cs typeface="Segoe UI"/>
-              </a:rPr>
-              <a:t>Alex Sachelarescu  ·  Cloud Solution Architect, Azure</a:t>
-            </a:r>
-          </a:p>
-        </p:txBody>
-      </p:sp>
-      <p:sp>
-        <p:nvSpPr>
           <p:cNvPr id="15" name="TextBox 14"/>
           <p:cNvSpPr txBox="1"/>
           <p:nvPr/>
@@ -15378,7 +15400,7 @@
         </p:nvSpPr>
         <p:spPr>
           <a:xfrm>
-            <a:off x="8001000" y="1371600"/>
+            <a:off x="5791200" y="1371600"/>
             <a:ext cx="6400800" cy="182880"/>
           </a:xfrm>
           <a:prstGeom prst="rect">
@@ -26020,7 +26042,7 @@
         </p:nvSpPr>
         <p:spPr>
           <a:xfrm>
-            <a:off x="5989320" y="4114800"/>
+            <a:off x="5791200" y="4114800"/>
             <a:ext cx="6400800" cy="182880"/>
           </a:xfrm>
           <a:prstGeom prst="rect">
